--- a/output/wordlabs-taste-3day.pptx
+++ b/output/wordlabs-taste-3day.pptx
@@ -6040,7 +6040,7 @@
                 <a:ea typeface="Calibri" pitchFamily="34" charset="-122"/>
                 <a:cs typeface="Calibri" pitchFamily="34" charset="-120"/>
               </a:rPr>
-              <a:t>Sam felt </a:t>
+              <a:t>The </a:t>
             </a:r>
             <a:pPr algn="l" indent="0" marL="0">
               <a:buNone/>
@@ -6057,7 +6057,7 @@
                 <a:ea typeface="Calibri" pitchFamily="34" charset="-122"/>
                 <a:cs typeface="Calibri" pitchFamily="34" charset="-120"/>
               </a:rPr>
-              <a:t>distaste</a:t>
+              <a:t>distasteful</a:t>
             </a:r>
             <a:pPr algn="l" indent="0" marL="0">
               <a:buNone/>
@@ -6071,7 +6071,7 @@
                 <a:ea typeface="Calibri" pitchFamily="34" charset="-122"/>
                 <a:cs typeface="Calibri" pitchFamily="34" charset="-120"/>
               </a:rPr>
-              <a:t> for the bitter medicine, but the </a:t>
+              <a:t> comment made everyone uncomfortable, but the </a:t>
             </a:r>
             <a:pPr algn="l" indent="0" marL="0">
               <a:buNone/>
@@ -6088,7 +6088,7 @@
                 <a:ea typeface="Calibri" pitchFamily="34" charset="-122"/>
                 <a:cs typeface="Calibri" pitchFamily="34" charset="-120"/>
               </a:rPr>
-              <a:t>tasty</a:t>
+              <a:t>tasteful</a:t>
             </a:r>
             <a:pPr algn="l" indent="0" marL="0">
               <a:buNone/>
@@ -6102,7 +6102,7 @@
                 <a:ea typeface="Calibri" pitchFamily="34" charset="-122"/>
                 <a:cs typeface="Calibri" pitchFamily="34" charset="-120"/>
               </a:rPr>
-              <a:t> honey helped wash it down.</a:t>
+              <a:t> reply from the teacher calmed the class.</a:t>
             </a:r>
             <a:endParaRPr lang="en-US" sz="1800" dirty="0"/>
           </a:p>
@@ -6257,7 +6257,7 @@
                 <a:ea typeface="Trebuchet MS" pitchFamily="34" charset="-122"/>
                 <a:cs typeface="Trebuchet MS" pitchFamily="34" charset="-120"/>
               </a:rPr>
-              <a:t>distaste</a:t>
+              <a:t>distasteful</a:t>
             </a:r>
             <a:endParaRPr lang="en-US" sz="1400" dirty="0"/>
           </a:p>
@@ -6385,7 +6385,7 @@
                 <a:ea typeface="Trebuchet MS" pitchFamily="34" charset="-122"/>
                 <a:cs typeface="Trebuchet MS" pitchFamily="34" charset="-120"/>
               </a:rPr>
-              <a:t>tasty</a:t>
+              <a:t>tasteful</a:t>
             </a:r>
             <a:endParaRPr lang="en-US" sz="1400" dirty="0"/>
           </a:p>
@@ -6855,7 +6855,7 @@
                 <a:ea typeface="Trebuchet MS" pitchFamily="34" charset="-122"/>
                 <a:cs typeface="Trebuchet MS" pitchFamily="34" charset="-120"/>
               </a:rPr>
-              <a:t>distaste</a:t>
+              <a:t>distasteful</a:t>
             </a:r>
             <a:endParaRPr lang="en-US" sz="2800" dirty="0"/>
           </a:p>
@@ -7682,7 +7682,7 @@
                 <a:ea typeface="Trebuchet MS" pitchFamily="34" charset="-122"/>
                 <a:cs typeface="Trebuchet MS" pitchFamily="34" charset="-120"/>
               </a:rPr>
-              <a:t>distaste</a:t>
+              <a:t>distasteful</a:t>
             </a:r>
             <a:endParaRPr lang="en-US" sz="2800" dirty="0"/>
           </a:p>
@@ -7762,7 +7762,7 @@
         </p:nvSpPr>
         <p:spPr>
           <a:xfrm>
-            <a:off x="2938272" y="2258568"/>
+            <a:off x="2221992" y="2258568"/>
             <a:ext cx="1828800" cy="292608"/>
           </a:xfrm>
           <a:prstGeom prst="rect">
@@ -7796,7 +7796,7 @@
         </p:nvSpPr>
         <p:spPr>
           <a:xfrm>
-            <a:off x="2938272" y="2258568"/>
+            <a:off x="2221992" y="2258568"/>
             <a:ext cx="1828800" cy="292608"/>
           </a:xfrm>
           <a:prstGeom prst="rect">
@@ -7835,7 +7835,7 @@
         </p:nvSpPr>
         <p:spPr>
           <a:xfrm>
-            <a:off x="2938272" y="2569464"/>
+            <a:off x="2221992" y="2569464"/>
             <a:ext cx="1828800" cy="201168"/>
           </a:xfrm>
           <a:prstGeom prst="rect">
@@ -7874,7 +7874,7 @@
         </p:nvSpPr>
         <p:spPr>
           <a:xfrm>
-            <a:off x="5803392" y="2258568"/>
+            <a:off x="4370832" y="2258568"/>
             <a:ext cx="1828800" cy="292608"/>
           </a:xfrm>
           <a:prstGeom prst="rect">
@@ -7908,7 +7908,7 @@
         </p:nvSpPr>
         <p:spPr>
           <a:xfrm>
-            <a:off x="5803392" y="2258568"/>
+            <a:off x="4370832" y="2258568"/>
             <a:ext cx="1828800" cy="292608"/>
           </a:xfrm>
           <a:prstGeom prst="rect">
@@ -7947,7 +7947,7 @@
         </p:nvSpPr>
         <p:spPr>
           <a:xfrm>
-            <a:off x="5803392" y="2569464"/>
+            <a:off x="4370832" y="2569464"/>
             <a:ext cx="1828800" cy="201168"/>
           </a:xfrm>
           <a:prstGeom prst="rect">
@@ -7986,6 +7986,118 @@
         </p:nvSpPr>
         <p:spPr>
           <a:xfrm>
+            <a:off x="6519672" y="2258568"/>
+            <a:ext cx="1828800" cy="292608"/>
+          </a:xfrm>
+          <a:prstGeom prst="rect">
+            <a:avLst>
+              <a:gd name="adj" fmla="val 25000"/>
+            </a:avLst>
+          </a:prstGeom>
+          <a:solidFill>
+            <a:srgbClr val="FCE7F3"/>
+          </a:solidFill>
+          <a:ln w="19050">
+            <a:solidFill>
+              <a:srgbClr val="DB2777"/>
+            </a:solidFill>
+            <a:prstDash val="solid"/>
+          </a:ln>
+          <a:effectLst>
+            <a:outerShdw sx="100000" sy="100000" kx="0" ky="0" algn="bl" rotWithShape="0" blurRad="101600" dist="38100" dir="8100000">
+              <a:srgbClr val="000000">
+                <a:alpha val="12000"/>
+              </a:srgbClr>
+            </a:outerShdw>
+          </a:effectLst>
+        </p:spPr>
+      </p:sp>
+      <p:sp>
+        <p:nvSpPr>
+          <p:cNvPr id="23" name="Text 21"/>
+          <p:cNvSpPr/>
+          <p:nvPr/>
+        </p:nvSpPr>
+        <p:spPr>
+          <a:xfrm>
+            <a:off x="6519672" y="2258568"/>
+            <a:ext cx="1828800" cy="292608"/>
+          </a:xfrm>
+          <a:prstGeom prst="rect">
+            <a:avLst/>
+          </a:prstGeom>
+          <a:noFill/>
+          <a:ln/>
+        </p:spPr>
+        <p:txBody>
+          <a:bodyPr wrap="square" lIns="0" tIns="0" rIns="0" bIns="0" rtlCol="0" anchor="ctr"/>
+          <a:lstStyle/>
+          <a:p>
+            <a:pPr algn="ctr" indent="0" marL="0">
+              <a:buNone/>
+            </a:pPr>
+            <a:r>
+              <a:rPr lang="en-US" sz="1300" b="1" dirty="0">
+                <a:solidFill>
+                  <a:srgbClr val="9D174D"/>
+                </a:solidFill>
+                <a:latin typeface="Trebuchet MS" pitchFamily="34" charset="0"/>
+                <a:ea typeface="Trebuchet MS" pitchFamily="34" charset="-122"/>
+                <a:cs typeface="Trebuchet MS" pitchFamily="34" charset="-120"/>
+              </a:rPr>
+              <a:t>ful</a:t>
+            </a:r>
+            <a:endParaRPr lang="en-US" sz="1300" dirty="0"/>
+          </a:p>
+        </p:txBody>
+      </p:sp>
+      <p:sp>
+        <p:nvSpPr>
+          <p:cNvPr id="24" name="Text 22"/>
+          <p:cNvSpPr/>
+          <p:nvPr/>
+        </p:nvSpPr>
+        <p:spPr>
+          <a:xfrm>
+            <a:off x="6519672" y="2569464"/>
+            <a:ext cx="1828800" cy="201168"/>
+          </a:xfrm>
+          <a:prstGeom prst="rect">
+            <a:avLst/>
+          </a:prstGeom>
+          <a:noFill/>
+          <a:ln/>
+        </p:spPr>
+        <p:txBody>
+          <a:bodyPr wrap="square" lIns="0" tIns="0" rIns="0" bIns="0" rtlCol="0" anchor="t"/>
+          <a:lstStyle/>
+          <a:p>
+            <a:pPr algn="ctr" indent="0" marL="0">
+              <a:buNone/>
+            </a:pPr>
+            <a:r>
+              <a:rPr lang="en-US" sz="850" dirty="0">
+                <a:solidFill>
+                  <a:srgbClr val="475569"/>
+                </a:solidFill>
+                <a:latin typeface="Calibri" pitchFamily="34" charset="0"/>
+                <a:ea typeface="Calibri" pitchFamily="34" charset="-122"/>
+                <a:cs typeface="Calibri" pitchFamily="34" charset="-120"/>
+              </a:rPr>
+              <a:t>full of, having</a:t>
+            </a:r>
+            <a:endParaRPr lang="en-US" sz="850" dirty="0"/>
+          </a:p>
+        </p:txBody>
+      </p:sp>
+      <p:sp>
+        <p:nvSpPr>
+          <p:cNvPr id="25" name="Shape 23"/>
+          <p:cNvSpPr/>
+          <p:nvPr/>
+        </p:nvSpPr>
+        <p:spPr>
+          <a:xfrm>
             <a:off x="365760" y="3273552"/>
             <a:ext cx="1371600" cy="658368"/>
           </a:xfrm>
@@ -8007,7 +8119,7 @@
       </p:sp>
       <p:sp>
         <p:nvSpPr>
-          <p:cNvPr id="23" name="Text 21"/>
+          <p:cNvPr id="26" name="Text 24"/>
           <p:cNvSpPr/>
           <p:nvPr/>
         </p:nvSpPr>
@@ -8046,7 +8158,7 @@
       </p:sp>
       <p:sp>
         <p:nvSpPr>
-          <p:cNvPr id="24" name="Shape 22"/>
+          <p:cNvPr id="27" name="Shape 25"/>
           <p:cNvSpPr/>
           <p:nvPr/>
         </p:nvSpPr>
@@ -8073,7 +8185,7 @@
       </p:sp>
       <p:sp>
         <p:nvSpPr>
-          <p:cNvPr id="25" name="Text 23"/>
+          <p:cNvPr id="28" name="Text 26"/>
           <p:cNvSpPr/>
           <p:nvPr/>
         </p:nvSpPr>
@@ -8112,7 +8224,7 @@
       </p:sp>
       <p:sp>
         <p:nvSpPr>
-          <p:cNvPr id="26" name="Shape 24"/>
+          <p:cNvPr id="29" name="Shape 27"/>
           <p:cNvSpPr/>
           <p:nvPr/>
         </p:nvSpPr>
@@ -8139,7 +8251,7 @@
       </p:sp>
       <p:sp>
         <p:nvSpPr>
-          <p:cNvPr id="27" name="Text 25"/>
+          <p:cNvPr id="30" name="Text 28"/>
           <p:cNvSpPr/>
           <p:nvPr/>
         </p:nvSpPr>
@@ -8178,7 +8290,7 @@
       </p:sp>
       <p:sp>
         <p:nvSpPr>
-          <p:cNvPr id="28" name="Shape 26"/>
+          <p:cNvPr id="31" name="Shape 29"/>
           <p:cNvSpPr/>
           <p:nvPr/>
         </p:nvSpPr>
@@ -8205,7 +8317,7 @@
       </p:sp>
       <p:sp>
         <p:nvSpPr>
-          <p:cNvPr id="29" name="Text 27"/>
+          <p:cNvPr id="32" name="Text 30"/>
           <p:cNvSpPr/>
           <p:nvPr/>
         </p:nvSpPr>
@@ -8667,7 +8779,7 @@
                 <a:ea typeface="Trebuchet MS" pitchFamily="34" charset="-122"/>
                 <a:cs typeface="Trebuchet MS" pitchFamily="34" charset="-120"/>
               </a:rPr>
-              <a:t>distaste</a:t>
+              <a:t>distasteful</a:t>
             </a:r>
             <a:endParaRPr lang="en-US" sz="2800" dirty="0"/>
           </a:p>
@@ -8747,7 +8859,7 @@
         </p:nvSpPr>
         <p:spPr>
           <a:xfrm>
-            <a:off x="2938272" y="2258568"/>
+            <a:off x="2221992" y="2258568"/>
             <a:ext cx="1828800" cy="292608"/>
           </a:xfrm>
           <a:prstGeom prst="rect">
@@ -8781,7 +8893,7 @@
         </p:nvSpPr>
         <p:spPr>
           <a:xfrm>
-            <a:off x="2938272" y="2258568"/>
+            <a:off x="2221992" y="2258568"/>
             <a:ext cx="1828800" cy="292608"/>
           </a:xfrm>
           <a:prstGeom prst="rect">
@@ -8820,7 +8932,7 @@
         </p:nvSpPr>
         <p:spPr>
           <a:xfrm>
-            <a:off x="2938272" y="2569464"/>
+            <a:off x="2221992" y="2569464"/>
             <a:ext cx="1828800" cy="201168"/>
           </a:xfrm>
           <a:prstGeom prst="rect">
@@ -8859,7 +8971,7 @@
         </p:nvSpPr>
         <p:spPr>
           <a:xfrm>
-            <a:off x="5803392" y="2258568"/>
+            <a:off x="4370832" y="2258568"/>
             <a:ext cx="1828800" cy="292608"/>
           </a:xfrm>
           <a:prstGeom prst="rect">
@@ -8893,7 +9005,7 @@
         </p:nvSpPr>
         <p:spPr>
           <a:xfrm>
-            <a:off x="5803392" y="2258568"/>
+            <a:off x="4370832" y="2258568"/>
             <a:ext cx="1828800" cy="292608"/>
           </a:xfrm>
           <a:prstGeom prst="rect">
@@ -8932,7 +9044,7 @@
         </p:nvSpPr>
         <p:spPr>
           <a:xfrm>
-            <a:off x="5803392" y="2569464"/>
+            <a:off x="4370832" y="2569464"/>
             <a:ext cx="1828800" cy="201168"/>
           </a:xfrm>
           <a:prstGeom prst="rect">
@@ -8971,6 +9083,118 @@
         </p:nvSpPr>
         <p:spPr>
           <a:xfrm>
+            <a:off x="6519672" y="2258568"/>
+            <a:ext cx="1828800" cy="292608"/>
+          </a:xfrm>
+          <a:prstGeom prst="rect">
+            <a:avLst>
+              <a:gd name="adj" fmla="val 25000"/>
+            </a:avLst>
+          </a:prstGeom>
+          <a:solidFill>
+            <a:srgbClr val="FCE7F3"/>
+          </a:solidFill>
+          <a:ln w="19050">
+            <a:solidFill>
+              <a:srgbClr val="DB2777"/>
+            </a:solidFill>
+            <a:prstDash val="solid"/>
+          </a:ln>
+          <a:effectLst>
+            <a:outerShdw sx="100000" sy="100000" kx="0" ky="0" algn="bl" rotWithShape="0" blurRad="101600" dist="38100" dir="8100000">
+              <a:srgbClr val="000000">
+                <a:alpha val="12000"/>
+              </a:srgbClr>
+            </a:outerShdw>
+          </a:effectLst>
+        </p:spPr>
+      </p:sp>
+      <p:sp>
+        <p:nvSpPr>
+          <p:cNvPr id="23" name="Text 21"/>
+          <p:cNvSpPr/>
+          <p:nvPr/>
+        </p:nvSpPr>
+        <p:spPr>
+          <a:xfrm>
+            <a:off x="6519672" y="2258568"/>
+            <a:ext cx="1828800" cy="292608"/>
+          </a:xfrm>
+          <a:prstGeom prst="rect">
+            <a:avLst/>
+          </a:prstGeom>
+          <a:noFill/>
+          <a:ln/>
+        </p:spPr>
+        <p:txBody>
+          <a:bodyPr wrap="square" lIns="0" tIns="0" rIns="0" bIns="0" rtlCol="0" anchor="ctr"/>
+          <a:lstStyle/>
+          <a:p>
+            <a:pPr algn="ctr" indent="0" marL="0">
+              <a:buNone/>
+            </a:pPr>
+            <a:r>
+              <a:rPr lang="en-US" sz="1300" b="1" dirty="0">
+                <a:solidFill>
+                  <a:srgbClr val="9D174D"/>
+                </a:solidFill>
+                <a:latin typeface="Trebuchet MS" pitchFamily="34" charset="0"/>
+                <a:ea typeface="Trebuchet MS" pitchFamily="34" charset="-122"/>
+                <a:cs typeface="Trebuchet MS" pitchFamily="34" charset="-120"/>
+              </a:rPr>
+              <a:t>ful</a:t>
+            </a:r>
+            <a:endParaRPr lang="en-US" sz="1300" dirty="0"/>
+          </a:p>
+        </p:txBody>
+      </p:sp>
+      <p:sp>
+        <p:nvSpPr>
+          <p:cNvPr id="24" name="Text 22"/>
+          <p:cNvSpPr/>
+          <p:nvPr/>
+        </p:nvSpPr>
+        <p:spPr>
+          <a:xfrm>
+            <a:off x="6519672" y="2569464"/>
+            <a:ext cx="1828800" cy="201168"/>
+          </a:xfrm>
+          <a:prstGeom prst="rect">
+            <a:avLst/>
+          </a:prstGeom>
+          <a:noFill/>
+          <a:ln/>
+        </p:spPr>
+        <p:txBody>
+          <a:bodyPr wrap="square" lIns="0" tIns="0" rIns="0" bIns="0" rtlCol="0" anchor="t"/>
+          <a:lstStyle/>
+          <a:p>
+            <a:pPr algn="ctr" indent="0" marL="0">
+              <a:buNone/>
+            </a:pPr>
+            <a:r>
+              <a:rPr lang="en-US" sz="850" dirty="0">
+                <a:solidFill>
+                  <a:srgbClr val="475569"/>
+                </a:solidFill>
+                <a:latin typeface="Calibri" pitchFamily="34" charset="0"/>
+                <a:ea typeface="Calibri" pitchFamily="34" charset="-122"/>
+                <a:cs typeface="Calibri" pitchFamily="34" charset="-120"/>
+              </a:rPr>
+              <a:t>full of, having</a:t>
+            </a:r>
+            <a:endParaRPr lang="en-US" sz="850" dirty="0"/>
+          </a:p>
+        </p:txBody>
+      </p:sp>
+      <p:sp>
+        <p:nvSpPr>
+          <p:cNvPr id="25" name="Shape 23"/>
+          <p:cNvSpPr/>
+          <p:nvPr/>
+        </p:nvSpPr>
+        <p:spPr>
+          <a:xfrm>
             <a:off x="365760" y="3273552"/>
             <a:ext cx="1371600" cy="658368"/>
           </a:xfrm>
@@ -8992,7 +9216,7 @@
       </p:sp>
       <p:sp>
         <p:nvSpPr>
-          <p:cNvPr id="23" name="Text 21"/>
+          <p:cNvPr id="26" name="Text 24"/>
           <p:cNvSpPr/>
           <p:nvPr/>
         </p:nvSpPr>
@@ -9031,7 +9255,7 @@
       </p:sp>
       <p:sp>
         <p:nvSpPr>
-          <p:cNvPr id="24" name="Shape 22"/>
+          <p:cNvPr id="27" name="Shape 25"/>
           <p:cNvSpPr/>
           <p:nvPr/>
         </p:nvSpPr>
@@ -9058,13 +9282,13 @@
       </p:sp>
       <p:sp>
         <p:nvSpPr>
-          <p:cNvPr id="25" name="Shape 23"/>
-          <p:cNvSpPr/>
-          <p:nvPr/>
-        </p:nvSpPr>
-        <p:spPr>
-          <a:xfrm>
-            <a:off x="2999232" y="3364992"/>
+          <p:cNvPr id="28" name="Shape 26"/>
+          <p:cNvSpPr/>
+          <p:nvPr/>
+        </p:nvSpPr>
+        <p:spPr>
+          <a:xfrm>
+            <a:off x="2313432" y="3364992"/>
             <a:ext cx="1645920" cy="475488"/>
           </a:xfrm>
           <a:prstGeom prst="rect">
@@ -9085,13 +9309,13 @@
       </p:sp>
       <p:sp>
         <p:nvSpPr>
-          <p:cNvPr id="26" name="Text 24"/>
-          <p:cNvSpPr/>
-          <p:nvPr/>
-        </p:nvSpPr>
-        <p:spPr>
-          <a:xfrm>
-            <a:off x="2999232" y="3364992"/>
+          <p:cNvPr id="29" name="Text 27"/>
+          <p:cNvSpPr/>
+          <p:nvPr/>
+        </p:nvSpPr>
+        <p:spPr>
+          <a:xfrm>
+            <a:off x="2313432" y="3364992"/>
             <a:ext cx="1645920" cy="475488"/>
           </a:xfrm>
           <a:prstGeom prst="rect">
@@ -9124,14 +9348,14 @@
       </p:sp>
       <p:sp>
         <p:nvSpPr>
-          <p:cNvPr id="27" name="Text 25"/>
-          <p:cNvSpPr/>
-          <p:nvPr/>
-        </p:nvSpPr>
-        <p:spPr>
-          <a:xfrm>
-            <a:off x="4645152" y="3364992"/>
-            <a:ext cx="1097280" cy="475488"/>
+          <p:cNvPr id="30" name="Text 28"/>
+          <p:cNvSpPr/>
+          <p:nvPr/>
+        </p:nvSpPr>
+        <p:spPr>
+          <a:xfrm>
+            <a:off x="3959352" y="3364992"/>
+            <a:ext cx="411480" cy="475488"/>
           </a:xfrm>
           <a:prstGeom prst="rect">
             <a:avLst/>
@@ -9163,13 +9387,13 @@
       </p:sp>
       <p:sp>
         <p:nvSpPr>
-          <p:cNvPr id="28" name="Shape 26"/>
-          <p:cNvSpPr/>
-          <p:nvPr/>
-        </p:nvSpPr>
-        <p:spPr>
-          <a:xfrm>
-            <a:off x="5742432" y="3364992"/>
+          <p:cNvPr id="31" name="Shape 29"/>
+          <p:cNvSpPr/>
+          <p:nvPr/>
+        </p:nvSpPr>
+        <p:spPr>
+          <a:xfrm>
+            <a:off x="4370832" y="3364992"/>
             <a:ext cx="1645920" cy="475488"/>
           </a:xfrm>
           <a:prstGeom prst="rect">
@@ -9190,13 +9414,13 @@
       </p:sp>
       <p:sp>
         <p:nvSpPr>
-          <p:cNvPr id="29" name="Text 27"/>
-          <p:cNvSpPr/>
-          <p:nvPr/>
-        </p:nvSpPr>
-        <p:spPr>
-          <a:xfrm>
-            <a:off x="5742432" y="3364992"/>
+          <p:cNvPr id="32" name="Text 30"/>
+          <p:cNvSpPr/>
+          <p:nvPr/>
+        </p:nvSpPr>
+        <p:spPr>
+          <a:xfrm>
+            <a:off x="4370832" y="3364992"/>
             <a:ext cx="1645920" cy="475488"/>
           </a:xfrm>
           <a:prstGeom prst="rect">
@@ -9229,7 +9453,112 @@
       </p:sp>
       <p:sp>
         <p:nvSpPr>
-          <p:cNvPr id="30" name="Shape 28"/>
+          <p:cNvPr id="33" name="Text 31"/>
+          <p:cNvSpPr/>
+          <p:nvPr/>
+        </p:nvSpPr>
+        <p:spPr>
+          <a:xfrm>
+            <a:off x="6016752" y="3364992"/>
+            <a:ext cx="411480" cy="475488"/>
+          </a:xfrm>
+          <a:prstGeom prst="rect">
+            <a:avLst/>
+          </a:prstGeom>
+          <a:noFill/>
+          <a:ln/>
+        </p:spPr>
+        <p:txBody>
+          <a:bodyPr wrap="square" lIns="0" tIns="0" rIns="0" bIns="0" rtlCol="0" anchor="ctr"/>
+          <a:lstStyle/>
+          <a:p>
+            <a:pPr algn="ctr" indent="0" marL="0">
+              <a:buNone/>
+            </a:pPr>
+            <a:r>
+              <a:rPr lang="en-US" sz="1600" b="1" dirty="0">
+                <a:solidFill>
+                  <a:srgbClr val="0D9488"/>
+                </a:solidFill>
+                <a:latin typeface="Trebuchet MS" pitchFamily="34" charset="0"/>
+                <a:ea typeface="Trebuchet MS" pitchFamily="34" charset="-122"/>
+                <a:cs typeface="Trebuchet MS" pitchFamily="34" charset="-120"/>
+              </a:rPr>
+              <a:t>·</a:t>
+            </a:r>
+            <a:endParaRPr lang="en-US" sz="1600" dirty="0"/>
+          </a:p>
+        </p:txBody>
+      </p:sp>
+      <p:sp>
+        <p:nvSpPr>
+          <p:cNvPr id="34" name="Shape 32"/>
+          <p:cNvSpPr/>
+          <p:nvPr/>
+        </p:nvSpPr>
+        <p:spPr>
+          <a:xfrm>
+            <a:off x="6428232" y="3364992"/>
+            <a:ext cx="1645920" cy="475488"/>
+          </a:xfrm>
+          <a:prstGeom prst="rect">
+            <a:avLst>
+              <a:gd name="adj" fmla="val 9615"/>
+            </a:avLst>
+          </a:prstGeom>
+          <a:solidFill>
+            <a:srgbClr val="FFFFFF"/>
+          </a:solidFill>
+          <a:ln w="12700">
+            <a:solidFill>
+              <a:srgbClr val="0D9488"/>
+            </a:solidFill>
+            <a:prstDash val="solid"/>
+          </a:ln>
+        </p:spPr>
+      </p:sp>
+      <p:sp>
+        <p:nvSpPr>
+          <p:cNvPr id="35" name="Text 33"/>
+          <p:cNvSpPr/>
+          <p:nvPr/>
+        </p:nvSpPr>
+        <p:spPr>
+          <a:xfrm>
+            <a:off x="6428232" y="3364992"/>
+            <a:ext cx="1645920" cy="475488"/>
+          </a:xfrm>
+          <a:prstGeom prst="rect">
+            <a:avLst/>
+          </a:prstGeom>
+          <a:noFill/>
+          <a:ln/>
+        </p:spPr>
+        <p:txBody>
+          <a:bodyPr wrap="square" lIns="0" tIns="0" rIns="0" bIns="0" rtlCol="0" anchor="ctr"/>
+          <a:lstStyle/>
+          <a:p>
+            <a:pPr algn="ctr" indent="0" marL="0">
+              <a:buNone/>
+            </a:pPr>
+            <a:r>
+              <a:rPr lang="en-US" sz="1400" b="1" dirty="0">
+                <a:solidFill>
+                  <a:srgbClr val="0D9488"/>
+                </a:solidFill>
+                <a:latin typeface="Trebuchet MS" pitchFamily="34" charset="0"/>
+                <a:ea typeface="Trebuchet MS" pitchFamily="34" charset="-122"/>
+                <a:cs typeface="Trebuchet MS" pitchFamily="34" charset="-120"/>
+              </a:rPr>
+              <a:t>ful</a:t>
+            </a:r>
+            <a:endParaRPr lang="en-US" sz="1400" dirty="0"/>
+          </a:p>
+        </p:txBody>
+      </p:sp>
+      <p:sp>
+        <p:nvSpPr>
+          <p:cNvPr id="36" name="Shape 34"/>
           <p:cNvSpPr/>
           <p:nvPr/>
         </p:nvSpPr>
@@ -9256,7 +9585,7 @@
       </p:sp>
       <p:sp>
         <p:nvSpPr>
-          <p:cNvPr id="31" name="Text 29"/>
+          <p:cNvPr id="37" name="Text 35"/>
           <p:cNvSpPr/>
           <p:nvPr/>
         </p:nvSpPr>
@@ -9295,7 +9624,7 @@
       </p:sp>
       <p:sp>
         <p:nvSpPr>
-          <p:cNvPr id="32" name="Shape 30"/>
+          <p:cNvPr id="38" name="Shape 36"/>
           <p:cNvSpPr/>
           <p:nvPr/>
         </p:nvSpPr>
@@ -9322,7 +9651,7 @@
       </p:sp>
       <p:sp>
         <p:nvSpPr>
-          <p:cNvPr id="33" name="Text 31"/>
+          <p:cNvPr id="39" name="Text 37"/>
           <p:cNvSpPr/>
           <p:nvPr/>
         </p:nvSpPr>
@@ -9784,7 +10113,7 @@
                 <a:ea typeface="Trebuchet MS" pitchFamily="34" charset="-122"/>
                 <a:cs typeface="Trebuchet MS" pitchFamily="34" charset="-120"/>
               </a:rPr>
-              <a:t>distaste</a:t>
+              <a:t>distasteful</a:t>
             </a:r>
             <a:endParaRPr lang="en-US" sz="2800" dirty="0"/>
           </a:p>
@@ -9864,7 +10193,7 @@
         </p:nvSpPr>
         <p:spPr>
           <a:xfrm>
-            <a:off x="2938272" y="2258568"/>
+            <a:off x="2221992" y="2258568"/>
             <a:ext cx="1828800" cy="292608"/>
           </a:xfrm>
           <a:prstGeom prst="rect">
@@ -9898,7 +10227,7 @@
         </p:nvSpPr>
         <p:spPr>
           <a:xfrm>
-            <a:off x="2938272" y="2258568"/>
+            <a:off x="2221992" y="2258568"/>
             <a:ext cx="1828800" cy="292608"/>
           </a:xfrm>
           <a:prstGeom prst="rect">
@@ -9937,7 +10266,7 @@
         </p:nvSpPr>
         <p:spPr>
           <a:xfrm>
-            <a:off x="2938272" y="2569464"/>
+            <a:off x="2221992" y="2569464"/>
             <a:ext cx="1828800" cy="201168"/>
           </a:xfrm>
           <a:prstGeom prst="rect">
@@ -9976,7 +10305,7 @@
         </p:nvSpPr>
         <p:spPr>
           <a:xfrm>
-            <a:off x="5803392" y="2258568"/>
+            <a:off x="4370832" y="2258568"/>
             <a:ext cx="1828800" cy="292608"/>
           </a:xfrm>
           <a:prstGeom prst="rect">
@@ -10010,7 +10339,7 @@
         </p:nvSpPr>
         <p:spPr>
           <a:xfrm>
-            <a:off x="5803392" y="2258568"/>
+            <a:off x="4370832" y="2258568"/>
             <a:ext cx="1828800" cy="292608"/>
           </a:xfrm>
           <a:prstGeom prst="rect">
@@ -10049,7 +10378,7 @@
         </p:nvSpPr>
         <p:spPr>
           <a:xfrm>
-            <a:off x="5803392" y="2569464"/>
+            <a:off x="4370832" y="2569464"/>
             <a:ext cx="1828800" cy="201168"/>
           </a:xfrm>
           <a:prstGeom prst="rect">
@@ -10088,6 +10417,118 @@
         </p:nvSpPr>
         <p:spPr>
           <a:xfrm>
+            <a:off x="6519672" y="2258568"/>
+            <a:ext cx="1828800" cy="292608"/>
+          </a:xfrm>
+          <a:prstGeom prst="rect">
+            <a:avLst>
+              <a:gd name="adj" fmla="val 25000"/>
+            </a:avLst>
+          </a:prstGeom>
+          <a:solidFill>
+            <a:srgbClr val="FCE7F3"/>
+          </a:solidFill>
+          <a:ln w="19050">
+            <a:solidFill>
+              <a:srgbClr val="DB2777"/>
+            </a:solidFill>
+            <a:prstDash val="solid"/>
+          </a:ln>
+          <a:effectLst>
+            <a:outerShdw sx="100000" sy="100000" kx="0" ky="0" algn="bl" rotWithShape="0" blurRad="101600" dist="38100" dir="8100000">
+              <a:srgbClr val="000000">
+                <a:alpha val="12000"/>
+              </a:srgbClr>
+            </a:outerShdw>
+          </a:effectLst>
+        </p:spPr>
+      </p:sp>
+      <p:sp>
+        <p:nvSpPr>
+          <p:cNvPr id="23" name="Text 21"/>
+          <p:cNvSpPr/>
+          <p:nvPr/>
+        </p:nvSpPr>
+        <p:spPr>
+          <a:xfrm>
+            <a:off x="6519672" y="2258568"/>
+            <a:ext cx="1828800" cy="292608"/>
+          </a:xfrm>
+          <a:prstGeom prst="rect">
+            <a:avLst/>
+          </a:prstGeom>
+          <a:noFill/>
+          <a:ln/>
+        </p:spPr>
+        <p:txBody>
+          <a:bodyPr wrap="square" lIns="0" tIns="0" rIns="0" bIns="0" rtlCol="0" anchor="ctr"/>
+          <a:lstStyle/>
+          <a:p>
+            <a:pPr algn="ctr" indent="0" marL="0">
+              <a:buNone/>
+            </a:pPr>
+            <a:r>
+              <a:rPr lang="en-US" sz="1300" b="1" dirty="0">
+                <a:solidFill>
+                  <a:srgbClr val="9D174D"/>
+                </a:solidFill>
+                <a:latin typeface="Trebuchet MS" pitchFamily="34" charset="0"/>
+                <a:ea typeface="Trebuchet MS" pitchFamily="34" charset="-122"/>
+                <a:cs typeface="Trebuchet MS" pitchFamily="34" charset="-120"/>
+              </a:rPr>
+              <a:t>ful</a:t>
+            </a:r>
+            <a:endParaRPr lang="en-US" sz="1300" dirty="0"/>
+          </a:p>
+        </p:txBody>
+      </p:sp>
+      <p:sp>
+        <p:nvSpPr>
+          <p:cNvPr id="24" name="Text 22"/>
+          <p:cNvSpPr/>
+          <p:nvPr/>
+        </p:nvSpPr>
+        <p:spPr>
+          <a:xfrm>
+            <a:off x="6519672" y="2569464"/>
+            <a:ext cx="1828800" cy="201168"/>
+          </a:xfrm>
+          <a:prstGeom prst="rect">
+            <a:avLst/>
+          </a:prstGeom>
+          <a:noFill/>
+          <a:ln/>
+        </p:spPr>
+        <p:txBody>
+          <a:bodyPr wrap="square" lIns="0" tIns="0" rIns="0" bIns="0" rtlCol="0" anchor="t"/>
+          <a:lstStyle/>
+          <a:p>
+            <a:pPr algn="ctr" indent="0" marL="0">
+              <a:buNone/>
+            </a:pPr>
+            <a:r>
+              <a:rPr lang="en-US" sz="850" dirty="0">
+                <a:solidFill>
+                  <a:srgbClr val="475569"/>
+                </a:solidFill>
+                <a:latin typeface="Calibri" pitchFamily="34" charset="0"/>
+                <a:ea typeface="Calibri" pitchFamily="34" charset="-122"/>
+                <a:cs typeface="Calibri" pitchFamily="34" charset="-120"/>
+              </a:rPr>
+              <a:t>full of, having</a:t>
+            </a:r>
+            <a:endParaRPr lang="en-US" sz="850" dirty="0"/>
+          </a:p>
+        </p:txBody>
+      </p:sp>
+      <p:sp>
+        <p:nvSpPr>
+          <p:cNvPr id="25" name="Shape 23"/>
+          <p:cNvSpPr/>
+          <p:nvPr/>
+        </p:nvSpPr>
+        <p:spPr>
+          <a:xfrm>
             <a:off x="365760" y="3273552"/>
             <a:ext cx="1371600" cy="658368"/>
           </a:xfrm>
@@ -10109,7 +10550,7 @@
       </p:sp>
       <p:sp>
         <p:nvSpPr>
-          <p:cNvPr id="23" name="Text 21"/>
+          <p:cNvPr id="26" name="Text 24"/>
           <p:cNvSpPr/>
           <p:nvPr/>
         </p:nvSpPr>
@@ -10148,7 +10589,7 @@
       </p:sp>
       <p:sp>
         <p:nvSpPr>
-          <p:cNvPr id="24" name="Shape 22"/>
+          <p:cNvPr id="27" name="Shape 25"/>
           <p:cNvSpPr/>
           <p:nvPr/>
         </p:nvSpPr>
@@ -10175,13 +10616,13 @@
       </p:sp>
       <p:sp>
         <p:nvSpPr>
-          <p:cNvPr id="25" name="Shape 23"/>
-          <p:cNvSpPr/>
-          <p:nvPr/>
-        </p:nvSpPr>
-        <p:spPr>
-          <a:xfrm>
-            <a:off x="2999232" y="3364992"/>
+          <p:cNvPr id="28" name="Shape 26"/>
+          <p:cNvSpPr/>
+          <p:nvPr/>
+        </p:nvSpPr>
+        <p:spPr>
+          <a:xfrm>
+            <a:off x="2313432" y="3364992"/>
             <a:ext cx="1645920" cy="475488"/>
           </a:xfrm>
           <a:prstGeom prst="rect">
@@ -10202,13 +10643,13 @@
       </p:sp>
       <p:sp>
         <p:nvSpPr>
-          <p:cNvPr id="26" name="Text 24"/>
-          <p:cNvSpPr/>
-          <p:nvPr/>
-        </p:nvSpPr>
-        <p:spPr>
-          <a:xfrm>
-            <a:off x="2999232" y="3364992"/>
+          <p:cNvPr id="29" name="Text 27"/>
+          <p:cNvSpPr/>
+          <p:nvPr/>
+        </p:nvSpPr>
+        <p:spPr>
+          <a:xfrm>
+            <a:off x="2313432" y="3364992"/>
             <a:ext cx="1645920" cy="475488"/>
           </a:xfrm>
           <a:prstGeom prst="rect">
@@ -10241,14 +10682,14 @@
       </p:sp>
       <p:sp>
         <p:nvSpPr>
-          <p:cNvPr id="27" name="Text 25"/>
-          <p:cNvSpPr/>
-          <p:nvPr/>
-        </p:nvSpPr>
-        <p:spPr>
-          <a:xfrm>
-            <a:off x="4645152" y="3364992"/>
-            <a:ext cx="1097280" cy="475488"/>
+          <p:cNvPr id="30" name="Text 28"/>
+          <p:cNvSpPr/>
+          <p:nvPr/>
+        </p:nvSpPr>
+        <p:spPr>
+          <a:xfrm>
+            <a:off x="3959352" y="3364992"/>
+            <a:ext cx="411480" cy="475488"/>
           </a:xfrm>
           <a:prstGeom prst="rect">
             <a:avLst/>
@@ -10280,13 +10721,13 @@
       </p:sp>
       <p:sp>
         <p:nvSpPr>
-          <p:cNvPr id="28" name="Shape 26"/>
-          <p:cNvSpPr/>
-          <p:nvPr/>
-        </p:nvSpPr>
-        <p:spPr>
-          <a:xfrm>
-            <a:off x="5742432" y="3364992"/>
+          <p:cNvPr id="31" name="Shape 29"/>
+          <p:cNvSpPr/>
+          <p:nvPr/>
+        </p:nvSpPr>
+        <p:spPr>
+          <a:xfrm>
+            <a:off x="4370832" y="3364992"/>
             <a:ext cx="1645920" cy="475488"/>
           </a:xfrm>
           <a:prstGeom prst="rect">
@@ -10307,13 +10748,13 @@
       </p:sp>
       <p:sp>
         <p:nvSpPr>
-          <p:cNvPr id="29" name="Text 27"/>
-          <p:cNvSpPr/>
-          <p:nvPr/>
-        </p:nvSpPr>
-        <p:spPr>
-          <a:xfrm>
-            <a:off x="5742432" y="3364992"/>
+          <p:cNvPr id="32" name="Text 30"/>
+          <p:cNvSpPr/>
+          <p:nvPr/>
+        </p:nvSpPr>
+        <p:spPr>
+          <a:xfrm>
+            <a:off x="4370832" y="3364992"/>
             <a:ext cx="1645920" cy="475488"/>
           </a:xfrm>
           <a:prstGeom prst="rect">
@@ -10346,7 +10787,112 @@
       </p:sp>
       <p:sp>
         <p:nvSpPr>
-          <p:cNvPr id="30" name="Shape 28"/>
+          <p:cNvPr id="33" name="Text 31"/>
+          <p:cNvSpPr/>
+          <p:nvPr/>
+        </p:nvSpPr>
+        <p:spPr>
+          <a:xfrm>
+            <a:off x="6016752" y="3364992"/>
+            <a:ext cx="411480" cy="475488"/>
+          </a:xfrm>
+          <a:prstGeom prst="rect">
+            <a:avLst/>
+          </a:prstGeom>
+          <a:noFill/>
+          <a:ln/>
+        </p:spPr>
+        <p:txBody>
+          <a:bodyPr wrap="square" lIns="0" tIns="0" rIns="0" bIns="0" rtlCol="0" anchor="ctr"/>
+          <a:lstStyle/>
+          <a:p>
+            <a:pPr algn="ctr" indent="0" marL="0">
+              <a:buNone/>
+            </a:pPr>
+            <a:r>
+              <a:rPr lang="en-US" sz="1600" b="1" dirty="0">
+                <a:solidFill>
+                  <a:srgbClr val="0D9488"/>
+                </a:solidFill>
+                <a:latin typeface="Trebuchet MS" pitchFamily="34" charset="0"/>
+                <a:ea typeface="Trebuchet MS" pitchFamily="34" charset="-122"/>
+                <a:cs typeface="Trebuchet MS" pitchFamily="34" charset="-120"/>
+              </a:rPr>
+              <a:t>·</a:t>
+            </a:r>
+            <a:endParaRPr lang="en-US" sz="1600" dirty="0"/>
+          </a:p>
+        </p:txBody>
+      </p:sp>
+      <p:sp>
+        <p:nvSpPr>
+          <p:cNvPr id="34" name="Shape 32"/>
+          <p:cNvSpPr/>
+          <p:nvPr/>
+        </p:nvSpPr>
+        <p:spPr>
+          <a:xfrm>
+            <a:off x="6428232" y="3364992"/>
+            <a:ext cx="1645920" cy="475488"/>
+          </a:xfrm>
+          <a:prstGeom prst="rect">
+            <a:avLst>
+              <a:gd name="adj" fmla="val 9615"/>
+            </a:avLst>
+          </a:prstGeom>
+          <a:solidFill>
+            <a:srgbClr val="FFFFFF"/>
+          </a:solidFill>
+          <a:ln w="12700">
+            <a:solidFill>
+              <a:srgbClr val="0D9488"/>
+            </a:solidFill>
+            <a:prstDash val="solid"/>
+          </a:ln>
+        </p:spPr>
+      </p:sp>
+      <p:sp>
+        <p:nvSpPr>
+          <p:cNvPr id="35" name="Text 33"/>
+          <p:cNvSpPr/>
+          <p:nvPr/>
+        </p:nvSpPr>
+        <p:spPr>
+          <a:xfrm>
+            <a:off x="6428232" y="3364992"/>
+            <a:ext cx="1645920" cy="475488"/>
+          </a:xfrm>
+          <a:prstGeom prst="rect">
+            <a:avLst/>
+          </a:prstGeom>
+          <a:noFill/>
+          <a:ln/>
+        </p:spPr>
+        <p:txBody>
+          <a:bodyPr wrap="square" lIns="0" tIns="0" rIns="0" bIns="0" rtlCol="0" anchor="ctr"/>
+          <a:lstStyle/>
+          <a:p>
+            <a:pPr algn="ctr" indent="0" marL="0">
+              <a:buNone/>
+            </a:pPr>
+            <a:r>
+              <a:rPr lang="en-US" sz="1400" b="1" dirty="0">
+                <a:solidFill>
+                  <a:srgbClr val="0D9488"/>
+                </a:solidFill>
+                <a:latin typeface="Trebuchet MS" pitchFamily="34" charset="0"/>
+                <a:ea typeface="Trebuchet MS" pitchFamily="34" charset="-122"/>
+                <a:cs typeface="Trebuchet MS" pitchFamily="34" charset="-120"/>
+              </a:rPr>
+              <a:t>ful</a:t>
+            </a:r>
+            <a:endParaRPr lang="en-US" sz="1400" dirty="0"/>
+          </a:p>
+        </p:txBody>
+      </p:sp>
+      <p:sp>
+        <p:nvSpPr>
+          <p:cNvPr id="36" name="Shape 34"/>
           <p:cNvSpPr/>
           <p:nvPr/>
         </p:nvSpPr>
@@ -10373,7 +10919,7 @@
       </p:sp>
       <p:sp>
         <p:nvSpPr>
-          <p:cNvPr id="31" name="Text 29"/>
+          <p:cNvPr id="37" name="Text 35"/>
           <p:cNvSpPr/>
           <p:nvPr/>
         </p:nvSpPr>
@@ -10412,18 +10958,18 @@
       </p:sp>
       <p:sp>
         <p:nvSpPr>
-          <p:cNvPr id="32" name="Shape 30"/>
+          <p:cNvPr id="38" name="Shape 36"/>
           <p:cNvSpPr/>
           <p:nvPr/>
         </p:nvSpPr>
         <p:spPr>
           <a:xfrm>
             <a:off x="1874520" y="4096512"/>
-            <a:ext cx="6903720" cy="658368"/>
+            <a:ext cx="6903720" cy="804672"/>
           </a:xfrm>
           <a:prstGeom prst="rect">
             <a:avLst>
-              <a:gd name="adj" fmla="val 8333"/>
+              <a:gd name="adj" fmla="val 6818"/>
             </a:avLst>
           </a:prstGeom>
           <a:solidFill>
@@ -10439,18 +10985,18 @@
       </p:sp>
       <p:sp>
         <p:nvSpPr>
-          <p:cNvPr id="33" name="Shape 31"/>
-          <p:cNvSpPr/>
-          <p:nvPr/>
-        </p:nvSpPr>
-        <p:spPr>
-          <a:xfrm>
-            <a:off x="2023872" y="4169664"/>
-            <a:ext cx="685800" cy="475488"/>
+          <p:cNvPr id="39" name="Shape 37"/>
+          <p:cNvSpPr/>
+          <p:nvPr/>
+        </p:nvSpPr>
+        <p:spPr>
+          <a:xfrm>
+            <a:off x="1951828" y="4169664"/>
+            <a:ext cx="603504" cy="384048"/>
           </a:xfrm>
           <a:prstGeom prst="rect">
             <a:avLst>
-              <a:gd name="adj" fmla="val 7692"/>
+              <a:gd name="adj" fmla="val 9524"/>
             </a:avLst>
           </a:prstGeom>
           <a:solidFill>
@@ -10466,14 +11012,14 @@
       </p:sp>
       <p:sp>
         <p:nvSpPr>
-          <p:cNvPr id="34" name="Text 32"/>
-          <p:cNvSpPr/>
-          <p:nvPr/>
-        </p:nvSpPr>
-        <p:spPr>
-          <a:xfrm>
-            <a:off x="2023872" y="4169664"/>
-            <a:ext cx="685800" cy="475488"/>
+          <p:cNvPr id="40" name="Text 38"/>
+          <p:cNvSpPr/>
+          <p:nvPr/>
+        </p:nvSpPr>
+        <p:spPr>
+          <a:xfrm>
+            <a:off x="1951828" y="4169664"/>
+            <a:ext cx="603504" cy="384048"/>
           </a:xfrm>
           <a:prstGeom prst="rect">
             <a:avLst/>
@@ -10505,18 +11051,18 @@
       </p:sp>
       <p:sp>
         <p:nvSpPr>
-          <p:cNvPr id="35" name="Shape 33"/>
-          <p:cNvSpPr/>
-          <p:nvPr/>
-        </p:nvSpPr>
-        <p:spPr>
-          <a:xfrm>
-            <a:off x="2831592" y="4169664"/>
-            <a:ext cx="685800" cy="475488"/>
+          <p:cNvPr id="41" name="Shape 39"/>
+          <p:cNvSpPr/>
+          <p:nvPr/>
+        </p:nvSpPr>
+        <p:spPr>
+          <a:xfrm>
+            <a:off x="2605209" y="4169664"/>
+            <a:ext cx="603504" cy="384048"/>
           </a:xfrm>
           <a:prstGeom prst="rect">
             <a:avLst>
-              <a:gd name="adj" fmla="val 7692"/>
+              <a:gd name="adj" fmla="val 9524"/>
             </a:avLst>
           </a:prstGeom>
           <a:solidFill>
@@ -10532,14 +11078,14 @@
       </p:sp>
       <p:sp>
         <p:nvSpPr>
-          <p:cNvPr id="36" name="Text 34"/>
-          <p:cNvSpPr/>
-          <p:nvPr/>
-        </p:nvSpPr>
-        <p:spPr>
-          <a:xfrm>
-            <a:off x="2831592" y="4169664"/>
-            <a:ext cx="685800" cy="475488"/>
+          <p:cNvPr id="42" name="Text 40"/>
+          <p:cNvSpPr/>
+          <p:nvPr/>
+        </p:nvSpPr>
+        <p:spPr>
+          <a:xfrm>
+            <a:off x="2605209" y="4169664"/>
+            <a:ext cx="603504" cy="384048"/>
           </a:xfrm>
           <a:prstGeom prst="rect">
             <a:avLst/>
@@ -10571,18 +11117,18 @@
       </p:sp>
       <p:sp>
         <p:nvSpPr>
-          <p:cNvPr id="37" name="Shape 35"/>
-          <p:cNvSpPr/>
-          <p:nvPr/>
-        </p:nvSpPr>
-        <p:spPr>
-          <a:xfrm>
-            <a:off x="3639312" y="4169664"/>
-            <a:ext cx="685800" cy="475488"/>
+          <p:cNvPr id="43" name="Shape 41"/>
+          <p:cNvSpPr/>
+          <p:nvPr/>
+        </p:nvSpPr>
+        <p:spPr>
+          <a:xfrm>
+            <a:off x="3258589" y="4169664"/>
+            <a:ext cx="603504" cy="384048"/>
           </a:xfrm>
           <a:prstGeom prst="rect">
             <a:avLst>
-              <a:gd name="adj" fmla="val 7692"/>
+              <a:gd name="adj" fmla="val 9524"/>
             </a:avLst>
           </a:prstGeom>
           <a:solidFill>
@@ -10598,14 +11144,14 @@
       </p:sp>
       <p:sp>
         <p:nvSpPr>
-          <p:cNvPr id="38" name="Text 36"/>
-          <p:cNvSpPr/>
-          <p:nvPr/>
-        </p:nvSpPr>
-        <p:spPr>
-          <a:xfrm>
-            <a:off x="3639312" y="4169664"/>
-            <a:ext cx="685800" cy="475488"/>
+          <p:cNvPr id="44" name="Text 42"/>
+          <p:cNvSpPr/>
+          <p:nvPr/>
+        </p:nvSpPr>
+        <p:spPr>
+          <a:xfrm>
+            <a:off x="3258589" y="4169664"/>
+            <a:ext cx="603504" cy="384048"/>
           </a:xfrm>
           <a:prstGeom prst="rect">
             <a:avLst/>
@@ -10637,18 +11183,18 @@
       </p:sp>
       <p:sp>
         <p:nvSpPr>
-          <p:cNvPr id="39" name="Shape 37"/>
-          <p:cNvSpPr/>
-          <p:nvPr/>
-        </p:nvSpPr>
-        <p:spPr>
-          <a:xfrm>
-            <a:off x="4447032" y="4169664"/>
-            <a:ext cx="685800" cy="475488"/>
+          <p:cNvPr id="45" name="Shape 43"/>
+          <p:cNvSpPr/>
+          <p:nvPr/>
+        </p:nvSpPr>
+        <p:spPr>
+          <a:xfrm>
+            <a:off x="3911969" y="4169664"/>
+            <a:ext cx="603504" cy="384048"/>
           </a:xfrm>
           <a:prstGeom prst="rect">
             <a:avLst>
-              <a:gd name="adj" fmla="val 7692"/>
+              <a:gd name="adj" fmla="val 9524"/>
             </a:avLst>
           </a:prstGeom>
           <a:solidFill>
@@ -10664,14 +11210,14 @@
       </p:sp>
       <p:sp>
         <p:nvSpPr>
-          <p:cNvPr id="40" name="Text 38"/>
-          <p:cNvSpPr/>
-          <p:nvPr/>
-        </p:nvSpPr>
-        <p:spPr>
-          <a:xfrm>
-            <a:off x="4447032" y="4169664"/>
-            <a:ext cx="685800" cy="475488"/>
+          <p:cNvPr id="46" name="Text 44"/>
+          <p:cNvSpPr/>
+          <p:nvPr/>
+        </p:nvSpPr>
+        <p:spPr>
+          <a:xfrm>
+            <a:off x="3911969" y="4169664"/>
+            <a:ext cx="603504" cy="384048"/>
           </a:xfrm>
           <a:prstGeom prst="rect">
             <a:avLst/>
@@ -10703,18 +11249,18 @@
       </p:sp>
       <p:sp>
         <p:nvSpPr>
-          <p:cNvPr id="41" name="Shape 39"/>
-          <p:cNvSpPr/>
-          <p:nvPr/>
-        </p:nvSpPr>
-        <p:spPr>
-          <a:xfrm>
-            <a:off x="5254752" y="4169664"/>
-            <a:ext cx="685800" cy="475488"/>
+          <p:cNvPr id="47" name="Shape 45"/>
+          <p:cNvSpPr/>
+          <p:nvPr/>
+        </p:nvSpPr>
+        <p:spPr>
+          <a:xfrm>
+            <a:off x="4565350" y="4169664"/>
+            <a:ext cx="603504" cy="384048"/>
           </a:xfrm>
           <a:prstGeom prst="rect">
             <a:avLst>
-              <a:gd name="adj" fmla="val 7692"/>
+              <a:gd name="adj" fmla="val 9524"/>
             </a:avLst>
           </a:prstGeom>
           <a:solidFill>
@@ -10730,14 +11276,14 @@
       </p:sp>
       <p:sp>
         <p:nvSpPr>
-          <p:cNvPr id="42" name="Text 40"/>
-          <p:cNvSpPr/>
-          <p:nvPr/>
-        </p:nvSpPr>
-        <p:spPr>
-          <a:xfrm>
-            <a:off x="5254752" y="4169664"/>
-            <a:ext cx="685800" cy="475488"/>
+          <p:cNvPr id="48" name="Text 46"/>
+          <p:cNvSpPr/>
+          <p:nvPr/>
+        </p:nvSpPr>
+        <p:spPr>
+          <a:xfrm>
+            <a:off x="4565350" y="4169664"/>
+            <a:ext cx="603504" cy="384048"/>
           </a:xfrm>
           <a:prstGeom prst="rect">
             <a:avLst/>
@@ -10761,7 +11307,7 @@
                 <a:ea typeface="Trebuchet MS" pitchFamily="34" charset="-122"/>
                 <a:cs typeface="Trebuchet MS" pitchFamily="34" charset="-120"/>
               </a:rPr>
-              <a:t>a</a:t>
+              <a:t>ay</a:t>
             </a:r>
             <a:endParaRPr lang="en-US" sz="900" dirty="0"/>
           </a:p>
@@ -10769,18 +11315,57 @@
       </p:sp>
       <p:sp>
         <p:nvSpPr>
-          <p:cNvPr id="43" name="Shape 41"/>
-          <p:cNvSpPr/>
-          <p:nvPr/>
-        </p:nvSpPr>
-        <p:spPr>
-          <a:xfrm>
-            <a:off x="6062472" y="4169664"/>
-            <a:ext cx="685800" cy="475488"/>
+          <p:cNvPr id="49" name="Text 47"/>
+          <p:cNvSpPr/>
+          <p:nvPr/>
+        </p:nvSpPr>
+        <p:spPr>
+          <a:xfrm>
+            <a:off x="4565350" y="4572000"/>
+            <a:ext cx="603504" cy="219456"/>
+          </a:xfrm>
+          <a:prstGeom prst="rect">
+            <a:avLst/>
+          </a:prstGeom>
+          <a:noFill/>
+          <a:ln/>
+        </p:spPr>
+        <p:txBody>
+          <a:bodyPr wrap="square" lIns="0" tIns="0" rIns="0" bIns="0" rtlCol="0" anchor="t"/>
+          <a:lstStyle/>
+          <a:p>
+            <a:pPr algn="ctr" indent="0" marL="0">
+              <a:buNone/>
+            </a:pPr>
+            <a:r>
+              <a:rPr lang="en-US" sz="750" i="1" dirty="0">
+                <a:solidFill>
+                  <a:srgbClr val="94A3B8"/>
+                </a:solidFill>
+                <a:latin typeface="Calibri" pitchFamily="34" charset="0"/>
+                <a:ea typeface="Calibri" pitchFamily="34" charset="-122"/>
+                <a:cs typeface="Calibri" pitchFamily="34" charset="-120"/>
+              </a:rPr>
+              <a:t>/ay/</a:t>
+            </a:r>
+            <a:endParaRPr lang="en-US" sz="750" dirty="0"/>
+          </a:p>
+        </p:txBody>
+      </p:sp>
+      <p:sp>
+        <p:nvSpPr>
+          <p:cNvPr id="50" name="Shape 48"/>
+          <p:cNvSpPr/>
+          <p:nvPr/>
+        </p:nvSpPr>
+        <p:spPr>
+          <a:xfrm>
+            <a:off x="5218730" y="4169664"/>
+            <a:ext cx="603504" cy="384048"/>
           </a:xfrm>
           <a:prstGeom prst="rect">
             <a:avLst>
-              <a:gd name="adj" fmla="val 7692"/>
+              <a:gd name="adj" fmla="val 9524"/>
             </a:avLst>
           </a:prstGeom>
           <a:solidFill>
@@ -10796,14 +11381,14 @@
       </p:sp>
       <p:sp>
         <p:nvSpPr>
-          <p:cNvPr id="44" name="Text 42"/>
-          <p:cNvSpPr/>
-          <p:nvPr/>
-        </p:nvSpPr>
-        <p:spPr>
-          <a:xfrm>
-            <a:off x="6062472" y="4169664"/>
-            <a:ext cx="685800" cy="475488"/>
+          <p:cNvPr id="51" name="Text 49"/>
+          <p:cNvSpPr/>
+          <p:nvPr/>
+        </p:nvSpPr>
+        <p:spPr>
+          <a:xfrm>
+            <a:off x="5218730" y="4169664"/>
+            <a:ext cx="603504" cy="384048"/>
           </a:xfrm>
           <a:prstGeom prst="rect">
             <a:avLst/>
@@ -10835,18 +11420,18 @@
       </p:sp>
       <p:sp>
         <p:nvSpPr>
-          <p:cNvPr id="45" name="Shape 43"/>
-          <p:cNvSpPr/>
-          <p:nvPr/>
-        </p:nvSpPr>
-        <p:spPr>
-          <a:xfrm>
-            <a:off x="6870192" y="4169664"/>
-            <a:ext cx="685800" cy="475488"/>
+          <p:cNvPr id="52" name="Shape 50"/>
+          <p:cNvSpPr/>
+          <p:nvPr/>
+        </p:nvSpPr>
+        <p:spPr>
+          <a:xfrm>
+            <a:off x="5872111" y="4169664"/>
+            <a:ext cx="603504" cy="384048"/>
           </a:xfrm>
           <a:prstGeom prst="rect">
             <a:avLst>
-              <a:gd name="adj" fmla="val 7692"/>
+              <a:gd name="adj" fmla="val 9524"/>
             </a:avLst>
           </a:prstGeom>
           <a:solidFill>
@@ -10862,14 +11447,14 @@
       </p:sp>
       <p:sp>
         <p:nvSpPr>
-          <p:cNvPr id="46" name="Text 44"/>
-          <p:cNvSpPr/>
-          <p:nvPr/>
-        </p:nvSpPr>
-        <p:spPr>
-          <a:xfrm>
-            <a:off x="6870192" y="4169664"/>
-            <a:ext cx="685800" cy="475488"/>
+          <p:cNvPr id="53" name="Text 51"/>
+          <p:cNvSpPr/>
+          <p:nvPr/>
+        </p:nvSpPr>
+        <p:spPr>
+          <a:xfrm>
+            <a:off x="5872111" y="4169664"/>
+            <a:ext cx="603504" cy="384048"/>
           </a:xfrm>
           <a:prstGeom prst="rect">
             <a:avLst/>
@@ -10901,18 +11486,18 @@
       </p:sp>
       <p:sp>
         <p:nvSpPr>
-          <p:cNvPr id="47" name="Shape 45"/>
-          <p:cNvSpPr/>
-          <p:nvPr/>
-        </p:nvSpPr>
-        <p:spPr>
-          <a:xfrm>
-            <a:off x="7677912" y="4169664"/>
-            <a:ext cx="685800" cy="475488"/>
+          <p:cNvPr id="54" name="Shape 52"/>
+          <p:cNvSpPr/>
+          <p:nvPr/>
+        </p:nvSpPr>
+        <p:spPr>
+          <a:xfrm>
+            <a:off x="6525491" y="4169664"/>
+            <a:ext cx="603504" cy="384048"/>
           </a:xfrm>
           <a:prstGeom prst="rect">
             <a:avLst>
-              <a:gd name="adj" fmla="val 7692"/>
+              <a:gd name="adj" fmla="val 9524"/>
             </a:avLst>
           </a:prstGeom>
           <a:solidFill>
@@ -10928,14 +11513,14 @@
       </p:sp>
       <p:sp>
         <p:nvSpPr>
-          <p:cNvPr id="48" name="Text 46"/>
-          <p:cNvSpPr/>
-          <p:nvPr/>
-        </p:nvSpPr>
-        <p:spPr>
-          <a:xfrm>
-            <a:off x="7677912" y="4169664"/>
-            <a:ext cx="685800" cy="475488"/>
+          <p:cNvPr id="55" name="Text 53"/>
+          <p:cNvSpPr/>
+          <p:nvPr/>
+        </p:nvSpPr>
+        <p:spPr>
+          <a:xfrm>
+            <a:off x="6525491" y="4169664"/>
+            <a:ext cx="603504" cy="384048"/>
           </a:xfrm>
           <a:prstGeom prst="rect">
             <a:avLst/>
@@ -10959,7 +11544,139 @@
                 <a:ea typeface="Trebuchet MS" pitchFamily="34" charset="-122"/>
                 <a:cs typeface="Trebuchet MS" pitchFamily="34" charset="-120"/>
               </a:rPr>
-              <a:t>e</a:t>
+              <a:t>f</a:t>
+            </a:r>
+            <a:endParaRPr lang="en-US" sz="900" dirty="0"/>
+          </a:p>
+        </p:txBody>
+      </p:sp>
+      <p:sp>
+        <p:nvSpPr>
+          <p:cNvPr id="56" name="Shape 54"/>
+          <p:cNvSpPr/>
+          <p:nvPr/>
+        </p:nvSpPr>
+        <p:spPr>
+          <a:xfrm>
+            <a:off x="7178871" y="4169664"/>
+            <a:ext cx="603504" cy="384048"/>
+          </a:xfrm>
+          <a:prstGeom prst="rect">
+            <a:avLst>
+              <a:gd name="adj" fmla="val 9524"/>
+            </a:avLst>
+          </a:prstGeom>
+          <a:solidFill>
+            <a:srgbClr val="FFFFFF"/>
+          </a:solidFill>
+          <a:ln w="12700">
+            <a:solidFill>
+              <a:srgbClr val="DB2777"/>
+            </a:solidFill>
+            <a:prstDash val="solid"/>
+          </a:ln>
+        </p:spPr>
+      </p:sp>
+      <p:sp>
+        <p:nvSpPr>
+          <p:cNvPr id="57" name="Text 55"/>
+          <p:cNvSpPr/>
+          <p:nvPr/>
+        </p:nvSpPr>
+        <p:spPr>
+          <a:xfrm>
+            <a:off x="7178871" y="4169664"/>
+            <a:ext cx="603504" cy="384048"/>
+          </a:xfrm>
+          <a:prstGeom prst="rect">
+            <a:avLst/>
+          </a:prstGeom>
+          <a:noFill/>
+          <a:ln/>
+        </p:spPr>
+        <p:txBody>
+          <a:bodyPr wrap="square" lIns="0" tIns="0" rIns="0" bIns="0" rtlCol="0" anchor="ctr"/>
+          <a:lstStyle/>
+          <a:p>
+            <a:pPr algn="ctr" indent="0" marL="0">
+              <a:buNone/>
+            </a:pPr>
+            <a:r>
+              <a:rPr lang="en-US" sz="900" b="1" dirty="0">
+                <a:solidFill>
+                  <a:srgbClr val="9D174D"/>
+                </a:solidFill>
+                <a:latin typeface="Trebuchet MS" pitchFamily="34" charset="0"/>
+                <a:ea typeface="Trebuchet MS" pitchFamily="34" charset="-122"/>
+                <a:cs typeface="Trebuchet MS" pitchFamily="34" charset="-120"/>
+              </a:rPr>
+              <a:t>u</a:t>
+            </a:r>
+            <a:endParaRPr lang="en-US" sz="900" dirty="0"/>
+          </a:p>
+        </p:txBody>
+      </p:sp>
+      <p:sp>
+        <p:nvSpPr>
+          <p:cNvPr id="58" name="Shape 56"/>
+          <p:cNvSpPr/>
+          <p:nvPr/>
+        </p:nvSpPr>
+        <p:spPr>
+          <a:xfrm>
+            <a:off x="7832252" y="4169664"/>
+            <a:ext cx="603504" cy="384048"/>
+          </a:xfrm>
+          <a:prstGeom prst="rect">
+            <a:avLst>
+              <a:gd name="adj" fmla="val 9524"/>
+            </a:avLst>
+          </a:prstGeom>
+          <a:solidFill>
+            <a:srgbClr val="FFFFFF"/>
+          </a:solidFill>
+          <a:ln w="12700">
+            <a:solidFill>
+              <a:srgbClr val="DB2777"/>
+            </a:solidFill>
+            <a:prstDash val="solid"/>
+          </a:ln>
+        </p:spPr>
+      </p:sp>
+      <p:sp>
+        <p:nvSpPr>
+          <p:cNvPr id="59" name="Text 57"/>
+          <p:cNvSpPr/>
+          <p:nvPr/>
+        </p:nvSpPr>
+        <p:spPr>
+          <a:xfrm>
+            <a:off x="7832252" y="4169664"/>
+            <a:ext cx="603504" cy="384048"/>
+          </a:xfrm>
+          <a:prstGeom prst="rect">
+            <a:avLst/>
+          </a:prstGeom>
+          <a:noFill/>
+          <a:ln/>
+        </p:spPr>
+        <p:txBody>
+          <a:bodyPr wrap="square" lIns="0" tIns="0" rIns="0" bIns="0" rtlCol="0" anchor="ctr"/>
+          <a:lstStyle/>
+          <a:p>
+            <a:pPr algn="ctr" indent="0" marL="0">
+              <a:buNone/>
+            </a:pPr>
+            <a:r>
+              <a:rPr lang="en-US" sz="900" b="1" dirty="0">
+                <a:solidFill>
+                  <a:srgbClr val="9D174D"/>
+                </a:solidFill>
+                <a:latin typeface="Trebuchet MS" pitchFamily="34" charset="0"/>
+                <a:ea typeface="Trebuchet MS" pitchFamily="34" charset="-122"/>
+                <a:cs typeface="Trebuchet MS" pitchFamily="34" charset="-120"/>
+              </a:rPr>
+              <a:t>l</a:t>
             </a:r>
             <a:endParaRPr lang="en-US" sz="900" dirty="0"/>
           </a:p>
@@ -11390,7 +12107,7 @@
                 <a:ea typeface="Trebuchet MS" pitchFamily="34" charset="-122"/>
                 <a:cs typeface="Trebuchet MS" pitchFamily="34" charset="-120"/>
               </a:rPr>
-              <a:t>tasty</a:t>
+              <a:t>tasteful</a:t>
             </a:r>
             <a:endParaRPr lang="en-US" sz="2800" dirty="0"/>
           </a:p>
@@ -12217,7 +12934,7 @@
                 <a:ea typeface="Trebuchet MS" pitchFamily="34" charset="-122"/>
                 <a:cs typeface="Trebuchet MS" pitchFamily="34" charset="-120"/>
               </a:rPr>
-              <a:t>tasty</a:t>
+              <a:t>tasteful</a:t>
             </a:r>
             <a:endParaRPr lang="en-US" sz="2800" dirty="0"/>
           </a:p>
@@ -12468,7 +13185,7 @@
                 <a:ea typeface="Trebuchet MS" pitchFamily="34" charset="-122"/>
                 <a:cs typeface="Trebuchet MS" pitchFamily="34" charset="-120"/>
               </a:rPr>
-              <a:t>y</a:t>
+              <a:t>ful</a:t>
             </a:r>
             <a:endParaRPr lang="en-US" sz="1300" dirty="0"/>
           </a:p>
@@ -12507,7 +13224,7 @@
                 <a:ea typeface="Calibri" pitchFamily="34" charset="-122"/>
                 <a:cs typeface="Calibri" pitchFamily="34" charset="-120"/>
               </a:rPr>
-              <a:t>having the quality of</a:t>
+              <a:t>full of, having</a:t>
             </a:r>
             <a:endParaRPr lang="en-US" sz="850" dirty="0"/>
           </a:p>
@@ -12515,57 +13232,150 @@
       </p:sp>
       <p:sp>
         <p:nvSpPr>
-          <p:cNvPr id="22" name="Text 20"/>
-          <p:cNvSpPr/>
-          <p:nvPr/>
-        </p:nvSpPr>
-        <p:spPr>
-          <a:xfrm>
-            <a:off x="5803392" y="2752344"/>
-            <a:ext cx="1828800" cy="182880"/>
-          </a:xfrm>
-          <a:prstGeom prst="rect">
-            <a:avLst/>
-          </a:prstGeom>
-          <a:noFill/>
-          <a:ln/>
-        </p:spPr>
-        <p:txBody>
-          <a:bodyPr wrap="square" lIns="0" tIns="0" rIns="0" bIns="0" rtlCol="0" anchor="t"/>
-          <a:lstStyle/>
-          <a:p>
-            <a:pPr algn="ctr" indent="0" marL="0">
-              <a:buNone/>
-            </a:pPr>
-            <a:r>
-              <a:rPr lang="en-US" sz="700" i="1" dirty="0">
-                <a:solidFill>
-                  <a:srgbClr val="94A3B8"/>
+          <p:cNvPr id="22" name="Shape 20"/>
+          <p:cNvSpPr/>
+          <p:nvPr/>
+        </p:nvSpPr>
+        <p:spPr>
+          <a:xfrm>
+            <a:off x="365760" y="3273552"/>
+            <a:ext cx="1371600" cy="658368"/>
+          </a:xfrm>
+          <a:prstGeom prst="rect">
+            <a:avLst>
+              <a:gd name="adj" fmla="val 8333"/>
+            </a:avLst>
+          </a:prstGeom>
+          <a:solidFill>
+            <a:srgbClr val="E2E8F0"/>
+          </a:solidFill>
+          <a:ln w="12700">
+            <a:solidFill>
+              <a:srgbClr val="E2E8F0"/>
+            </a:solidFill>
+            <a:prstDash val="solid"/>
+          </a:ln>
+        </p:spPr>
+      </p:sp>
+      <p:sp>
+        <p:nvSpPr>
+          <p:cNvPr id="23" name="Text 21"/>
+          <p:cNvSpPr/>
+          <p:nvPr/>
+        </p:nvSpPr>
+        <p:spPr>
+          <a:xfrm>
+            <a:off x="365760" y="3273552"/>
+            <a:ext cx="1371600" cy="658368"/>
+          </a:xfrm>
+          <a:prstGeom prst="rect">
+            <a:avLst/>
+          </a:prstGeom>
+          <a:noFill/>
+          <a:ln/>
+        </p:spPr>
+        <p:txBody>
+          <a:bodyPr wrap="square" lIns="0" tIns="0" rIns="0" bIns="0" rtlCol="0" anchor="ctr"/>
+          <a:lstStyle/>
+          <a:p>
+            <a:pPr algn="ctr" indent="0" marL="0">
+              <a:buNone/>
+            </a:pPr>
+            <a:r>
+              <a:rPr lang="en-US" sz="1100" b="1" dirty="0">
+                <a:solidFill>
+                  <a:srgbClr val="475569"/>
+                </a:solidFill>
+                <a:latin typeface="Trebuchet MS" pitchFamily="34" charset="0"/>
+                <a:ea typeface="Trebuchet MS" pitchFamily="34" charset="-122"/>
+                <a:cs typeface="Trebuchet MS" pitchFamily="34" charset="-120"/>
+              </a:rPr>
+              <a:t>Syllables</a:t>
+            </a:r>
+            <a:endParaRPr lang="en-US" sz="1100" dirty="0"/>
+          </a:p>
+        </p:txBody>
+      </p:sp>
+      <p:sp>
+        <p:nvSpPr>
+          <p:cNvPr id="24" name="Shape 22"/>
+          <p:cNvSpPr/>
+          <p:nvPr/>
+        </p:nvSpPr>
+        <p:spPr>
+          <a:xfrm>
+            <a:off x="1874520" y="3273552"/>
+            <a:ext cx="6903720" cy="658368"/>
+          </a:xfrm>
+          <a:prstGeom prst="rect">
+            <a:avLst>
+              <a:gd name="adj" fmla="val 8333"/>
+            </a:avLst>
+          </a:prstGeom>
+          <a:solidFill>
+            <a:srgbClr val="F8FAFC"/>
+          </a:solidFill>
+          <a:ln w="12700">
+            <a:solidFill>
+              <a:srgbClr val="E2E8F0"/>
+            </a:solidFill>
+            <a:prstDash val="dash"/>
+          </a:ln>
+        </p:spPr>
+      </p:sp>
+      <p:sp>
+        <p:nvSpPr>
+          <p:cNvPr id="25" name="Text 23"/>
+          <p:cNvSpPr/>
+          <p:nvPr/>
+        </p:nvSpPr>
+        <p:spPr>
+          <a:xfrm>
+            <a:off x="1874520" y="3273552"/>
+            <a:ext cx="6903720" cy="658368"/>
+          </a:xfrm>
+          <a:prstGeom prst="rect">
+            <a:avLst/>
+          </a:prstGeom>
+          <a:noFill/>
+          <a:ln/>
+        </p:spPr>
+        <p:txBody>
+          <a:bodyPr wrap="square" rtlCol="0" anchor="ctr"/>
+          <a:lstStyle/>
+          <a:p>
+            <a:pPr algn="ctr" indent="0" marL="0">
+              <a:buNone/>
+            </a:pPr>
+            <a:r>
+              <a:rPr lang="en-US" sz="1100" i="1" dirty="0">
+                <a:solidFill>
+                  <a:srgbClr val="CBD5E1"/>
                 </a:solidFill>
                 <a:latin typeface="Calibri" pitchFamily="34" charset="0"/>
                 <a:ea typeface="Calibri" pitchFamily="34" charset="-122"/>
                 <a:cs typeface="Calibri" pitchFamily="34" charset="-120"/>
               </a:rPr>
-              <a:t>'e' dropped before vowel suffix</a:t>
-            </a:r>
-            <a:endParaRPr lang="en-US" sz="700" dirty="0"/>
-          </a:p>
-        </p:txBody>
-      </p:sp>
-      <p:sp>
-        <p:nvSpPr>
-          <p:cNvPr id="23" name="Shape 21"/>
-          <p:cNvSpPr/>
-          <p:nvPr/>
-        </p:nvSpPr>
-        <p:spPr>
-          <a:xfrm>
-            <a:off x="365760" y="3273552"/>
-            <a:ext cx="1371600" cy="658368"/>
+              <a:t>Write here...</a:t>
+            </a:r>
+            <a:endParaRPr lang="en-US" sz="1100" dirty="0"/>
+          </a:p>
+        </p:txBody>
+      </p:sp>
+      <p:sp>
+        <p:nvSpPr>
+          <p:cNvPr id="26" name="Shape 24"/>
+          <p:cNvSpPr/>
+          <p:nvPr/>
+        </p:nvSpPr>
+        <p:spPr>
+          <a:xfrm>
+            <a:off x="365760" y="4096512"/>
+            <a:ext cx="1371600" cy="804672"/>
           </a:xfrm>
           <a:prstGeom prst="rect">
             <a:avLst>
-              <a:gd name="adj" fmla="val 8333"/>
+              <a:gd name="adj" fmla="val 6818"/>
             </a:avLst>
           </a:prstGeom>
           <a:solidFill>
@@ -12581,14 +13391,14 @@
       </p:sp>
       <p:sp>
         <p:nvSpPr>
-          <p:cNvPr id="24" name="Text 22"/>
-          <p:cNvSpPr/>
-          <p:nvPr/>
-        </p:nvSpPr>
-        <p:spPr>
-          <a:xfrm>
-            <a:off x="365760" y="3273552"/>
-            <a:ext cx="1371600" cy="658368"/>
+          <p:cNvPr id="27" name="Text 25"/>
+          <p:cNvSpPr/>
+          <p:nvPr/>
+        </p:nvSpPr>
+        <p:spPr>
+          <a:xfrm>
+            <a:off x="365760" y="4096512"/>
+            <a:ext cx="1371600" cy="804672"/>
           </a:xfrm>
           <a:prstGeom prst="rect">
             <a:avLst/>
@@ -12612,7 +13422,7 @@
                 <a:ea typeface="Trebuchet MS" pitchFamily="34" charset="-122"/>
                 <a:cs typeface="Trebuchet MS" pitchFamily="34" charset="-120"/>
               </a:rPr>
-              <a:t>Syllables</a:t>
+              <a:t>Phonemes</a:t>
             </a:r>
             <a:endParaRPr lang="en-US" sz="1100" dirty="0"/>
           </a:p>
@@ -12620,80 +13430,14 @@
       </p:sp>
       <p:sp>
         <p:nvSpPr>
-          <p:cNvPr id="25" name="Shape 23"/>
-          <p:cNvSpPr/>
-          <p:nvPr/>
-        </p:nvSpPr>
-        <p:spPr>
-          <a:xfrm>
-            <a:off x="1874520" y="3273552"/>
-            <a:ext cx="6903720" cy="658368"/>
-          </a:xfrm>
-          <a:prstGeom prst="rect">
-            <a:avLst>
-              <a:gd name="adj" fmla="val 8333"/>
-            </a:avLst>
-          </a:prstGeom>
-          <a:solidFill>
-            <a:srgbClr val="F8FAFC"/>
-          </a:solidFill>
-          <a:ln w="12700">
-            <a:solidFill>
-              <a:srgbClr val="E2E8F0"/>
-            </a:solidFill>
-            <a:prstDash val="dash"/>
-          </a:ln>
-        </p:spPr>
-      </p:sp>
-      <p:sp>
-        <p:nvSpPr>
-          <p:cNvPr id="26" name="Text 24"/>
-          <p:cNvSpPr/>
-          <p:nvPr/>
-        </p:nvSpPr>
-        <p:spPr>
-          <a:xfrm>
-            <a:off x="1874520" y="3273552"/>
-            <a:ext cx="6903720" cy="658368"/>
-          </a:xfrm>
-          <a:prstGeom prst="rect">
-            <a:avLst/>
-          </a:prstGeom>
-          <a:noFill/>
-          <a:ln/>
-        </p:spPr>
-        <p:txBody>
-          <a:bodyPr wrap="square" rtlCol="0" anchor="ctr"/>
-          <a:lstStyle/>
-          <a:p>
-            <a:pPr algn="ctr" indent="0" marL="0">
-              <a:buNone/>
-            </a:pPr>
-            <a:r>
-              <a:rPr lang="en-US" sz="1100" i="1" dirty="0">
-                <a:solidFill>
-                  <a:srgbClr val="CBD5E1"/>
-                </a:solidFill>
-                <a:latin typeface="Calibri" pitchFamily="34" charset="0"/>
-                <a:ea typeface="Calibri" pitchFamily="34" charset="-122"/>
-                <a:cs typeface="Calibri" pitchFamily="34" charset="-120"/>
-              </a:rPr>
-              <a:t>Write here...</a:t>
-            </a:r>
-            <a:endParaRPr lang="en-US" sz="1100" dirty="0"/>
-          </a:p>
-        </p:txBody>
-      </p:sp>
-      <p:sp>
-        <p:nvSpPr>
-          <p:cNvPr id="27" name="Shape 25"/>
-          <p:cNvSpPr/>
-          <p:nvPr/>
-        </p:nvSpPr>
-        <p:spPr>
-          <a:xfrm>
-            <a:off x="365760" y="4096512"/>
-            <a:ext cx="1371600" cy="804672"/>
+          <p:cNvPr id="28" name="Shape 26"/>
+          <p:cNvSpPr/>
+          <p:nvPr/>
+        </p:nvSpPr>
+        <p:spPr>
+          <a:xfrm>
+            <a:off x="1874520" y="4096512"/>
+            <a:ext cx="6903720" cy="804672"/>
           </a:xfrm>
           <a:prstGeom prst="rect">
             <a:avLst>
@@ -12701,85 +13445,19 @@
             </a:avLst>
           </a:prstGeom>
           <a:solidFill>
-            <a:srgbClr val="E2E8F0"/>
+            <a:srgbClr val="F8FAFC"/>
           </a:solidFill>
           <a:ln w="12700">
             <a:solidFill>
               <a:srgbClr val="E2E8F0"/>
             </a:solidFill>
-            <a:prstDash val="solid"/>
-          </a:ln>
-        </p:spPr>
-      </p:sp>
-      <p:sp>
-        <p:nvSpPr>
-          <p:cNvPr id="28" name="Text 26"/>
-          <p:cNvSpPr/>
-          <p:nvPr/>
-        </p:nvSpPr>
-        <p:spPr>
-          <a:xfrm>
-            <a:off x="365760" y="4096512"/>
-            <a:ext cx="1371600" cy="804672"/>
-          </a:xfrm>
-          <a:prstGeom prst="rect">
-            <a:avLst/>
-          </a:prstGeom>
-          <a:noFill/>
-          <a:ln/>
-        </p:spPr>
-        <p:txBody>
-          <a:bodyPr wrap="square" lIns="0" tIns="0" rIns="0" bIns="0" rtlCol="0" anchor="ctr"/>
-          <a:lstStyle/>
-          <a:p>
-            <a:pPr algn="ctr" indent="0" marL="0">
-              <a:buNone/>
-            </a:pPr>
-            <a:r>
-              <a:rPr lang="en-US" sz="1100" b="1" dirty="0">
-                <a:solidFill>
-                  <a:srgbClr val="475569"/>
-                </a:solidFill>
-                <a:latin typeface="Trebuchet MS" pitchFamily="34" charset="0"/>
-                <a:ea typeface="Trebuchet MS" pitchFamily="34" charset="-122"/>
-                <a:cs typeface="Trebuchet MS" pitchFamily="34" charset="-120"/>
-              </a:rPr>
-              <a:t>Phonemes</a:t>
-            </a:r>
-            <a:endParaRPr lang="en-US" sz="1100" dirty="0"/>
-          </a:p>
-        </p:txBody>
-      </p:sp>
-      <p:sp>
-        <p:nvSpPr>
-          <p:cNvPr id="29" name="Shape 27"/>
-          <p:cNvSpPr/>
-          <p:nvPr/>
-        </p:nvSpPr>
-        <p:spPr>
-          <a:xfrm>
-            <a:off x="1874520" y="4096512"/>
-            <a:ext cx="6903720" cy="804672"/>
-          </a:xfrm>
-          <a:prstGeom prst="rect">
-            <a:avLst>
-              <a:gd name="adj" fmla="val 6818"/>
-            </a:avLst>
-          </a:prstGeom>
-          <a:solidFill>
-            <a:srgbClr val="F8FAFC"/>
-          </a:solidFill>
-          <a:ln w="12700">
-            <a:solidFill>
-              <a:srgbClr val="E2E8F0"/>
-            </a:solidFill>
             <a:prstDash val="dash"/>
           </a:ln>
         </p:spPr>
       </p:sp>
       <p:sp>
         <p:nvSpPr>
-          <p:cNvPr id="30" name="Text 28"/>
+          <p:cNvPr id="29" name="Text 27"/>
           <p:cNvSpPr/>
           <p:nvPr/>
         </p:nvSpPr>
@@ -13241,7 +13919,7 @@
                 <a:ea typeface="Trebuchet MS" pitchFamily="34" charset="-122"/>
                 <a:cs typeface="Trebuchet MS" pitchFamily="34" charset="-120"/>
               </a:rPr>
-              <a:t>tasty</a:t>
+              <a:t>tasteful</a:t>
             </a:r>
             <a:endParaRPr lang="en-US" sz="2800" dirty="0"/>
           </a:p>
@@ -13492,7 +14170,7 @@
                 <a:ea typeface="Trebuchet MS" pitchFamily="34" charset="-122"/>
                 <a:cs typeface="Trebuchet MS" pitchFamily="34" charset="-120"/>
               </a:rPr>
-              <a:t>y</a:t>
+              <a:t>ful</a:t>
             </a:r>
             <a:endParaRPr lang="en-US" sz="1300" dirty="0"/>
           </a:p>
@@ -13531,7 +14209,7 @@
                 <a:ea typeface="Calibri" pitchFamily="34" charset="-122"/>
                 <a:cs typeface="Calibri" pitchFamily="34" charset="-120"/>
               </a:rPr>
-              <a:t>having the quality of</a:t>
+              <a:t>full of, having</a:t>
             </a:r>
             <a:endParaRPr lang="en-US" sz="850" dirty="0"/>
           </a:p>
@@ -13539,46 +14217,7 @@
       </p:sp>
       <p:sp>
         <p:nvSpPr>
-          <p:cNvPr id="22" name="Text 20"/>
-          <p:cNvSpPr/>
-          <p:nvPr/>
-        </p:nvSpPr>
-        <p:spPr>
-          <a:xfrm>
-            <a:off x="5803392" y="2752344"/>
-            <a:ext cx="1828800" cy="182880"/>
-          </a:xfrm>
-          <a:prstGeom prst="rect">
-            <a:avLst/>
-          </a:prstGeom>
-          <a:noFill/>
-          <a:ln/>
-        </p:spPr>
-        <p:txBody>
-          <a:bodyPr wrap="square" lIns="0" tIns="0" rIns="0" bIns="0" rtlCol="0" anchor="t"/>
-          <a:lstStyle/>
-          <a:p>
-            <a:pPr algn="ctr" indent="0" marL="0">
-              <a:buNone/>
-            </a:pPr>
-            <a:r>
-              <a:rPr lang="en-US" sz="700" i="1" dirty="0">
-                <a:solidFill>
-                  <a:srgbClr val="94A3B8"/>
-                </a:solidFill>
-                <a:latin typeface="Calibri" pitchFamily="34" charset="0"/>
-                <a:ea typeface="Calibri" pitchFamily="34" charset="-122"/>
-                <a:cs typeface="Calibri" pitchFamily="34" charset="-120"/>
-              </a:rPr>
-              <a:t>'e' dropped before vowel suffix</a:t>
-            </a:r>
-            <a:endParaRPr lang="en-US" sz="700" dirty="0"/>
-          </a:p>
-        </p:txBody>
-      </p:sp>
-      <p:sp>
-        <p:nvSpPr>
-          <p:cNvPr id="23" name="Shape 21"/>
+          <p:cNvPr id="22" name="Shape 20"/>
           <p:cNvSpPr/>
           <p:nvPr/>
         </p:nvSpPr>
@@ -13605,7 +14244,7 @@
       </p:sp>
       <p:sp>
         <p:nvSpPr>
-          <p:cNvPr id="24" name="Text 22"/>
+          <p:cNvPr id="23" name="Text 21"/>
           <p:cNvSpPr/>
           <p:nvPr/>
         </p:nvSpPr>
@@ -13644,7 +14283,7 @@
       </p:sp>
       <p:sp>
         <p:nvSpPr>
-          <p:cNvPr id="25" name="Shape 23"/>
+          <p:cNvPr id="24" name="Shape 22"/>
           <p:cNvSpPr/>
           <p:nvPr/>
         </p:nvSpPr>
@@ -13671,7 +14310,7 @@
       </p:sp>
       <p:sp>
         <p:nvSpPr>
-          <p:cNvPr id="26" name="Shape 24"/>
+          <p:cNvPr id="25" name="Shape 23"/>
           <p:cNvSpPr/>
           <p:nvPr/>
         </p:nvSpPr>
@@ -13698,7 +14337,7 @@
       </p:sp>
       <p:sp>
         <p:nvSpPr>
-          <p:cNvPr id="27" name="Text 25"/>
+          <p:cNvPr id="26" name="Text 24"/>
           <p:cNvSpPr/>
           <p:nvPr/>
         </p:nvSpPr>
@@ -13729,7 +14368,7 @@
                 <a:ea typeface="Trebuchet MS" pitchFamily="34" charset="-122"/>
                 <a:cs typeface="Trebuchet MS" pitchFamily="34" charset="-120"/>
               </a:rPr>
-              <a:t>tas</a:t>
+              <a:t>taste</a:t>
             </a:r>
             <a:endParaRPr lang="en-US" sz="1400" dirty="0"/>
           </a:p>
@@ -13737,7 +14376,7 @@
       </p:sp>
       <p:sp>
         <p:nvSpPr>
-          <p:cNvPr id="28" name="Text 26"/>
+          <p:cNvPr id="27" name="Text 25"/>
           <p:cNvSpPr/>
           <p:nvPr/>
         </p:nvSpPr>
@@ -13776,7 +14415,7 @@
       </p:sp>
       <p:sp>
         <p:nvSpPr>
-          <p:cNvPr id="29" name="Shape 27"/>
+          <p:cNvPr id="28" name="Shape 26"/>
           <p:cNvSpPr/>
           <p:nvPr/>
         </p:nvSpPr>
@@ -13803,7 +14442,7 @@
       </p:sp>
       <p:sp>
         <p:nvSpPr>
-          <p:cNvPr id="30" name="Text 28"/>
+          <p:cNvPr id="29" name="Text 27"/>
           <p:cNvSpPr/>
           <p:nvPr/>
         </p:nvSpPr>
@@ -13834,7 +14473,7 @@
                 <a:ea typeface="Trebuchet MS" pitchFamily="34" charset="-122"/>
                 <a:cs typeface="Trebuchet MS" pitchFamily="34" charset="-120"/>
               </a:rPr>
-              <a:t>ty</a:t>
+              <a:t>ful</a:t>
             </a:r>
             <a:endParaRPr lang="en-US" sz="1400" dirty="0"/>
           </a:p>
@@ -13842,7 +14481,7 @@
       </p:sp>
       <p:sp>
         <p:nvSpPr>
-          <p:cNvPr id="31" name="Shape 29"/>
+          <p:cNvPr id="30" name="Shape 28"/>
           <p:cNvSpPr/>
           <p:nvPr/>
         </p:nvSpPr>
@@ -13869,7 +14508,7 @@
       </p:sp>
       <p:sp>
         <p:nvSpPr>
-          <p:cNvPr id="32" name="Text 30"/>
+          <p:cNvPr id="31" name="Text 29"/>
           <p:cNvSpPr/>
           <p:nvPr/>
         </p:nvSpPr>
@@ -13908,7 +14547,7 @@
       </p:sp>
       <p:sp>
         <p:nvSpPr>
-          <p:cNvPr id="33" name="Shape 31"/>
+          <p:cNvPr id="32" name="Shape 30"/>
           <p:cNvSpPr/>
           <p:nvPr/>
         </p:nvSpPr>
@@ -13935,7 +14574,7 @@
       </p:sp>
       <p:sp>
         <p:nvSpPr>
-          <p:cNvPr id="34" name="Text 32"/>
+          <p:cNvPr id="33" name="Text 31"/>
           <p:cNvSpPr/>
           <p:nvPr/>
         </p:nvSpPr>
@@ -14662,7 +15301,7 @@
                 <a:ea typeface="Trebuchet MS" pitchFamily="34" charset="-122"/>
                 <a:cs typeface="Trebuchet MS" pitchFamily="34" charset="-120"/>
               </a:rPr>
-              <a:t>tasty</a:t>
+              <a:t>tasteful</a:t>
             </a:r>
             <a:endParaRPr lang="en-US" sz="2800" dirty="0"/>
           </a:p>
@@ -14913,7 +15552,7 @@
                 <a:ea typeface="Trebuchet MS" pitchFamily="34" charset="-122"/>
                 <a:cs typeface="Trebuchet MS" pitchFamily="34" charset="-120"/>
               </a:rPr>
-              <a:t>y</a:t>
+              <a:t>ful</a:t>
             </a:r>
             <a:endParaRPr lang="en-US" sz="1300" dirty="0"/>
           </a:p>
@@ -14952,7 +15591,7 @@
                 <a:ea typeface="Calibri" pitchFamily="34" charset="-122"/>
                 <a:cs typeface="Calibri" pitchFamily="34" charset="-120"/>
               </a:rPr>
-              <a:t>having the quality of</a:t>
+              <a:t>full of, having</a:t>
             </a:r>
             <a:endParaRPr lang="en-US" sz="850" dirty="0"/>
           </a:p>
@@ -14960,14 +15599,503 @@
       </p:sp>
       <p:sp>
         <p:nvSpPr>
-          <p:cNvPr id="22" name="Text 20"/>
-          <p:cNvSpPr/>
-          <p:nvPr/>
-        </p:nvSpPr>
-        <p:spPr>
-          <a:xfrm>
-            <a:off x="5803392" y="2752344"/>
-            <a:ext cx="1828800" cy="182880"/>
+          <p:cNvPr id="22" name="Shape 20"/>
+          <p:cNvSpPr/>
+          <p:nvPr/>
+        </p:nvSpPr>
+        <p:spPr>
+          <a:xfrm>
+            <a:off x="365760" y="3273552"/>
+            <a:ext cx="1371600" cy="658368"/>
+          </a:xfrm>
+          <a:prstGeom prst="rect">
+            <a:avLst>
+              <a:gd name="adj" fmla="val 8333"/>
+            </a:avLst>
+          </a:prstGeom>
+          <a:solidFill>
+            <a:srgbClr val="E2E8F0"/>
+          </a:solidFill>
+          <a:ln w="12700">
+            <a:solidFill>
+              <a:srgbClr val="E2E8F0"/>
+            </a:solidFill>
+            <a:prstDash val="solid"/>
+          </a:ln>
+        </p:spPr>
+      </p:sp>
+      <p:sp>
+        <p:nvSpPr>
+          <p:cNvPr id="23" name="Text 21"/>
+          <p:cNvSpPr/>
+          <p:nvPr/>
+        </p:nvSpPr>
+        <p:spPr>
+          <a:xfrm>
+            <a:off x="365760" y="3273552"/>
+            <a:ext cx="1371600" cy="658368"/>
+          </a:xfrm>
+          <a:prstGeom prst="rect">
+            <a:avLst/>
+          </a:prstGeom>
+          <a:noFill/>
+          <a:ln/>
+        </p:spPr>
+        <p:txBody>
+          <a:bodyPr wrap="square" lIns="0" tIns="0" rIns="0" bIns="0" rtlCol="0" anchor="ctr"/>
+          <a:lstStyle/>
+          <a:p>
+            <a:pPr algn="ctr" indent="0" marL="0">
+              <a:buNone/>
+            </a:pPr>
+            <a:r>
+              <a:rPr lang="en-US" sz="1100" b="1" dirty="0">
+                <a:solidFill>
+                  <a:srgbClr val="475569"/>
+                </a:solidFill>
+                <a:latin typeface="Trebuchet MS" pitchFamily="34" charset="0"/>
+                <a:ea typeface="Trebuchet MS" pitchFamily="34" charset="-122"/>
+                <a:cs typeface="Trebuchet MS" pitchFamily="34" charset="-120"/>
+              </a:rPr>
+              <a:t>Syllables</a:t>
+            </a:r>
+            <a:endParaRPr lang="en-US" sz="1100" dirty="0"/>
+          </a:p>
+        </p:txBody>
+      </p:sp>
+      <p:sp>
+        <p:nvSpPr>
+          <p:cNvPr id="24" name="Shape 22"/>
+          <p:cNvSpPr/>
+          <p:nvPr/>
+        </p:nvSpPr>
+        <p:spPr>
+          <a:xfrm>
+            <a:off x="1874520" y="3273552"/>
+            <a:ext cx="6903720" cy="658368"/>
+          </a:xfrm>
+          <a:prstGeom prst="rect">
+            <a:avLst>
+              <a:gd name="adj" fmla="val 8333"/>
+            </a:avLst>
+          </a:prstGeom>
+          <a:solidFill>
+            <a:srgbClr val="CCFBF1"/>
+          </a:solidFill>
+          <a:ln w="12700">
+            <a:solidFill>
+              <a:srgbClr val="0D9488"/>
+            </a:solidFill>
+            <a:prstDash val="solid"/>
+          </a:ln>
+        </p:spPr>
+      </p:sp>
+      <p:sp>
+        <p:nvSpPr>
+          <p:cNvPr id="25" name="Shape 23"/>
+          <p:cNvSpPr/>
+          <p:nvPr/>
+        </p:nvSpPr>
+        <p:spPr>
+          <a:xfrm>
+            <a:off x="2999232" y="3364992"/>
+            <a:ext cx="1645920" cy="475488"/>
+          </a:xfrm>
+          <a:prstGeom prst="rect">
+            <a:avLst>
+              <a:gd name="adj" fmla="val 9615"/>
+            </a:avLst>
+          </a:prstGeom>
+          <a:solidFill>
+            <a:srgbClr val="FFFFFF"/>
+          </a:solidFill>
+          <a:ln w="12700">
+            <a:solidFill>
+              <a:srgbClr val="0D9488"/>
+            </a:solidFill>
+            <a:prstDash val="solid"/>
+          </a:ln>
+        </p:spPr>
+      </p:sp>
+      <p:sp>
+        <p:nvSpPr>
+          <p:cNvPr id="26" name="Text 24"/>
+          <p:cNvSpPr/>
+          <p:nvPr/>
+        </p:nvSpPr>
+        <p:spPr>
+          <a:xfrm>
+            <a:off x="2999232" y="3364992"/>
+            <a:ext cx="1645920" cy="475488"/>
+          </a:xfrm>
+          <a:prstGeom prst="rect">
+            <a:avLst/>
+          </a:prstGeom>
+          <a:noFill/>
+          <a:ln/>
+        </p:spPr>
+        <p:txBody>
+          <a:bodyPr wrap="square" lIns="0" tIns="0" rIns="0" bIns="0" rtlCol="0" anchor="ctr"/>
+          <a:lstStyle/>
+          <a:p>
+            <a:pPr algn="ctr" indent="0" marL="0">
+              <a:buNone/>
+            </a:pPr>
+            <a:r>
+              <a:rPr lang="en-US" sz="1400" b="1" dirty="0">
+                <a:solidFill>
+                  <a:srgbClr val="0D9488"/>
+                </a:solidFill>
+                <a:latin typeface="Trebuchet MS" pitchFamily="34" charset="0"/>
+                <a:ea typeface="Trebuchet MS" pitchFamily="34" charset="-122"/>
+                <a:cs typeface="Trebuchet MS" pitchFamily="34" charset="-120"/>
+              </a:rPr>
+              <a:t>taste</a:t>
+            </a:r>
+            <a:endParaRPr lang="en-US" sz="1400" dirty="0"/>
+          </a:p>
+        </p:txBody>
+      </p:sp>
+      <p:sp>
+        <p:nvSpPr>
+          <p:cNvPr id="27" name="Text 25"/>
+          <p:cNvSpPr/>
+          <p:nvPr/>
+        </p:nvSpPr>
+        <p:spPr>
+          <a:xfrm>
+            <a:off x="4645152" y="3364992"/>
+            <a:ext cx="1097280" cy="475488"/>
+          </a:xfrm>
+          <a:prstGeom prst="rect">
+            <a:avLst/>
+          </a:prstGeom>
+          <a:noFill/>
+          <a:ln/>
+        </p:spPr>
+        <p:txBody>
+          <a:bodyPr wrap="square" lIns="0" tIns="0" rIns="0" bIns="0" rtlCol="0" anchor="ctr"/>
+          <a:lstStyle/>
+          <a:p>
+            <a:pPr algn="ctr" indent="0" marL="0">
+              <a:buNone/>
+            </a:pPr>
+            <a:r>
+              <a:rPr lang="en-US" sz="1600" b="1" dirty="0">
+                <a:solidFill>
+                  <a:srgbClr val="0D9488"/>
+                </a:solidFill>
+                <a:latin typeface="Trebuchet MS" pitchFamily="34" charset="0"/>
+                <a:ea typeface="Trebuchet MS" pitchFamily="34" charset="-122"/>
+                <a:cs typeface="Trebuchet MS" pitchFamily="34" charset="-120"/>
+              </a:rPr>
+              <a:t>·</a:t>
+            </a:r>
+            <a:endParaRPr lang="en-US" sz="1600" dirty="0"/>
+          </a:p>
+        </p:txBody>
+      </p:sp>
+      <p:sp>
+        <p:nvSpPr>
+          <p:cNvPr id="28" name="Shape 26"/>
+          <p:cNvSpPr/>
+          <p:nvPr/>
+        </p:nvSpPr>
+        <p:spPr>
+          <a:xfrm>
+            <a:off x="5742432" y="3364992"/>
+            <a:ext cx="1645920" cy="475488"/>
+          </a:xfrm>
+          <a:prstGeom prst="rect">
+            <a:avLst>
+              <a:gd name="adj" fmla="val 9615"/>
+            </a:avLst>
+          </a:prstGeom>
+          <a:solidFill>
+            <a:srgbClr val="FFFFFF"/>
+          </a:solidFill>
+          <a:ln w="12700">
+            <a:solidFill>
+              <a:srgbClr val="0D9488"/>
+            </a:solidFill>
+            <a:prstDash val="solid"/>
+          </a:ln>
+        </p:spPr>
+      </p:sp>
+      <p:sp>
+        <p:nvSpPr>
+          <p:cNvPr id="29" name="Text 27"/>
+          <p:cNvSpPr/>
+          <p:nvPr/>
+        </p:nvSpPr>
+        <p:spPr>
+          <a:xfrm>
+            <a:off x="5742432" y="3364992"/>
+            <a:ext cx="1645920" cy="475488"/>
+          </a:xfrm>
+          <a:prstGeom prst="rect">
+            <a:avLst/>
+          </a:prstGeom>
+          <a:noFill/>
+          <a:ln/>
+        </p:spPr>
+        <p:txBody>
+          <a:bodyPr wrap="square" lIns="0" tIns="0" rIns="0" bIns="0" rtlCol="0" anchor="ctr"/>
+          <a:lstStyle/>
+          <a:p>
+            <a:pPr algn="ctr" indent="0" marL="0">
+              <a:buNone/>
+            </a:pPr>
+            <a:r>
+              <a:rPr lang="en-US" sz="1400" b="1" dirty="0">
+                <a:solidFill>
+                  <a:srgbClr val="0D9488"/>
+                </a:solidFill>
+                <a:latin typeface="Trebuchet MS" pitchFamily="34" charset="0"/>
+                <a:ea typeface="Trebuchet MS" pitchFamily="34" charset="-122"/>
+                <a:cs typeface="Trebuchet MS" pitchFamily="34" charset="-120"/>
+              </a:rPr>
+              <a:t>ful</a:t>
+            </a:r>
+            <a:endParaRPr lang="en-US" sz="1400" dirty="0"/>
+          </a:p>
+        </p:txBody>
+      </p:sp>
+      <p:sp>
+        <p:nvSpPr>
+          <p:cNvPr id="30" name="Shape 28"/>
+          <p:cNvSpPr/>
+          <p:nvPr/>
+        </p:nvSpPr>
+        <p:spPr>
+          <a:xfrm>
+            <a:off x="365760" y="4096512"/>
+            <a:ext cx="1371600" cy="804672"/>
+          </a:xfrm>
+          <a:prstGeom prst="rect">
+            <a:avLst>
+              <a:gd name="adj" fmla="val 6818"/>
+            </a:avLst>
+          </a:prstGeom>
+          <a:solidFill>
+            <a:srgbClr val="E2E8F0"/>
+          </a:solidFill>
+          <a:ln w="12700">
+            <a:solidFill>
+              <a:srgbClr val="E2E8F0"/>
+            </a:solidFill>
+            <a:prstDash val="solid"/>
+          </a:ln>
+        </p:spPr>
+      </p:sp>
+      <p:sp>
+        <p:nvSpPr>
+          <p:cNvPr id="31" name="Text 29"/>
+          <p:cNvSpPr/>
+          <p:nvPr/>
+        </p:nvSpPr>
+        <p:spPr>
+          <a:xfrm>
+            <a:off x="365760" y="4096512"/>
+            <a:ext cx="1371600" cy="804672"/>
+          </a:xfrm>
+          <a:prstGeom prst="rect">
+            <a:avLst/>
+          </a:prstGeom>
+          <a:noFill/>
+          <a:ln/>
+        </p:spPr>
+        <p:txBody>
+          <a:bodyPr wrap="square" lIns="0" tIns="0" rIns="0" bIns="0" rtlCol="0" anchor="ctr"/>
+          <a:lstStyle/>
+          <a:p>
+            <a:pPr algn="ctr" indent="0" marL="0">
+              <a:buNone/>
+            </a:pPr>
+            <a:r>
+              <a:rPr lang="en-US" sz="1100" b="1" dirty="0">
+                <a:solidFill>
+                  <a:srgbClr val="475569"/>
+                </a:solidFill>
+                <a:latin typeface="Trebuchet MS" pitchFamily="34" charset="0"/>
+                <a:ea typeface="Trebuchet MS" pitchFamily="34" charset="-122"/>
+                <a:cs typeface="Trebuchet MS" pitchFamily="34" charset="-120"/>
+              </a:rPr>
+              <a:t>Phonemes</a:t>
+            </a:r>
+            <a:endParaRPr lang="en-US" sz="1100" dirty="0"/>
+          </a:p>
+        </p:txBody>
+      </p:sp>
+      <p:sp>
+        <p:nvSpPr>
+          <p:cNvPr id="32" name="Shape 30"/>
+          <p:cNvSpPr/>
+          <p:nvPr/>
+        </p:nvSpPr>
+        <p:spPr>
+          <a:xfrm>
+            <a:off x="1874520" y="4096512"/>
+            <a:ext cx="6903720" cy="804672"/>
+          </a:xfrm>
+          <a:prstGeom prst="rect">
+            <a:avLst>
+              <a:gd name="adj" fmla="val 6818"/>
+            </a:avLst>
+          </a:prstGeom>
+          <a:solidFill>
+            <a:srgbClr val="FCE7F3"/>
+          </a:solidFill>
+          <a:ln w="12700">
+            <a:solidFill>
+              <a:srgbClr val="DB2777"/>
+            </a:solidFill>
+            <a:prstDash val="solid"/>
+          </a:ln>
+        </p:spPr>
+      </p:sp>
+      <p:sp>
+        <p:nvSpPr>
+          <p:cNvPr id="33" name="Shape 31"/>
+          <p:cNvSpPr/>
+          <p:nvPr/>
+        </p:nvSpPr>
+        <p:spPr>
+          <a:xfrm>
+            <a:off x="2124837" y="4169664"/>
+            <a:ext cx="685800" cy="384048"/>
+          </a:xfrm>
+          <a:prstGeom prst="rect">
+            <a:avLst>
+              <a:gd name="adj" fmla="val 9524"/>
+            </a:avLst>
+          </a:prstGeom>
+          <a:solidFill>
+            <a:srgbClr val="FFFFFF"/>
+          </a:solidFill>
+          <a:ln w="12700">
+            <a:solidFill>
+              <a:srgbClr val="DB2777"/>
+            </a:solidFill>
+            <a:prstDash val="solid"/>
+          </a:ln>
+        </p:spPr>
+      </p:sp>
+      <p:sp>
+        <p:nvSpPr>
+          <p:cNvPr id="34" name="Text 32"/>
+          <p:cNvSpPr/>
+          <p:nvPr/>
+        </p:nvSpPr>
+        <p:spPr>
+          <a:xfrm>
+            <a:off x="2124837" y="4169664"/>
+            <a:ext cx="685800" cy="384048"/>
+          </a:xfrm>
+          <a:prstGeom prst="rect">
+            <a:avLst/>
+          </a:prstGeom>
+          <a:noFill/>
+          <a:ln/>
+        </p:spPr>
+        <p:txBody>
+          <a:bodyPr wrap="square" lIns="0" tIns="0" rIns="0" bIns="0" rtlCol="0" anchor="ctr"/>
+          <a:lstStyle/>
+          <a:p>
+            <a:pPr algn="ctr" indent="0" marL="0">
+              <a:buNone/>
+            </a:pPr>
+            <a:r>
+              <a:rPr lang="en-US" sz="900" b="1" dirty="0">
+                <a:solidFill>
+                  <a:srgbClr val="9D174D"/>
+                </a:solidFill>
+                <a:latin typeface="Trebuchet MS" pitchFamily="34" charset="0"/>
+                <a:ea typeface="Trebuchet MS" pitchFamily="34" charset="-122"/>
+                <a:cs typeface="Trebuchet MS" pitchFamily="34" charset="-120"/>
+              </a:rPr>
+              <a:t>t</a:t>
+            </a:r>
+            <a:endParaRPr lang="en-US" sz="900" dirty="0"/>
+          </a:p>
+        </p:txBody>
+      </p:sp>
+      <p:sp>
+        <p:nvSpPr>
+          <p:cNvPr id="35" name="Shape 33"/>
+          <p:cNvSpPr/>
+          <p:nvPr/>
+        </p:nvSpPr>
+        <p:spPr>
+          <a:xfrm>
+            <a:off x="3033522" y="4169664"/>
+            <a:ext cx="685800" cy="384048"/>
+          </a:xfrm>
+          <a:prstGeom prst="rect">
+            <a:avLst>
+              <a:gd name="adj" fmla="val 9524"/>
+            </a:avLst>
+          </a:prstGeom>
+          <a:solidFill>
+            <a:srgbClr val="FFFFFF"/>
+          </a:solidFill>
+          <a:ln w="12700">
+            <a:solidFill>
+              <a:srgbClr val="DB2777"/>
+            </a:solidFill>
+            <a:prstDash val="solid"/>
+          </a:ln>
+        </p:spPr>
+      </p:sp>
+      <p:sp>
+        <p:nvSpPr>
+          <p:cNvPr id="36" name="Text 34"/>
+          <p:cNvSpPr/>
+          <p:nvPr/>
+        </p:nvSpPr>
+        <p:spPr>
+          <a:xfrm>
+            <a:off x="3033522" y="4169664"/>
+            <a:ext cx="685800" cy="384048"/>
+          </a:xfrm>
+          <a:prstGeom prst="rect">
+            <a:avLst/>
+          </a:prstGeom>
+          <a:noFill/>
+          <a:ln/>
+        </p:spPr>
+        <p:txBody>
+          <a:bodyPr wrap="square" lIns="0" tIns="0" rIns="0" bIns="0" rtlCol="0" anchor="ctr"/>
+          <a:lstStyle/>
+          <a:p>
+            <a:pPr algn="ctr" indent="0" marL="0">
+              <a:buNone/>
+            </a:pPr>
+            <a:r>
+              <a:rPr lang="en-US" sz="900" b="1" dirty="0">
+                <a:solidFill>
+                  <a:srgbClr val="9D174D"/>
+                </a:solidFill>
+                <a:latin typeface="Trebuchet MS" pitchFamily="34" charset="0"/>
+                <a:ea typeface="Trebuchet MS" pitchFamily="34" charset="-122"/>
+                <a:cs typeface="Trebuchet MS" pitchFamily="34" charset="-120"/>
+              </a:rPr>
+              <a:t>ay</a:t>
+            </a:r>
+            <a:endParaRPr lang="en-US" sz="900" dirty="0"/>
+          </a:p>
+        </p:txBody>
+      </p:sp>
+      <p:sp>
+        <p:nvSpPr>
+          <p:cNvPr id="37" name="Text 35"/>
+          <p:cNvSpPr/>
+          <p:nvPr/>
+        </p:nvSpPr>
+        <p:spPr>
+          <a:xfrm>
+            <a:off x="3033522" y="4572000"/>
+            <a:ext cx="685800" cy="219456"/>
           </a:xfrm>
           <a:prstGeom prst="rect">
             <a:avLst/>
@@ -14983,7 +16111,7 @@
               <a:buNone/>
             </a:pPr>
             <a:r>
-              <a:rPr lang="en-US" sz="700" i="1" dirty="0">
+              <a:rPr lang="en-US" sz="750" i="1" dirty="0">
                 <a:solidFill>
                   <a:srgbClr val="94A3B8"/>
                 </a:solidFill>
@@ -14991,49 +16119,49 @@
                 <a:ea typeface="Calibri" pitchFamily="34" charset="-122"/>
                 <a:cs typeface="Calibri" pitchFamily="34" charset="-120"/>
               </a:rPr>
-              <a:t>'e' dropped before vowel suffix</a:t>
-            </a:r>
-            <a:endParaRPr lang="en-US" sz="700" dirty="0"/>
-          </a:p>
-        </p:txBody>
-      </p:sp>
-      <p:sp>
-        <p:nvSpPr>
-          <p:cNvPr id="23" name="Shape 21"/>
-          <p:cNvSpPr/>
-          <p:nvPr/>
-        </p:nvSpPr>
-        <p:spPr>
-          <a:xfrm>
-            <a:off x="365760" y="3273552"/>
-            <a:ext cx="1371600" cy="658368"/>
+              <a:t>/ay/</a:t>
+            </a:r>
+            <a:endParaRPr lang="en-US" sz="750" dirty="0"/>
+          </a:p>
+        </p:txBody>
+      </p:sp>
+      <p:sp>
+        <p:nvSpPr>
+          <p:cNvPr id="38" name="Shape 36"/>
+          <p:cNvSpPr/>
+          <p:nvPr/>
+        </p:nvSpPr>
+        <p:spPr>
+          <a:xfrm>
+            <a:off x="3942207" y="4169664"/>
+            <a:ext cx="685800" cy="384048"/>
           </a:xfrm>
           <a:prstGeom prst="rect">
             <a:avLst>
-              <a:gd name="adj" fmla="val 8333"/>
+              <a:gd name="adj" fmla="val 9524"/>
             </a:avLst>
           </a:prstGeom>
           <a:solidFill>
-            <a:srgbClr val="E2E8F0"/>
-          </a:solidFill>
-          <a:ln w="12700">
-            <a:solidFill>
-              <a:srgbClr val="E2E8F0"/>
-            </a:solidFill>
-            <a:prstDash val="solid"/>
-          </a:ln>
-        </p:spPr>
-      </p:sp>
-      <p:sp>
-        <p:nvSpPr>
-          <p:cNvPr id="24" name="Text 22"/>
-          <p:cNvSpPr/>
-          <p:nvPr/>
-        </p:nvSpPr>
-        <p:spPr>
-          <a:xfrm>
-            <a:off x="365760" y="3273552"/>
-            <a:ext cx="1371600" cy="658368"/>
+            <a:srgbClr val="FFFFFF"/>
+          </a:solidFill>
+          <a:ln w="12700">
+            <a:solidFill>
+              <a:srgbClr val="DB2777"/>
+            </a:solidFill>
+            <a:prstDash val="solid"/>
+          </a:ln>
+        </p:spPr>
+      </p:sp>
+      <p:sp>
+        <p:nvSpPr>
+          <p:cNvPr id="39" name="Text 37"/>
+          <p:cNvSpPr/>
+          <p:nvPr/>
+        </p:nvSpPr>
+        <p:spPr>
+          <a:xfrm>
+            <a:off x="3942207" y="4169664"/>
+            <a:ext cx="685800" cy="384048"/>
           </a:xfrm>
           <a:prstGeom prst="rect">
             <a:avLst/>
@@ -15049,84 +16177,57 @@
               <a:buNone/>
             </a:pPr>
             <a:r>
-              <a:rPr lang="en-US" sz="1100" b="1" dirty="0">
-                <a:solidFill>
-                  <a:srgbClr val="475569"/>
+              <a:rPr lang="en-US" sz="900" b="1" dirty="0">
+                <a:solidFill>
+                  <a:srgbClr val="9D174D"/>
                 </a:solidFill>
                 <a:latin typeface="Trebuchet MS" pitchFamily="34" charset="0"/>
                 <a:ea typeface="Trebuchet MS" pitchFamily="34" charset="-122"/>
                 <a:cs typeface="Trebuchet MS" pitchFamily="34" charset="-120"/>
               </a:rPr>
-              <a:t>Syllables</a:t>
-            </a:r>
-            <a:endParaRPr lang="en-US" sz="1100" dirty="0"/>
-          </a:p>
-        </p:txBody>
-      </p:sp>
-      <p:sp>
-        <p:nvSpPr>
-          <p:cNvPr id="25" name="Shape 23"/>
-          <p:cNvSpPr/>
-          <p:nvPr/>
-        </p:nvSpPr>
-        <p:spPr>
-          <a:xfrm>
-            <a:off x="1874520" y="3273552"/>
-            <a:ext cx="6903720" cy="658368"/>
+              <a:t>s</a:t>
+            </a:r>
+            <a:endParaRPr lang="en-US" sz="900" dirty="0"/>
+          </a:p>
+        </p:txBody>
+      </p:sp>
+      <p:sp>
+        <p:nvSpPr>
+          <p:cNvPr id="40" name="Shape 38"/>
+          <p:cNvSpPr/>
+          <p:nvPr/>
+        </p:nvSpPr>
+        <p:spPr>
+          <a:xfrm>
+            <a:off x="4850892" y="4169664"/>
+            <a:ext cx="685800" cy="384048"/>
           </a:xfrm>
           <a:prstGeom prst="rect">
             <a:avLst>
-              <a:gd name="adj" fmla="val 8333"/>
+              <a:gd name="adj" fmla="val 9524"/>
             </a:avLst>
           </a:prstGeom>
           <a:solidFill>
-            <a:srgbClr val="CCFBF1"/>
-          </a:solidFill>
-          <a:ln w="12700">
-            <a:solidFill>
-              <a:srgbClr val="0D9488"/>
-            </a:solidFill>
-            <a:prstDash val="solid"/>
-          </a:ln>
-        </p:spPr>
-      </p:sp>
-      <p:sp>
-        <p:nvSpPr>
-          <p:cNvPr id="26" name="Shape 24"/>
-          <p:cNvSpPr/>
-          <p:nvPr/>
-        </p:nvSpPr>
-        <p:spPr>
-          <a:xfrm>
-            <a:off x="2999232" y="3364992"/>
-            <a:ext cx="1645920" cy="475488"/>
-          </a:xfrm>
-          <a:prstGeom prst="rect">
-            <a:avLst>
-              <a:gd name="adj" fmla="val 9615"/>
-            </a:avLst>
-          </a:prstGeom>
-          <a:solidFill>
             <a:srgbClr val="FFFFFF"/>
           </a:solidFill>
           <a:ln w="12700">
             <a:solidFill>
-              <a:srgbClr val="0D9488"/>
-            </a:solidFill>
-            <a:prstDash val="solid"/>
-          </a:ln>
-        </p:spPr>
-      </p:sp>
-      <p:sp>
-        <p:nvSpPr>
-          <p:cNvPr id="27" name="Text 25"/>
-          <p:cNvSpPr/>
-          <p:nvPr/>
-        </p:nvSpPr>
-        <p:spPr>
-          <a:xfrm>
-            <a:off x="2999232" y="3364992"/>
-            <a:ext cx="1645920" cy="475488"/>
+              <a:srgbClr val="DB2777"/>
+            </a:solidFill>
+            <a:prstDash val="solid"/>
+          </a:ln>
+        </p:spPr>
+      </p:sp>
+      <p:sp>
+        <p:nvSpPr>
+          <p:cNvPr id="41" name="Text 39"/>
+          <p:cNvSpPr/>
+          <p:nvPr/>
+        </p:nvSpPr>
+        <p:spPr>
+          <a:xfrm>
+            <a:off x="4850892" y="4169664"/>
+            <a:ext cx="685800" cy="384048"/>
           </a:xfrm>
           <a:prstGeom prst="rect">
             <a:avLst/>
@@ -15142,30 +16243,57 @@
               <a:buNone/>
             </a:pPr>
             <a:r>
-              <a:rPr lang="en-US" sz="1400" b="1" dirty="0">
-                <a:solidFill>
-                  <a:srgbClr val="0D9488"/>
+              <a:rPr lang="en-US" sz="900" b="1" dirty="0">
+                <a:solidFill>
+                  <a:srgbClr val="9D174D"/>
                 </a:solidFill>
                 <a:latin typeface="Trebuchet MS" pitchFamily="34" charset="0"/>
                 <a:ea typeface="Trebuchet MS" pitchFamily="34" charset="-122"/>
                 <a:cs typeface="Trebuchet MS" pitchFamily="34" charset="-120"/>
               </a:rPr>
-              <a:t>tas</a:t>
-            </a:r>
-            <a:endParaRPr lang="en-US" sz="1400" dirty="0"/>
-          </a:p>
-        </p:txBody>
-      </p:sp>
-      <p:sp>
-        <p:nvSpPr>
-          <p:cNvPr id="28" name="Text 26"/>
-          <p:cNvSpPr/>
-          <p:nvPr/>
-        </p:nvSpPr>
-        <p:spPr>
-          <a:xfrm>
-            <a:off x="4645152" y="3364992"/>
-            <a:ext cx="1097280" cy="475488"/>
+              <a:t>t</a:t>
+            </a:r>
+            <a:endParaRPr lang="en-US" sz="900" dirty="0"/>
+          </a:p>
+        </p:txBody>
+      </p:sp>
+      <p:sp>
+        <p:nvSpPr>
+          <p:cNvPr id="42" name="Shape 40"/>
+          <p:cNvSpPr/>
+          <p:nvPr/>
+        </p:nvSpPr>
+        <p:spPr>
+          <a:xfrm>
+            <a:off x="5759577" y="4169664"/>
+            <a:ext cx="685800" cy="384048"/>
+          </a:xfrm>
+          <a:prstGeom prst="rect">
+            <a:avLst>
+              <a:gd name="adj" fmla="val 9524"/>
+            </a:avLst>
+          </a:prstGeom>
+          <a:solidFill>
+            <a:srgbClr val="FFFFFF"/>
+          </a:solidFill>
+          <a:ln w="12700">
+            <a:solidFill>
+              <a:srgbClr val="DB2777"/>
+            </a:solidFill>
+            <a:prstDash val="solid"/>
+          </a:ln>
+        </p:spPr>
+      </p:sp>
+      <p:sp>
+        <p:nvSpPr>
+          <p:cNvPr id="43" name="Text 41"/>
+          <p:cNvSpPr/>
+          <p:nvPr/>
+        </p:nvSpPr>
+        <p:spPr>
+          <a:xfrm>
+            <a:off x="5759577" y="4169664"/>
+            <a:ext cx="685800" cy="384048"/>
           </a:xfrm>
           <a:prstGeom prst="rect">
             <a:avLst/>
@@ -15181,34 +16309,34 @@
               <a:buNone/>
             </a:pPr>
             <a:r>
-              <a:rPr lang="en-US" sz="1600" b="1" dirty="0">
-                <a:solidFill>
-                  <a:srgbClr val="0D9488"/>
+              <a:rPr lang="en-US" sz="900" b="1" dirty="0">
+                <a:solidFill>
+                  <a:srgbClr val="9D174D"/>
                 </a:solidFill>
                 <a:latin typeface="Trebuchet MS" pitchFamily="34" charset="0"/>
                 <a:ea typeface="Trebuchet MS" pitchFamily="34" charset="-122"/>
                 <a:cs typeface="Trebuchet MS" pitchFamily="34" charset="-120"/>
               </a:rPr>
-              <a:t>·</a:t>
-            </a:r>
-            <a:endParaRPr lang="en-US" sz="1600" dirty="0"/>
-          </a:p>
-        </p:txBody>
-      </p:sp>
-      <p:sp>
-        <p:nvSpPr>
-          <p:cNvPr id="29" name="Shape 27"/>
-          <p:cNvSpPr/>
-          <p:nvPr/>
-        </p:nvSpPr>
-        <p:spPr>
-          <a:xfrm>
-            <a:off x="5742432" y="3364992"/>
-            <a:ext cx="1645920" cy="475488"/>
+              <a:t>f</a:t>
+            </a:r>
+            <a:endParaRPr lang="en-US" sz="900" dirty="0"/>
+          </a:p>
+        </p:txBody>
+      </p:sp>
+      <p:sp>
+        <p:nvSpPr>
+          <p:cNvPr id="44" name="Shape 42"/>
+          <p:cNvSpPr/>
+          <p:nvPr/>
+        </p:nvSpPr>
+        <p:spPr>
+          <a:xfrm>
+            <a:off x="6668262" y="4169664"/>
+            <a:ext cx="685800" cy="384048"/>
           </a:xfrm>
           <a:prstGeom prst="rect">
             <a:avLst>
-              <a:gd name="adj" fmla="val 9615"/>
+              <a:gd name="adj" fmla="val 9524"/>
             </a:avLst>
           </a:prstGeom>
           <a:solidFill>
@@ -15216,22 +16344,22 @@
           </a:solidFill>
           <a:ln w="12700">
             <a:solidFill>
-              <a:srgbClr val="0D9488"/>
-            </a:solidFill>
-            <a:prstDash val="solid"/>
-          </a:ln>
-        </p:spPr>
-      </p:sp>
-      <p:sp>
-        <p:nvSpPr>
-          <p:cNvPr id="30" name="Text 28"/>
-          <p:cNvSpPr/>
-          <p:nvPr/>
-        </p:nvSpPr>
-        <p:spPr>
-          <a:xfrm>
-            <a:off x="5742432" y="3364992"/>
-            <a:ext cx="1645920" cy="475488"/>
+              <a:srgbClr val="DB2777"/>
+            </a:solidFill>
+            <a:prstDash val="solid"/>
+          </a:ln>
+        </p:spPr>
+      </p:sp>
+      <p:sp>
+        <p:nvSpPr>
+          <p:cNvPr id="45" name="Text 43"/>
+          <p:cNvSpPr/>
+          <p:nvPr/>
+        </p:nvSpPr>
+        <p:spPr>
+          <a:xfrm>
+            <a:off x="6668262" y="4169664"/>
+            <a:ext cx="685800" cy="384048"/>
           </a:xfrm>
           <a:prstGeom prst="rect">
             <a:avLst/>
@@ -15247,57 +16375,57 @@
               <a:buNone/>
             </a:pPr>
             <a:r>
-              <a:rPr lang="en-US" sz="1400" b="1" dirty="0">
-                <a:solidFill>
-                  <a:srgbClr val="0D9488"/>
+              <a:rPr lang="en-US" sz="900" b="1" dirty="0">
+                <a:solidFill>
+                  <a:srgbClr val="9D174D"/>
                 </a:solidFill>
                 <a:latin typeface="Trebuchet MS" pitchFamily="34" charset="0"/>
                 <a:ea typeface="Trebuchet MS" pitchFamily="34" charset="-122"/>
                 <a:cs typeface="Trebuchet MS" pitchFamily="34" charset="-120"/>
               </a:rPr>
-              <a:t>ty</a:t>
-            </a:r>
-            <a:endParaRPr lang="en-US" sz="1400" dirty="0"/>
-          </a:p>
-        </p:txBody>
-      </p:sp>
-      <p:sp>
-        <p:nvSpPr>
-          <p:cNvPr id="31" name="Shape 29"/>
-          <p:cNvSpPr/>
-          <p:nvPr/>
-        </p:nvSpPr>
-        <p:spPr>
-          <a:xfrm>
-            <a:off x="365760" y="4096512"/>
-            <a:ext cx="1371600" cy="804672"/>
+              <a:t>u</a:t>
+            </a:r>
+            <a:endParaRPr lang="en-US" sz="900" dirty="0"/>
+          </a:p>
+        </p:txBody>
+      </p:sp>
+      <p:sp>
+        <p:nvSpPr>
+          <p:cNvPr id="46" name="Shape 44"/>
+          <p:cNvSpPr/>
+          <p:nvPr/>
+        </p:nvSpPr>
+        <p:spPr>
+          <a:xfrm>
+            <a:off x="7576947" y="4169664"/>
+            <a:ext cx="685800" cy="384048"/>
           </a:xfrm>
           <a:prstGeom prst="rect">
             <a:avLst>
-              <a:gd name="adj" fmla="val 6818"/>
+              <a:gd name="adj" fmla="val 9524"/>
             </a:avLst>
           </a:prstGeom>
           <a:solidFill>
-            <a:srgbClr val="E2E8F0"/>
-          </a:solidFill>
-          <a:ln w="12700">
-            <a:solidFill>
-              <a:srgbClr val="E2E8F0"/>
-            </a:solidFill>
-            <a:prstDash val="solid"/>
-          </a:ln>
-        </p:spPr>
-      </p:sp>
-      <p:sp>
-        <p:nvSpPr>
-          <p:cNvPr id="32" name="Text 30"/>
-          <p:cNvSpPr/>
-          <p:nvPr/>
-        </p:nvSpPr>
-        <p:spPr>
-          <a:xfrm>
-            <a:off x="365760" y="4096512"/>
-            <a:ext cx="1371600" cy="804672"/>
+            <a:srgbClr val="FFFFFF"/>
+          </a:solidFill>
+          <a:ln w="12700">
+            <a:solidFill>
+              <a:srgbClr val="DB2777"/>
+            </a:solidFill>
+            <a:prstDash val="solid"/>
+          </a:ln>
+        </p:spPr>
+      </p:sp>
+      <p:sp>
+        <p:nvSpPr>
+          <p:cNvPr id="47" name="Text 45"/>
+          <p:cNvSpPr/>
+          <p:nvPr/>
+        </p:nvSpPr>
+        <p:spPr>
+          <a:xfrm>
+            <a:off x="7576947" y="4169664"/>
+            <a:ext cx="685800" cy="384048"/>
           </a:xfrm>
           <a:prstGeom prst="rect">
             <a:avLst/>
@@ -15313,372 +16441,15 @@
               <a:buNone/>
             </a:pPr>
             <a:r>
-              <a:rPr lang="en-US" sz="1100" b="1" dirty="0">
-                <a:solidFill>
-                  <a:srgbClr val="475569"/>
+              <a:rPr lang="en-US" sz="900" b="1" dirty="0">
+                <a:solidFill>
+                  <a:srgbClr val="9D174D"/>
                 </a:solidFill>
                 <a:latin typeface="Trebuchet MS" pitchFamily="34" charset="0"/>
                 <a:ea typeface="Trebuchet MS" pitchFamily="34" charset="-122"/>
                 <a:cs typeface="Trebuchet MS" pitchFamily="34" charset="-120"/>
               </a:rPr>
-              <a:t>Phonemes</a:t>
-            </a:r>
-            <a:endParaRPr lang="en-US" sz="1100" dirty="0"/>
-          </a:p>
-        </p:txBody>
-      </p:sp>
-      <p:sp>
-        <p:nvSpPr>
-          <p:cNvPr id="33" name="Shape 31"/>
-          <p:cNvSpPr/>
-          <p:nvPr/>
-        </p:nvSpPr>
-        <p:spPr>
-          <a:xfrm>
-            <a:off x="1874520" y="4096512"/>
-            <a:ext cx="6903720" cy="658368"/>
-          </a:xfrm>
-          <a:prstGeom prst="rect">
-            <a:avLst>
-              <a:gd name="adj" fmla="val 8333"/>
-            </a:avLst>
-          </a:prstGeom>
-          <a:solidFill>
-            <a:srgbClr val="FCE7F3"/>
-          </a:solidFill>
-          <a:ln w="12700">
-            <a:solidFill>
-              <a:srgbClr val="DB2777"/>
-            </a:solidFill>
-            <a:prstDash val="solid"/>
-          </a:ln>
-        </p:spPr>
-      </p:sp>
-      <p:sp>
-        <p:nvSpPr>
-          <p:cNvPr id="34" name="Shape 32"/>
-          <p:cNvSpPr/>
-          <p:nvPr/>
-        </p:nvSpPr>
-        <p:spPr>
-          <a:xfrm>
-            <a:off x="2427732" y="4169664"/>
-            <a:ext cx="685800" cy="475488"/>
-          </a:xfrm>
-          <a:prstGeom prst="rect">
-            <a:avLst>
-              <a:gd name="adj" fmla="val 7692"/>
-            </a:avLst>
-          </a:prstGeom>
-          <a:solidFill>
-            <a:srgbClr val="FFFFFF"/>
-          </a:solidFill>
-          <a:ln w="12700">
-            <a:solidFill>
-              <a:srgbClr val="DB2777"/>
-            </a:solidFill>
-            <a:prstDash val="solid"/>
-          </a:ln>
-        </p:spPr>
-      </p:sp>
-      <p:sp>
-        <p:nvSpPr>
-          <p:cNvPr id="35" name="Text 33"/>
-          <p:cNvSpPr/>
-          <p:nvPr/>
-        </p:nvSpPr>
-        <p:spPr>
-          <a:xfrm>
-            <a:off x="2427732" y="4169664"/>
-            <a:ext cx="685800" cy="475488"/>
-          </a:xfrm>
-          <a:prstGeom prst="rect">
-            <a:avLst/>
-          </a:prstGeom>
-          <a:noFill/>
-          <a:ln/>
-        </p:spPr>
-        <p:txBody>
-          <a:bodyPr wrap="square" lIns="0" tIns="0" rIns="0" bIns="0" rtlCol="0" anchor="ctr"/>
-          <a:lstStyle/>
-          <a:p>
-            <a:pPr algn="ctr" indent="0" marL="0">
-              <a:buNone/>
-            </a:pPr>
-            <a:r>
-              <a:rPr lang="en-US" sz="900" b="1" dirty="0">
-                <a:solidFill>
-                  <a:srgbClr val="9D174D"/>
-                </a:solidFill>
-                <a:latin typeface="Trebuchet MS" pitchFamily="34" charset="0"/>
-                <a:ea typeface="Trebuchet MS" pitchFamily="34" charset="-122"/>
-                <a:cs typeface="Trebuchet MS" pitchFamily="34" charset="-120"/>
-              </a:rPr>
-              <a:t>t</a:t>
-            </a:r>
-            <a:endParaRPr lang="en-US" sz="900" dirty="0"/>
-          </a:p>
-        </p:txBody>
-      </p:sp>
-      <p:sp>
-        <p:nvSpPr>
-          <p:cNvPr id="36" name="Shape 34"/>
-          <p:cNvSpPr/>
-          <p:nvPr/>
-        </p:nvSpPr>
-        <p:spPr>
-          <a:xfrm>
-            <a:off x="3639312" y="4169664"/>
-            <a:ext cx="685800" cy="475488"/>
-          </a:xfrm>
-          <a:prstGeom prst="rect">
-            <a:avLst>
-              <a:gd name="adj" fmla="val 7692"/>
-            </a:avLst>
-          </a:prstGeom>
-          <a:solidFill>
-            <a:srgbClr val="FFFFFF"/>
-          </a:solidFill>
-          <a:ln w="12700">
-            <a:solidFill>
-              <a:srgbClr val="DB2777"/>
-            </a:solidFill>
-            <a:prstDash val="solid"/>
-          </a:ln>
-        </p:spPr>
-      </p:sp>
-      <p:sp>
-        <p:nvSpPr>
-          <p:cNvPr id="37" name="Text 35"/>
-          <p:cNvSpPr/>
-          <p:nvPr/>
-        </p:nvSpPr>
-        <p:spPr>
-          <a:xfrm>
-            <a:off x="3639312" y="4169664"/>
-            <a:ext cx="685800" cy="475488"/>
-          </a:xfrm>
-          <a:prstGeom prst="rect">
-            <a:avLst/>
-          </a:prstGeom>
-          <a:noFill/>
-          <a:ln/>
-        </p:spPr>
-        <p:txBody>
-          <a:bodyPr wrap="square" lIns="0" tIns="0" rIns="0" bIns="0" rtlCol="0" anchor="ctr"/>
-          <a:lstStyle/>
-          <a:p>
-            <a:pPr algn="ctr" indent="0" marL="0">
-              <a:buNone/>
-            </a:pPr>
-            <a:r>
-              <a:rPr lang="en-US" sz="900" b="1" dirty="0">
-                <a:solidFill>
-                  <a:srgbClr val="9D174D"/>
-                </a:solidFill>
-                <a:latin typeface="Trebuchet MS" pitchFamily="34" charset="0"/>
-                <a:ea typeface="Trebuchet MS" pitchFamily="34" charset="-122"/>
-                <a:cs typeface="Trebuchet MS" pitchFamily="34" charset="-120"/>
-              </a:rPr>
-              <a:t>a</a:t>
-            </a:r>
-            <a:endParaRPr lang="en-US" sz="900" dirty="0"/>
-          </a:p>
-        </p:txBody>
-      </p:sp>
-      <p:sp>
-        <p:nvSpPr>
-          <p:cNvPr id="38" name="Shape 36"/>
-          <p:cNvSpPr/>
-          <p:nvPr/>
-        </p:nvSpPr>
-        <p:spPr>
-          <a:xfrm>
-            <a:off x="4850892" y="4169664"/>
-            <a:ext cx="685800" cy="475488"/>
-          </a:xfrm>
-          <a:prstGeom prst="rect">
-            <a:avLst>
-              <a:gd name="adj" fmla="val 7692"/>
-            </a:avLst>
-          </a:prstGeom>
-          <a:solidFill>
-            <a:srgbClr val="FFFFFF"/>
-          </a:solidFill>
-          <a:ln w="12700">
-            <a:solidFill>
-              <a:srgbClr val="DB2777"/>
-            </a:solidFill>
-            <a:prstDash val="solid"/>
-          </a:ln>
-        </p:spPr>
-      </p:sp>
-      <p:sp>
-        <p:nvSpPr>
-          <p:cNvPr id="39" name="Text 37"/>
-          <p:cNvSpPr/>
-          <p:nvPr/>
-        </p:nvSpPr>
-        <p:spPr>
-          <a:xfrm>
-            <a:off x="4850892" y="4169664"/>
-            <a:ext cx="685800" cy="475488"/>
-          </a:xfrm>
-          <a:prstGeom prst="rect">
-            <a:avLst/>
-          </a:prstGeom>
-          <a:noFill/>
-          <a:ln/>
-        </p:spPr>
-        <p:txBody>
-          <a:bodyPr wrap="square" lIns="0" tIns="0" rIns="0" bIns="0" rtlCol="0" anchor="ctr"/>
-          <a:lstStyle/>
-          <a:p>
-            <a:pPr algn="ctr" indent="0" marL="0">
-              <a:buNone/>
-            </a:pPr>
-            <a:r>
-              <a:rPr lang="en-US" sz="900" b="1" dirty="0">
-                <a:solidFill>
-                  <a:srgbClr val="9D174D"/>
-                </a:solidFill>
-                <a:latin typeface="Trebuchet MS" pitchFamily="34" charset="0"/>
-                <a:ea typeface="Trebuchet MS" pitchFamily="34" charset="-122"/>
-                <a:cs typeface="Trebuchet MS" pitchFamily="34" charset="-120"/>
-              </a:rPr>
-              <a:t>s</a:t>
-            </a:r>
-            <a:endParaRPr lang="en-US" sz="900" dirty="0"/>
-          </a:p>
-        </p:txBody>
-      </p:sp>
-      <p:sp>
-        <p:nvSpPr>
-          <p:cNvPr id="40" name="Shape 38"/>
-          <p:cNvSpPr/>
-          <p:nvPr/>
-        </p:nvSpPr>
-        <p:spPr>
-          <a:xfrm>
-            <a:off x="6062472" y="4169664"/>
-            <a:ext cx="685800" cy="475488"/>
-          </a:xfrm>
-          <a:prstGeom prst="rect">
-            <a:avLst>
-              <a:gd name="adj" fmla="val 7692"/>
-            </a:avLst>
-          </a:prstGeom>
-          <a:solidFill>
-            <a:srgbClr val="FFFFFF"/>
-          </a:solidFill>
-          <a:ln w="12700">
-            <a:solidFill>
-              <a:srgbClr val="DB2777"/>
-            </a:solidFill>
-            <a:prstDash val="solid"/>
-          </a:ln>
-        </p:spPr>
-      </p:sp>
-      <p:sp>
-        <p:nvSpPr>
-          <p:cNvPr id="41" name="Text 39"/>
-          <p:cNvSpPr/>
-          <p:nvPr/>
-        </p:nvSpPr>
-        <p:spPr>
-          <a:xfrm>
-            <a:off x="6062472" y="4169664"/>
-            <a:ext cx="685800" cy="475488"/>
-          </a:xfrm>
-          <a:prstGeom prst="rect">
-            <a:avLst/>
-          </a:prstGeom>
-          <a:noFill/>
-          <a:ln/>
-        </p:spPr>
-        <p:txBody>
-          <a:bodyPr wrap="square" lIns="0" tIns="0" rIns="0" bIns="0" rtlCol="0" anchor="ctr"/>
-          <a:lstStyle/>
-          <a:p>
-            <a:pPr algn="ctr" indent="0" marL="0">
-              <a:buNone/>
-            </a:pPr>
-            <a:r>
-              <a:rPr lang="en-US" sz="900" b="1" dirty="0">
-                <a:solidFill>
-                  <a:srgbClr val="9D174D"/>
-                </a:solidFill>
-                <a:latin typeface="Trebuchet MS" pitchFamily="34" charset="0"/>
-                <a:ea typeface="Trebuchet MS" pitchFamily="34" charset="-122"/>
-                <a:cs typeface="Trebuchet MS" pitchFamily="34" charset="-120"/>
-              </a:rPr>
-              <a:t>t</a:t>
-            </a:r>
-            <a:endParaRPr lang="en-US" sz="900" dirty="0"/>
-          </a:p>
-        </p:txBody>
-      </p:sp>
-      <p:sp>
-        <p:nvSpPr>
-          <p:cNvPr id="42" name="Shape 40"/>
-          <p:cNvSpPr/>
-          <p:nvPr/>
-        </p:nvSpPr>
-        <p:spPr>
-          <a:xfrm>
-            <a:off x="7274052" y="4169664"/>
-            <a:ext cx="685800" cy="475488"/>
-          </a:xfrm>
-          <a:prstGeom prst="rect">
-            <a:avLst>
-              <a:gd name="adj" fmla="val 7692"/>
-            </a:avLst>
-          </a:prstGeom>
-          <a:solidFill>
-            <a:srgbClr val="FFFFFF"/>
-          </a:solidFill>
-          <a:ln w="12700">
-            <a:solidFill>
-              <a:srgbClr val="DB2777"/>
-            </a:solidFill>
-            <a:prstDash val="solid"/>
-          </a:ln>
-        </p:spPr>
-      </p:sp>
-      <p:sp>
-        <p:nvSpPr>
-          <p:cNvPr id="43" name="Text 41"/>
-          <p:cNvSpPr/>
-          <p:nvPr/>
-        </p:nvSpPr>
-        <p:spPr>
-          <a:xfrm>
-            <a:off x="7274052" y="4169664"/>
-            <a:ext cx="685800" cy="475488"/>
-          </a:xfrm>
-          <a:prstGeom prst="rect">
-            <a:avLst/>
-          </a:prstGeom>
-          <a:noFill/>
-          <a:ln/>
-        </p:spPr>
-        <p:txBody>
-          <a:bodyPr wrap="square" lIns="0" tIns="0" rIns="0" bIns="0" rtlCol="0" anchor="ctr"/>
-          <a:lstStyle/>
-          <a:p>
-            <a:pPr algn="ctr" indent="0" marL="0">
-              <a:buNone/>
-            </a:pPr>
-            <a:r>
-              <a:rPr lang="en-US" sz="900" b="1" dirty="0">
-                <a:solidFill>
-                  <a:srgbClr val="9D174D"/>
-                </a:solidFill>
-                <a:latin typeface="Trebuchet MS" pitchFamily="34" charset="0"/>
-                <a:ea typeface="Trebuchet MS" pitchFamily="34" charset="-122"/>
-                <a:cs typeface="Trebuchet MS" pitchFamily="34" charset="-120"/>
-              </a:rPr>
-              <a:t>y</a:t>
+              <a:t>l</a:t>
             </a:r>
             <a:endParaRPr lang="en-US" sz="900" dirty="0"/>
           </a:p>
@@ -17004,7 +17775,7 @@
                 <a:ea typeface="Calibri" pitchFamily="34" charset="-122"/>
                 <a:cs typeface="Calibri" pitchFamily="34" charset="-120"/>
               </a:rPr>
-              <a:t>The </a:t>
+              <a:t>We had a </a:t>
             </a:r>
             <a:pPr algn="l" indent="0" marL="0">
               <a:buNone/>
@@ -17021,7 +17792,7 @@
                 <a:ea typeface="Calibri" pitchFamily="34" charset="-122"/>
                 <a:cs typeface="Calibri" pitchFamily="34" charset="-120"/>
               </a:rPr>
-              <a:t>tasteful</a:t>
+              <a:t>foretaste</a:t>
             </a:r>
             <a:pPr algn="l" indent="0" marL="0">
               <a:buNone/>
@@ -17035,7 +17806,7 @@
                 <a:ea typeface="Calibri" pitchFamily="34" charset="-122"/>
                 <a:cs typeface="Calibri" pitchFamily="34" charset="-120"/>
               </a:rPr>
-              <a:t> dessert left an </a:t>
+              <a:t> of summer at the </a:t>
             </a:r>
             <a:pPr algn="l" indent="0" marL="0">
               <a:buNone/>
@@ -17052,7 +17823,7 @@
                 <a:ea typeface="Calibri" pitchFamily="34" charset="-122"/>
                 <a:cs typeface="Calibri" pitchFamily="34" charset="-120"/>
               </a:rPr>
-              <a:t>aftertaste</a:t>
+              <a:t>tasting</a:t>
             </a:r>
             <a:pPr algn="l" indent="0" marL="0">
               <a:buNone/>
@@ -17066,7 +17837,7 @@
                 <a:ea typeface="Calibri" pitchFamily="34" charset="-122"/>
                 <a:cs typeface="Calibri" pitchFamily="34" charset="-120"/>
               </a:rPr>
-              <a:t> of lemon, but everyone agreed the </a:t>
+              <a:t> event; the </a:t>
             </a:r>
             <a:pPr algn="l" indent="0" marL="0">
               <a:buNone/>
@@ -17083,7 +17854,7 @@
                 <a:ea typeface="Calibri" pitchFamily="34" charset="-122"/>
                 <a:cs typeface="Calibri" pitchFamily="34" charset="-120"/>
               </a:rPr>
-              <a:t>tasting</a:t>
+              <a:t>tasteless</a:t>
             </a:r>
             <a:pPr algn="l" indent="0" marL="0">
               <a:buNone/>
@@ -17097,7 +17868,7 @@
                 <a:ea typeface="Calibri" pitchFamily="34" charset="-122"/>
                 <a:cs typeface="Calibri" pitchFamily="34" charset="-120"/>
               </a:rPr>
-              <a:t> had been a wonderful experience!</a:t>
+              <a:t> lemonade was the only disappointment.</a:t>
             </a:r>
             <a:endParaRPr lang="en-US" sz="1800" dirty="0"/>
           </a:p>
@@ -17252,7 +18023,7 @@
                 <a:ea typeface="Trebuchet MS" pitchFamily="34" charset="-122"/>
                 <a:cs typeface="Trebuchet MS" pitchFamily="34" charset="-120"/>
               </a:rPr>
-              <a:t>tasteful</a:t>
+              <a:t>foretaste</a:t>
             </a:r>
             <a:endParaRPr lang="en-US" sz="1400" dirty="0"/>
           </a:p>
@@ -17380,7 +18151,7 @@
                 <a:ea typeface="Trebuchet MS" pitchFamily="34" charset="-122"/>
                 <a:cs typeface="Trebuchet MS" pitchFamily="34" charset="-120"/>
               </a:rPr>
-              <a:t>aftertaste</a:t>
+              <a:t>tasting</a:t>
             </a:r>
             <a:endParaRPr lang="en-US" sz="1400" dirty="0"/>
           </a:p>
@@ -17508,7 +18279,7 @@
                 <a:ea typeface="Trebuchet MS" pitchFamily="34" charset="-122"/>
                 <a:cs typeface="Trebuchet MS" pitchFamily="34" charset="-120"/>
               </a:rPr>
-              <a:t>tasting</a:t>
+              <a:t>tasteless</a:t>
             </a:r>
             <a:endParaRPr lang="en-US" sz="1400" dirty="0"/>
           </a:p>
@@ -17978,7 +18749,7 @@
                 <a:ea typeface="Trebuchet MS" pitchFamily="34" charset="-122"/>
                 <a:cs typeface="Trebuchet MS" pitchFamily="34" charset="-120"/>
               </a:rPr>
-              <a:t>tasteful</a:t>
+              <a:t>foretaste</a:t>
             </a:r>
             <a:endParaRPr lang="en-US" sz="2800" dirty="0"/>
           </a:p>
@@ -18805,7 +19576,7 @@
                 <a:ea typeface="Trebuchet MS" pitchFamily="34" charset="-122"/>
                 <a:cs typeface="Trebuchet MS" pitchFamily="34" charset="-120"/>
               </a:rPr>
-              <a:t>tasteful</a:t>
+              <a:t>foretaste</a:t>
             </a:r>
             <a:endParaRPr lang="en-US" sz="2800" dirty="0"/>
           </a:p>
@@ -18894,11 +19665,11 @@
             </a:avLst>
           </a:prstGeom>
           <a:solidFill>
-            <a:srgbClr val="CCFBF1"/>
+            <a:srgbClr val="DDD6FE"/>
           </a:solidFill>
           <a:ln w="19050">
             <a:solidFill>
-              <a:srgbClr val="0D9488"/>
+              <a:srgbClr val="7C3AED"/>
             </a:solidFill>
             <a:prstDash val="solid"/>
           </a:ln>
@@ -18938,13 +19709,13 @@
             <a:r>
               <a:rPr lang="en-US" sz="1300" b="1" dirty="0">
                 <a:solidFill>
-                  <a:srgbClr val="0F766E"/>
+                  <a:srgbClr val="4C1D95"/>
                 </a:solidFill>
                 <a:latin typeface="Trebuchet MS" pitchFamily="34" charset="0"/>
                 <a:ea typeface="Trebuchet MS" pitchFamily="34" charset="-122"/>
                 <a:cs typeface="Trebuchet MS" pitchFamily="34" charset="-120"/>
               </a:rPr>
-              <a:t>taste</a:t>
+              <a:t>fore</a:t>
             </a:r>
             <a:endParaRPr lang="en-US" sz="1300" dirty="0"/>
           </a:p>
@@ -18983,7 +19754,7 @@
                 <a:ea typeface="Calibri" pitchFamily="34" charset="-122"/>
                 <a:cs typeface="Calibri" pitchFamily="34" charset="-120"/>
               </a:rPr>
-              <a:t>to sense flavour or quality</a:t>
+              <a:t>before, in advance</a:t>
             </a:r>
             <a:endParaRPr lang="en-US" sz="850" dirty="0"/>
           </a:p>
@@ -19006,11 +19777,11 @@
             </a:avLst>
           </a:prstGeom>
           <a:solidFill>
-            <a:srgbClr val="FCE7F3"/>
+            <a:srgbClr val="CCFBF1"/>
           </a:solidFill>
           <a:ln w="19050">
             <a:solidFill>
-              <a:srgbClr val="DB2777"/>
+              <a:srgbClr val="0D9488"/>
             </a:solidFill>
             <a:prstDash val="solid"/>
           </a:ln>
@@ -19050,13 +19821,13 @@
             <a:r>
               <a:rPr lang="en-US" sz="1300" b="1" dirty="0">
                 <a:solidFill>
-                  <a:srgbClr val="9D174D"/>
+                  <a:srgbClr val="0F766E"/>
                 </a:solidFill>
                 <a:latin typeface="Trebuchet MS" pitchFamily="34" charset="0"/>
                 <a:ea typeface="Trebuchet MS" pitchFamily="34" charset="-122"/>
                 <a:cs typeface="Trebuchet MS" pitchFamily="34" charset="-120"/>
               </a:rPr>
-              <a:t>ful</a:t>
+              <a:t>taste</a:t>
             </a:r>
             <a:endParaRPr lang="en-US" sz="1300" dirty="0"/>
           </a:p>
@@ -19095,7 +19866,7 @@
                 <a:ea typeface="Calibri" pitchFamily="34" charset="-122"/>
                 <a:cs typeface="Calibri" pitchFamily="34" charset="-120"/>
               </a:rPr>
-              <a:t>full of, having</a:t>
+              <a:t>to sense flavour or quality</a:t>
             </a:r>
             <a:endParaRPr lang="en-US" sz="850" dirty="0"/>
           </a:p>
@@ -19790,7 +20561,7 @@
                 <a:ea typeface="Trebuchet MS" pitchFamily="34" charset="-122"/>
                 <a:cs typeface="Trebuchet MS" pitchFamily="34" charset="-120"/>
               </a:rPr>
-              <a:t>tasteful</a:t>
+              <a:t>foretaste</a:t>
             </a:r>
             <a:endParaRPr lang="en-US" sz="2800" dirty="0"/>
           </a:p>
@@ -19879,11 +20650,11 @@
             </a:avLst>
           </a:prstGeom>
           <a:solidFill>
-            <a:srgbClr val="CCFBF1"/>
+            <a:srgbClr val="DDD6FE"/>
           </a:solidFill>
           <a:ln w="19050">
             <a:solidFill>
-              <a:srgbClr val="0D9488"/>
+              <a:srgbClr val="7C3AED"/>
             </a:solidFill>
             <a:prstDash val="solid"/>
           </a:ln>
@@ -19923,13 +20694,13 @@
             <a:r>
               <a:rPr lang="en-US" sz="1300" b="1" dirty="0">
                 <a:solidFill>
-                  <a:srgbClr val="0F766E"/>
+                  <a:srgbClr val="4C1D95"/>
                 </a:solidFill>
                 <a:latin typeface="Trebuchet MS" pitchFamily="34" charset="0"/>
                 <a:ea typeface="Trebuchet MS" pitchFamily="34" charset="-122"/>
                 <a:cs typeface="Trebuchet MS" pitchFamily="34" charset="-120"/>
               </a:rPr>
-              <a:t>taste</a:t>
+              <a:t>fore</a:t>
             </a:r>
             <a:endParaRPr lang="en-US" sz="1300" dirty="0"/>
           </a:p>
@@ -19968,7 +20739,7 @@
                 <a:ea typeface="Calibri" pitchFamily="34" charset="-122"/>
                 <a:cs typeface="Calibri" pitchFamily="34" charset="-120"/>
               </a:rPr>
-              <a:t>to sense flavour or quality</a:t>
+              <a:t>before, in advance</a:t>
             </a:r>
             <a:endParaRPr lang="en-US" sz="850" dirty="0"/>
           </a:p>
@@ -19991,11 +20762,11 @@
             </a:avLst>
           </a:prstGeom>
           <a:solidFill>
-            <a:srgbClr val="FCE7F3"/>
+            <a:srgbClr val="CCFBF1"/>
           </a:solidFill>
           <a:ln w="19050">
             <a:solidFill>
-              <a:srgbClr val="DB2777"/>
+              <a:srgbClr val="0D9488"/>
             </a:solidFill>
             <a:prstDash val="solid"/>
           </a:ln>
@@ -20035,13 +20806,13 @@
             <a:r>
               <a:rPr lang="en-US" sz="1300" b="1" dirty="0">
                 <a:solidFill>
-                  <a:srgbClr val="9D174D"/>
+                  <a:srgbClr val="0F766E"/>
                 </a:solidFill>
                 <a:latin typeface="Trebuchet MS" pitchFamily="34" charset="0"/>
                 <a:ea typeface="Trebuchet MS" pitchFamily="34" charset="-122"/>
                 <a:cs typeface="Trebuchet MS" pitchFamily="34" charset="-120"/>
               </a:rPr>
-              <a:t>ful</a:t>
+              <a:t>taste</a:t>
             </a:r>
             <a:endParaRPr lang="en-US" sz="1300" dirty="0"/>
           </a:p>
@@ -20080,7 +20851,7 @@
                 <a:ea typeface="Calibri" pitchFamily="34" charset="-122"/>
                 <a:cs typeface="Calibri" pitchFamily="34" charset="-120"/>
               </a:rPr>
-              <a:t>full of, having</a:t>
+              <a:t>to sense flavour or quality</a:t>
             </a:r>
             <a:endParaRPr lang="en-US" sz="850" dirty="0"/>
           </a:p>
@@ -20239,7 +21010,7 @@
                 <a:ea typeface="Trebuchet MS" pitchFamily="34" charset="-122"/>
                 <a:cs typeface="Trebuchet MS" pitchFamily="34" charset="-120"/>
               </a:rPr>
-              <a:t>taste</a:t>
+              <a:t>fore</a:t>
             </a:r>
             <a:endParaRPr lang="en-US" sz="1400" dirty="0"/>
           </a:p>
@@ -20344,7 +21115,7 @@
                 <a:ea typeface="Trebuchet MS" pitchFamily="34" charset="-122"/>
                 <a:cs typeface="Trebuchet MS" pitchFamily="34" charset="-120"/>
               </a:rPr>
-              <a:t>ful</a:t>
+              <a:t>taste</a:t>
             </a:r>
             <a:endParaRPr lang="en-US" sz="1400" dirty="0"/>
           </a:p>
@@ -20907,7 +21678,7 @@
                 <a:ea typeface="Trebuchet MS" pitchFamily="34" charset="-122"/>
                 <a:cs typeface="Trebuchet MS" pitchFamily="34" charset="-120"/>
               </a:rPr>
-              <a:t>tasteful</a:t>
+              <a:t>foretaste</a:t>
             </a:r>
             <a:endParaRPr lang="en-US" sz="2800" dirty="0"/>
           </a:p>
@@ -20996,11 +21767,11 @@
             </a:avLst>
           </a:prstGeom>
           <a:solidFill>
-            <a:srgbClr val="CCFBF1"/>
+            <a:srgbClr val="DDD6FE"/>
           </a:solidFill>
           <a:ln w="19050">
             <a:solidFill>
-              <a:srgbClr val="0D9488"/>
+              <a:srgbClr val="7C3AED"/>
             </a:solidFill>
             <a:prstDash val="solid"/>
           </a:ln>
@@ -21040,13 +21811,13 @@
             <a:r>
               <a:rPr lang="en-US" sz="1300" b="1" dirty="0">
                 <a:solidFill>
-                  <a:srgbClr val="0F766E"/>
+                  <a:srgbClr val="4C1D95"/>
                 </a:solidFill>
                 <a:latin typeface="Trebuchet MS" pitchFamily="34" charset="0"/>
                 <a:ea typeface="Trebuchet MS" pitchFamily="34" charset="-122"/>
                 <a:cs typeface="Trebuchet MS" pitchFamily="34" charset="-120"/>
               </a:rPr>
-              <a:t>taste</a:t>
+              <a:t>fore</a:t>
             </a:r>
             <a:endParaRPr lang="en-US" sz="1300" dirty="0"/>
           </a:p>
@@ -21085,7 +21856,7 @@
                 <a:ea typeface="Calibri" pitchFamily="34" charset="-122"/>
                 <a:cs typeface="Calibri" pitchFamily="34" charset="-120"/>
               </a:rPr>
-              <a:t>to sense flavour or quality</a:t>
+              <a:t>before, in advance</a:t>
             </a:r>
             <a:endParaRPr lang="en-US" sz="850" dirty="0"/>
           </a:p>
@@ -21108,11 +21879,11 @@
             </a:avLst>
           </a:prstGeom>
           <a:solidFill>
-            <a:srgbClr val="FCE7F3"/>
+            <a:srgbClr val="CCFBF1"/>
           </a:solidFill>
           <a:ln w="19050">
             <a:solidFill>
-              <a:srgbClr val="DB2777"/>
+              <a:srgbClr val="0D9488"/>
             </a:solidFill>
             <a:prstDash val="solid"/>
           </a:ln>
@@ -21152,13 +21923,13 @@
             <a:r>
               <a:rPr lang="en-US" sz="1300" b="1" dirty="0">
                 <a:solidFill>
-                  <a:srgbClr val="9D174D"/>
+                  <a:srgbClr val="0F766E"/>
                 </a:solidFill>
                 <a:latin typeface="Trebuchet MS" pitchFamily="34" charset="0"/>
                 <a:ea typeface="Trebuchet MS" pitchFamily="34" charset="-122"/>
                 <a:cs typeface="Trebuchet MS" pitchFamily="34" charset="-120"/>
               </a:rPr>
-              <a:t>ful</a:t>
+              <a:t>taste</a:t>
             </a:r>
             <a:endParaRPr lang="en-US" sz="1300" dirty="0"/>
           </a:p>
@@ -21197,7 +21968,7 @@
                 <a:ea typeface="Calibri" pitchFamily="34" charset="-122"/>
                 <a:cs typeface="Calibri" pitchFamily="34" charset="-120"/>
               </a:rPr>
-              <a:t>full of, having</a:t>
+              <a:t>to sense flavour or quality</a:t>
             </a:r>
             <a:endParaRPr lang="en-US" sz="850" dirty="0"/>
           </a:p>
@@ -21356,7 +22127,7 @@
                 <a:ea typeface="Trebuchet MS" pitchFamily="34" charset="-122"/>
                 <a:cs typeface="Trebuchet MS" pitchFamily="34" charset="-120"/>
               </a:rPr>
-              <a:t>taste</a:t>
+              <a:t>fore</a:t>
             </a:r>
             <a:endParaRPr lang="en-US" sz="1400" dirty="0"/>
           </a:p>
@@ -21461,7 +22232,7 @@
                 <a:ea typeface="Trebuchet MS" pitchFamily="34" charset="-122"/>
                 <a:cs typeface="Trebuchet MS" pitchFamily="34" charset="-120"/>
               </a:rPr>
-              <a:t>ful</a:t>
+              <a:t>taste</a:t>
             </a:r>
             <a:endParaRPr lang="en-US" sz="1400" dirty="0"/>
           </a:p>
@@ -21542,11 +22313,11 @@
         <p:spPr>
           <a:xfrm>
             <a:off x="1874520" y="4096512"/>
-            <a:ext cx="6903720" cy="658368"/>
+            <a:ext cx="6903720" cy="804672"/>
           </a:xfrm>
           <a:prstGeom prst="rect">
             <a:avLst>
-              <a:gd name="adj" fmla="val 8333"/>
+              <a:gd name="adj" fmla="val 6818"/>
             </a:avLst>
           </a:prstGeom>
           <a:solidFill>
@@ -21568,12 +22339,12 @@
         </p:nvSpPr>
         <p:spPr>
           <a:xfrm>
-            <a:off x="2023872" y="4169664"/>
-            <a:ext cx="685800" cy="475488"/>
+            <a:off x="2254649" y="4169664"/>
+            <a:ext cx="685800" cy="384048"/>
           </a:xfrm>
           <a:prstGeom prst="rect">
             <a:avLst>
-              <a:gd name="adj" fmla="val 7692"/>
+              <a:gd name="adj" fmla="val 9524"/>
             </a:avLst>
           </a:prstGeom>
           <a:solidFill>
@@ -21595,8 +22366,8 @@
         </p:nvSpPr>
         <p:spPr>
           <a:xfrm>
-            <a:off x="2023872" y="4169664"/>
-            <a:ext cx="685800" cy="475488"/>
+            <a:off x="2254649" y="4169664"/>
+            <a:ext cx="685800" cy="384048"/>
           </a:xfrm>
           <a:prstGeom prst="rect">
             <a:avLst/>
@@ -21620,7 +22391,7 @@
                 <a:ea typeface="Trebuchet MS" pitchFamily="34" charset="-122"/>
                 <a:cs typeface="Trebuchet MS" pitchFamily="34" charset="-120"/>
               </a:rPr>
-              <a:t>t</a:t>
+              <a:t>f</a:t>
             </a:r>
             <a:endParaRPr lang="en-US" sz="900" dirty="0"/>
           </a:p>
@@ -21634,12 +22405,12 @@
         </p:nvSpPr>
         <p:spPr>
           <a:xfrm>
-            <a:off x="2831592" y="4169664"/>
-            <a:ext cx="685800" cy="475488"/>
+            <a:off x="3293146" y="4169664"/>
+            <a:ext cx="685800" cy="384048"/>
           </a:xfrm>
           <a:prstGeom prst="rect">
             <a:avLst>
-              <a:gd name="adj" fmla="val 7692"/>
+              <a:gd name="adj" fmla="val 9524"/>
             </a:avLst>
           </a:prstGeom>
           <a:solidFill>
@@ -21661,8 +22432,8 @@
         </p:nvSpPr>
         <p:spPr>
           <a:xfrm>
-            <a:off x="2831592" y="4169664"/>
-            <a:ext cx="685800" cy="475488"/>
+            <a:off x="3293146" y="4169664"/>
+            <a:ext cx="685800" cy="384048"/>
           </a:xfrm>
           <a:prstGeom prst="rect">
             <a:avLst/>
@@ -21686,7 +22457,7 @@
                 <a:ea typeface="Trebuchet MS" pitchFamily="34" charset="-122"/>
                 <a:cs typeface="Trebuchet MS" pitchFamily="34" charset="-120"/>
               </a:rPr>
-              <a:t>a</a:t>
+              <a:t>or</a:t>
             </a:r>
             <a:endParaRPr lang="en-US" sz="900" dirty="0"/>
           </a:p>
@@ -21700,12 +22471,12 @@
         </p:nvSpPr>
         <p:spPr>
           <a:xfrm>
-            <a:off x="3639312" y="4169664"/>
-            <a:ext cx="685800" cy="475488"/>
+            <a:off x="4331643" y="4169664"/>
+            <a:ext cx="685800" cy="384048"/>
           </a:xfrm>
           <a:prstGeom prst="rect">
             <a:avLst>
-              <a:gd name="adj" fmla="val 7692"/>
+              <a:gd name="adj" fmla="val 9524"/>
             </a:avLst>
           </a:prstGeom>
           <a:solidFill>
@@ -21727,8 +22498,8 @@
         </p:nvSpPr>
         <p:spPr>
           <a:xfrm>
-            <a:off x="3639312" y="4169664"/>
-            <a:ext cx="685800" cy="475488"/>
+            <a:off x="4331643" y="4169664"/>
+            <a:ext cx="685800" cy="384048"/>
           </a:xfrm>
           <a:prstGeom prst="rect">
             <a:avLst/>
@@ -21752,7 +22523,7 @@
                 <a:ea typeface="Trebuchet MS" pitchFamily="34" charset="-122"/>
                 <a:cs typeface="Trebuchet MS" pitchFamily="34" charset="-120"/>
               </a:rPr>
-              <a:t>s</a:t>
+              <a:t>t</a:t>
             </a:r>
             <a:endParaRPr lang="en-US" sz="900" dirty="0"/>
           </a:p>
@@ -21766,12 +22537,12 @@
         </p:nvSpPr>
         <p:spPr>
           <a:xfrm>
-            <a:off x="4447032" y="4169664"/>
-            <a:ext cx="685800" cy="475488"/>
+            <a:off x="5370141" y="4169664"/>
+            <a:ext cx="685800" cy="384048"/>
           </a:xfrm>
           <a:prstGeom prst="rect">
             <a:avLst>
-              <a:gd name="adj" fmla="val 7692"/>
+              <a:gd name="adj" fmla="val 9524"/>
             </a:avLst>
           </a:prstGeom>
           <a:solidFill>
@@ -21793,8 +22564,8 @@
         </p:nvSpPr>
         <p:spPr>
           <a:xfrm>
-            <a:off x="4447032" y="4169664"/>
-            <a:ext cx="685800" cy="475488"/>
+            <a:off x="5370141" y="4169664"/>
+            <a:ext cx="685800" cy="384048"/>
           </a:xfrm>
           <a:prstGeom prst="rect">
             <a:avLst/>
@@ -21818,7 +22589,7 @@
                 <a:ea typeface="Trebuchet MS" pitchFamily="34" charset="-122"/>
                 <a:cs typeface="Trebuchet MS" pitchFamily="34" charset="-120"/>
               </a:rPr>
-              <a:t>t</a:t>
+              <a:t>ay</a:t>
             </a:r>
             <a:endParaRPr lang="en-US" sz="900" dirty="0"/>
           </a:p>
@@ -21826,18 +22597,57 @@
       </p:sp>
       <p:sp>
         <p:nvSpPr>
-          <p:cNvPr id="41" name="Shape 39"/>
-          <p:cNvSpPr/>
-          <p:nvPr/>
-        </p:nvSpPr>
-        <p:spPr>
-          <a:xfrm>
-            <a:off x="5254752" y="4169664"/>
-            <a:ext cx="685800" cy="475488"/>
+          <p:cNvPr id="41" name="Text 39"/>
+          <p:cNvSpPr/>
+          <p:nvPr/>
+        </p:nvSpPr>
+        <p:spPr>
+          <a:xfrm>
+            <a:off x="5370141" y="4572000"/>
+            <a:ext cx="685800" cy="219456"/>
+          </a:xfrm>
+          <a:prstGeom prst="rect">
+            <a:avLst/>
+          </a:prstGeom>
+          <a:noFill/>
+          <a:ln/>
+        </p:spPr>
+        <p:txBody>
+          <a:bodyPr wrap="square" lIns="0" tIns="0" rIns="0" bIns="0" rtlCol="0" anchor="t"/>
+          <a:lstStyle/>
+          <a:p>
+            <a:pPr algn="ctr" indent="0" marL="0">
+              <a:buNone/>
+            </a:pPr>
+            <a:r>
+              <a:rPr lang="en-US" sz="750" i="1" dirty="0">
+                <a:solidFill>
+                  <a:srgbClr val="94A3B8"/>
+                </a:solidFill>
+                <a:latin typeface="Calibri" pitchFamily="34" charset="0"/>
+                <a:ea typeface="Calibri" pitchFamily="34" charset="-122"/>
+                <a:cs typeface="Calibri" pitchFamily="34" charset="-120"/>
+              </a:rPr>
+              <a:t>/ay/</a:t>
+            </a:r>
+            <a:endParaRPr lang="en-US" sz="750" dirty="0"/>
+          </a:p>
+        </p:txBody>
+      </p:sp>
+      <p:sp>
+        <p:nvSpPr>
+          <p:cNvPr id="42" name="Shape 40"/>
+          <p:cNvSpPr/>
+          <p:nvPr/>
+        </p:nvSpPr>
+        <p:spPr>
+          <a:xfrm>
+            <a:off x="6408638" y="4169664"/>
+            <a:ext cx="685800" cy="384048"/>
           </a:xfrm>
           <a:prstGeom prst="rect">
             <a:avLst>
-              <a:gd name="adj" fmla="val 7692"/>
+              <a:gd name="adj" fmla="val 9524"/>
             </a:avLst>
           </a:prstGeom>
           <a:solidFill>
@@ -21853,14 +22663,14 @@
       </p:sp>
       <p:sp>
         <p:nvSpPr>
-          <p:cNvPr id="42" name="Text 40"/>
-          <p:cNvSpPr/>
-          <p:nvPr/>
-        </p:nvSpPr>
-        <p:spPr>
-          <a:xfrm>
-            <a:off x="5254752" y="4169664"/>
-            <a:ext cx="685800" cy="475488"/>
+          <p:cNvPr id="43" name="Text 41"/>
+          <p:cNvSpPr/>
+          <p:nvPr/>
+        </p:nvSpPr>
+        <p:spPr>
+          <a:xfrm>
+            <a:off x="6408638" y="4169664"/>
+            <a:ext cx="685800" cy="384048"/>
           </a:xfrm>
           <a:prstGeom prst="rect">
             <a:avLst/>
@@ -21884,7 +22694,7 @@
                 <a:ea typeface="Trebuchet MS" pitchFamily="34" charset="-122"/>
                 <a:cs typeface="Trebuchet MS" pitchFamily="34" charset="-120"/>
               </a:rPr>
-              <a:t>e</a:t>
+              <a:t>s</a:t>
             </a:r>
             <a:endParaRPr lang="en-US" sz="900" dirty="0"/>
           </a:p>
@@ -21892,18 +22702,18 @@
       </p:sp>
       <p:sp>
         <p:nvSpPr>
-          <p:cNvPr id="43" name="Shape 41"/>
-          <p:cNvSpPr/>
-          <p:nvPr/>
-        </p:nvSpPr>
-        <p:spPr>
-          <a:xfrm>
-            <a:off x="6062472" y="4169664"/>
-            <a:ext cx="685800" cy="475488"/>
+          <p:cNvPr id="44" name="Shape 42"/>
+          <p:cNvSpPr/>
+          <p:nvPr/>
+        </p:nvSpPr>
+        <p:spPr>
+          <a:xfrm>
+            <a:off x="7447135" y="4169664"/>
+            <a:ext cx="685800" cy="384048"/>
           </a:xfrm>
           <a:prstGeom prst="rect">
             <a:avLst>
-              <a:gd name="adj" fmla="val 7692"/>
+              <a:gd name="adj" fmla="val 9524"/>
             </a:avLst>
           </a:prstGeom>
           <a:solidFill>
@@ -21919,14 +22729,14 @@
       </p:sp>
       <p:sp>
         <p:nvSpPr>
-          <p:cNvPr id="44" name="Text 42"/>
-          <p:cNvSpPr/>
-          <p:nvPr/>
-        </p:nvSpPr>
-        <p:spPr>
-          <a:xfrm>
-            <a:off x="6062472" y="4169664"/>
-            <a:ext cx="685800" cy="475488"/>
+          <p:cNvPr id="45" name="Text 43"/>
+          <p:cNvSpPr/>
+          <p:nvPr/>
+        </p:nvSpPr>
+        <p:spPr>
+          <a:xfrm>
+            <a:off x="7447135" y="4169664"/>
+            <a:ext cx="685800" cy="384048"/>
           </a:xfrm>
           <a:prstGeom prst="rect">
             <a:avLst/>
@@ -21950,139 +22760,7 @@
                 <a:ea typeface="Trebuchet MS" pitchFamily="34" charset="-122"/>
                 <a:cs typeface="Trebuchet MS" pitchFamily="34" charset="-120"/>
               </a:rPr>
-              <a:t>f</a:t>
-            </a:r>
-            <a:endParaRPr lang="en-US" sz="900" dirty="0"/>
-          </a:p>
-        </p:txBody>
-      </p:sp>
-      <p:sp>
-        <p:nvSpPr>
-          <p:cNvPr id="45" name="Shape 43"/>
-          <p:cNvSpPr/>
-          <p:nvPr/>
-        </p:nvSpPr>
-        <p:spPr>
-          <a:xfrm>
-            <a:off x="6870192" y="4169664"/>
-            <a:ext cx="685800" cy="475488"/>
-          </a:xfrm>
-          <a:prstGeom prst="rect">
-            <a:avLst>
-              <a:gd name="adj" fmla="val 7692"/>
-            </a:avLst>
-          </a:prstGeom>
-          <a:solidFill>
-            <a:srgbClr val="FFFFFF"/>
-          </a:solidFill>
-          <a:ln w="12700">
-            <a:solidFill>
-              <a:srgbClr val="DB2777"/>
-            </a:solidFill>
-            <a:prstDash val="solid"/>
-          </a:ln>
-        </p:spPr>
-      </p:sp>
-      <p:sp>
-        <p:nvSpPr>
-          <p:cNvPr id="46" name="Text 44"/>
-          <p:cNvSpPr/>
-          <p:nvPr/>
-        </p:nvSpPr>
-        <p:spPr>
-          <a:xfrm>
-            <a:off x="6870192" y="4169664"/>
-            <a:ext cx="685800" cy="475488"/>
-          </a:xfrm>
-          <a:prstGeom prst="rect">
-            <a:avLst/>
-          </a:prstGeom>
-          <a:noFill/>
-          <a:ln/>
-        </p:spPr>
-        <p:txBody>
-          <a:bodyPr wrap="square" lIns="0" tIns="0" rIns="0" bIns="0" rtlCol="0" anchor="ctr"/>
-          <a:lstStyle/>
-          <a:p>
-            <a:pPr algn="ctr" indent="0" marL="0">
-              <a:buNone/>
-            </a:pPr>
-            <a:r>
-              <a:rPr lang="en-US" sz="900" b="1" dirty="0">
-                <a:solidFill>
-                  <a:srgbClr val="9D174D"/>
-                </a:solidFill>
-                <a:latin typeface="Trebuchet MS" pitchFamily="34" charset="0"/>
-                <a:ea typeface="Trebuchet MS" pitchFamily="34" charset="-122"/>
-                <a:cs typeface="Trebuchet MS" pitchFamily="34" charset="-120"/>
-              </a:rPr>
-              <a:t>u</a:t>
-            </a:r>
-            <a:endParaRPr lang="en-US" sz="900" dirty="0"/>
-          </a:p>
-        </p:txBody>
-      </p:sp>
-      <p:sp>
-        <p:nvSpPr>
-          <p:cNvPr id="47" name="Shape 45"/>
-          <p:cNvSpPr/>
-          <p:nvPr/>
-        </p:nvSpPr>
-        <p:spPr>
-          <a:xfrm>
-            <a:off x="7677912" y="4169664"/>
-            <a:ext cx="685800" cy="475488"/>
-          </a:xfrm>
-          <a:prstGeom prst="rect">
-            <a:avLst>
-              <a:gd name="adj" fmla="val 7692"/>
-            </a:avLst>
-          </a:prstGeom>
-          <a:solidFill>
-            <a:srgbClr val="FFFFFF"/>
-          </a:solidFill>
-          <a:ln w="12700">
-            <a:solidFill>
-              <a:srgbClr val="DB2777"/>
-            </a:solidFill>
-            <a:prstDash val="solid"/>
-          </a:ln>
-        </p:spPr>
-      </p:sp>
-      <p:sp>
-        <p:nvSpPr>
-          <p:cNvPr id="48" name="Text 46"/>
-          <p:cNvSpPr/>
-          <p:nvPr/>
-        </p:nvSpPr>
-        <p:spPr>
-          <a:xfrm>
-            <a:off x="7677912" y="4169664"/>
-            <a:ext cx="685800" cy="475488"/>
-          </a:xfrm>
-          <a:prstGeom prst="rect">
-            <a:avLst/>
-          </a:prstGeom>
-          <a:noFill/>
-          <a:ln/>
-        </p:spPr>
-        <p:txBody>
-          <a:bodyPr wrap="square" lIns="0" tIns="0" rIns="0" bIns="0" rtlCol="0" anchor="ctr"/>
-          <a:lstStyle/>
-          <a:p>
-            <a:pPr algn="ctr" indent="0" marL="0">
-              <a:buNone/>
-            </a:pPr>
-            <a:r>
-              <a:rPr lang="en-US" sz="900" b="1" dirty="0">
-                <a:solidFill>
-                  <a:srgbClr val="9D174D"/>
-                </a:solidFill>
-                <a:latin typeface="Trebuchet MS" pitchFamily="34" charset="0"/>
-                <a:ea typeface="Trebuchet MS" pitchFamily="34" charset="-122"/>
-                <a:cs typeface="Trebuchet MS" pitchFamily="34" charset="-120"/>
-              </a:rPr>
-              <a:t>l</a:t>
+              <a:t>t</a:t>
             </a:r>
             <a:endParaRPr lang="en-US" sz="900" dirty="0"/>
           </a:p>
@@ -22513,7 +23191,7 @@
                 <a:ea typeface="Trebuchet MS" pitchFamily="34" charset="-122"/>
                 <a:cs typeface="Trebuchet MS" pitchFamily="34" charset="-120"/>
               </a:rPr>
-              <a:t>aftertaste</a:t>
+              <a:t>tasting</a:t>
             </a:r>
             <a:endParaRPr lang="en-US" sz="2800" dirty="0"/>
           </a:p>
@@ -23340,7 +24018,7 @@
                 <a:ea typeface="Trebuchet MS" pitchFamily="34" charset="-122"/>
                 <a:cs typeface="Trebuchet MS" pitchFamily="34" charset="-120"/>
               </a:rPr>
-              <a:t>aftertaste</a:t>
+              <a:t>tasting</a:t>
             </a:r>
             <a:endParaRPr lang="en-US" sz="2800" dirty="0"/>
           </a:p>
@@ -23429,11 +24107,11 @@
             </a:avLst>
           </a:prstGeom>
           <a:solidFill>
-            <a:srgbClr val="DDD6FE"/>
+            <a:srgbClr val="CCFBF1"/>
           </a:solidFill>
           <a:ln w="19050">
             <a:solidFill>
-              <a:srgbClr val="7C3AED"/>
+              <a:srgbClr val="0D9488"/>
             </a:solidFill>
             <a:prstDash val="solid"/>
           </a:ln>
@@ -23473,13 +24151,13 @@
             <a:r>
               <a:rPr lang="en-US" sz="1300" b="1" dirty="0">
                 <a:solidFill>
-                  <a:srgbClr val="4C1D95"/>
+                  <a:srgbClr val="0F766E"/>
                 </a:solidFill>
                 <a:latin typeface="Trebuchet MS" pitchFamily="34" charset="0"/>
                 <a:ea typeface="Trebuchet MS" pitchFamily="34" charset="-122"/>
                 <a:cs typeface="Trebuchet MS" pitchFamily="34" charset="-120"/>
               </a:rPr>
-              <a:t>after</a:t>
+              <a:t>taste</a:t>
             </a:r>
             <a:endParaRPr lang="en-US" sz="1300" dirty="0"/>
           </a:p>
@@ -23518,7 +24196,7 @@
                 <a:ea typeface="Calibri" pitchFamily="34" charset="-122"/>
                 <a:cs typeface="Calibri" pitchFamily="34" charset="-120"/>
               </a:rPr>
-              <a:t>following, behind</a:t>
+              <a:t>to sense flavour or quality</a:t>
             </a:r>
             <a:endParaRPr lang="en-US" sz="850" dirty="0"/>
           </a:p>
@@ -23526,7 +24204,46 @@
       </p:sp>
       <p:sp>
         <p:nvSpPr>
-          <p:cNvPr id="19" name="Shape 17"/>
+          <p:cNvPr id="19" name="Text 17"/>
+          <p:cNvSpPr/>
+          <p:nvPr/>
+        </p:nvSpPr>
+        <p:spPr>
+          <a:xfrm>
+            <a:off x="2938272" y="2752344"/>
+            <a:ext cx="1828800" cy="182880"/>
+          </a:xfrm>
+          <a:prstGeom prst="rect">
+            <a:avLst/>
+          </a:prstGeom>
+          <a:noFill/>
+          <a:ln/>
+        </p:spPr>
+        <p:txBody>
+          <a:bodyPr wrap="square" lIns="0" tIns="0" rIns="0" bIns="0" rtlCol="0" anchor="t"/>
+          <a:lstStyle/>
+          <a:p>
+            <a:pPr algn="ctr" indent="0" marL="0">
+              <a:buNone/>
+            </a:pPr>
+            <a:r>
+              <a:rPr lang="en-US" sz="700" i="1" dirty="0">
+                <a:solidFill>
+                  <a:srgbClr val="94A3B8"/>
+                </a:solidFill>
+                <a:latin typeface="Calibri" pitchFamily="34" charset="0"/>
+                <a:ea typeface="Calibri" pitchFamily="34" charset="-122"/>
+                <a:cs typeface="Calibri" pitchFamily="34" charset="-120"/>
+              </a:rPr>
+              <a:t>'e' dropped before vowel suffix</a:t>
+            </a:r>
+            <a:endParaRPr lang="en-US" sz="700" dirty="0"/>
+          </a:p>
+        </p:txBody>
+      </p:sp>
+      <p:sp>
+        <p:nvSpPr>
+          <p:cNvPr id="20" name="Shape 18"/>
           <p:cNvSpPr/>
           <p:nvPr/>
         </p:nvSpPr>
@@ -23541,11 +24258,11 @@
             </a:avLst>
           </a:prstGeom>
           <a:solidFill>
-            <a:srgbClr val="CCFBF1"/>
+            <a:srgbClr val="FCE7F3"/>
           </a:solidFill>
           <a:ln w="19050">
             <a:solidFill>
-              <a:srgbClr val="0D9488"/>
+              <a:srgbClr val="DB2777"/>
             </a:solidFill>
             <a:prstDash val="solid"/>
           </a:ln>
@@ -23560,7 +24277,7 @@
       </p:sp>
       <p:sp>
         <p:nvSpPr>
-          <p:cNvPr id="20" name="Text 18"/>
+          <p:cNvPr id="21" name="Text 19"/>
           <p:cNvSpPr/>
           <p:nvPr/>
         </p:nvSpPr>
@@ -23585,13 +24302,13 @@
             <a:r>
               <a:rPr lang="en-US" sz="1300" b="1" dirty="0">
                 <a:solidFill>
-                  <a:srgbClr val="0F766E"/>
+                  <a:srgbClr val="9D174D"/>
                 </a:solidFill>
                 <a:latin typeface="Trebuchet MS" pitchFamily="34" charset="0"/>
                 <a:ea typeface="Trebuchet MS" pitchFamily="34" charset="-122"/>
                 <a:cs typeface="Trebuchet MS" pitchFamily="34" charset="-120"/>
               </a:rPr>
-              <a:t>taste</a:t>
+              <a:t>ing</a:t>
             </a:r>
             <a:endParaRPr lang="en-US" sz="1300" dirty="0"/>
           </a:p>
@@ -23599,7 +24316,7 @@
       </p:sp>
       <p:sp>
         <p:nvSpPr>
-          <p:cNvPr id="21" name="Text 19"/>
+          <p:cNvPr id="22" name="Text 20"/>
           <p:cNvSpPr/>
           <p:nvPr/>
         </p:nvSpPr>
@@ -23630,7 +24347,7 @@
                 <a:ea typeface="Calibri" pitchFamily="34" charset="-122"/>
                 <a:cs typeface="Calibri" pitchFamily="34" charset="-120"/>
               </a:rPr>
-              <a:t>to sense flavour or quality</a:t>
+              <a:t>action in progress</a:t>
             </a:r>
             <a:endParaRPr lang="en-US" sz="850" dirty="0"/>
           </a:p>
@@ -23638,7 +24355,7 @@
       </p:sp>
       <p:sp>
         <p:nvSpPr>
-          <p:cNvPr id="22" name="Shape 20"/>
+          <p:cNvPr id="23" name="Shape 21"/>
           <p:cNvSpPr/>
           <p:nvPr/>
         </p:nvSpPr>
@@ -23665,7 +24382,7 @@
       </p:sp>
       <p:sp>
         <p:nvSpPr>
-          <p:cNvPr id="23" name="Text 21"/>
+          <p:cNvPr id="24" name="Text 22"/>
           <p:cNvSpPr/>
           <p:nvPr/>
         </p:nvSpPr>
@@ -23704,7 +24421,7 @@
       </p:sp>
       <p:sp>
         <p:nvSpPr>
-          <p:cNvPr id="24" name="Shape 22"/>
+          <p:cNvPr id="25" name="Shape 23"/>
           <p:cNvSpPr/>
           <p:nvPr/>
         </p:nvSpPr>
@@ -23731,7 +24448,7 @@
       </p:sp>
       <p:sp>
         <p:nvSpPr>
-          <p:cNvPr id="25" name="Text 23"/>
+          <p:cNvPr id="26" name="Text 24"/>
           <p:cNvSpPr/>
           <p:nvPr/>
         </p:nvSpPr>
@@ -23770,7 +24487,7 @@
       </p:sp>
       <p:sp>
         <p:nvSpPr>
-          <p:cNvPr id="26" name="Shape 24"/>
+          <p:cNvPr id="27" name="Shape 25"/>
           <p:cNvSpPr/>
           <p:nvPr/>
         </p:nvSpPr>
@@ -23797,7 +24514,7 @@
       </p:sp>
       <p:sp>
         <p:nvSpPr>
-          <p:cNvPr id="27" name="Text 25"/>
+          <p:cNvPr id="28" name="Text 26"/>
           <p:cNvSpPr/>
           <p:nvPr/>
         </p:nvSpPr>
@@ -23836,7 +24553,7 @@
       </p:sp>
       <p:sp>
         <p:nvSpPr>
-          <p:cNvPr id="28" name="Shape 26"/>
+          <p:cNvPr id="29" name="Shape 27"/>
           <p:cNvSpPr/>
           <p:nvPr/>
         </p:nvSpPr>
@@ -23863,7 +24580,7 @@
       </p:sp>
       <p:sp>
         <p:nvSpPr>
-          <p:cNvPr id="29" name="Text 27"/>
+          <p:cNvPr id="30" name="Text 28"/>
           <p:cNvSpPr/>
           <p:nvPr/>
         </p:nvSpPr>
@@ -25044,7 +25761,7 @@
                 <a:ea typeface="Trebuchet MS" pitchFamily="34" charset="-122"/>
                 <a:cs typeface="Trebuchet MS" pitchFamily="34" charset="-120"/>
               </a:rPr>
-              <a:t>aftertaste</a:t>
+              <a:t>tasting</a:t>
             </a:r>
             <a:endParaRPr lang="en-US" sz="2800" dirty="0"/>
           </a:p>
@@ -25133,11 +25850,11 @@
             </a:avLst>
           </a:prstGeom>
           <a:solidFill>
-            <a:srgbClr val="DDD6FE"/>
+            <a:srgbClr val="CCFBF1"/>
           </a:solidFill>
           <a:ln w="19050">
             <a:solidFill>
-              <a:srgbClr val="7C3AED"/>
+              <a:srgbClr val="0D9488"/>
             </a:solidFill>
             <a:prstDash val="solid"/>
           </a:ln>
@@ -25177,13 +25894,13 @@
             <a:r>
               <a:rPr lang="en-US" sz="1300" b="1" dirty="0">
                 <a:solidFill>
-                  <a:srgbClr val="4C1D95"/>
+                  <a:srgbClr val="0F766E"/>
                 </a:solidFill>
                 <a:latin typeface="Trebuchet MS" pitchFamily="34" charset="0"/>
                 <a:ea typeface="Trebuchet MS" pitchFamily="34" charset="-122"/>
                 <a:cs typeface="Trebuchet MS" pitchFamily="34" charset="-120"/>
               </a:rPr>
-              <a:t>after</a:t>
+              <a:t>taste</a:t>
             </a:r>
             <a:endParaRPr lang="en-US" sz="1300" dirty="0"/>
           </a:p>
@@ -25222,7 +25939,7 @@
                 <a:ea typeface="Calibri" pitchFamily="34" charset="-122"/>
                 <a:cs typeface="Calibri" pitchFamily="34" charset="-120"/>
               </a:rPr>
-              <a:t>following, behind</a:t>
+              <a:t>to sense flavour or quality</a:t>
             </a:r>
             <a:endParaRPr lang="en-US" sz="850" dirty="0"/>
           </a:p>
@@ -25230,7 +25947,46 @@
       </p:sp>
       <p:sp>
         <p:nvSpPr>
-          <p:cNvPr id="19" name="Shape 17"/>
+          <p:cNvPr id="19" name="Text 17"/>
+          <p:cNvSpPr/>
+          <p:nvPr/>
+        </p:nvSpPr>
+        <p:spPr>
+          <a:xfrm>
+            <a:off x="2938272" y="2752344"/>
+            <a:ext cx="1828800" cy="182880"/>
+          </a:xfrm>
+          <a:prstGeom prst="rect">
+            <a:avLst/>
+          </a:prstGeom>
+          <a:noFill/>
+          <a:ln/>
+        </p:spPr>
+        <p:txBody>
+          <a:bodyPr wrap="square" lIns="0" tIns="0" rIns="0" bIns="0" rtlCol="0" anchor="t"/>
+          <a:lstStyle/>
+          <a:p>
+            <a:pPr algn="ctr" indent="0" marL="0">
+              <a:buNone/>
+            </a:pPr>
+            <a:r>
+              <a:rPr lang="en-US" sz="700" i="1" dirty="0">
+                <a:solidFill>
+                  <a:srgbClr val="94A3B8"/>
+                </a:solidFill>
+                <a:latin typeface="Calibri" pitchFamily="34" charset="0"/>
+                <a:ea typeface="Calibri" pitchFamily="34" charset="-122"/>
+                <a:cs typeface="Calibri" pitchFamily="34" charset="-120"/>
+              </a:rPr>
+              <a:t>'e' dropped before vowel suffix</a:t>
+            </a:r>
+            <a:endParaRPr lang="en-US" sz="700" dirty="0"/>
+          </a:p>
+        </p:txBody>
+      </p:sp>
+      <p:sp>
+        <p:nvSpPr>
+          <p:cNvPr id="20" name="Shape 18"/>
           <p:cNvSpPr/>
           <p:nvPr/>
         </p:nvSpPr>
@@ -25245,11 +26001,11 @@
             </a:avLst>
           </a:prstGeom>
           <a:solidFill>
-            <a:srgbClr val="CCFBF1"/>
+            <a:srgbClr val="FCE7F3"/>
           </a:solidFill>
           <a:ln w="19050">
             <a:solidFill>
-              <a:srgbClr val="0D9488"/>
+              <a:srgbClr val="DB2777"/>
             </a:solidFill>
             <a:prstDash val="solid"/>
           </a:ln>
@@ -25264,7 +26020,7 @@
       </p:sp>
       <p:sp>
         <p:nvSpPr>
-          <p:cNvPr id="20" name="Text 18"/>
+          <p:cNvPr id="21" name="Text 19"/>
           <p:cNvSpPr/>
           <p:nvPr/>
         </p:nvSpPr>
@@ -25289,13 +26045,13 @@
             <a:r>
               <a:rPr lang="en-US" sz="1300" b="1" dirty="0">
                 <a:solidFill>
-                  <a:srgbClr val="0F766E"/>
+                  <a:srgbClr val="9D174D"/>
                 </a:solidFill>
                 <a:latin typeface="Trebuchet MS" pitchFamily="34" charset="0"/>
                 <a:ea typeface="Trebuchet MS" pitchFamily="34" charset="-122"/>
                 <a:cs typeface="Trebuchet MS" pitchFamily="34" charset="-120"/>
               </a:rPr>
-              <a:t>taste</a:t>
+              <a:t>ing</a:t>
             </a:r>
             <a:endParaRPr lang="en-US" sz="1300" dirty="0"/>
           </a:p>
@@ -25303,7 +26059,7 @@
       </p:sp>
       <p:sp>
         <p:nvSpPr>
-          <p:cNvPr id="21" name="Text 19"/>
+          <p:cNvPr id="22" name="Text 20"/>
           <p:cNvSpPr/>
           <p:nvPr/>
         </p:nvSpPr>
@@ -25334,7 +26090,7 @@
                 <a:ea typeface="Calibri" pitchFamily="34" charset="-122"/>
                 <a:cs typeface="Calibri" pitchFamily="34" charset="-120"/>
               </a:rPr>
-              <a:t>to sense flavour or quality</a:t>
+              <a:t>action in progress</a:t>
             </a:r>
             <a:endParaRPr lang="en-US" sz="850" dirty="0"/>
           </a:p>
@@ -25342,7 +26098,7 @@
       </p:sp>
       <p:sp>
         <p:nvSpPr>
-          <p:cNvPr id="22" name="Shape 20"/>
+          <p:cNvPr id="23" name="Shape 21"/>
           <p:cNvSpPr/>
           <p:nvPr/>
         </p:nvSpPr>
@@ -25369,7 +26125,7 @@
       </p:sp>
       <p:sp>
         <p:nvSpPr>
-          <p:cNvPr id="23" name="Text 21"/>
+          <p:cNvPr id="24" name="Text 22"/>
           <p:cNvSpPr/>
           <p:nvPr/>
         </p:nvSpPr>
@@ -25408,7 +26164,7 @@
       </p:sp>
       <p:sp>
         <p:nvSpPr>
-          <p:cNvPr id="24" name="Shape 22"/>
+          <p:cNvPr id="25" name="Shape 23"/>
           <p:cNvSpPr/>
           <p:nvPr/>
         </p:nvSpPr>
@@ -25435,13 +26191,13 @@
       </p:sp>
       <p:sp>
         <p:nvSpPr>
-          <p:cNvPr id="25" name="Shape 23"/>
-          <p:cNvSpPr/>
-          <p:nvPr/>
-        </p:nvSpPr>
-        <p:spPr>
-          <a:xfrm>
-            <a:off x="2313432" y="3364992"/>
+          <p:cNvPr id="26" name="Shape 24"/>
+          <p:cNvSpPr/>
+          <p:nvPr/>
+        </p:nvSpPr>
+        <p:spPr>
+          <a:xfrm>
+            <a:off x="2999232" y="3364992"/>
             <a:ext cx="1645920" cy="475488"/>
           </a:xfrm>
           <a:prstGeom prst="rect">
@@ -25462,13 +26218,13 @@
       </p:sp>
       <p:sp>
         <p:nvSpPr>
-          <p:cNvPr id="26" name="Text 24"/>
-          <p:cNvSpPr/>
-          <p:nvPr/>
-        </p:nvSpPr>
-        <p:spPr>
-          <a:xfrm>
-            <a:off x="2313432" y="3364992"/>
+          <p:cNvPr id="27" name="Text 25"/>
+          <p:cNvSpPr/>
+          <p:nvPr/>
+        </p:nvSpPr>
+        <p:spPr>
+          <a:xfrm>
+            <a:off x="2999232" y="3364992"/>
             <a:ext cx="1645920" cy="475488"/>
           </a:xfrm>
           <a:prstGeom prst="rect">
@@ -25493,7 +26249,7 @@
                 <a:ea typeface="Trebuchet MS" pitchFamily="34" charset="-122"/>
                 <a:cs typeface="Trebuchet MS" pitchFamily="34" charset="-120"/>
               </a:rPr>
-              <a:t>af</a:t>
+              <a:t>tast</a:t>
             </a:r>
             <a:endParaRPr lang="en-US" sz="1400" dirty="0"/>
           </a:p>
@@ -25501,14 +26257,14 @@
       </p:sp>
       <p:sp>
         <p:nvSpPr>
-          <p:cNvPr id="27" name="Text 25"/>
-          <p:cNvSpPr/>
-          <p:nvPr/>
-        </p:nvSpPr>
-        <p:spPr>
-          <a:xfrm>
-            <a:off x="3959352" y="3364992"/>
-            <a:ext cx="411480" cy="475488"/>
+          <p:cNvPr id="28" name="Text 26"/>
+          <p:cNvSpPr/>
+          <p:nvPr/>
+        </p:nvSpPr>
+        <p:spPr>
+          <a:xfrm>
+            <a:off x="4645152" y="3364992"/>
+            <a:ext cx="1097280" cy="475488"/>
           </a:xfrm>
           <a:prstGeom prst="rect">
             <a:avLst/>
@@ -25540,13 +26296,13 @@
       </p:sp>
       <p:sp>
         <p:nvSpPr>
-          <p:cNvPr id="28" name="Shape 26"/>
-          <p:cNvSpPr/>
-          <p:nvPr/>
-        </p:nvSpPr>
-        <p:spPr>
-          <a:xfrm>
-            <a:off x="4370832" y="3364992"/>
+          <p:cNvPr id="29" name="Shape 27"/>
+          <p:cNvSpPr/>
+          <p:nvPr/>
+        </p:nvSpPr>
+        <p:spPr>
+          <a:xfrm>
+            <a:off x="5742432" y="3364992"/>
             <a:ext cx="1645920" cy="475488"/>
           </a:xfrm>
           <a:prstGeom prst="rect">
@@ -25567,13 +26323,13 @@
       </p:sp>
       <p:sp>
         <p:nvSpPr>
-          <p:cNvPr id="29" name="Text 27"/>
-          <p:cNvSpPr/>
-          <p:nvPr/>
-        </p:nvSpPr>
-        <p:spPr>
-          <a:xfrm>
-            <a:off x="4370832" y="3364992"/>
+          <p:cNvPr id="30" name="Text 28"/>
+          <p:cNvSpPr/>
+          <p:nvPr/>
+        </p:nvSpPr>
+        <p:spPr>
+          <a:xfrm>
+            <a:off x="5742432" y="3364992"/>
             <a:ext cx="1645920" cy="475488"/>
           </a:xfrm>
           <a:prstGeom prst="rect">
@@ -25598,7 +26354,7 @@
                 <a:ea typeface="Trebuchet MS" pitchFamily="34" charset="-122"/>
                 <a:cs typeface="Trebuchet MS" pitchFamily="34" charset="-120"/>
               </a:rPr>
-              <a:t>ter</a:t>
+              <a:t>ing</a:t>
             </a:r>
             <a:endParaRPr lang="en-US" sz="1400" dirty="0"/>
           </a:p>
@@ -25606,14 +26362,41 @@
       </p:sp>
       <p:sp>
         <p:nvSpPr>
-          <p:cNvPr id="30" name="Text 28"/>
-          <p:cNvSpPr/>
-          <p:nvPr/>
-        </p:nvSpPr>
-        <p:spPr>
-          <a:xfrm>
-            <a:off x="6016752" y="3364992"/>
-            <a:ext cx="411480" cy="475488"/>
+          <p:cNvPr id="31" name="Shape 29"/>
+          <p:cNvSpPr/>
+          <p:nvPr/>
+        </p:nvSpPr>
+        <p:spPr>
+          <a:xfrm>
+            <a:off x="365760" y="4096512"/>
+            <a:ext cx="1371600" cy="804672"/>
+          </a:xfrm>
+          <a:prstGeom prst="rect">
+            <a:avLst>
+              <a:gd name="adj" fmla="val 6818"/>
+            </a:avLst>
+          </a:prstGeom>
+          <a:solidFill>
+            <a:srgbClr val="E2E8F0"/>
+          </a:solidFill>
+          <a:ln w="12700">
+            <a:solidFill>
+              <a:srgbClr val="E2E8F0"/>
+            </a:solidFill>
+            <a:prstDash val="solid"/>
+          </a:ln>
+        </p:spPr>
+      </p:sp>
+      <p:sp>
+        <p:nvSpPr>
+          <p:cNvPr id="32" name="Text 30"/>
+          <p:cNvSpPr/>
+          <p:nvPr/>
+        </p:nvSpPr>
+        <p:spPr>
+          <a:xfrm>
+            <a:off x="365760" y="4096512"/>
+            <a:ext cx="1371600" cy="804672"/>
           </a:xfrm>
           <a:prstGeom prst="rect">
             <a:avLst/>
@@ -25629,83 +26412,17 @@
               <a:buNone/>
             </a:pPr>
             <a:r>
-              <a:rPr lang="en-US" sz="1600" b="1" dirty="0">
-                <a:solidFill>
-                  <a:srgbClr val="0D9488"/>
+              <a:rPr lang="en-US" sz="1100" b="1" dirty="0">
+                <a:solidFill>
+                  <a:srgbClr val="475569"/>
                 </a:solidFill>
                 <a:latin typeface="Trebuchet MS" pitchFamily="34" charset="0"/>
                 <a:ea typeface="Trebuchet MS" pitchFamily="34" charset="-122"/>
                 <a:cs typeface="Trebuchet MS" pitchFamily="34" charset="-120"/>
               </a:rPr>
-              <a:t>·</a:t>
-            </a:r>
-            <a:endParaRPr lang="en-US" sz="1600" dirty="0"/>
-          </a:p>
-        </p:txBody>
-      </p:sp>
-      <p:sp>
-        <p:nvSpPr>
-          <p:cNvPr id="31" name="Shape 29"/>
-          <p:cNvSpPr/>
-          <p:nvPr/>
-        </p:nvSpPr>
-        <p:spPr>
-          <a:xfrm>
-            <a:off x="6428232" y="3364992"/>
-            <a:ext cx="1645920" cy="475488"/>
-          </a:xfrm>
-          <a:prstGeom prst="rect">
-            <a:avLst>
-              <a:gd name="adj" fmla="val 9615"/>
-            </a:avLst>
-          </a:prstGeom>
-          <a:solidFill>
-            <a:srgbClr val="FFFFFF"/>
-          </a:solidFill>
-          <a:ln w="12700">
-            <a:solidFill>
-              <a:srgbClr val="0D9488"/>
-            </a:solidFill>
-            <a:prstDash val="solid"/>
-          </a:ln>
-        </p:spPr>
-      </p:sp>
-      <p:sp>
-        <p:nvSpPr>
-          <p:cNvPr id="32" name="Text 30"/>
-          <p:cNvSpPr/>
-          <p:nvPr/>
-        </p:nvSpPr>
-        <p:spPr>
-          <a:xfrm>
-            <a:off x="6428232" y="3364992"/>
-            <a:ext cx="1645920" cy="475488"/>
-          </a:xfrm>
-          <a:prstGeom prst="rect">
-            <a:avLst/>
-          </a:prstGeom>
-          <a:noFill/>
-          <a:ln/>
-        </p:spPr>
-        <p:txBody>
-          <a:bodyPr wrap="square" lIns="0" tIns="0" rIns="0" bIns="0" rtlCol="0" anchor="ctr"/>
-          <a:lstStyle/>
-          <a:p>
-            <a:pPr algn="ctr" indent="0" marL="0">
-              <a:buNone/>
-            </a:pPr>
-            <a:r>
-              <a:rPr lang="en-US" sz="1400" b="1" dirty="0">
-                <a:solidFill>
-                  <a:srgbClr val="0D9488"/>
-                </a:solidFill>
-                <a:latin typeface="Trebuchet MS" pitchFamily="34" charset="0"/>
-                <a:ea typeface="Trebuchet MS" pitchFamily="34" charset="-122"/>
-                <a:cs typeface="Trebuchet MS" pitchFamily="34" charset="-120"/>
-              </a:rPr>
-              <a:t>taste</a:t>
-            </a:r>
-            <a:endParaRPr lang="en-US" sz="1400" dirty="0"/>
+              <a:t>Phonemes</a:t>
+            </a:r>
+            <a:endParaRPr lang="en-US" sz="1100" dirty="0"/>
           </a:p>
         </p:txBody>
       </p:sp>
@@ -25717,8 +26434,8 @@
         </p:nvSpPr>
         <p:spPr>
           <a:xfrm>
-            <a:off x="365760" y="4096512"/>
-            <a:ext cx="1371600" cy="804672"/>
+            <a:off x="1874520" y="4096512"/>
+            <a:ext cx="6903720" cy="804672"/>
           </a:xfrm>
           <a:prstGeom prst="rect">
             <a:avLst>
@@ -25726,85 +26443,19 @@
             </a:avLst>
           </a:prstGeom>
           <a:solidFill>
-            <a:srgbClr val="E2E8F0"/>
+            <a:srgbClr val="F8FAFC"/>
           </a:solidFill>
           <a:ln w="12700">
             <a:solidFill>
               <a:srgbClr val="E2E8F0"/>
             </a:solidFill>
-            <a:prstDash val="solid"/>
+            <a:prstDash val="dash"/>
           </a:ln>
         </p:spPr>
       </p:sp>
       <p:sp>
         <p:nvSpPr>
           <p:cNvPr id="34" name="Text 32"/>
-          <p:cNvSpPr/>
-          <p:nvPr/>
-        </p:nvSpPr>
-        <p:spPr>
-          <a:xfrm>
-            <a:off x="365760" y="4096512"/>
-            <a:ext cx="1371600" cy="804672"/>
-          </a:xfrm>
-          <a:prstGeom prst="rect">
-            <a:avLst/>
-          </a:prstGeom>
-          <a:noFill/>
-          <a:ln/>
-        </p:spPr>
-        <p:txBody>
-          <a:bodyPr wrap="square" lIns="0" tIns="0" rIns="0" bIns="0" rtlCol="0" anchor="ctr"/>
-          <a:lstStyle/>
-          <a:p>
-            <a:pPr algn="ctr" indent="0" marL="0">
-              <a:buNone/>
-            </a:pPr>
-            <a:r>
-              <a:rPr lang="en-US" sz="1100" b="1" dirty="0">
-                <a:solidFill>
-                  <a:srgbClr val="475569"/>
-                </a:solidFill>
-                <a:latin typeface="Trebuchet MS" pitchFamily="34" charset="0"/>
-                <a:ea typeface="Trebuchet MS" pitchFamily="34" charset="-122"/>
-                <a:cs typeface="Trebuchet MS" pitchFamily="34" charset="-120"/>
-              </a:rPr>
-              <a:t>Phonemes</a:t>
-            </a:r>
-            <a:endParaRPr lang="en-US" sz="1100" dirty="0"/>
-          </a:p>
-        </p:txBody>
-      </p:sp>
-      <p:sp>
-        <p:nvSpPr>
-          <p:cNvPr id="35" name="Shape 33"/>
-          <p:cNvSpPr/>
-          <p:nvPr/>
-        </p:nvSpPr>
-        <p:spPr>
-          <a:xfrm>
-            <a:off x="1874520" y="4096512"/>
-            <a:ext cx="6903720" cy="804672"/>
-          </a:xfrm>
-          <a:prstGeom prst="rect">
-            <a:avLst>
-              <a:gd name="adj" fmla="val 6818"/>
-            </a:avLst>
-          </a:prstGeom>
-          <a:solidFill>
-            <a:srgbClr val="F8FAFC"/>
-          </a:solidFill>
-          <a:ln w="12700">
-            <a:solidFill>
-              <a:srgbClr val="E2E8F0"/>
-            </a:solidFill>
-            <a:prstDash val="dash"/>
-          </a:ln>
-        </p:spPr>
-      </p:sp>
-      <p:sp>
-        <p:nvSpPr>
-          <p:cNvPr id="36" name="Text 34"/>
           <p:cNvSpPr/>
           <p:nvPr/>
         </p:nvSpPr>
@@ -26266,7 +26917,7 @@
                 <a:ea typeface="Trebuchet MS" pitchFamily="34" charset="-122"/>
                 <a:cs typeface="Trebuchet MS" pitchFamily="34" charset="-120"/>
               </a:rPr>
-              <a:t>aftertaste</a:t>
+              <a:t>tasting</a:t>
             </a:r>
             <a:endParaRPr lang="en-US" sz="2800" dirty="0"/>
           </a:p>
@@ -26355,11 +27006,11 @@
             </a:avLst>
           </a:prstGeom>
           <a:solidFill>
-            <a:srgbClr val="DDD6FE"/>
+            <a:srgbClr val="CCFBF1"/>
           </a:solidFill>
           <a:ln w="19050">
             <a:solidFill>
-              <a:srgbClr val="7C3AED"/>
+              <a:srgbClr val="0D9488"/>
             </a:solidFill>
             <a:prstDash val="solid"/>
           </a:ln>
@@ -26399,13 +27050,13 @@
             <a:r>
               <a:rPr lang="en-US" sz="1300" b="1" dirty="0">
                 <a:solidFill>
-                  <a:srgbClr val="4C1D95"/>
+                  <a:srgbClr val="0F766E"/>
                 </a:solidFill>
                 <a:latin typeface="Trebuchet MS" pitchFamily="34" charset="0"/>
                 <a:ea typeface="Trebuchet MS" pitchFamily="34" charset="-122"/>
                 <a:cs typeface="Trebuchet MS" pitchFamily="34" charset="-120"/>
               </a:rPr>
-              <a:t>after</a:t>
+              <a:t>taste</a:t>
             </a:r>
             <a:endParaRPr lang="en-US" sz="1300" dirty="0"/>
           </a:p>
@@ -26444,7 +27095,7 @@
                 <a:ea typeface="Calibri" pitchFamily="34" charset="-122"/>
                 <a:cs typeface="Calibri" pitchFamily="34" charset="-120"/>
               </a:rPr>
-              <a:t>following, behind</a:t>
+              <a:t>to sense flavour or quality</a:t>
             </a:r>
             <a:endParaRPr lang="en-US" sz="850" dirty="0"/>
           </a:p>
@@ -26452,7 +27103,46 @@
       </p:sp>
       <p:sp>
         <p:nvSpPr>
-          <p:cNvPr id="19" name="Shape 17"/>
+          <p:cNvPr id="19" name="Text 17"/>
+          <p:cNvSpPr/>
+          <p:nvPr/>
+        </p:nvSpPr>
+        <p:spPr>
+          <a:xfrm>
+            <a:off x="2938272" y="2752344"/>
+            <a:ext cx="1828800" cy="182880"/>
+          </a:xfrm>
+          <a:prstGeom prst="rect">
+            <a:avLst/>
+          </a:prstGeom>
+          <a:noFill/>
+          <a:ln/>
+        </p:spPr>
+        <p:txBody>
+          <a:bodyPr wrap="square" lIns="0" tIns="0" rIns="0" bIns="0" rtlCol="0" anchor="t"/>
+          <a:lstStyle/>
+          <a:p>
+            <a:pPr algn="ctr" indent="0" marL="0">
+              <a:buNone/>
+            </a:pPr>
+            <a:r>
+              <a:rPr lang="en-US" sz="700" i="1" dirty="0">
+                <a:solidFill>
+                  <a:srgbClr val="94A3B8"/>
+                </a:solidFill>
+                <a:latin typeface="Calibri" pitchFamily="34" charset="0"/>
+                <a:ea typeface="Calibri" pitchFamily="34" charset="-122"/>
+                <a:cs typeface="Calibri" pitchFamily="34" charset="-120"/>
+              </a:rPr>
+              <a:t>'e' dropped before vowel suffix</a:t>
+            </a:r>
+            <a:endParaRPr lang="en-US" sz="700" dirty="0"/>
+          </a:p>
+        </p:txBody>
+      </p:sp>
+      <p:sp>
+        <p:nvSpPr>
+          <p:cNvPr id="20" name="Shape 18"/>
           <p:cNvSpPr/>
           <p:nvPr/>
         </p:nvSpPr>
@@ -26467,11 +27157,11 @@
             </a:avLst>
           </a:prstGeom>
           <a:solidFill>
-            <a:srgbClr val="CCFBF1"/>
+            <a:srgbClr val="FCE7F3"/>
           </a:solidFill>
           <a:ln w="19050">
             <a:solidFill>
-              <a:srgbClr val="0D9488"/>
+              <a:srgbClr val="DB2777"/>
             </a:solidFill>
             <a:prstDash val="solid"/>
           </a:ln>
@@ -26486,7 +27176,7 @@
       </p:sp>
       <p:sp>
         <p:nvSpPr>
-          <p:cNvPr id="20" name="Text 18"/>
+          <p:cNvPr id="21" name="Text 19"/>
           <p:cNvSpPr/>
           <p:nvPr/>
         </p:nvSpPr>
@@ -26511,13 +27201,13 @@
             <a:r>
               <a:rPr lang="en-US" sz="1300" b="1" dirty="0">
                 <a:solidFill>
-                  <a:srgbClr val="0F766E"/>
+                  <a:srgbClr val="9D174D"/>
                 </a:solidFill>
                 <a:latin typeface="Trebuchet MS" pitchFamily="34" charset="0"/>
                 <a:ea typeface="Trebuchet MS" pitchFamily="34" charset="-122"/>
                 <a:cs typeface="Trebuchet MS" pitchFamily="34" charset="-120"/>
               </a:rPr>
-              <a:t>taste</a:t>
+              <a:t>ing</a:t>
             </a:r>
             <a:endParaRPr lang="en-US" sz="1300" dirty="0"/>
           </a:p>
@@ -26525,7 +27215,7 @@
       </p:sp>
       <p:sp>
         <p:nvSpPr>
-          <p:cNvPr id="21" name="Text 19"/>
+          <p:cNvPr id="22" name="Text 20"/>
           <p:cNvSpPr/>
           <p:nvPr/>
         </p:nvSpPr>
@@ -26556,7 +27246,7 @@
                 <a:ea typeface="Calibri" pitchFamily="34" charset="-122"/>
                 <a:cs typeface="Calibri" pitchFamily="34" charset="-120"/>
               </a:rPr>
-              <a:t>to sense flavour or quality</a:t>
+              <a:t>action in progress</a:t>
             </a:r>
             <a:endParaRPr lang="en-US" sz="850" dirty="0"/>
           </a:p>
@@ -26564,7 +27254,7 @@
       </p:sp>
       <p:sp>
         <p:nvSpPr>
-          <p:cNvPr id="22" name="Shape 20"/>
+          <p:cNvPr id="23" name="Shape 21"/>
           <p:cNvSpPr/>
           <p:nvPr/>
         </p:nvSpPr>
@@ -26591,7 +27281,7 @@
       </p:sp>
       <p:sp>
         <p:nvSpPr>
-          <p:cNvPr id="23" name="Text 21"/>
+          <p:cNvPr id="24" name="Text 22"/>
           <p:cNvSpPr/>
           <p:nvPr/>
         </p:nvSpPr>
@@ -26630,7 +27320,7 @@
       </p:sp>
       <p:sp>
         <p:nvSpPr>
-          <p:cNvPr id="24" name="Shape 22"/>
+          <p:cNvPr id="25" name="Shape 23"/>
           <p:cNvSpPr/>
           <p:nvPr/>
         </p:nvSpPr>
@@ -26657,13 +27347,13 @@
       </p:sp>
       <p:sp>
         <p:nvSpPr>
-          <p:cNvPr id="25" name="Shape 23"/>
-          <p:cNvSpPr/>
-          <p:nvPr/>
-        </p:nvSpPr>
-        <p:spPr>
-          <a:xfrm>
-            <a:off x="2313432" y="3364992"/>
+          <p:cNvPr id="26" name="Shape 24"/>
+          <p:cNvSpPr/>
+          <p:nvPr/>
+        </p:nvSpPr>
+        <p:spPr>
+          <a:xfrm>
+            <a:off x="2999232" y="3364992"/>
             <a:ext cx="1645920" cy="475488"/>
           </a:xfrm>
           <a:prstGeom prst="rect">
@@ -26684,13 +27374,13 @@
       </p:sp>
       <p:sp>
         <p:nvSpPr>
-          <p:cNvPr id="26" name="Text 24"/>
-          <p:cNvSpPr/>
-          <p:nvPr/>
-        </p:nvSpPr>
-        <p:spPr>
-          <a:xfrm>
-            <a:off x="2313432" y="3364992"/>
+          <p:cNvPr id="27" name="Text 25"/>
+          <p:cNvSpPr/>
+          <p:nvPr/>
+        </p:nvSpPr>
+        <p:spPr>
+          <a:xfrm>
+            <a:off x="2999232" y="3364992"/>
             <a:ext cx="1645920" cy="475488"/>
           </a:xfrm>
           <a:prstGeom prst="rect">
@@ -26715,7 +27405,7 @@
                 <a:ea typeface="Trebuchet MS" pitchFamily="34" charset="-122"/>
                 <a:cs typeface="Trebuchet MS" pitchFamily="34" charset="-120"/>
               </a:rPr>
-              <a:t>af</a:t>
+              <a:t>tast</a:t>
             </a:r>
             <a:endParaRPr lang="en-US" sz="1400" dirty="0"/>
           </a:p>
@@ -26723,14 +27413,14 @@
       </p:sp>
       <p:sp>
         <p:nvSpPr>
-          <p:cNvPr id="27" name="Text 25"/>
-          <p:cNvSpPr/>
-          <p:nvPr/>
-        </p:nvSpPr>
-        <p:spPr>
-          <a:xfrm>
-            <a:off x="3959352" y="3364992"/>
-            <a:ext cx="411480" cy="475488"/>
+          <p:cNvPr id="28" name="Text 26"/>
+          <p:cNvSpPr/>
+          <p:nvPr/>
+        </p:nvSpPr>
+        <p:spPr>
+          <a:xfrm>
+            <a:off x="4645152" y="3364992"/>
+            <a:ext cx="1097280" cy="475488"/>
           </a:xfrm>
           <a:prstGeom prst="rect">
             <a:avLst/>
@@ -26762,13 +27452,13 @@
       </p:sp>
       <p:sp>
         <p:nvSpPr>
-          <p:cNvPr id="28" name="Shape 26"/>
-          <p:cNvSpPr/>
-          <p:nvPr/>
-        </p:nvSpPr>
-        <p:spPr>
-          <a:xfrm>
-            <a:off x="4370832" y="3364992"/>
+          <p:cNvPr id="29" name="Shape 27"/>
+          <p:cNvSpPr/>
+          <p:nvPr/>
+        </p:nvSpPr>
+        <p:spPr>
+          <a:xfrm>
+            <a:off x="5742432" y="3364992"/>
             <a:ext cx="1645920" cy="475488"/>
           </a:xfrm>
           <a:prstGeom prst="rect">
@@ -26789,13 +27479,13 @@
       </p:sp>
       <p:sp>
         <p:nvSpPr>
-          <p:cNvPr id="29" name="Text 27"/>
-          <p:cNvSpPr/>
-          <p:nvPr/>
-        </p:nvSpPr>
-        <p:spPr>
-          <a:xfrm>
-            <a:off x="4370832" y="3364992"/>
+          <p:cNvPr id="30" name="Text 28"/>
+          <p:cNvSpPr/>
+          <p:nvPr/>
+        </p:nvSpPr>
+        <p:spPr>
+          <a:xfrm>
+            <a:off x="5742432" y="3364992"/>
             <a:ext cx="1645920" cy="475488"/>
           </a:xfrm>
           <a:prstGeom prst="rect">
@@ -26820,7 +27510,7 @@
                 <a:ea typeface="Trebuchet MS" pitchFamily="34" charset="-122"/>
                 <a:cs typeface="Trebuchet MS" pitchFamily="34" charset="-120"/>
               </a:rPr>
-              <a:t>ter</a:t>
+              <a:t>ing</a:t>
             </a:r>
             <a:endParaRPr lang="en-US" sz="1400" dirty="0"/>
           </a:p>
@@ -26828,14 +27518,41 @@
       </p:sp>
       <p:sp>
         <p:nvSpPr>
-          <p:cNvPr id="30" name="Text 28"/>
-          <p:cNvSpPr/>
-          <p:nvPr/>
-        </p:nvSpPr>
-        <p:spPr>
-          <a:xfrm>
-            <a:off x="6016752" y="3364992"/>
-            <a:ext cx="411480" cy="475488"/>
+          <p:cNvPr id="31" name="Shape 29"/>
+          <p:cNvSpPr/>
+          <p:nvPr/>
+        </p:nvSpPr>
+        <p:spPr>
+          <a:xfrm>
+            <a:off x="365760" y="4096512"/>
+            <a:ext cx="1371600" cy="804672"/>
+          </a:xfrm>
+          <a:prstGeom prst="rect">
+            <a:avLst>
+              <a:gd name="adj" fmla="val 6818"/>
+            </a:avLst>
+          </a:prstGeom>
+          <a:solidFill>
+            <a:srgbClr val="E2E8F0"/>
+          </a:solidFill>
+          <a:ln w="12700">
+            <a:solidFill>
+              <a:srgbClr val="E2E8F0"/>
+            </a:solidFill>
+            <a:prstDash val="solid"/>
+          </a:ln>
+        </p:spPr>
+      </p:sp>
+      <p:sp>
+        <p:nvSpPr>
+          <p:cNvPr id="32" name="Text 30"/>
+          <p:cNvSpPr/>
+          <p:nvPr/>
+        </p:nvSpPr>
+        <p:spPr>
+          <a:xfrm>
+            <a:off x="365760" y="4096512"/>
+            <a:ext cx="1371600" cy="804672"/>
           </a:xfrm>
           <a:prstGeom prst="rect">
             <a:avLst/>
@@ -26851,57 +27568,84 @@
               <a:buNone/>
             </a:pPr>
             <a:r>
-              <a:rPr lang="en-US" sz="1600" b="1" dirty="0">
-                <a:solidFill>
-                  <a:srgbClr val="0D9488"/>
+              <a:rPr lang="en-US" sz="1100" b="1" dirty="0">
+                <a:solidFill>
+                  <a:srgbClr val="475569"/>
                 </a:solidFill>
                 <a:latin typeface="Trebuchet MS" pitchFamily="34" charset="0"/>
                 <a:ea typeface="Trebuchet MS" pitchFamily="34" charset="-122"/>
                 <a:cs typeface="Trebuchet MS" pitchFamily="34" charset="-120"/>
               </a:rPr>
-              <a:t>·</a:t>
-            </a:r>
-            <a:endParaRPr lang="en-US" sz="1600" dirty="0"/>
-          </a:p>
-        </p:txBody>
-      </p:sp>
-      <p:sp>
-        <p:nvSpPr>
-          <p:cNvPr id="31" name="Shape 29"/>
-          <p:cNvSpPr/>
-          <p:nvPr/>
-        </p:nvSpPr>
-        <p:spPr>
-          <a:xfrm>
-            <a:off x="6428232" y="3364992"/>
-            <a:ext cx="1645920" cy="475488"/>
+              <a:t>Phonemes</a:t>
+            </a:r>
+            <a:endParaRPr lang="en-US" sz="1100" dirty="0"/>
+          </a:p>
+        </p:txBody>
+      </p:sp>
+      <p:sp>
+        <p:nvSpPr>
+          <p:cNvPr id="33" name="Shape 31"/>
+          <p:cNvSpPr/>
+          <p:nvPr/>
+        </p:nvSpPr>
+        <p:spPr>
+          <a:xfrm>
+            <a:off x="1874520" y="4096512"/>
+            <a:ext cx="6903720" cy="804672"/>
           </a:xfrm>
           <a:prstGeom prst="rect">
             <a:avLst>
-              <a:gd name="adj" fmla="val 9615"/>
+              <a:gd name="adj" fmla="val 6818"/>
             </a:avLst>
           </a:prstGeom>
           <a:solidFill>
+            <a:srgbClr val="FCE7F3"/>
+          </a:solidFill>
+          <a:ln w="12700">
+            <a:solidFill>
+              <a:srgbClr val="DB2777"/>
+            </a:solidFill>
+            <a:prstDash val="solid"/>
+          </a:ln>
+        </p:spPr>
+      </p:sp>
+      <p:sp>
+        <p:nvSpPr>
+          <p:cNvPr id="34" name="Shape 32"/>
+          <p:cNvSpPr/>
+          <p:nvPr/>
+        </p:nvSpPr>
+        <p:spPr>
+          <a:xfrm>
+            <a:off x="2254649" y="4169664"/>
+            <a:ext cx="685800" cy="384048"/>
+          </a:xfrm>
+          <a:prstGeom prst="rect">
+            <a:avLst>
+              <a:gd name="adj" fmla="val 9524"/>
+            </a:avLst>
+          </a:prstGeom>
+          <a:solidFill>
             <a:srgbClr val="FFFFFF"/>
           </a:solidFill>
           <a:ln w="12700">
             <a:solidFill>
-              <a:srgbClr val="0D9488"/>
-            </a:solidFill>
-            <a:prstDash val="solid"/>
-          </a:ln>
-        </p:spPr>
-      </p:sp>
-      <p:sp>
-        <p:nvSpPr>
-          <p:cNvPr id="32" name="Text 30"/>
-          <p:cNvSpPr/>
-          <p:nvPr/>
-        </p:nvSpPr>
-        <p:spPr>
-          <a:xfrm>
-            <a:off x="6428232" y="3364992"/>
-            <a:ext cx="1645920" cy="475488"/>
+              <a:srgbClr val="DB2777"/>
+            </a:solidFill>
+            <a:prstDash val="solid"/>
+          </a:ln>
+        </p:spPr>
+      </p:sp>
+      <p:sp>
+        <p:nvSpPr>
+          <p:cNvPr id="35" name="Text 33"/>
+          <p:cNvSpPr/>
+          <p:nvPr/>
+        </p:nvSpPr>
+        <p:spPr>
+          <a:xfrm>
+            <a:off x="2254649" y="4169664"/>
+            <a:ext cx="685800" cy="384048"/>
           </a:xfrm>
           <a:prstGeom prst="rect">
             <a:avLst/>
@@ -26917,57 +27661,57 @@
               <a:buNone/>
             </a:pPr>
             <a:r>
-              <a:rPr lang="en-US" sz="1400" b="1" dirty="0">
-                <a:solidFill>
-                  <a:srgbClr val="0D9488"/>
+              <a:rPr lang="en-US" sz="900" b="1" dirty="0">
+                <a:solidFill>
+                  <a:srgbClr val="9D174D"/>
                 </a:solidFill>
                 <a:latin typeface="Trebuchet MS" pitchFamily="34" charset="0"/>
                 <a:ea typeface="Trebuchet MS" pitchFamily="34" charset="-122"/>
                 <a:cs typeface="Trebuchet MS" pitchFamily="34" charset="-120"/>
               </a:rPr>
-              <a:t>taste</a:t>
-            </a:r>
-            <a:endParaRPr lang="en-US" sz="1400" dirty="0"/>
-          </a:p>
-        </p:txBody>
-      </p:sp>
-      <p:sp>
-        <p:nvSpPr>
-          <p:cNvPr id="33" name="Shape 31"/>
-          <p:cNvSpPr/>
-          <p:nvPr/>
-        </p:nvSpPr>
-        <p:spPr>
-          <a:xfrm>
-            <a:off x="365760" y="4096512"/>
-            <a:ext cx="1371600" cy="804672"/>
+              <a:t>t</a:t>
+            </a:r>
+            <a:endParaRPr lang="en-US" sz="900" dirty="0"/>
+          </a:p>
+        </p:txBody>
+      </p:sp>
+      <p:sp>
+        <p:nvSpPr>
+          <p:cNvPr id="36" name="Shape 34"/>
+          <p:cNvSpPr/>
+          <p:nvPr/>
+        </p:nvSpPr>
+        <p:spPr>
+          <a:xfrm>
+            <a:off x="3293146" y="4169664"/>
+            <a:ext cx="685800" cy="384048"/>
           </a:xfrm>
           <a:prstGeom prst="rect">
             <a:avLst>
-              <a:gd name="adj" fmla="val 6818"/>
+              <a:gd name="adj" fmla="val 9524"/>
             </a:avLst>
           </a:prstGeom>
           <a:solidFill>
-            <a:srgbClr val="E2E8F0"/>
-          </a:solidFill>
-          <a:ln w="12700">
-            <a:solidFill>
-              <a:srgbClr val="E2E8F0"/>
-            </a:solidFill>
-            <a:prstDash val="solid"/>
-          </a:ln>
-        </p:spPr>
-      </p:sp>
-      <p:sp>
-        <p:nvSpPr>
-          <p:cNvPr id="34" name="Text 32"/>
-          <p:cNvSpPr/>
-          <p:nvPr/>
-        </p:nvSpPr>
-        <p:spPr>
-          <a:xfrm>
-            <a:off x="365760" y="4096512"/>
-            <a:ext cx="1371600" cy="804672"/>
+            <a:srgbClr val="FFFFFF"/>
+          </a:solidFill>
+          <a:ln w="12700">
+            <a:solidFill>
+              <a:srgbClr val="DB2777"/>
+            </a:solidFill>
+            <a:prstDash val="solid"/>
+          </a:ln>
+        </p:spPr>
+      </p:sp>
+      <p:sp>
+        <p:nvSpPr>
+          <p:cNvPr id="37" name="Text 35"/>
+          <p:cNvSpPr/>
+          <p:nvPr/>
+        </p:nvSpPr>
+        <p:spPr>
+          <a:xfrm>
+            <a:off x="3293146" y="4169664"/>
+            <a:ext cx="685800" cy="384048"/>
           </a:xfrm>
           <a:prstGeom prst="rect">
             <a:avLst/>
@@ -26983,38 +27727,77 @@
               <a:buNone/>
             </a:pPr>
             <a:r>
-              <a:rPr lang="en-US" sz="1100" b="1" dirty="0">
-                <a:solidFill>
-                  <a:srgbClr val="475569"/>
+              <a:rPr lang="en-US" sz="900" b="1" dirty="0">
+                <a:solidFill>
+                  <a:srgbClr val="9D174D"/>
                 </a:solidFill>
                 <a:latin typeface="Trebuchet MS" pitchFamily="34" charset="0"/>
                 <a:ea typeface="Trebuchet MS" pitchFamily="34" charset="-122"/>
                 <a:cs typeface="Trebuchet MS" pitchFamily="34" charset="-120"/>
               </a:rPr>
-              <a:t>Phonemes</a:t>
-            </a:r>
-            <a:endParaRPr lang="en-US" sz="1100" dirty="0"/>
-          </a:p>
-        </p:txBody>
-      </p:sp>
-      <p:sp>
-        <p:nvSpPr>
-          <p:cNvPr id="35" name="Shape 33"/>
-          <p:cNvSpPr/>
-          <p:nvPr/>
-        </p:nvSpPr>
-        <p:spPr>
-          <a:xfrm>
-            <a:off x="1874520" y="4096512"/>
-            <a:ext cx="6903720" cy="658368"/>
+              <a:t>ay</a:t>
+            </a:r>
+            <a:endParaRPr lang="en-US" sz="900" dirty="0"/>
+          </a:p>
+        </p:txBody>
+      </p:sp>
+      <p:sp>
+        <p:nvSpPr>
+          <p:cNvPr id="38" name="Text 36"/>
+          <p:cNvSpPr/>
+          <p:nvPr/>
+        </p:nvSpPr>
+        <p:spPr>
+          <a:xfrm>
+            <a:off x="3293146" y="4572000"/>
+            <a:ext cx="685800" cy="219456"/>
+          </a:xfrm>
+          <a:prstGeom prst="rect">
+            <a:avLst/>
+          </a:prstGeom>
+          <a:noFill/>
+          <a:ln/>
+        </p:spPr>
+        <p:txBody>
+          <a:bodyPr wrap="square" lIns="0" tIns="0" rIns="0" bIns="0" rtlCol="0" anchor="t"/>
+          <a:lstStyle/>
+          <a:p>
+            <a:pPr algn="ctr" indent="0" marL="0">
+              <a:buNone/>
+            </a:pPr>
+            <a:r>
+              <a:rPr lang="en-US" sz="750" i="1" dirty="0">
+                <a:solidFill>
+                  <a:srgbClr val="94A3B8"/>
+                </a:solidFill>
+                <a:latin typeface="Calibri" pitchFamily="34" charset="0"/>
+                <a:ea typeface="Calibri" pitchFamily="34" charset="-122"/>
+                <a:cs typeface="Calibri" pitchFamily="34" charset="-120"/>
+              </a:rPr>
+              <a:t>/ay/</a:t>
+            </a:r>
+            <a:endParaRPr lang="en-US" sz="750" dirty="0"/>
+          </a:p>
+        </p:txBody>
+      </p:sp>
+      <p:sp>
+        <p:nvSpPr>
+          <p:cNvPr id="39" name="Shape 37"/>
+          <p:cNvSpPr/>
+          <p:nvPr/>
+        </p:nvSpPr>
+        <p:spPr>
+          <a:xfrm>
+            <a:off x="4331643" y="4169664"/>
+            <a:ext cx="685800" cy="384048"/>
           </a:xfrm>
           <a:prstGeom prst="rect">
             <a:avLst>
-              <a:gd name="adj" fmla="val 8333"/>
+              <a:gd name="adj" fmla="val 9524"/>
             </a:avLst>
           </a:prstGeom>
           <a:solidFill>
-            <a:srgbClr val="FCE7F3"/>
+            <a:srgbClr val="FFFFFF"/>
           </a:solidFill>
           <a:ln w="12700">
             <a:solidFill>
@@ -27026,41 +27809,14 @@
       </p:sp>
       <p:sp>
         <p:nvSpPr>
-          <p:cNvPr id="36" name="Shape 34"/>
-          <p:cNvSpPr/>
-          <p:nvPr/>
-        </p:nvSpPr>
-        <p:spPr>
-          <a:xfrm>
-            <a:off x="1951330" y="4169664"/>
-            <a:ext cx="676656" cy="475488"/>
-          </a:xfrm>
-          <a:prstGeom prst="rect">
-            <a:avLst>
-              <a:gd name="adj" fmla="val 7692"/>
-            </a:avLst>
-          </a:prstGeom>
-          <a:solidFill>
-            <a:srgbClr val="FFFFFF"/>
-          </a:solidFill>
-          <a:ln w="12700">
-            <a:solidFill>
-              <a:srgbClr val="DB2777"/>
-            </a:solidFill>
-            <a:prstDash val="solid"/>
-          </a:ln>
-        </p:spPr>
-      </p:sp>
-      <p:sp>
-        <p:nvSpPr>
-          <p:cNvPr id="37" name="Text 35"/>
-          <p:cNvSpPr/>
-          <p:nvPr/>
-        </p:nvSpPr>
-        <p:spPr>
-          <a:xfrm>
-            <a:off x="1951330" y="4169664"/>
-            <a:ext cx="676656" cy="475488"/>
+          <p:cNvPr id="40" name="Text 38"/>
+          <p:cNvSpPr/>
+          <p:nvPr/>
+        </p:nvSpPr>
+        <p:spPr>
+          <a:xfrm>
+            <a:off x="4331643" y="4169664"/>
+            <a:ext cx="685800" cy="384048"/>
           </a:xfrm>
           <a:prstGeom prst="rect">
             <a:avLst/>
@@ -27084,7 +27840,7 @@
                 <a:ea typeface="Trebuchet MS" pitchFamily="34" charset="-122"/>
                 <a:cs typeface="Trebuchet MS" pitchFamily="34" charset="-120"/>
               </a:rPr>
-              <a:t>a</a:t>
+              <a:t>s</a:t>
             </a:r>
             <a:endParaRPr lang="en-US" sz="900" dirty="0"/>
           </a:p>
@@ -27092,18 +27848,18 @@
       </p:sp>
       <p:sp>
         <p:nvSpPr>
-          <p:cNvPr id="38" name="Shape 36"/>
-          <p:cNvSpPr/>
-          <p:nvPr/>
-        </p:nvSpPr>
-        <p:spPr>
-          <a:xfrm>
-            <a:off x="2677363" y="4169664"/>
-            <a:ext cx="676656" cy="475488"/>
+          <p:cNvPr id="41" name="Shape 39"/>
+          <p:cNvSpPr/>
+          <p:nvPr/>
+        </p:nvSpPr>
+        <p:spPr>
+          <a:xfrm>
+            <a:off x="5370141" y="4169664"/>
+            <a:ext cx="685800" cy="384048"/>
           </a:xfrm>
           <a:prstGeom prst="rect">
             <a:avLst>
-              <a:gd name="adj" fmla="val 7692"/>
+              <a:gd name="adj" fmla="val 9524"/>
             </a:avLst>
           </a:prstGeom>
           <a:solidFill>
@@ -27119,14 +27875,14 @@
       </p:sp>
       <p:sp>
         <p:nvSpPr>
-          <p:cNvPr id="39" name="Text 37"/>
-          <p:cNvSpPr/>
-          <p:nvPr/>
-        </p:nvSpPr>
-        <p:spPr>
-          <a:xfrm>
-            <a:off x="2677363" y="4169664"/>
-            <a:ext cx="676656" cy="475488"/>
+          <p:cNvPr id="42" name="Text 40"/>
+          <p:cNvSpPr/>
+          <p:nvPr/>
+        </p:nvSpPr>
+        <p:spPr>
+          <a:xfrm>
+            <a:off x="5370141" y="4169664"/>
+            <a:ext cx="685800" cy="384048"/>
           </a:xfrm>
           <a:prstGeom prst="rect">
             <a:avLst/>
@@ -27150,7 +27906,7 @@
                 <a:ea typeface="Trebuchet MS" pitchFamily="34" charset="-122"/>
                 <a:cs typeface="Trebuchet MS" pitchFamily="34" charset="-120"/>
               </a:rPr>
-              <a:t>f</a:t>
+              <a:t>t</a:t>
             </a:r>
             <a:endParaRPr lang="en-US" sz="900" dirty="0"/>
           </a:p>
@@ -27158,18 +27914,18 @@
       </p:sp>
       <p:sp>
         <p:nvSpPr>
-          <p:cNvPr id="40" name="Shape 38"/>
-          <p:cNvSpPr/>
-          <p:nvPr/>
-        </p:nvSpPr>
-        <p:spPr>
-          <a:xfrm>
-            <a:off x="3403397" y="4169664"/>
-            <a:ext cx="676656" cy="475488"/>
+          <p:cNvPr id="43" name="Shape 41"/>
+          <p:cNvSpPr/>
+          <p:nvPr/>
+        </p:nvSpPr>
+        <p:spPr>
+          <a:xfrm>
+            <a:off x="6408638" y="4169664"/>
+            <a:ext cx="685800" cy="384048"/>
           </a:xfrm>
           <a:prstGeom prst="rect">
             <a:avLst>
-              <a:gd name="adj" fmla="val 7692"/>
+              <a:gd name="adj" fmla="val 9524"/>
             </a:avLst>
           </a:prstGeom>
           <a:solidFill>
@@ -27185,14 +27941,14 @@
       </p:sp>
       <p:sp>
         <p:nvSpPr>
-          <p:cNvPr id="41" name="Text 39"/>
-          <p:cNvSpPr/>
-          <p:nvPr/>
-        </p:nvSpPr>
-        <p:spPr>
-          <a:xfrm>
-            <a:off x="3403397" y="4169664"/>
-            <a:ext cx="676656" cy="475488"/>
+          <p:cNvPr id="44" name="Text 42"/>
+          <p:cNvSpPr/>
+          <p:nvPr/>
+        </p:nvSpPr>
+        <p:spPr>
+          <a:xfrm>
+            <a:off x="6408638" y="4169664"/>
+            <a:ext cx="685800" cy="384048"/>
           </a:xfrm>
           <a:prstGeom prst="rect">
             <a:avLst/>
@@ -27216,7 +27972,7 @@
                 <a:ea typeface="Trebuchet MS" pitchFamily="34" charset="-122"/>
                 <a:cs typeface="Trebuchet MS" pitchFamily="34" charset="-120"/>
               </a:rPr>
-              <a:t>t</a:t>
+              <a:t>i</a:t>
             </a:r>
             <a:endParaRPr lang="en-US" sz="900" dirty="0"/>
           </a:p>
@@ -27224,18 +27980,18 @@
       </p:sp>
       <p:sp>
         <p:nvSpPr>
-          <p:cNvPr id="42" name="Shape 40"/>
-          <p:cNvSpPr/>
-          <p:nvPr/>
-        </p:nvSpPr>
-        <p:spPr>
-          <a:xfrm>
-            <a:off x="4129430" y="4169664"/>
-            <a:ext cx="676656" cy="475488"/>
+          <p:cNvPr id="45" name="Shape 43"/>
+          <p:cNvSpPr/>
+          <p:nvPr/>
+        </p:nvSpPr>
+        <p:spPr>
+          <a:xfrm>
+            <a:off x="7447135" y="4169664"/>
+            <a:ext cx="685800" cy="384048"/>
           </a:xfrm>
           <a:prstGeom prst="rect">
             <a:avLst>
-              <a:gd name="adj" fmla="val 7692"/>
+              <a:gd name="adj" fmla="val 9524"/>
             </a:avLst>
           </a:prstGeom>
           <a:solidFill>
@@ -27251,14 +28007,14 @@
       </p:sp>
       <p:sp>
         <p:nvSpPr>
-          <p:cNvPr id="43" name="Text 41"/>
-          <p:cNvSpPr/>
-          <p:nvPr/>
-        </p:nvSpPr>
-        <p:spPr>
-          <a:xfrm>
-            <a:off x="4129430" y="4169664"/>
-            <a:ext cx="676656" cy="475488"/>
+          <p:cNvPr id="46" name="Text 44"/>
+          <p:cNvSpPr/>
+          <p:nvPr/>
+        </p:nvSpPr>
+        <p:spPr>
+          <a:xfrm>
+            <a:off x="7447135" y="4169664"/>
+            <a:ext cx="685800" cy="384048"/>
           </a:xfrm>
           <a:prstGeom prst="rect">
             <a:avLst/>
@@ -27282,337 +28038,7 @@
                 <a:ea typeface="Trebuchet MS" pitchFamily="34" charset="-122"/>
                 <a:cs typeface="Trebuchet MS" pitchFamily="34" charset="-120"/>
               </a:rPr>
-              <a:t>er</a:t>
-            </a:r>
-            <a:endParaRPr lang="en-US" sz="900" dirty="0"/>
-          </a:p>
-        </p:txBody>
-      </p:sp>
-      <p:sp>
-        <p:nvSpPr>
-          <p:cNvPr id="44" name="Shape 42"/>
-          <p:cNvSpPr/>
-          <p:nvPr/>
-        </p:nvSpPr>
-        <p:spPr>
-          <a:xfrm>
-            <a:off x="4855464" y="4169664"/>
-            <a:ext cx="676656" cy="475488"/>
-          </a:xfrm>
-          <a:prstGeom prst="rect">
-            <a:avLst>
-              <a:gd name="adj" fmla="val 7692"/>
-            </a:avLst>
-          </a:prstGeom>
-          <a:solidFill>
-            <a:srgbClr val="FFFFFF"/>
-          </a:solidFill>
-          <a:ln w="12700">
-            <a:solidFill>
-              <a:srgbClr val="DB2777"/>
-            </a:solidFill>
-            <a:prstDash val="solid"/>
-          </a:ln>
-        </p:spPr>
-      </p:sp>
-      <p:sp>
-        <p:nvSpPr>
-          <p:cNvPr id="45" name="Text 43"/>
-          <p:cNvSpPr/>
-          <p:nvPr/>
-        </p:nvSpPr>
-        <p:spPr>
-          <a:xfrm>
-            <a:off x="4855464" y="4169664"/>
-            <a:ext cx="676656" cy="475488"/>
-          </a:xfrm>
-          <a:prstGeom prst="rect">
-            <a:avLst/>
-          </a:prstGeom>
-          <a:noFill/>
-          <a:ln/>
-        </p:spPr>
-        <p:txBody>
-          <a:bodyPr wrap="square" lIns="0" tIns="0" rIns="0" bIns="0" rtlCol="0" anchor="ctr"/>
-          <a:lstStyle/>
-          <a:p>
-            <a:pPr algn="ctr" indent="0" marL="0">
-              <a:buNone/>
-            </a:pPr>
-            <a:r>
-              <a:rPr lang="en-US" sz="900" b="1" dirty="0">
-                <a:solidFill>
-                  <a:srgbClr val="9D174D"/>
-                </a:solidFill>
-                <a:latin typeface="Trebuchet MS" pitchFamily="34" charset="0"/>
-                <a:ea typeface="Trebuchet MS" pitchFamily="34" charset="-122"/>
-                <a:cs typeface="Trebuchet MS" pitchFamily="34" charset="-120"/>
-              </a:rPr>
-              <a:t>t</a:t>
-            </a:r>
-            <a:endParaRPr lang="en-US" sz="900" dirty="0"/>
-          </a:p>
-        </p:txBody>
-      </p:sp>
-      <p:sp>
-        <p:nvSpPr>
-          <p:cNvPr id="46" name="Shape 44"/>
-          <p:cNvSpPr/>
-          <p:nvPr/>
-        </p:nvSpPr>
-        <p:spPr>
-          <a:xfrm>
-            <a:off x="5581498" y="4169664"/>
-            <a:ext cx="676656" cy="475488"/>
-          </a:xfrm>
-          <a:prstGeom prst="rect">
-            <a:avLst>
-              <a:gd name="adj" fmla="val 7692"/>
-            </a:avLst>
-          </a:prstGeom>
-          <a:solidFill>
-            <a:srgbClr val="FFFFFF"/>
-          </a:solidFill>
-          <a:ln w="12700">
-            <a:solidFill>
-              <a:srgbClr val="DB2777"/>
-            </a:solidFill>
-            <a:prstDash val="solid"/>
-          </a:ln>
-        </p:spPr>
-      </p:sp>
-      <p:sp>
-        <p:nvSpPr>
-          <p:cNvPr id="47" name="Text 45"/>
-          <p:cNvSpPr/>
-          <p:nvPr/>
-        </p:nvSpPr>
-        <p:spPr>
-          <a:xfrm>
-            <a:off x="5581498" y="4169664"/>
-            <a:ext cx="676656" cy="475488"/>
-          </a:xfrm>
-          <a:prstGeom prst="rect">
-            <a:avLst/>
-          </a:prstGeom>
-          <a:noFill/>
-          <a:ln/>
-        </p:spPr>
-        <p:txBody>
-          <a:bodyPr wrap="square" lIns="0" tIns="0" rIns="0" bIns="0" rtlCol="0" anchor="ctr"/>
-          <a:lstStyle/>
-          <a:p>
-            <a:pPr algn="ctr" indent="0" marL="0">
-              <a:buNone/>
-            </a:pPr>
-            <a:r>
-              <a:rPr lang="en-US" sz="900" b="1" dirty="0">
-                <a:solidFill>
-                  <a:srgbClr val="9D174D"/>
-                </a:solidFill>
-                <a:latin typeface="Trebuchet MS" pitchFamily="34" charset="0"/>
-                <a:ea typeface="Trebuchet MS" pitchFamily="34" charset="-122"/>
-                <a:cs typeface="Trebuchet MS" pitchFamily="34" charset="-120"/>
-              </a:rPr>
-              <a:t>a</a:t>
-            </a:r>
-            <a:endParaRPr lang="en-US" sz="900" dirty="0"/>
-          </a:p>
-        </p:txBody>
-      </p:sp>
-      <p:sp>
-        <p:nvSpPr>
-          <p:cNvPr id="48" name="Shape 46"/>
-          <p:cNvSpPr/>
-          <p:nvPr/>
-        </p:nvSpPr>
-        <p:spPr>
-          <a:xfrm>
-            <a:off x="6307531" y="4169664"/>
-            <a:ext cx="676656" cy="475488"/>
-          </a:xfrm>
-          <a:prstGeom prst="rect">
-            <a:avLst>
-              <a:gd name="adj" fmla="val 7692"/>
-            </a:avLst>
-          </a:prstGeom>
-          <a:solidFill>
-            <a:srgbClr val="FFFFFF"/>
-          </a:solidFill>
-          <a:ln w="12700">
-            <a:solidFill>
-              <a:srgbClr val="DB2777"/>
-            </a:solidFill>
-            <a:prstDash val="solid"/>
-          </a:ln>
-        </p:spPr>
-      </p:sp>
-      <p:sp>
-        <p:nvSpPr>
-          <p:cNvPr id="49" name="Text 47"/>
-          <p:cNvSpPr/>
-          <p:nvPr/>
-        </p:nvSpPr>
-        <p:spPr>
-          <a:xfrm>
-            <a:off x="6307531" y="4169664"/>
-            <a:ext cx="676656" cy="475488"/>
-          </a:xfrm>
-          <a:prstGeom prst="rect">
-            <a:avLst/>
-          </a:prstGeom>
-          <a:noFill/>
-          <a:ln/>
-        </p:spPr>
-        <p:txBody>
-          <a:bodyPr wrap="square" lIns="0" tIns="0" rIns="0" bIns="0" rtlCol="0" anchor="ctr"/>
-          <a:lstStyle/>
-          <a:p>
-            <a:pPr algn="ctr" indent="0" marL="0">
-              <a:buNone/>
-            </a:pPr>
-            <a:r>
-              <a:rPr lang="en-US" sz="900" b="1" dirty="0">
-                <a:solidFill>
-                  <a:srgbClr val="9D174D"/>
-                </a:solidFill>
-                <a:latin typeface="Trebuchet MS" pitchFamily="34" charset="0"/>
-                <a:ea typeface="Trebuchet MS" pitchFamily="34" charset="-122"/>
-                <a:cs typeface="Trebuchet MS" pitchFamily="34" charset="-120"/>
-              </a:rPr>
-              <a:t>s</a:t>
-            </a:r>
-            <a:endParaRPr lang="en-US" sz="900" dirty="0"/>
-          </a:p>
-        </p:txBody>
-      </p:sp>
-      <p:sp>
-        <p:nvSpPr>
-          <p:cNvPr id="50" name="Shape 48"/>
-          <p:cNvSpPr/>
-          <p:nvPr/>
-        </p:nvSpPr>
-        <p:spPr>
-          <a:xfrm>
-            <a:off x="7033565" y="4169664"/>
-            <a:ext cx="676656" cy="475488"/>
-          </a:xfrm>
-          <a:prstGeom prst="rect">
-            <a:avLst>
-              <a:gd name="adj" fmla="val 7692"/>
-            </a:avLst>
-          </a:prstGeom>
-          <a:solidFill>
-            <a:srgbClr val="FFFFFF"/>
-          </a:solidFill>
-          <a:ln w="12700">
-            <a:solidFill>
-              <a:srgbClr val="DB2777"/>
-            </a:solidFill>
-            <a:prstDash val="solid"/>
-          </a:ln>
-        </p:spPr>
-      </p:sp>
-      <p:sp>
-        <p:nvSpPr>
-          <p:cNvPr id="51" name="Text 49"/>
-          <p:cNvSpPr/>
-          <p:nvPr/>
-        </p:nvSpPr>
-        <p:spPr>
-          <a:xfrm>
-            <a:off x="7033565" y="4169664"/>
-            <a:ext cx="676656" cy="475488"/>
-          </a:xfrm>
-          <a:prstGeom prst="rect">
-            <a:avLst/>
-          </a:prstGeom>
-          <a:noFill/>
-          <a:ln/>
-        </p:spPr>
-        <p:txBody>
-          <a:bodyPr wrap="square" lIns="0" tIns="0" rIns="0" bIns="0" rtlCol="0" anchor="ctr"/>
-          <a:lstStyle/>
-          <a:p>
-            <a:pPr algn="ctr" indent="0" marL="0">
-              <a:buNone/>
-            </a:pPr>
-            <a:r>
-              <a:rPr lang="en-US" sz="900" b="1" dirty="0">
-                <a:solidFill>
-                  <a:srgbClr val="9D174D"/>
-                </a:solidFill>
-                <a:latin typeface="Trebuchet MS" pitchFamily="34" charset="0"/>
-                <a:ea typeface="Trebuchet MS" pitchFamily="34" charset="-122"/>
-                <a:cs typeface="Trebuchet MS" pitchFamily="34" charset="-120"/>
-              </a:rPr>
-              <a:t>t</a:t>
-            </a:r>
-            <a:endParaRPr lang="en-US" sz="900" dirty="0"/>
-          </a:p>
-        </p:txBody>
-      </p:sp>
-      <p:sp>
-        <p:nvSpPr>
-          <p:cNvPr id="52" name="Shape 50"/>
-          <p:cNvSpPr/>
-          <p:nvPr/>
-        </p:nvSpPr>
-        <p:spPr>
-          <a:xfrm>
-            <a:off x="7759598" y="4169664"/>
-            <a:ext cx="676656" cy="475488"/>
-          </a:xfrm>
-          <a:prstGeom prst="rect">
-            <a:avLst>
-              <a:gd name="adj" fmla="val 7692"/>
-            </a:avLst>
-          </a:prstGeom>
-          <a:solidFill>
-            <a:srgbClr val="FFFFFF"/>
-          </a:solidFill>
-          <a:ln w="12700">
-            <a:solidFill>
-              <a:srgbClr val="DB2777"/>
-            </a:solidFill>
-            <a:prstDash val="solid"/>
-          </a:ln>
-        </p:spPr>
-      </p:sp>
-      <p:sp>
-        <p:nvSpPr>
-          <p:cNvPr id="53" name="Text 51"/>
-          <p:cNvSpPr/>
-          <p:nvPr/>
-        </p:nvSpPr>
-        <p:spPr>
-          <a:xfrm>
-            <a:off x="7759598" y="4169664"/>
-            <a:ext cx="676656" cy="475488"/>
-          </a:xfrm>
-          <a:prstGeom prst="rect">
-            <a:avLst/>
-          </a:prstGeom>
-          <a:noFill/>
-          <a:ln/>
-        </p:spPr>
-        <p:txBody>
-          <a:bodyPr wrap="square" lIns="0" tIns="0" rIns="0" bIns="0" rtlCol="0" anchor="ctr"/>
-          <a:lstStyle/>
-          <a:p>
-            <a:pPr algn="ctr" indent="0" marL="0">
-              <a:buNone/>
-            </a:pPr>
-            <a:r>
-              <a:rPr lang="en-US" sz="900" b="1" dirty="0">
-                <a:solidFill>
-                  <a:srgbClr val="9D174D"/>
-                </a:solidFill>
-                <a:latin typeface="Trebuchet MS" pitchFamily="34" charset="0"/>
-                <a:ea typeface="Trebuchet MS" pitchFamily="34" charset="-122"/>
-                <a:cs typeface="Trebuchet MS" pitchFamily="34" charset="-120"/>
-              </a:rPr>
-              <a:t>e</a:t>
+              <a:t>ng</a:t>
             </a:r>
             <a:endParaRPr lang="en-US" sz="900" dirty="0"/>
           </a:p>
@@ -28043,7 +28469,7 @@
                 <a:ea typeface="Trebuchet MS" pitchFamily="34" charset="-122"/>
                 <a:cs typeface="Trebuchet MS" pitchFamily="34" charset="-120"/>
               </a:rPr>
-              <a:t>tasting</a:t>
+              <a:t>tasteless</a:t>
             </a:r>
             <a:endParaRPr lang="en-US" sz="2800" dirty="0"/>
           </a:p>
@@ -28870,7 +29296,7 @@
                 <a:ea typeface="Trebuchet MS" pitchFamily="34" charset="-122"/>
                 <a:cs typeface="Trebuchet MS" pitchFamily="34" charset="-120"/>
               </a:rPr>
-              <a:t>tasting</a:t>
+              <a:t>tasteless</a:t>
             </a:r>
             <a:endParaRPr lang="en-US" sz="2800" dirty="0"/>
           </a:p>
@@ -29071,11 +29497,11 @@
             </a:avLst>
           </a:prstGeom>
           <a:solidFill>
-            <a:srgbClr val="FCE7F3"/>
+            <a:srgbClr val="DDD6FE"/>
           </a:solidFill>
           <a:ln w="19050">
             <a:solidFill>
-              <a:srgbClr val="DB2777"/>
+              <a:srgbClr val="7C3AED"/>
             </a:solidFill>
             <a:prstDash val="solid"/>
           </a:ln>
@@ -29115,13 +29541,13 @@
             <a:r>
               <a:rPr lang="en-US" sz="1300" b="1" dirty="0">
                 <a:solidFill>
-                  <a:srgbClr val="9D174D"/>
+                  <a:srgbClr val="4C1D95"/>
                 </a:solidFill>
                 <a:latin typeface="Trebuchet MS" pitchFamily="34" charset="0"/>
                 <a:ea typeface="Trebuchet MS" pitchFamily="34" charset="-122"/>
                 <a:cs typeface="Trebuchet MS" pitchFamily="34" charset="-120"/>
               </a:rPr>
-              <a:t>ing</a:t>
+              <a:t>less</a:t>
             </a:r>
             <a:endParaRPr lang="en-US" sz="1300" dirty="0"/>
           </a:p>
@@ -29160,7 +29586,7 @@
                 <a:ea typeface="Calibri" pitchFamily="34" charset="-122"/>
                 <a:cs typeface="Calibri" pitchFamily="34" charset="-120"/>
               </a:rPr>
-              <a:t>ongoing action</a:t>
+              <a:t>without, lacking</a:t>
             </a:r>
             <a:endParaRPr lang="en-US" sz="850" dirty="0"/>
           </a:p>
@@ -29168,57 +29594,150 @@
       </p:sp>
       <p:sp>
         <p:nvSpPr>
-          <p:cNvPr id="22" name="Text 20"/>
-          <p:cNvSpPr/>
-          <p:nvPr/>
-        </p:nvSpPr>
-        <p:spPr>
-          <a:xfrm>
-            <a:off x="5803392" y="2752344"/>
-            <a:ext cx="1828800" cy="182880"/>
-          </a:xfrm>
-          <a:prstGeom prst="rect">
-            <a:avLst/>
-          </a:prstGeom>
-          <a:noFill/>
-          <a:ln/>
-        </p:spPr>
-        <p:txBody>
-          <a:bodyPr wrap="square" lIns="0" tIns="0" rIns="0" bIns="0" rtlCol="0" anchor="t"/>
-          <a:lstStyle/>
-          <a:p>
-            <a:pPr algn="ctr" indent="0" marL="0">
-              <a:buNone/>
-            </a:pPr>
-            <a:r>
-              <a:rPr lang="en-US" sz="700" i="1" dirty="0">
-                <a:solidFill>
-                  <a:srgbClr val="94A3B8"/>
+          <p:cNvPr id="22" name="Shape 20"/>
+          <p:cNvSpPr/>
+          <p:nvPr/>
+        </p:nvSpPr>
+        <p:spPr>
+          <a:xfrm>
+            <a:off x="365760" y="3273552"/>
+            <a:ext cx="1371600" cy="658368"/>
+          </a:xfrm>
+          <a:prstGeom prst="rect">
+            <a:avLst>
+              <a:gd name="adj" fmla="val 8333"/>
+            </a:avLst>
+          </a:prstGeom>
+          <a:solidFill>
+            <a:srgbClr val="E2E8F0"/>
+          </a:solidFill>
+          <a:ln w="12700">
+            <a:solidFill>
+              <a:srgbClr val="E2E8F0"/>
+            </a:solidFill>
+            <a:prstDash val="solid"/>
+          </a:ln>
+        </p:spPr>
+      </p:sp>
+      <p:sp>
+        <p:nvSpPr>
+          <p:cNvPr id="23" name="Text 21"/>
+          <p:cNvSpPr/>
+          <p:nvPr/>
+        </p:nvSpPr>
+        <p:spPr>
+          <a:xfrm>
+            <a:off x="365760" y="3273552"/>
+            <a:ext cx="1371600" cy="658368"/>
+          </a:xfrm>
+          <a:prstGeom prst="rect">
+            <a:avLst/>
+          </a:prstGeom>
+          <a:noFill/>
+          <a:ln/>
+        </p:spPr>
+        <p:txBody>
+          <a:bodyPr wrap="square" lIns="0" tIns="0" rIns="0" bIns="0" rtlCol="0" anchor="ctr"/>
+          <a:lstStyle/>
+          <a:p>
+            <a:pPr algn="ctr" indent="0" marL="0">
+              <a:buNone/>
+            </a:pPr>
+            <a:r>
+              <a:rPr lang="en-US" sz="1100" b="1" dirty="0">
+                <a:solidFill>
+                  <a:srgbClr val="475569"/>
+                </a:solidFill>
+                <a:latin typeface="Trebuchet MS" pitchFamily="34" charset="0"/>
+                <a:ea typeface="Trebuchet MS" pitchFamily="34" charset="-122"/>
+                <a:cs typeface="Trebuchet MS" pitchFamily="34" charset="-120"/>
+              </a:rPr>
+              <a:t>Syllables</a:t>
+            </a:r>
+            <a:endParaRPr lang="en-US" sz="1100" dirty="0"/>
+          </a:p>
+        </p:txBody>
+      </p:sp>
+      <p:sp>
+        <p:nvSpPr>
+          <p:cNvPr id="24" name="Shape 22"/>
+          <p:cNvSpPr/>
+          <p:nvPr/>
+        </p:nvSpPr>
+        <p:spPr>
+          <a:xfrm>
+            <a:off x="1874520" y="3273552"/>
+            <a:ext cx="6903720" cy="658368"/>
+          </a:xfrm>
+          <a:prstGeom prst="rect">
+            <a:avLst>
+              <a:gd name="adj" fmla="val 8333"/>
+            </a:avLst>
+          </a:prstGeom>
+          <a:solidFill>
+            <a:srgbClr val="F8FAFC"/>
+          </a:solidFill>
+          <a:ln w="12700">
+            <a:solidFill>
+              <a:srgbClr val="E2E8F0"/>
+            </a:solidFill>
+            <a:prstDash val="dash"/>
+          </a:ln>
+        </p:spPr>
+      </p:sp>
+      <p:sp>
+        <p:nvSpPr>
+          <p:cNvPr id="25" name="Text 23"/>
+          <p:cNvSpPr/>
+          <p:nvPr/>
+        </p:nvSpPr>
+        <p:spPr>
+          <a:xfrm>
+            <a:off x="1874520" y="3273552"/>
+            <a:ext cx="6903720" cy="658368"/>
+          </a:xfrm>
+          <a:prstGeom prst="rect">
+            <a:avLst/>
+          </a:prstGeom>
+          <a:noFill/>
+          <a:ln/>
+        </p:spPr>
+        <p:txBody>
+          <a:bodyPr wrap="square" rtlCol="0" anchor="ctr"/>
+          <a:lstStyle/>
+          <a:p>
+            <a:pPr algn="ctr" indent="0" marL="0">
+              <a:buNone/>
+            </a:pPr>
+            <a:r>
+              <a:rPr lang="en-US" sz="1100" i="1" dirty="0">
+                <a:solidFill>
+                  <a:srgbClr val="CBD5E1"/>
                 </a:solidFill>
                 <a:latin typeface="Calibri" pitchFamily="34" charset="0"/>
                 <a:ea typeface="Calibri" pitchFamily="34" charset="-122"/>
                 <a:cs typeface="Calibri" pitchFamily="34" charset="-120"/>
               </a:rPr>
-              <a:t>'e' dropped before vowel suffix</a:t>
-            </a:r>
-            <a:endParaRPr lang="en-US" sz="700" dirty="0"/>
-          </a:p>
-        </p:txBody>
-      </p:sp>
-      <p:sp>
-        <p:nvSpPr>
-          <p:cNvPr id="23" name="Shape 21"/>
-          <p:cNvSpPr/>
-          <p:nvPr/>
-        </p:nvSpPr>
-        <p:spPr>
-          <a:xfrm>
-            <a:off x="365760" y="3273552"/>
-            <a:ext cx="1371600" cy="658368"/>
+              <a:t>Write here...</a:t>
+            </a:r>
+            <a:endParaRPr lang="en-US" sz="1100" dirty="0"/>
+          </a:p>
+        </p:txBody>
+      </p:sp>
+      <p:sp>
+        <p:nvSpPr>
+          <p:cNvPr id="26" name="Shape 24"/>
+          <p:cNvSpPr/>
+          <p:nvPr/>
+        </p:nvSpPr>
+        <p:spPr>
+          <a:xfrm>
+            <a:off x="365760" y="4096512"/>
+            <a:ext cx="1371600" cy="804672"/>
           </a:xfrm>
           <a:prstGeom prst="rect">
             <a:avLst>
-              <a:gd name="adj" fmla="val 8333"/>
+              <a:gd name="adj" fmla="val 6818"/>
             </a:avLst>
           </a:prstGeom>
           <a:solidFill>
@@ -29234,14 +29753,14 @@
       </p:sp>
       <p:sp>
         <p:nvSpPr>
-          <p:cNvPr id="24" name="Text 22"/>
-          <p:cNvSpPr/>
-          <p:nvPr/>
-        </p:nvSpPr>
-        <p:spPr>
-          <a:xfrm>
-            <a:off x="365760" y="3273552"/>
-            <a:ext cx="1371600" cy="658368"/>
+          <p:cNvPr id="27" name="Text 25"/>
+          <p:cNvSpPr/>
+          <p:nvPr/>
+        </p:nvSpPr>
+        <p:spPr>
+          <a:xfrm>
+            <a:off x="365760" y="4096512"/>
+            <a:ext cx="1371600" cy="804672"/>
           </a:xfrm>
           <a:prstGeom prst="rect">
             <a:avLst/>
@@ -29265,7 +29784,7 @@
                 <a:ea typeface="Trebuchet MS" pitchFamily="34" charset="-122"/>
                 <a:cs typeface="Trebuchet MS" pitchFamily="34" charset="-120"/>
               </a:rPr>
-              <a:t>Syllables</a:t>
+              <a:t>Phonemes</a:t>
             </a:r>
             <a:endParaRPr lang="en-US" sz="1100" dirty="0"/>
           </a:p>
@@ -29273,80 +29792,14 @@
       </p:sp>
       <p:sp>
         <p:nvSpPr>
-          <p:cNvPr id="25" name="Shape 23"/>
-          <p:cNvSpPr/>
-          <p:nvPr/>
-        </p:nvSpPr>
-        <p:spPr>
-          <a:xfrm>
-            <a:off x="1874520" y="3273552"/>
-            <a:ext cx="6903720" cy="658368"/>
-          </a:xfrm>
-          <a:prstGeom prst="rect">
-            <a:avLst>
-              <a:gd name="adj" fmla="val 8333"/>
-            </a:avLst>
-          </a:prstGeom>
-          <a:solidFill>
-            <a:srgbClr val="F8FAFC"/>
-          </a:solidFill>
-          <a:ln w="12700">
-            <a:solidFill>
-              <a:srgbClr val="E2E8F0"/>
-            </a:solidFill>
-            <a:prstDash val="dash"/>
-          </a:ln>
-        </p:spPr>
-      </p:sp>
-      <p:sp>
-        <p:nvSpPr>
-          <p:cNvPr id="26" name="Text 24"/>
-          <p:cNvSpPr/>
-          <p:nvPr/>
-        </p:nvSpPr>
-        <p:spPr>
-          <a:xfrm>
-            <a:off x="1874520" y="3273552"/>
-            <a:ext cx="6903720" cy="658368"/>
-          </a:xfrm>
-          <a:prstGeom prst="rect">
-            <a:avLst/>
-          </a:prstGeom>
-          <a:noFill/>
-          <a:ln/>
-        </p:spPr>
-        <p:txBody>
-          <a:bodyPr wrap="square" rtlCol="0" anchor="ctr"/>
-          <a:lstStyle/>
-          <a:p>
-            <a:pPr algn="ctr" indent="0" marL="0">
-              <a:buNone/>
-            </a:pPr>
-            <a:r>
-              <a:rPr lang="en-US" sz="1100" i="1" dirty="0">
-                <a:solidFill>
-                  <a:srgbClr val="CBD5E1"/>
-                </a:solidFill>
-                <a:latin typeface="Calibri" pitchFamily="34" charset="0"/>
-                <a:ea typeface="Calibri" pitchFamily="34" charset="-122"/>
-                <a:cs typeface="Calibri" pitchFamily="34" charset="-120"/>
-              </a:rPr>
-              <a:t>Write here...</a:t>
-            </a:r>
-            <a:endParaRPr lang="en-US" sz="1100" dirty="0"/>
-          </a:p>
-        </p:txBody>
-      </p:sp>
-      <p:sp>
-        <p:nvSpPr>
-          <p:cNvPr id="27" name="Shape 25"/>
-          <p:cNvSpPr/>
-          <p:nvPr/>
-        </p:nvSpPr>
-        <p:spPr>
-          <a:xfrm>
-            <a:off x="365760" y="4096512"/>
-            <a:ext cx="1371600" cy="804672"/>
+          <p:cNvPr id="28" name="Shape 26"/>
+          <p:cNvSpPr/>
+          <p:nvPr/>
+        </p:nvSpPr>
+        <p:spPr>
+          <a:xfrm>
+            <a:off x="1874520" y="4096512"/>
+            <a:ext cx="6903720" cy="804672"/>
           </a:xfrm>
           <a:prstGeom prst="rect">
             <a:avLst>
@@ -29354,85 +29807,19 @@
             </a:avLst>
           </a:prstGeom>
           <a:solidFill>
-            <a:srgbClr val="E2E8F0"/>
+            <a:srgbClr val="F8FAFC"/>
           </a:solidFill>
           <a:ln w="12700">
             <a:solidFill>
               <a:srgbClr val="E2E8F0"/>
             </a:solidFill>
-            <a:prstDash val="solid"/>
-          </a:ln>
-        </p:spPr>
-      </p:sp>
-      <p:sp>
-        <p:nvSpPr>
-          <p:cNvPr id="28" name="Text 26"/>
-          <p:cNvSpPr/>
-          <p:nvPr/>
-        </p:nvSpPr>
-        <p:spPr>
-          <a:xfrm>
-            <a:off x="365760" y="4096512"/>
-            <a:ext cx="1371600" cy="804672"/>
-          </a:xfrm>
-          <a:prstGeom prst="rect">
-            <a:avLst/>
-          </a:prstGeom>
-          <a:noFill/>
-          <a:ln/>
-        </p:spPr>
-        <p:txBody>
-          <a:bodyPr wrap="square" lIns="0" tIns="0" rIns="0" bIns="0" rtlCol="0" anchor="ctr"/>
-          <a:lstStyle/>
-          <a:p>
-            <a:pPr algn="ctr" indent="0" marL="0">
-              <a:buNone/>
-            </a:pPr>
-            <a:r>
-              <a:rPr lang="en-US" sz="1100" b="1" dirty="0">
-                <a:solidFill>
-                  <a:srgbClr val="475569"/>
-                </a:solidFill>
-                <a:latin typeface="Trebuchet MS" pitchFamily="34" charset="0"/>
-                <a:ea typeface="Trebuchet MS" pitchFamily="34" charset="-122"/>
-                <a:cs typeface="Trebuchet MS" pitchFamily="34" charset="-120"/>
-              </a:rPr>
-              <a:t>Phonemes</a:t>
-            </a:r>
-            <a:endParaRPr lang="en-US" sz="1100" dirty="0"/>
-          </a:p>
-        </p:txBody>
-      </p:sp>
-      <p:sp>
-        <p:nvSpPr>
-          <p:cNvPr id="29" name="Shape 27"/>
-          <p:cNvSpPr/>
-          <p:nvPr/>
-        </p:nvSpPr>
-        <p:spPr>
-          <a:xfrm>
-            <a:off x="1874520" y="4096512"/>
-            <a:ext cx="6903720" cy="804672"/>
-          </a:xfrm>
-          <a:prstGeom prst="rect">
-            <a:avLst>
-              <a:gd name="adj" fmla="val 6818"/>
-            </a:avLst>
-          </a:prstGeom>
-          <a:solidFill>
-            <a:srgbClr val="F8FAFC"/>
-          </a:solidFill>
-          <a:ln w="12700">
-            <a:solidFill>
-              <a:srgbClr val="E2E8F0"/>
-            </a:solidFill>
             <a:prstDash val="dash"/>
           </a:ln>
         </p:spPr>
       </p:sp>
       <p:sp>
         <p:nvSpPr>
-          <p:cNvPr id="30" name="Text 28"/>
+          <p:cNvPr id="29" name="Text 27"/>
           <p:cNvSpPr/>
           <p:nvPr/>
         </p:nvSpPr>
@@ -29894,7 +30281,7 @@
                 <a:ea typeface="Trebuchet MS" pitchFamily="34" charset="-122"/>
                 <a:cs typeface="Trebuchet MS" pitchFamily="34" charset="-120"/>
               </a:rPr>
-              <a:t>tasting</a:t>
+              <a:t>tasteless</a:t>
             </a:r>
             <a:endParaRPr lang="en-US" sz="2800" dirty="0"/>
           </a:p>
@@ -30095,11 +30482,11 @@
             </a:avLst>
           </a:prstGeom>
           <a:solidFill>
-            <a:srgbClr val="FCE7F3"/>
+            <a:srgbClr val="DDD6FE"/>
           </a:solidFill>
           <a:ln w="19050">
             <a:solidFill>
-              <a:srgbClr val="DB2777"/>
+              <a:srgbClr val="7C3AED"/>
             </a:solidFill>
             <a:prstDash val="solid"/>
           </a:ln>
@@ -30139,13 +30526,13 @@
             <a:r>
               <a:rPr lang="en-US" sz="1300" b="1" dirty="0">
                 <a:solidFill>
-                  <a:srgbClr val="9D174D"/>
+                  <a:srgbClr val="4C1D95"/>
                 </a:solidFill>
                 <a:latin typeface="Trebuchet MS" pitchFamily="34" charset="0"/>
                 <a:ea typeface="Trebuchet MS" pitchFamily="34" charset="-122"/>
                 <a:cs typeface="Trebuchet MS" pitchFamily="34" charset="-120"/>
               </a:rPr>
-              <a:t>ing</a:t>
+              <a:t>less</a:t>
             </a:r>
             <a:endParaRPr lang="en-US" sz="1300" dirty="0"/>
           </a:p>
@@ -30184,7 +30571,7 @@
                 <a:ea typeface="Calibri" pitchFamily="34" charset="-122"/>
                 <a:cs typeface="Calibri" pitchFamily="34" charset="-120"/>
               </a:rPr>
-              <a:t>ongoing action</a:t>
+              <a:t>without, lacking</a:t>
             </a:r>
             <a:endParaRPr lang="en-US" sz="850" dirty="0"/>
           </a:p>
@@ -30192,46 +30579,7 @@
       </p:sp>
       <p:sp>
         <p:nvSpPr>
-          <p:cNvPr id="22" name="Text 20"/>
-          <p:cNvSpPr/>
-          <p:nvPr/>
-        </p:nvSpPr>
-        <p:spPr>
-          <a:xfrm>
-            <a:off x="5803392" y="2752344"/>
-            <a:ext cx="1828800" cy="182880"/>
-          </a:xfrm>
-          <a:prstGeom prst="rect">
-            <a:avLst/>
-          </a:prstGeom>
-          <a:noFill/>
-          <a:ln/>
-        </p:spPr>
-        <p:txBody>
-          <a:bodyPr wrap="square" lIns="0" tIns="0" rIns="0" bIns="0" rtlCol="0" anchor="t"/>
-          <a:lstStyle/>
-          <a:p>
-            <a:pPr algn="ctr" indent="0" marL="0">
-              <a:buNone/>
-            </a:pPr>
-            <a:r>
-              <a:rPr lang="en-US" sz="700" i="1" dirty="0">
-                <a:solidFill>
-                  <a:srgbClr val="94A3B8"/>
-                </a:solidFill>
-                <a:latin typeface="Calibri" pitchFamily="34" charset="0"/>
-                <a:ea typeface="Calibri" pitchFamily="34" charset="-122"/>
-                <a:cs typeface="Calibri" pitchFamily="34" charset="-120"/>
-              </a:rPr>
-              <a:t>'e' dropped before vowel suffix</a:t>
-            </a:r>
-            <a:endParaRPr lang="en-US" sz="700" dirty="0"/>
-          </a:p>
-        </p:txBody>
-      </p:sp>
-      <p:sp>
-        <p:nvSpPr>
-          <p:cNvPr id="23" name="Shape 21"/>
+          <p:cNvPr id="22" name="Shape 20"/>
           <p:cNvSpPr/>
           <p:nvPr/>
         </p:nvSpPr>
@@ -30258,7 +30606,7 @@
       </p:sp>
       <p:sp>
         <p:nvSpPr>
-          <p:cNvPr id="24" name="Text 22"/>
+          <p:cNvPr id="23" name="Text 21"/>
           <p:cNvSpPr/>
           <p:nvPr/>
         </p:nvSpPr>
@@ -30297,7 +30645,7 @@
       </p:sp>
       <p:sp>
         <p:nvSpPr>
-          <p:cNvPr id="25" name="Shape 23"/>
+          <p:cNvPr id="24" name="Shape 22"/>
           <p:cNvSpPr/>
           <p:nvPr/>
         </p:nvSpPr>
@@ -30324,7 +30672,7 @@
       </p:sp>
       <p:sp>
         <p:nvSpPr>
-          <p:cNvPr id="26" name="Shape 24"/>
+          <p:cNvPr id="25" name="Shape 23"/>
           <p:cNvSpPr/>
           <p:nvPr/>
         </p:nvSpPr>
@@ -30351,7 +30699,7 @@
       </p:sp>
       <p:sp>
         <p:nvSpPr>
-          <p:cNvPr id="27" name="Text 25"/>
+          <p:cNvPr id="26" name="Text 24"/>
           <p:cNvSpPr/>
           <p:nvPr/>
         </p:nvSpPr>
@@ -30382,7 +30730,7 @@
                 <a:ea typeface="Trebuchet MS" pitchFamily="34" charset="-122"/>
                 <a:cs typeface="Trebuchet MS" pitchFamily="34" charset="-120"/>
               </a:rPr>
-              <a:t>tas</a:t>
+              <a:t>taste</a:t>
             </a:r>
             <a:endParaRPr lang="en-US" sz="1400" dirty="0"/>
           </a:p>
@@ -30390,7 +30738,7 @@
       </p:sp>
       <p:sp>
         <p:nvSpPr>
-          <p:cNvPr id="28" name="Text 26"/>
+          <p:cNvPr id="27" name="Text 25"/>
           <p:cNvSpPr/>
           <p:nvPr/>
         </p:nvSpPr>
@@ -30429,7 +30777,7 @@
       </p:sp>
       <p:sp>
         <p:nvSpPr>
-          <p:cNvPr id="29" name="Shape 27"/>
+          <p:cNvPr id="28" name="Shape 26"/>
           <p:cNvSpPr/>
           <p:nvPr/>
         </p:nvSpPr>
@@ -30456,7 +30804,7 @@
       </p:sp>
       <p:sp>
         <p:nvSpPr>
-          <p:cNvPr id="30" name="Text 28"/>
+          <p:cNvPr id="29" name="Text 27"/>
           <p:cNvSpPr/>
           <p:nvPr/>
         </p:nvSpPr>
@@ -30487,7 +30835,7 @@
                 <a:ea typeface="Trebuchet MS" pitchFamily="34" charset="-122"/>
                 <a:cs typeface="Trebuchet MS" pitchFamily="34" charset="-120"/>
               </a:rPr>
-              <a:t>ting</a:t>
+              <a:t>less</a:t>
             </a:r>
             <a:endParaRPr lang="en-US" sz="1400" dirty="0"/>
           </a:p>
@@ -30495,7 +30843,7 @@
       </p:sp>
       <p:sp>
         <p:nvSpPr>
-          <p:cNvPr id="31" name="Shape 29"/>
+          <p:cNvPr id="30" name="Shape 28"/>
           <p:cNvSpPr/>
           <p:nvPr/>
         </p:nvSpPr>
@@ -30522,7 +30870,7 @@
       </p:sp>
       <p:sp>
         <p:nvSpPr>
-          <p:cNvPr id="32" name="Text 30"/>
+          <p:cNvPr id="31" name="Text 29"/>
           <p:cNvSpPr/>
           <p:nvPr/>
         </p:nvSpPr>
@@ -30561,7 +30909,7 @@
       </p:sp>
       <p:sp>
         <p:nvSpPr>
-          <p:cNvPr id="33" name="Shape 31"/>
+          <p:cNvPr id="32" name="Shape 30"/>
           <p:cNvSpPr/>
           <p:nvPr/>
         </p:nvSpPr>
@@ -30588,7 +30936,7 @@
       </p:sp>
       <p:sp>
         <p:nvSpPr>
-          <p:cNvPr id="34" name="Text 32"/>
+          <p:cNvPr id="33" name="Text 31"/>
           <p:cNvSpPr/>
           <p:nvPr/>
         </p:nvSpPr>
@@ -31050,7 +31398,7 @@
                 <a:ea typeface="Trebuchet MS" pitchFamily="34" charset="-122"/>
                 <a:cs typeface="Trebuchet MS" pitchFamily="34" charset="-120"/>
               </a:rPr>
-              <a:t>tasting</a:t>
+              <a:t>tasteless</a:t>
             </a:r>
             <a:endParaRPr lang="en-US" sz="2800" dirty="0"/>
           </a:p>
@@ -31251,11 +31599,11 @@
             </a:avLst>
           </a:prstGeom>
           <a:solidFill>
-            <a:srgbClr val="FCE7F3"/>
+            <a:srgbClr val="DDD6FE"/>
           </a:solidFill>
           <a:ln w="19050">
             <a:solidFill>
-              <a:srgbClr val="DB2777"/>
+              <a:srgbClr val="7C3AED"/>
             </a:solidFill>
             <a:prstDash val="solid"/>
           </a:ln>
@@ -31295,13 +31643,13 @@
             <a:r>
               <a:rPr lang="en-US" sz="1300" b="1" dirty="0">
                 <a:solidFill>
-                  <a:srgbClr val="9D174D"/>
+                  <a:srgbClr val="4C1D95"/>
                 </a:solidFill>
                 <a:latin typeface="Trebuchet MS" pitchFamily="34" charset="0"/>
                 <a:ea typeface="Trebuchet MS" pitchFamily="34" charset="-122"/>
                 <a:cs typeface="Trebuchet MS" pitchFamily="34" charset="-120"/>
               </a:rPr>
-              <a:t>ing</a:t>
+              <a:t>less</a:t>
             </a:r>
             <a:endParaRPr lang="en-US" sz="1300" dirty="0"/>
           </a:p>
@@ -31340,7 +31688,7 @@
                 <a:ea typeface="Calibri" pitchFamily="34" charset="-122"/>
                 <a:cs typeface="Calibri" pitchFamily="34" charset="-120"/>
               </a:rPr>
-              <a:t>ongoing action</a:t>
+              <a:t>without, lacking</a:t>
             </a:r>
             <a:endParaRPr lang="en-US" sz="850" dirty="0"/>
           </a:p>
@@ -31348,14 +31696,503 @@
       </p:sp>
       <p:sp>
         <p:nvSpPr>
-          <p:cNvPr id="22" name="Text 20"/>
-          <p:cNvSpPr/>
-          <p:nvPr/>
-        </p:nvSpPr>
-        <p:spPr>
-          <a:xfrm>
-            <a:off x="5803392" y="2752344"/>
-            <a:ext cx="1828800" cy="182880"/>
+          <p:cNvPr id="22" name="Shape 20"/>
+          <p:cNvSpPr/>
+          <p:nvPr/>
+        </p:nvSpPr>
+        <p:spPr>
+          <a:xfrm>
+            <a:off x="365760" y="3273552"/>
+            <a:ext cx="1371600" cy="658368"/>
+          </a:xfrm>
+          <a:prstGeom prst="rect">
+            <a:avLst>
+              <a:gd name="adj" fmla="val 8333"/>
+            </a:avLst>
+          </a:prstGeom>
+          <a:solidFill>
+            <a:srgbClr val="E2E8F0"/>
+          </a:solidFill>
+          <a:ln w="12700">
+            <a:solidFill>
+              <a:srgbClr val="E2E8F0"/>
+            </a:solidFill>
+            <a:prstDash val="solid"/>
+          </a:ln>
+        </p:spPr>
+      </p:sp>
+      <p:sp>
+        <p:nvSpPr>
+          <p:cNvPr id="23" name="Text 21"/>
+          <p:cNvSpPr/>
+          <p:nvPr/>
+        </p:nvSpPr>
+        <p:spPr>
+          <a:xfrm>
+            <a:off x="365760" y="3273552"/>
+            <a:ext cx="1371600" cy="658368"/>
+          </a:xfrm>
+          <a:prstGeom prst="rect">
+            <a:avLst/>
+          </a:prstGeom>
+          <a:noFill/>
+          <a:ln/>
+        </p:spPr>
+        <p:txBody>
+          <a:bodyPr wrap="square" lIns="0" tIns="0" rIns="0" bIns="0" rtlCol="0" anchor="ctr"/>
+          <a:lstStyle/>
+          <a:p>
+            <a:pPr algn="ctr" indent="0" marL="0">
+              <a:buNone/>
+            </a:pPr>
+            <a:r>
+              <a:rPr lang="en-US" sz="1100" b="1" dirty="0">
+                <a:solidFill>
+                  <a:srgbClr val="475569"/>
+                </a:solidFill>
+                <a:latin typeface="Trebuchet MS" pitchFamily="34" charset="0"/>
+                <a:ea typeface="Trebuchet MS" pitchFamily="34" charset="-122"/>
+                <a:cs typeface="Trebuchet MS" pitchFamily="34" charset="-120"/>
+              </a:rPr>
+              <a:t>Syllables</a:t>
+            </a:r>
+            <a:endParaRPr lang="en-US" sz="1100" dirty="0"/>
+          </a:p>
+        </p:txBody>
+      </p:sp>
+      <p:sp>
+        <p:nvSpPr>
+          <p:cNvPr id="24" name="Shape 22"/>
+          <p:cNvSpPr/>
+          <p:nvPr/>
+        </p:nvSpPr>
+        <p:spPr>
+          <a:xfrm>
+            <a:off x="1874520" y="3273552"/>
+            <a:ext cx="6903720" cy="658368"/>
+          </a:xfrm>
+          <a:prstGeom prst="rect">
+            <a:avLst>
+              <a:gd name="adj" fmla="val 8333"/>
+            </a:avLst>
+          </a:prstGeom>
+          <a:solidFill>
+            <a:srgbClr val="CCFBF1"/>
+          </a:solidFill>
+          <a:ln w="12700">
+            <a:solidFill>
+              <a:srgbClr val="0D9488"/>
+            </a:solidFill>
+            <a:prstDash val="solid"/>
+          </a:ln>
+        </p:spPr>
+      </p:sp>
+      <p:sp>
+        <p:nvSpPr>
+          <p:cNvPr id="25" name="Shape 23"/>
+          <p:cNvSpPr/>
+          <p:nvPr/>
+        </p:nvSpPr>
+        <p:spPr>
+          <a:xfrm>
+            <a:off x="2999232" y="3364992"/>
+            <a:ext cx="1645920" cy="475488"/>
+          </a:xfrm>
+          <a:prstGeom prst="rect">
+            <a:avLst>
+              <a:gd name="adj" fmla="val 9615"/>
+            </a:avLst>
+          </a:prstGeom>
+          <a:solidFill>
+            <a:srgbClr val="FFFFFF"/>
+          </a:solidFill>
+          <a:ln w="12700">
+            <a:solidFill>
+              <a:srgbClr val="0D9488"/>
+            </a:solidFill>
+            <a:prstDash val="solid"/>
+          </a:ln>
+        </p:spPr>
+      </p:sp>
+      <p:sp>
+        <p:nvSpPr>
+          <p:cNvPr id="26" name="Text 24"/>
+          <p:cNvSpPr/>
+          <p:nvPr/>
+        </p:nvSpPr>
+        <p:spPr>
+          <a:xfrm>
+            <a:off x="2999232" y="3364992"/>
+            <a:ext cx="1645920" cy="475488"/>
+          </a:xfrm>
+          <a:prstGeom prst="rect">
+            <a:avLst/>
+          </a:prstGeom>
+          <a:noFill/>
+          <a:ln/>
+        </p:spPr>
+        <p:txBody>
+          <a:bodyPr wrap="square" lIns="0" tIns="0" rIns="0" bIns="0" rtlCol="0" anchor="ctr"/>
+          <a:lstStyle/>
+          <a:p>
+            <a:pPr algn="ctr" indent="0" marL="0">
+              <a:buNone/>
+            </a:pPr>
+            <a:r>
+              <a:rPr lang="en-US" sz="1400" b="1" dirty="0">
+                <a:solidFill>
+                  <a:srgbClr val="0D9488"/>
+                </a:solidFill>
+                <a:latin typeface="Trebuchet MS" pitchFamily="34" charset="0"/>
+                <a:ea typeface="Trebuchet MS" pitchFamily="34" charset="-122"/>
+                <a:cs typeface="Trebuchet MS" pitchFamily="34" charset="-120"/>
+              </a:rPr>
+              <a:t>taste</a:t>
+            </a:r>
+            <a:endParaRPr lang="en-US" sz="1400" dirty="0"/>
+          </a:p>
+        </p:txBody>
+      </p:sp>
+      <p:sp>
+        <p:nvSpPr>
+          <p:cNvPr id="27" name="Text 25"/>
+          <p:cNvSpPr/>
+          <p:nvPr/>
+        </p:nvSpPr>
+        <p:spPr>
+          <a:xfrm>
+            <a:off x="4645152" y="3364992"/>
+            <a:ext cx="1097280" cy="475488"/>
+          </a:xfrm>
+          <a:prstGeom prst="rect">
+            <a:avLst/>
+          </a:prstGeom>
+          <a:noFill/>
+          <a:ln/>
+        </p:spPr>
+        <p:txBody>
+          <a:bodyPr wrap="square" lIns="0" tIns="0" rIns="0" bIns="0" rtlCol="0" anchor="ctr"/>
+          <a:lstStyle/>
+          <a:p>
+            <a:pPr algn="ctr" indent="0" marL="0">
+              <a:buNone/>
+            </a:pPr>
+            <a:r>
+              <a:rPr lang="en-US" sz="1600" b="1" dirty="0">
+                <a:solidFill>
+                  <a:srgbClr val="0D9488"/>
+                </a:solidFill>
+                <a:latin typeface="Trebuchet MS" pitchFamily="34" charset="0"/>
+                <a:ea typeface="Trebuchet MS" pitchFamily="34" charset="-122"/>
+                <a:cs typeface="Trebuchet MS" pitchFamily="34" charset="-120"/>
+              </a:rPr>
+              <a:t>·</a:t>
+            </a:r>
+            <a:endParaRPr lang="en-US" sz="1600" dirty="0"/>
+          </a:p>
+        </p:txBody>
+      </p:sp>
+      <p:sp>
+        <p:nvSpPr>
+          <p:cNvPr id="28" name="Shape 26"/>
+          <p:cNvSpPr/>
+          <p:nvPr/>
+        </p:nvSpPr>
+        <p:spPr>
+          <a:xfrm>
+            <a:off x="5742432" y="3364992"/>
+            <a:ext cx="1645920" cy="475488"/>
+          </a:xfrm>
+          <a:prstGeom prst="rect">
+            <a:avLst>
+              <a:gd name="adj" fmla="val 9615"/>
+            </a:avLst>
+          </a:prstGeom>
+          <a:solidFill>
+            <a:srgbClr val="FFFFFF"/>
+          </a:solidFill>
+          <a:ln w="12700">
+            <a:solidFill>
+              <a:srgbClr val="0D9488"/>
+            </a:solidFill>
+            <a:prstDash val="solid"/>
+          </a:ln>
+        </p:spPr>
+      </p:sp>
+      <p:sp>
+        <p:nvSpPr>
+          <p:cNvPr id="29" name="Text 27"/>
+          <p:cNvSpPr/>
+          <p:nvPr/>
+        </p:nvSpPr>
+        <p:spPr>
+          <a:xfrm>
+            <a:off x="5742432" y="3364992"/>
+            <a:ext cx="1645920" cy="475488"/>
+          </a:xfrm>
+          <a:prstGeom prst="rect">
+            <a:avLst/>
+          </a:prstGeom>
+          <a:noFill/>
+          <a:ln/>
+        </p:spPr>
+        <p:txBody>
+          <a:bodyPr wrap="square" lIns="0" tIns="0" rIns="0" bIns="0" rtlCol="0" anchor="ctr"/>
+          <a:lstStyle/>
+          <a:p>
+            <a:pPr algn="ctr" indent="0" marL="0">
+              <a:buNone/>
+            </a:pPr>
+            <a:r>
+              <a:rPr lang="en-US" sz="1400" b="1" dirty="0">
+                <a:solidFill>
+                  <a:srgbClr val="0D9488"/>
+                </a:solidFill>
+                <a:latin typeface="Trebuchet MS" pitchFamily="34" charset="0"/>
+                <a:ea typeface="Trebuchet MS" pitchFamily="34" charset="-122"/>
+                <a:cs typeface="Trebuchet MS" pitchFamily="34" charset="-120"/>
+              </a:rPr>
+              <a:t>less</a:t>
+            </a:r>
+            <a:endParaRPr lang="en-US" sz="1400" dirty="0"/>
+          </a:p>
+        </p:txBody>
+      </p:sp>
+      <p:sp>
+        <p:nvSpPr>
+          <p:cNvPr id="30" name="Shape 28"/>
+          <p:cNvSpPr/>
+          <p:nvPr/>
+        </p:nvSpPr>
+        <p:spPr>
+          <a:xfrm>
+            <a:off x="365760" y="4096512"/>
+            <a:ext cx="1371600" cy="804672"/>
+          </a:xfrm>
+          <a:prstGeom prst="rect">
+            <a:avLst>
+              <a:gd name="adj" fmla="val 6818"/>
+            </a:avLst>
+          </a:prstGeom>
+          <a:solidFill>
+            <a:srgbClr val="E2E8F0"/>
+          </a:solidFill>
+          <a:ln w="12700">
+            <a:solidFill>
+              <a:srgbClr val="E2E8F0"/>
+            </a:solidFill>
+            <a:prstDash val="solid"/>
+          </a:ln>
+        </p:spPr>
+      </p:sp>
+      <p:sp>
+        <p:nvSpPr>
+          <p:cNvPr id="31" name="Text 29"/>
+          <p:cNvSpPr/>
+          <p:nvPr/>
+        </p:nvSpPr>
+        <p:spPr>
+          <a:xfrm>
+            <a:off x="365760" y="4096512"/>
+            <a:ext cx="1371600" cy="804672"/>
+          </a:xfrm>
+          <a:prstGeom prst="rect">
+            <a:avLst/>
+          </a:prstGeom>
+          <a:noFill/>
+          <a:ln/>
+        </p:spPr>
+        <p:txBody>
+          <a:bodyPr wrap="square" lIns="0" tIns="0" rIns="0" bIns="0" rtlCol="0" anchor="ctr"/>
+          <a:lstStyle/>
+          <a:p>
+            <a:pPr algn="ctr" indent="0" marL="0">
+              <a:buNone/>
+            </a:pPr>
+            <a:r>
+              <a:rPr lang="en-US" sz="1100" b="1" dirty="0">
+                <a:solidFill>
+                  <a:srgbClr val="475569"/>
+                </a:solidFill>
+                <a:latin typeface="Trebuchet MS" pitchFamily="34" charset="0"/>
+                <a:ea typeface="Trebuchet MS" pitchFamily="34" charset="-122"/>
+                <a:cs typeface="Trebuchet MS" pitchFamily="34" charset="-120"/>
+              </a:rPr>
+              <a:t>Phonemes</a:t>
+            </a:r>
+            <a:endParaRPr lang="en-US" sz="1100" dirty="0"/>
+          </a:p>
+        </p:txBody>
+      </p:sp>
+      <p:sp>
+        <p:nvSpPr>
+          <p:cNvPr id="32" name="Shape 30"/>
+          <p:cNvSpPr/>
+          <p:nvPr/>
+        </p:nvSpPr>
+        <p:spPr>
+          <a:xfrm>
+            <a:off x="1874520" y="4096512"/>
+            <a:ext cx="6903720" cy="804672"/>
+          </a:xfrm>
+          <a:prstGeom prst="rect">
+            <a:avLst>
+              <a:gd name="adj" fmla="val 6818"/>
+            </a:avLst>
+          </a:prstGeom>
+          <a:solidFill>
+            <a:srgbClr val="FCE7F3"/>
+          </a:solidFill>
+          <a:ln w="12700">
+            <a:solidFill>
+              <a:srgbClr val="DB2777"/>
+            </a:solidFill>
+            <a:prstDash val="solid"/>
+          </a:ln>
+        </p:spPr>
+      </p:sp>
+      <p:sp>
+        <p:nvSpPr>
+          <p:cNvPr id="33" name="Shape 31"/>
+          <p:cNvSpPr/>
+          <p:nvPr/>
+        </p:nvSpPr>
+        <p:spPr>
+          <a:xfrm>
+            <a:off x="2124837" y="4169664"/>
+            <a:ext cx="685800" cy="384048"/>
+          </a:xfrm>
+          <a:prstGeom prst="rect">
+            <a:avLst>
+              <a:gd name="adj" fmla="val 9524"/>
+            </a:avLst>
+          </a:prstGeom>
+          <a:solidFill>
+            <a:srgbClr val="FFFFFF"/>
+          </a:solidFill>
+          <a:ln w="12700">
+            <a:solidFill>
+              <a:srgbClr val="DB2777"/>
+            </a:solidFill>
+            <a:prstDash val="solid"/>
+          </a:ln>
+        </p:spPr>
+      </p:sp>
+      <p:sp>
+        <p:nvSpPr>
+          <p:cNvPr id="34" name="Text 32"/>
+          <p:cNvSpPr/>
+          <p:nvPr/>
+        </p:nvSpPr>
+        <p:spPr>
+          <a:xfrm>
+            <a:off x="2124837" y="4169664"/>
+            <a:ext cx="685800" cy="384048"/>
+          </a:xfrm>
+          <a:prstGeom prst="rect">
+            <a:avLst/>
+          </a:prstGeom>
+          <a:noFill/>
+          <a:ln/>
+        </p:spPr>
+        <p:txBody>
+          <a:bodyPr wrap="square" lIns="0" tIns="0" rIns="0" bIns="0" rtlCol="0" anchor="ctr"/>
+          <a:lstStyle/>
+          <a:p>
+            <a:pPr algn="ctr" indent="0" marL="0">
+              <a:buNone/>
+            </a:pPr>
+            <a:r>
+              <a:rPr lang="en-US" sz="900" b="1" dirty="0">
+                <a:solidFill>
+                  <a:srgbClr val="9D174D"/>
+                </a:solidFill>
+                <a:latin typeface="Trebuchet MS" pitchFamily="34" charset="0"/>
+                <a:ea typeface="Trebuchet MS" pitchFamily="34" charset="-122"/>
+                <a:cs typeface="Trebuchet MS" pitchFamily="34" charset="-120"/>
+              </a:rPr>
+              <a:t>t</a:t>
+            </a:r>
+            <a:endParaRPr lang="en-US" sz="900" dirty="0"/>
+          </a:p>
+        </p:txBody>
+      </p:sp>
+      <p:sp>
+        <p:nvSpPr>
+          <p:cNvPr id="35" name="Shape 33"/>
+          <p:cNvSpPr/>
+          <p:nvPr/>
+        </p:nvSpPr>
+        <p:spPr>
+          <a:xfrm>
+            <a:off x="3033522" y="4169664"/>
+            <a:ext cx="685800" cy="384048"/>
+          </a:xfrm>
+          <a:prstGeom prst="rect">
+            <a:avLst>
+              <a:gd name="adj" fmla="val 9524"/>
+            </a:avLst>
+          </a:prstGeom>
+          <a:solidFill>
+            <a:srgbClr val="FFFFFF"/>
+          </a:solidFill>
+          <a:ln w="12700">
+            <a:solidFill>
+              <a:srgbClr val="DB2777"/>
+            </a:solidFill>
+            <a:prstDash val="solid"/>
+          </a:ln>
+        </p:spPr>
+      </p:sp>
+      <p:sp>
+        <p:nvSpPr>
+          <p:cNvPr id="36" name="Text 34"/>
+          <p:cNvSpPr/>
+          <p:nvPr/>
+        </p:nvSpPr>
+        <p:spPr>
+          <a:xfrm>
+            <a:off x="3033522" y="4169664"/>
+            <a:ext cx="685800" cy="384048"/>
+          </a:xfrm>
+          <a:prstGeom prst="rect">
+            <a:avLst/>
+          </a:prstGeom>
+          <a:noFill/>
+          <a:ln/>
+        </p:spPr>
+        <p:txBody>
+          <a:bodyPr wrap="square" lIns="0" tIns="0" rIns="0" bIns="0" rtlCol="0" anchor="ctr"/>
+          <a:lstStyle/>
+          <a:p>
+            <a:pPr algn="ctr" indent="0" marL="0">
+              <a:buNone/>
+            </a:pPr>
+            <a:r>
+              <a:rPr lang="en-US" sz="900" b="1" dirty="0">
+                <a:solidFill>
+                  <a:srgbClr val="9D174D"/>
+                </a:solidFill>
+                <a:latin typeface="Trebuchet MS" pitchFamily="34" charset="0"/>
+                <a:ea typeface="Trebuchet MS" pitchFamily="34" charset="-122"/>
+                <a:cs typeface="Trebuchet MS" pitchFamily="34" charset="-120"/>
+              </a:rPr>
+              <a:t>ay</a:t>
+            </a:r>
+            <a:endParaRPr lang="en-US" sz="900" dirty="0"/>
+          </a:p>
+        </p:txBody>
+      </p:sp>
+      <p:sp>
+        <p:nvSpPr>
+          <p:cNvPr id="37" name="Text 35"/>
+          <p:cNvSpPr/>
+          <p:nvPr/>
+        </p:nvSpPr>
+        <p:spPr>
+          <a:xfrm>
+            <a:off x="3033522" y="4572000"/>
+            <a:ext cx="685800" cy="219456"/>
           </a:xfrm>
           <a:prstGeom prst="rect">
             <a:avLst/>
@@ -31371,7 +32208,7 @@
               <a:buNone/>
             </a:pPr>
             <a:r>
-              <a:rPr lang="en-US" sz="700" i="1" dirty="0">
+              <a:rPr lang="en-US" sz="750" i="1" dirty="0">
                 <a:solidFill>
                   <a:srgbClr val="94A3B8"/>
                 </a:solidFill>
@@ -31379,49 +32216,49 @@
                 <a:ea typeface="Calibri" pitchFamily="34" charset="-122"/>
                 <a:cs typeface="Calibri" pitchFamily="34" charset="-120"/>
               </a:rPr>
-              <a:t>'e' dropped before vowel suffix</a:t>
-            </a:r>
-            <a:endParaRPr lang="en-US" sz="700" dirty="0"/>
-          </a:p>
-        </p:txBody>
-      </p:sp>
-      <p:sp>
-        <p:nvSpPr>
-          <p:cNvPr id="23" name="Shape 21"/>
-          <p:cNvSpPr/>
-          <p:nvPr/>
-        </p:nvSpPr>
-        <p:spPr>
-          <a:xfrm>
-            <a:off x="365760" y="3273552"/>
-            <a:ext cx="1371600" cy="658368"/>
+              <a:t>/ay/</a:t>
+            </a:r>
+            <a:endParaRPr lang="en-US" sz="750" dirty="0"/>
+          </a:p>
+        </p:txBody>
+      </p:sp>
+      <p:sp>
+        <p:nvSpPr>
+          <p:cNvPr id="38" name="Shape 36"/>
+          <p:cNvSpPr/>
+          <p:nvPr/>
+        </p:nvSpPr>
+        <p:spPr>
+          <a:xfrm>
+            <a:off x="3942207" y="4169664"/>
+            <a:ext cx="685800" cy="384048"/>
           </a:xfrm>
           <a:prstGeom prst="rect">
             <a:avLst>
-              <a:gd name="adj" fmla="val 8333"/>
+              <a:gd name="adj" fmla="val 9524"/>
             </a:avLst>
           </a:prstGeom>
           <a:solidFill>
-            <a:srgbClr val="E2E8F0"/>
-          </a:solidFill>
-          <a:ln w="12700">
-            <a:solidFill>
-              <a:srgbClr val="E2E8F0"/>
-            </a:solidFill>
-            <a:prstDash val="solid"/>
-          </a:ln>
-        </p:spPr>
-      </p:sp>
-      <p:sp>
-        <p:nvSpPr>
-          <p:cNvPr id="24" name="Text 22"/>
-          <p:cNvSpPr/>
-          <p:nvPr/>
-        </p:nvSpPr>
-        <p:spPr>
-          <a:xfrm>
-            <a:off x="365760" y="3273552"/>
-            <a:ext cx="1371600" cy="658368"/>
+            <a:srgbClr val="FFFFFF"/>
+          </a:solidFill>
+          <a:ln w="12700">
+            <a:solidFill>
+              <a:srgbClr val="DB2777"/>
+            </a:solidFill>
+            <a:prstDash val="solid"/>
+          </a:ln>
+        </p:spPr>
+      </p:sp>
+      <p:sp>
+        <p:nvSpPr>
+          <p:cNvPr id="39" name="Text 37"/>
+          <p:cNvSpPr/>
+          <p:nvPr/>
+        </p:nvSpPr>
+        <p:spPr>
+          <a:xfrm>
+            <a:off x="3942207" y="4169664"/>
+            <a:ext cx="685800" cy="384048"/>
           </a:xfrm>
           <a:prstGeom prst="rect">
             <a:avLst/>
@@ -31437,84 +32274,57 @@
               <a:buNone/>
             </a:pPr>
             <a:r>
-              <a:rPr lang="en-US" sz="1100" b="1" dirty="0">
-                <a:solidFill>
-                  <a:srgbClr val="475569"/>
+              <a:rPr lang="en-US" sz="900" b="1" dirty="0">
+                <a:solidFill>
+                  <a:srgbClr val="9D174D"/>
                 </a:solidFill>
                 <a:latin typeface="Trebuchet MS" pitchFamily="34" charset="0"/>
                 <a:ea typeface="Trebuchet MS" pitchFamily="34" charset="-122"/>
                 <a:cs typeface="Trebuchet MS" pitchFamily="34" charset="-120"/>
               </a:rPr>
-              <a:t>Syllables</a:t>
-            </a:r>
-            <a:endParaRPr lang="en-US" sz="1100" dirty="0"/>
-          </a:p>
-        </p:txBody>
-      </p:sp>
-      <p:sp>
-        <p:nvSpPr>
-          <p:cNvPr id="25" name="Shape 23"/>
-          <p:cNvSpPr/>
-          <p:nvPr/>
-        </p:nvSpPr>
-        <p:spPr>
-          <a:xfrm>
-            <a:off x="1874520" y="3273552"/>
-            <a:ext cx="6903720" cy="658368"/>
+              <a:t>s</a:t>
+            </a:r>
+            <a:endParaRPr lang="en-US" sz="900" dirty="0"/>
+          </a:p>
+        </p:txBody>
+      </p:sp>
+      <p:sp>
+        <p:nvSpPr>
+          <p:cNvPr id="40" name="Shape 38"/>
+          <p:cNvSpPr/>
+          <p:nvPr/>
+        </p:nvSpPr>
+        <p:spPr>
+          <a:xfrm>
+            <a:off x="4850892" y="4169664"/>
+            <a:ext cx="685800" cy="384048"/>
           </a:xfrm>
           <a:prstGeom prst="rect">
             <a:avLst>
-              <a:gd name="adj" fmla="val 8333"/>
+              <a:gd name="adj" fmla="val 9524"/>
             </a:avLst>
           </a:prstGeom>
           <a:solidFill>
-            <a:srgbClr val="CCFBF1"/>
-          </a:solidFill>
-          <a:ln w="12700">
-            <a:solidFill>
-              <a:srgbClr val="0D9488"/>
-            </a:solidFill>
-            <a:prstDash val="solid"/>
-          </a:ln>
-        </p:spPr>
-      </p:sp>
-      <p:sp>
-        <p:nvSpPr>
-          <p:cNvPr id="26" name="Shape 24"/>
-          <p:cNvSpPr/>
-          <p:nvPr/>
-        </p:nvSpPr>
-        <p:spPr>
-          <a:xfrm>
-            <a:off x="2999232" y="3364992"/>
-            <a:ext cx="1645920" cy="475488"/>
-          </a:xfrm>
-          <a:prstGeom prst="rect">
-            <a:avLst>
-              <a:gd name="adj" fmla="val 9615"/>
-            </a:avLst>
-          </a:prstGeom>
-          <a:solidFill>
             <a:srgbClr val="FFFFFF"/>
           </a:solidFill>
           <a:ln w="12700">
             <a:solidFill>
-              <a:srgbClr val="0D9488"/>
-            </a:solidFill>
-            <a:prstDash val="solid"/>
-          </a:ln>
-        </p:spPr>
-      </p:sp>
-      <p:sp>
-        <p:nvSpPr>
-          <p:cNvPr id="27" name="Text 25"/>
-          <p:cNvSpPr/>
-          <p:nvPr/>
-        </p:nvSpPr>
-        <p:spPr>
-          <a:xfrm>
-            <a:off x="2999232" y="3364992"/>
-            <a:ext cx="1645920" cy="475488"/>
+              <a:srgbClr val="DB2777"/>
+            </a:solidFill>
+            <a:prstDash val="solid"/>
+          </a:ln>
+        </p:spPr>
+      </p:sp>
+      <p:sp>
+        <p:nvSpPr>
+          <p:cNvPr id="41" name="Text 39"/>
+          <p:cNvSpPr/>
+          <p:nvPr/>
+        </p:nvSpPr>
+        <p:spPr>
+          <a:xfrm>
+            <a:off x="4850892" y="4169664"/>
+            <a:ext cx="685800" cy="384048"/>
           </a:xfrm>
           <a:prstGeom prst="rect">
             <a:avLst/>
@@ -31530,30 +32340,57 @@
               <a:buNone/>
             </a:pPr>
             <a:r>
-              <a:rPr lang="en-US" sz="1400" b="1" dirty="0">
-                <a:solidFill>
-                  <a:srgbClr val="0D9488"/>
+              <a:rPr lang="en-US" sz="900" b="1" dirty="0">
+                <a:solidFill>
+                  <a:srgbClr val="9D174D"/>
                 </a:solidFill>
                 <a:latin typeface="Trebuchet MS" pitchFamily="34" charset="0"/>
                 <a:ea typeface="Trebuchet MS" pitchFamily="34" charset="-122"/>
                 <a:cs typeface="Trebuchet MS" pitchFamily="34" charset="-120"/>
               </a:rPr>
-              <a:t>tas</a:t>
-            </a:r>
-            <a:endParaRPr lang="en-US" sz="1400" dirty="0"/>
-          </a:p>
-        </p:txBody>
-      </p:sp>
-      <p:sp>
-        <p:nvSpPr>
-          <p:cNvPr id="28" name="Text 26"/>
-          <p:cNvSpPr/>
-          <p:nvPr/>
-        </p:nvSpPr>
-        <p:spPr>
-          <a:xfrm>
-            <a:off x="4645152" y="3364992"/>
-            <a:ext cx="1097280" cy="475488"/>
+              <a:t>t</a:t>
+            </a:r>
+            <a:endParaRPr lang="en-US" sz="900" dirty="0"/>
+          </a:p>
+        </p:txBody>
+      </p:sp>
+      <p:sp>
+        <p:nvSpPr>
+          <p:cNvPr id="42" name="Shape 40"/>
+          <p:cNvSpPr/>
+          <p:nvPr/>
+        </p:nvSpPr>
+        <p:spPr>
+          <a:xfrm>
+            <a:off x="5759577" y="4169664"/>
+            <a:ext cx="685800" cy="384048"/>
+          </a:xfrm>
+          <a:prstGeom prst="rect">
+            <a:avLst>
+              <a:gd name="adj" fmla="val 9524"/>
+            </a:avLst>
+          </a:prstGeom>
+          <a:solidFill>
+            <a:srgbClr val="FFFFFF"/>
+          </a:solidFill>
+          <a:ln w="12700">
+            <a:solidFill>
+              <a:srgbClr val="DB2777"/>
+            </a:solidFill>
+            <a:prstDash val="solid"/>
+          </a:ln>
+        </p:spPr>
+      </p:sp>
+      <p:sp>
+        <p:nvSpPr>
+          <p:cNvPr id="43" name="Text 41"/>
+          <p:cNvSpPr/>
+          <p:nvPr/>
+        </p:nvSpPr>
+        <p:spPr>
+          <a:xfrm>
+            <a:off x="5759577" y="4169664"/>
+            <a:ext cx="685800" cy="384048"/>
           </a:xfrm>
           <a:prstGeom prst="rect">
             <a:avLst/>
@@ -31569,34 +32406,34 @@
               <a:buNone/>
             </a:pPr>
             <a:r>
-              <a:rPr lang="en-US" sz="1600" b="1" dirty="0">
-                <a:solidFill>
-                  <a:srgbClr val="0D9488"/>
+              <a:rPr lang="en-US" sz="900" b="1" dirty="0">
+                <a:solidFill>
+                  <a:srgbClr val="9D174D"/>
                 </a:solidFill>
                 <a:latin typeface="Trebuchet MS" pitchFamily="34" charset="0"/>
                 <a:ea typeface="Trebuchet MS" pitchFamily="34" charset="-122"/>
                 <a:cs typeface="Trebuchet MS" pitchFamily="34" charset="-120"/>
               </a:rPr>
-              <a:t>·</a:t>
-            </a:r>
-            <a:endParaRPr lang="en-US" sz="1600" dirty="0"/>
-          </a:p>
-        </p:txBody>
-      </p:sp>
-      <p:sp>
-        <p:nvSpPr>
-          <p:cNvPr id="29" name="Shape 27"/>
-          <p:cNvSpPr/>
-          <p:nvPr/>
-        </p:nvSpPr>
-        <p:spPr>
-          <a:xfrm>
-            <a:off x="5742432" y="3364992"/>
-            <a:ext cx="1645920" cy="475488"/>
+              <a:t>l</a:t>
+            </a:r>
+            <a:endParaRPr lang="en-US" sz="900" dirty="0"/>
+          </a:p>
+        </p:txBody>
+      </p:sp>
+      <p:sp>
+        <p:nvSpPr>
+          <p:cNvPr id="44" name="Shape 42"/>
+          <p:cNvSpPr/>
+          <p:nvPr/>
+        </p:nvSpPr>
+        <p:spPr>
+          <a:xfrm>
+            <a:off x="6668262" y="4169664"/>
+            <a:ext cx="685800" cy="384048"/>
           </a:xfrm>
           <a:prstGeom prst="rect">
             <a:avLst>
-              <a:gd name="adj" fmla="val 9615"/>
+              <a:gd name="adj" fmla="val 9524"/>
             </a:avLst>
           </a:prstGeom>
           <a:solidFill>
@@ -31604,22 +32441,22 @@
           </a:solidFill>
           <a:ln w="12700">
             <a:solidFill>
-              <a:srgbClr val="0D9488"/>
-            </a:solidFill>
-            <a:prstDash val="solid"/>
-          </a:ln>
-        </p:spPr>
-      </p:sp>
-      <p:sp>
-        <p:nvSpPr>
-          <p:cNvPr id="30" name="Text 28"/>
-          <p:cNvSpPr/>
-          <p:nvPr/>
-        </p:nvSpPr>
-        <p:spPr>
-          <a:xfrm>
-            <a:off x="5742432" y="3364992"/>
-            <a:ext cx="1645920" cy="475488"/>
+              <a:srgbClr val="DB2777"/>
+            </a:solidFill>
+            <a:prstDash val="solid"/>
+          </a:ln>
+        </p:spPr>
+      </p:sp>
+      <p:sp>
+        <p:nvSpPr>
+          <p:cNvPr id="45" name="Text 43"/>
+          <p:cNvSpPr/>
+          <p:nvPr/>
+        </p:nvSpPr>
+        <p:spPr>
+          <a:xfrm>
+            <a:off x="6668262" y="4169664"/>
+            <a:ext cx="685800" cy="384048"/>
           </a:xfrm>
           <a:prstGeom prst="rect">
             <a:avLst/>
@@ -31635,57 +32472,57 @@
               <a:buNone/>
             </a:pPr>
             <a:r>
-              <a:rPr lang="en-US" sz="1400" b="1" dirty="0">
-                <a:solidFill>
-                  <a:srgbClr val="0D9488"/>
+              <a:rPr lang="en-US" sz="900" b="1" dirty="0">
+                <a:solidFill>
+                  <a:srgbClr val="9D174D"/>
                 </a:solidFill>
                 <a:latin typeface="Trebuchet MS" pitchFamily="34" charset="0"/>
                 <a:ea typeface="Trebuchet MS" pitchFamily="34" charset="-122"/>
                 <a:cs typeface="Trebuchet MS" pitchFamily="34" charset="-120"/>
               </a:rPr>
-              <a:t>ting</a:t>
-            </a:r>
-            <a:endParaRPr lang="en-US" sz="1400" dirty="0"/>
-          </a:p>
-        </p:txBody>
-      </p:sp>
-      <p:sp>
-        <p:nvSpPr>
-          <p:cNvPr id="31" name="Shape 29"/>
-          <p:cNvSpPr/>
-          <p:nvPr/>
-        </p:nvSpPr>
-        <p:spPr>
-          <a:xfrm>
-            <a:off x="365760" y="4096512"/>
-            <a:ext cx="1371600" cy="804672"/>
+              <a:t>e</a:t>
+            </a:r>
+            <a:endParaRPr lang="en-US" sz="900" dirty="0"/>
+          </a:p>
+        </p:txBody>
+      </p:sp>
+      <p:sp>
+        <p:nvSpPr>
+          <p:cNvPr id="46" name="Shape 44"/>
+          <p:cNvSpPr/>
+          <p:nvPr/>
+        </p:nvSpPr>
+        <p:spPr>
+          <a:xfrm>
+            <a:off x="7576947" y="4169664"/>
+            <a:ext cx="685800" cy="384048"/>
           </a:xfrm>
           <a:prstGeom prst="rect">
             <a:avLst>
-              <a:gd name="adj" fmla="val 6818"/>
+              <a:gd name="adj" fmla="val 9524"/>
             </a:avLst>
           </a:prstGeom>
           <a:solidFill>
-            <a:srgbClr val="E2E8F0"/>
-          </a:solidFill>
-          <a:ln w="12700">
-            <a:solidFill>
-              <a:srgbClr val="E2E8F0"/>
-            </a:solidFill>
-            <a:prstDash val="solid"/>
-          </a:ln>
-        </p:spPr>
-      </p:sp>
-      <p:sp>
-        <p:nvSpPr>
-          <p:cNvPr id="32" name="Text 30"/>
-          <p:cNvSpPr/>
-          <p:nvPr/>
-        </p:nvSpPr>
-        <p:spPr>
-          <a:xfrm>
-            <a:off x="365760" y="4096512"/>
-            <a:ext cx="1371600" cy="804672"/>
+            <a:srgbClr val="FFFFFF"/>
+          </a:solidFill>
+          <a:ln w="12700">
+            <a:solidFill>
+              <a:srgbClr val="DB2777"/>
+            </a:solidFill>
+            <a:prstDash val="solid"/>
+          </a:ln>
+        </p:spPr>
+      </p:sp>
+      <p:sp>
+        <p:nvSpPr>
+          <p:cNvPr id="47" name="Text 45"/>
+          <p:cNvSpPr/>
+          <p:nvPr/>
+        </p:nvSpPr>
+        <p:spPr>
+          <a:xfrm>
+            <a:off x="7576947" y="4169664"/>
+            <a:ext cx="685800" cy="384048"/>
           </a:xfrm>
           <a:prstGeom prst="rect">
             <a:avLst/>
@@ -31701,372 +32538,15 @@
               <a:buNone/>
             </a:pPr>
             <a:r>
-              <a:rPr lang="en-US" sz="1100" b="1" dirty="0">
-                <a:solidFill>
-                  <a:srgbClr val="475569"/>
+              <a:rPr lang="en-US" sz="900" b="1" dirty="0">
+                <a:solidFill>
+                  <a:srgbClr val="9D174D"/>
                 </a:solidFill>
                 <a:latin typeface="Trebuchet MS" pitchFamily="34" charset="0"/>
                 <a:ea typeface="Trebuchet MS" pitchFamily="34" charset="-122"/>
                 <a:cs typeface="Trebuchet MS" pitchFamily="34" charset="-120"/>
               </a:rPr>
-              <a:t>Phonemes</a:t>
-            </a:r>
-            <a:endParaRPr lang="en-US" sz="1100" dirty="0"/>
-          </a:p>
-        </p:txBody>
-      </p:sp>
-      <p:sp>
-        <p:nvSpPr>
-          <p:cNvPr id="33" name="Shape 31"/>
-          <p:cNvSpPr/>
-          <p:nvPr/>
-        </p:nvSpPr>
-        <p:spPr>
-          <a:xfrm>
-            <a:off x="1874520" y="4096512"/>
-            <a:ext cx="6903720" cy="658368"/>
-          </a:xfrm>
-          <a:prstGeom prst="rect">
-            <a:avLst>
-              <a:gd name="adj" fmla="val 8333"/>
-            </a:avLst>
-          </a:prstGeom>
-          <a:solidFill>
-            <a:srgbClr val="FCE7F3"/>
-          </a:solidFill>
-          <a:ln w="12700">
-            <a:solidFill>
-              <a:srgbClr val="DB2777"/>
-            </a:solidFill>
-            <a:prstDash val="solid"/>
-          </a:ln>
-        </p:spPr>
-      </p:sp>
-      <p:sp>
-        <p:nvSpPr>
-          <p:cNvPr id="34" name="Shape 32"/>
-          <p:cNvSpPr/>
-          <p:nvPr/>
-        </p:nvSpPr>
-        <p:spPr>
-          <a:xfrm>
-            <a:off x="2427732" y="4169664"/>
-            <a:ext cx="685800" cy="475488"/>
-          </a:xfrm>
-          <a:prstGeom prst="rect">
-            <a:avLst>
-              <a:gd name="adj" fmla="val 7692"/>
-            </a:avLst>
-          </a:prstGeom>
-          <a:solidFill>
-            <a:srgbClr val="FFFFFF"/>
-          </a:solidFill>
-          <a:ln w="12700">
-            <a:solidFill>
-              <a:srgbClr val="DB2777"/>
-            </a:solidFill>
-            <a:prstDash val="solid"/>
-          </a:ln>
-        </p:spPr>
-      </p:sp>
-      <p:sp>
-        <p:nvSpPr>
-          <p:cNvPr id="35" name="Text 33"/>
-          <p:cNvSpPr/>
-          <p:nvPr/>
-        </p:nvSpPr>
-        <p:spPr>
-          <a:xfrm>
-            <a:off x="2427732" y="4169664"/>
-            <a:ext cx="685800" cy="475488"/>
-          </a:xfrm>
-          <a:prstGeom prst="rect">
-            <a:avLst/>
-          </a:prstGeom>
-          <a:noFill/>
-          <a:ln/>
-        </p:spPr>
-        <p:txBody>
-          <a:bodyPr wrap="square" lIns="0" tIns="0" rIns="0" bIns="0" rtlCol="0" anchor="ctr"/>
-          <a:lstStyle/>
-          <a:p>
-            <a:pPr algn="ctr" indent="0" marL="0">
-              <a:buNone/>
-            </a:pPr>
-            <a:r>
-              <a:rPr lang="en-US" sz="900" b="1" dirty="0">
-                <a:solidFill>
-                  <a:srgbClr val="9D174D"/>
-                </a:solidFill>
-                <a:latin typeface="Trebuchet MS" pitchFamily="34" charset="0"/>
-                <a:ea typeface="Trebuchet MS" pitchFamily="34" charset="-122"/>
-                <a:cs typeface="Trebuchet MS" pitchFamily="34" charset="-120"/>
-              </a:rPr>
-              <a:t>t</a:t>
-            </a:r>
-            <a:endParaRPr lang="en-US" sz="900" dirty="0"/>
-          </a:p>
-        </p:txBody>
-      </p:sp>
-      <p:sp>
-        <p:nvSpPr>
-          <p:cNvPr id="36" name="Shape 34"/>
-          <p:cNvSpPr/>
-          <p:nvPr/>
-        </p:nvSpPr>
-        <p:spPr>
-          <a:xfrm>
-            <a:off x="3639312" y="4169664"/>
-            <a:ext cx="685800" cy="475488"/>
-          </a:xfrm>
-          <a:prstGeom prst="rect">
-            <a:avLst>
-              <a:gd name="adj" fmla="val 7692"/>
-            </a:avLst>
-          </a:prstGeom>
-          <a:solidFill>
-            <a:srgbClr val="FFFFFF"/>
-          </a:solidFill>
-          <a:ln w="12700">
-            <a:solidFill>
-              <a:srgbClr val="DB2777"/>
-            </a:solidFill>
-            <a:prstDash val="solid"/>
-          </a:ln>
-        </p:spPr>
-      </p:sp>
-      <p:sp>
-        <p:nvSpPr>
-          <p:cNvPr id="37" name="Text 35"/>
-          <p:cNvSpPr/>
-          <p:nvPr/>
-        </p:nvSpPr>
-        <p:spPr>
-          <a:xfrm>
-            <a:off x="3639312" y="4169664"/>
-            <a:ext cx="685800" cy="475488"/>
-          </a:xfrm>
-          <a:prstGeom prst="rect">
-            <a:avLst/>
-          </a:prstGeom>
-          <a:noFill/>
-          <a:ln/>
-        </p:spPr>
-        <p:txBody>
-          <a:bodyPr wrap="square" lIns="0" tIns="0" rIns="0" bIns="0" rtlCol="0" anchor="ctr"/>
-          <a:lstStyle/>
-          <a:p>
-            <a:pPr algn="ctr" indent="0" marL="0">
-              <a:buNone/>
-            </a:pPr>
-            <a:r>
-              <a:rPr lang="en-US" sz="900" b="1" dirty="0">
-                <a:solidFill>
-                  <a:srgbClr val="9D174D"/>
-                </a:solidFill>
-                <a:latin typeface="Trebuchet MS" pitchFamily="34" charset="0"/>
-                <a:ea typeface="Trebuchet MS" pitchFamily="34" charset="-122"/>
-                <a:cs typeface="Trebuchet MS" pitchFamily="34" charset="-120"/>
-              </a:rPr>
-              <a:t>a</a:t>
-            </a:r>
-            <a:endParaRPr lang="en-US" sz="900" dirty="0"/>
-          </a:p>
-        </p:txBody>
-      </p:sp>
-      <p:sp>
-        <p:nvSpPr>
-          <p:cNvPr id="38" name="Shape 36"/>
-          <p:cNvSpPr/>
-          <p:nvPr/>
-        </p:nvSpPr>
-        <p:spPr>
-          <a:xfrm>
-            <a:off x="4850892" y="4169664"/>
-            <a:ext cx="685800" cy="475488"/>
-          </a:xfrm>
-          <a:prstGeom prst="rect">
-            <a:avLst>
-              <a:gd name="adj" fmla="val 7692"/>
-            </a:avLst>
-          </a:prstGeom>
-          <a:solidFill>
-            <a:srgbClr val="FFFFFF"/>
-          </a:solidFill>
-          <a:ln w="12700">
-            <a:solidFill>
-              <a:srgbClr val="DB2777"/>
-            </a:solidFill>
-            <a:prstDash val="solid"/>
-          </a:ln>
-        </p:spPr>
-      </p:sp>
-      <p:sp>
-        <p:nvSpPr>
-          <p:cNvPr id="39" name="Text 37"/>
-          <p:cNvSpPr/>
-          <p:nvPr/>
-        </p:nvSpPr>
-        <p:spPr>
-          <a:xfrm>
-            <a:off x="4850892" y="4169664"/>
-            <a:ext cx="685800" cy="475488"/>
-          </a:xfrm>
-          <a:prstGeom prst="rect">
-            <a:avLst/>
-          </a:prstGeom>
-          <a:noFill/>
-          <a:ln/>
-        </p:spPr>
-        <p:txBody>
-          <a:bodyPr wrap="square" lIns="0" tIns="0" rIns="0" bIns="0" rtlCol="0" anchor="ctr"/>
-          <a:lstStyle/>
-          <a:p>
-            <a:pPr algn="ctr" indent="0" marL="0">
-              <a:buNone/>
-            </a:pPr>
-            <a:r>
-              <a:rPr lang="en-US" sz="900" b="1" dirty="0">
-                <a:solidFill>
-                  <a:srgbClr val="9D174D"/>
-                </a:solidFill>
-                <a:latin typeface="Trebuchet MS" pitchFamily="34" charset="0"/>
-                <a:ea typeface="Trebuchet MS" pitchFamily="34" charset="-122"/>
-                <a:cs typeface="Trebuchet MS" pitchFamily="34" charset="-120"/>
-              </a:rPr>
-              <a:t>s</a:t>
-            </a:r>
-            <a:endParaRPr lang="en-US" sz="900" dirty="0"/>
-          </a:p>
-        </p:txBody>
-      </p:sp>
-      <p:sp>
-        <p:nvSpPr>
-          <p:cNvPr id="40" name="Shape 38"/>
-          <p:cNvSpPr/>
-          <p:nvPr/>
-        </p:nvSpPr>
-        <p:spPr>
-          <a:xfrm>
-            <a:off x="6062472" y="4169664"/>
-            <a:ext cx="685800" cy="475488"/>
-          </a:xfrm>
-          <a:prstGeom prst="rect">
-            <a:avLst>
-              <a:gd name="adj" fmla="val 7692"/>
-            </a:avLst>
-          </a:prstGeom>
-          <a:solidFill>
-            <a:srgbClr val="FFFFFF"/>
-          </a:solidFill>
-          <a:ln w="12700">
-            <a:solidFill>
-              <a:srgbClr val="DB2777"/>
-            </a:solidFill>
-            <a:prstDash val="solid"/>
-          </a:ln>
-        </p:spPr>
-      </p:sp>
-      <p:sp>
-        <p:nvSpPr>
-          <p:cNvPr id="41" name="Text 39"/>
-          <p:cNvSpPr/>
-          <p:nvPr/>
-        </p:nvSpPr>
-        <p:spPr>
-          <a:xfrm>
-            <a:off x="6062472" y="4169664"/>
-            <a:ext cx="685800" cy="475488"/>
-          </a:xfrm>
-          <a:prstGeom prst="rect">
-            <a:avLst/>
-          </a:prstGeom>
-          <a:noFill/>
-          <a:ln/>
-        </p:spPr>
-        <p:txBody>
-          <a:bodyPr wrap="square" lIns="0" tIns="0" rIns="0" bIns="0" rtlCol="0" anchor="ctr"/>
-          <a:lstStyle/>
-          <a:p>
-            <a:pPr algn="ctr" indent="0" marL="0">
-              <a:buNone/>
-            </a:pPr>
-            <a:r>
-              <a:rPr lang="en-US" sz="900" b="1" dirty="0">
-                <a:solidFill>
-                  <a:srgbClr val="9D174D"/>
-                </a:solidFill>
-                <a:latin typeface="Trebuchet MS" pitchFamily="34" charset="0"/>
-                <a:ea typeface="Trebuchet MS" pitchFamily="34" charset="-122"/>
-                <a:cs typeface="Trebuchet MS" pitchFamily="34" charset="-120"/>
-              </a:rPr>
-              <a:t>t</a:t>
-            </a:r>
-            <a:endParaRPr lang="en-US" sz="900" dirty="0"/>
-          </a:p>
-        </p:txBody>
-      </p:sp>
-      <p:sp>
-        <p:nvSpPr>
-          <p:cNvPr id="42" name="Shape 40"/>
-          <p:cNvSpPr/>
-          <p:nvPr/>
-        </p:nvSpPr>
-        <p:spPr>
-          <a:xfrm>
-            <a:off x="7274052" y="4169664"/>
-            <a:ext cx="685800" cy="475488"/>
-          </a:xfrm>
-          <a:prstGeom prst="rect">
-            <a:avLst>
-              <a:gd name="adj" fmla="val 7692"/>
-            </a:avLst>
-          </a:prstGeom>
-          <a:solidFill>
-            <a:srgbClr val="FFFFFF"/>
-          </a:solidFill>
-          <a:ln w="12700">
-            <a:solidFill>
-              <a:srgbClr val="DB2777"/>
-            </a:solidFill>
-            <a:prstDash val="solid"/>
-          </a:ln>
-        </p:spPr>
-      </p:sp>
-      <p:sp>
-        <p:nvSpPr>
-          <p:cNvPr id="43" name="Text 41"/>
-          <p:cNvSpPr/>
-          <p:nvPr/>
-        </p:nvSpPr>
-        <p:spPr>
-          <a:xfrm>
-            <a:off x="7274052" y="4169664"/>
-            <a:ext cx="685800" cy="475488"/>
-          </a:xfrm>
-          <a:prstGeom prst="rect">
-            <a:avLst/>
-          </a:prstGeom>
-          <a:noFill/>
-          <a:ln/>
-        </p:spPr>
-        <p:txBody>
-          <a:bodyPr wrap="square" lIns="0" tIns="0" rIns="0" bIns="0" rtlCol="0" anchor="ctr"/>
-          <a:lstStyle/>
-          <a:p>
-            <a:pPr algn="ctr" indent="0" marL="0">
-              <a:buNone/>
-            </a:pPr>
-            <a:r>
-              <a:rPr lang="en-US" sz="900" b="1" dirty="0">
-                <a:solidFill>
-                  <a:srgbClr val="9D174D"/>
-                </a:solidFill>
-                <a:latin typeface="Trebuchet MS" pitchFamily="34" charset="0"/>
-                <a:ea typeface="Trebuchet MS" pitchFamily="34" charset="-122"/>
-                <a:cs typeface="Trebuchet MS" pitchFamily="34" charset="-120"/>
-              </a:rPr>
-              <a:t>ing</a:t>
+              <a:t>ss</a:t>
             </a:r>
             <a:endParaRPr lang="en-US" sz="900" dirty="0"/>
           </a:p>
@@ -34262,7 +34742,7 @@
                 <a:ea typeface="Trebuchet MS" pitchFamily="34" charset="-122"/>
                 <a:cs typeface="Trebuchet MS" pitchFamily="34" charset="-120"/>
               </a:rPr>
-              <a:t>-ing</a:t>
+              <a:t>-ful-ly</a:t>
             </a:r>
             <a:endParaRPr lang="en-US" sz="1300" dirty="0"/>
           </a:p>
@@ -34326,7 +34806,7 @@
                 <a:ea typeface="Trebuchet MS" pitchFamily="34" charset="-122"/>
                 <a:cs typeface="Trebuchet MS" pitchFamily="34" charset="-120"/>
               </a:rPr>
-              <a:t>un-</a:t>
+              <a:t>re-</a:t>
             </a:r>
             <a:endParaRPr lang="en-US" sz="1300" dirty="0"/>
           </a:p>
@@ -34415,7 +34895,7 @@
                 <a:ea typeface="Trebuchet MS" pitchFamily="34" charset="-122"/>
                 <a:cs typeface="Trebuchet MS" pitchFamily="34" charset="-120"/>
               </a:rPr>
-              <a:t>-ed</a:t>
+              <a:t>-ing</a:t>
             </a:r>
             <a:endParaRPr lang="en-US" sz="1300" dirty="0"/>
           </a:p>
@@ -34479,7 +34959,7 @@
                 <a:ea typeface="Trebuchet MS" pitchFamily="34" charset="-122"/>
                 <a:cs typeface="Trebuchet MS" pitchFamily="34" charset="-120"/>
               </a:rPr>
-              <a:t>re-</a:t>
+              <a:t>un-</a:t>
             </a:r>
             <a:endParaRPr lang="en-US" sz="1300" dirty="0"/>
           </a:p>
@@ -34568,7 +35048,7 @@
                 <a:ea typeface="Trebuchet MS" pitchFamily="34" charset="-122"/>
                 <a:cs typeface="Trebuchet MS" pitchFamily="34" charset="-120"/>
               </a:rPr>
-              <a:t>-ful</a:t>
+              <a:t>-ed</a:t>
             </a:r>
             <a:endParaRPr lang="en-US" sz="1300" dirty="0"/>
           </a:p>
@@ -34805,7 +35285,7 @@
                 <a:ea typeface="Trebuchet MS" pitchFamily="34" charset="-122"/>
                 <a:cs typeface="Trebuchet MS" pitchFamily="34" charset="-120"/>
               </a:rPr>
-              <a:t>tasting</a:t>
+              <a:t>distaste</a:t>
             </a:r>
             <a:endParaRPr lang="en-US" sz="1200" dirty="0"/>
           </a:p>
@@ -34871,7 +35351,7 @@
                 <a:ea typeface="Trebuchet MS" pitchFamily="34" charset="-122"/>
                 <a:cs typeface="Trebuchet MS" pitchFamily="34" charset="-120"/>
               </a:rPr>
-              <a:t>tasted</a:t>
+              <a:t>tasting</a:t>
             </a:r>
             <a:endParaRPr lang="en-US" sz="1200" dirty="0"/>
           </a:p>
@@ -34937,7 +35417,7 @@
                 <a:ea typeface="Trebuchet MS" pitchFamily="34" charset="-122"/>
                 <a:cs typeface="Trebuchet MS" pitchFamily="34" charset="-120"/>
               </a:rPr>
-              <a:t>tasty</a:t>
+              <a:t>tasted</a:t>
             </a:r>
             <a:endParaRPr lang="en-US" sz="1200" dirty="0"/>
           </a:p>
@@ -35003,7 +35483,7 @@
                 <a:ea typeface="Trebuchet MS" pitchFamily="34" charset="-122"/>
                 <a:cs typeface="Trebuchet MS" pitchFamily="34" charset="-120"/>
               </a:rPr>
-              <a:t>distaste</a:t>
+              <a:t>tasty</a:t>
             </a:r>
             <a:endParaRPr lang="en-US" sz="1200" dirty="0"/>
           </a:p>
@@ -35069,7 +35549,7 @@
                 <a:ea typeface="Trebuchet MS" pitchFamily="34" charset="-122"/>
                 <a:cs typeface="Trebuchet MS" pitchFamily="34" charset="-120"/>
               </a:rPr>
-              <a:t>aftertaste</a:t>
+              <a:t>foretaste</a:t>
             </a:r>
             <a:endParaRPr lang="en-US" sz="1200" dirty="0"/>
           </a:p>
@@ -35135,7 +35615,7 @@
                 <a:ea typeface="Trebuchet MS" pitchFamily="34" charset="-122"/>
                 <a:cs typeface="Trebuchet MS" pitchFamily="34" charset="-120"/>
               </a:rPr>
-              <a:t>retaste</a:t>
+              <a:t>distasteful</a:t>
             </a:r>
             <a:endParaRPr lang="en-US" sz="1200" dirty="0"/>
           </a:p>
@@ -36323,7 +36803,7 @@
                 <a:ea typeface="Calibri" pitchFamily="34" charset="-122"/>
                 <a:cs typeface="Calibri" pitchFamily="34" charset="-120"/>
               </a:rPr>
-              <a:t>1.  The word 'tasteful' contains the root 'taste' and the suffix '-ful'.</a:t>
+              <a:t>1.  The word 'tasteless' contains the root 'taste' and a suffix meaning 'without'.</a:t>
             </a:r>
             <a:endParaRPr lang="en-US" sz="1300" dirty="0"/>
           </a:p>
@@ -36462,7 +36942,7 @@
                 <a:ea typeface="Calibri" pitchFamily="34" charset="-122"/>
                 <a:cs typeface="Calibri" pitchFamily="34" charset="-120"/>
               </a:rPr>
-              <a:t>2.  The word 'distaste' means to really enjoy something.</a:t>
+              <a:t>2.  The word 'tasteful' uses the suffix '-ful' meaning full of or having.</a:t>
             </a:r>
             <a:endParaRPr lang="en-US" sz="1300" dirty="0"/>
           </a:p>
@@ -36485,11 +36965,11 @@
             </a:avLst>
           </a:prstGeom>
           <a:solidFill>
-            <a:srgbClr val="FEE2E2"/>
-          </a:solidFill>
-          <a:ln w="12700">
-            <a:solidFill>
-              <a:srgbClr val="DC2626"/>
+            <a:srgbClr val="DCFCE7"/>
+          </a:solidFill>
+          <a:ln w="12700">
+            <a:solidFill>
+              <a:srgbClr val="16A34A"/>
             </a:solidFill>
             <a:prstDash val="solid"/>
           </a:ln>
@@ -36522,13 +37002,13 @@
             <a:r>
               <a:rPr lang="en-US" sz="1100" b="1" dirty="0">
                 <a:solidFill>
-                  <a:srgbClr val="DC2626"/>
+                  <a:srgbClr val="16A34A"/>
                 </a:solidFill>
                 <a:latin typeface="Trebuchet MS" pitchFamily="34" charset="0"/>
                 <a:ea typeface="Trebuchet MS" pitchFamily="34" charset="-122"/>
                 <a:cs typeface="Trebuchet MS" pitchFamily="34" charset="-120"/>
               </a:rPr>
-              <a:t>FALSE</a:t>
+              <a:t>TRUE</a:t>
             </a:r>
             <a:endParaRPr lang="en-US" sz="1100" dirty="0"/>
           </a:p>
@@ -36601,7 +37081,7 @@
                 <a:ea typeface="Calibri" pitchFamily="34" charset="-122"/>
                 <a:cs typeface="Calibri" pitchFamily="34" charset="-120"/>
               </a:rPr>
-              <a:t>3.  An 'aftertaste' is the flavour that lingers in your mouth after eating.</a:t>
+              <a:t>3.  The root 'taste' comes from ancient Greek.</a:t>
             </a:r>
             <a:endParaRPr lang="en-US" sz="1300" dirty="0"/>
           </a:p>
@@ -36624,11 +37104,11 @@
             </a:avLst>
           </a:prstGeom>
           <a:solidFill>
-            <a:srgbClr val="DCFCE7"/>
-          </a:solidFill>
-          <a:ln w="12700">
-            <a:solidFill>
-              <a:srgbClr val="16A34A"/>
+            <a:srgbClr val="FEE2E2"/>
+          </a:solidFill>
+          <a:ln w="12700">
+            <a:solidFill>
+              <a:srgbClr val="DC2626"/>
             </a:solidFill>
             <a:prstDash val="solid"/>
           </a:ln>
@@ -36661,13 +37141,13 @@
             <a:r>
               <a:rPr lang="en-US" sz="1100" b="1" dirty="0">
                 <a:solidFill>
-                  <a:srgbClr val="16A34A"/>
+                  <a:srgbClr val="DC2626"/>
                 </a:solidFill>
                 <a:latin typeface="Trebuchet MS" pitchFamily="34" charset="0"/>
                 <a:ea typeface="Trebuchet MS" pitchFamily="34" charset="-122"/>
                 <a:cs typeface="Trebuchet MS" pitchFamily="34" charset="-120"/>
               </a:rPr>
-              <a:t>TRUE</a:t>
+              <a:t>FALSE</a:t>
             </a:r>
             <a:endParaRPr lang="en-US" sz="1100" dirty="0"/>
           </a:p>
@@ -36740,7 +37220,7 @@
                 <a:ea typeface="Calibri" pitchFamily="34" charset="-122"/>
                 <a:cs typeface="Calibri" pitchFamily="34" charset="-120"/>
               </a:rPr>
-              <a:t>4.  The root 'taste' relates to sensing flavour or judging quality.</a:t>
+              <a:t>4.  The word 'foretaste' means to experience something after it has already happened.</a:t>
             </a:r>
             <a:endParaRPr lang="en-US" sz="1300" dirty="0"/>
           </a:p>
@@ -36763,11 +37243,11 @@
             </a:avLst>
           </a:prstGeom>
           <a:solidFill>
-            <a:srgbClr val="DCFCE7"/>
-          </a:solidFill>
-          <a:ln w="12700">
-            <a:solidFill>
-              <a:srgbClr val="16A34A"/>
+            <a:srgbClr val="FEE2E2"/>
+          </a:solidFill>
+          <a:ln w="12700">
+            <a:solidFill>
+              <a:srgbClr val="DC2626"/>
             </a:solidFill>
             <a:prstDash val="solid"/>
           </a:ln>
@@ -36800,13 +37280,13 @@
             <a:r>
               <a:rPr lang="en-US" sz="1100" b="1" dirty="0">
                 <a:solidFill>
-                  <a:srgbClr val="16A34A"/>
+                  <a:srgbClr val="DC2626"/>
                 </a:solidFill>
                 <a:latin typeface="Trebuchet MS" pitchFamily="34" charset="0"/>
                 <a:ea typeface="Trebuchet MS" pitchFamily="34" charset="-122"/>
                 <a:cs typeface="Trebuchet MS" pitchFamily="34" charset="-120"/>
               </a:rPr>
-              <a:t>TRUE</a:t>
+              <a:t>FALSE</a:t>
             </a:r>
             <a:endParaRPr lang="en-US" sz="1100" dirty="0"/>
           </a:p>
@@ -36879,7 +37359,7 @@
                 <a:ea typeface="Calibri" pitchFamily="34" charset="-122"/>
                 <a:cs typeface="Calibri" pitchFamily="34" charset="-120"/>
               </a:rPr>
-              <a:t>5.  The word 'tasteless' means something is full of wonderful flavour.</a:t>
+              <a:t>5.  Adding the prefix 'dis' to 'taste' makes a word meaning a feeling of dislike.</a:t>
             </a:r>
             <a:endParaRPr lang="en-US" sz="1300" dirty="0"/>
           </a:p>
@@ -36902,11 +37382,11 @@
             </a:avLst>
           </a:prstGeom>
           <a:solidFill>
-            <a:srgbClr val="FEE2E2"/>
-          </a:solidFill>
-          <a:ln w="12700">
-            <a:solidFill>
-              <a:srgbClr val="DC2626"/>
+            <a:srgbClr val="DCFCE7"/>
+          </a:solidFill>
+          <a:ln w="12700">
+            <a:solidFill>
+              <a:srgbClr val="16A34A"/>
             </a:solidFill>
             <a:prstDash val="solid"/>
           </a:ln>
@@ -36939,13 +37419,13 @@
             <a:r>
               <a:rPr lang="en-US" sz="1100" b="1" dirty="0">
                 <a:solidFill>
-                  <a:srgbClr val="DC2626"/>
+                  <a:srgbClr val="16A34A"/>
                 </a:solidFill>
                 <a:latin typeface="Trebuchet MS" pitchFamily="34" charset="0"/>
                 <a:ea typeface="Trebuchet MS" pitchFamily="34" charset="-122"/>
                 <a:cs typeface="Trebuchet MS" pitchFamily="34" charset="-120"/>
               </a:rPr>
-              <a:t>FALSE</a:t>
+              <a:t>TRUE</a:t>
             </a:r>
             <a:endParaRPr lang="en-US" sz="1100" dirty="0"/>
           </a:p>
@@ -37650,7 +38130,7 @@
                 <a:ea typeface="Trebuchet MS" pitchFamily="34" charset="-122"/>
                 <a:cs typeface="Trebuchet MS" pitchFamily="34" charset="-120"/>
               </a:rPr>
-              <a:t>tasting</a:t>
+              <a:t>distaste</a:t>
             </a:r>
             <a:endParaRPr lang="en-US" sz="1300" dirty="0"/>
           </a:p>
@@ -37716,7 +38196,7 @@
                 <a:ea typeface="Trebuchet MS" pitchFamily="34" charset="-122"/>
                 <a:cs typeface="Trebuchet MS" pitchFamily="34" charset="-120"/>
               </a:rPr>
-              <a:t>tasted</a:t>
+              <a:t>tasting</a:t>
             </a:r>
             <a:endParaRPr lang="en-US" sz="1300" dirty="0"/>
           </a:p>
@@ -37782,7 +38262,7 @@
                 <a:ea typeface="Trebuchet MS" pitchFamily="34" charset="-122"/>
                 <a:cs typeface="Trebuchet MS" pitchFamily="34" charset="-120"/>
               </a:rPr>
-              <a:t>tasty</a:t>
+              <a:t>tasted</a:t>
             </a:r>
             <a:endParaRPr lang="en-US" sz="1300" dirty="0"/>
           </a:p>
@@ -37848,7 +38328,7 @@
                 <a:ea typeface="Trebuchet MS" pitchFamily="34" charset="-122"/>
                 <a:cs typeface="Trebuchet MS" pitchFamily="34" charset="-120"/>
               </a:rPr>
-              <a:t>distaste</a:t>
+              <a:t>tasty</a:t>
             </a:r>
             <a:endParaRPr lang="en-US" sz="1300" dirty="0"/>
           </a:p>
@@ -37914,7 +38394,7 @@
                 <a:ea typeface="Trebuchet MS" pitchFamily="34" charset="-122"/>
                 <a:cs typeface="Trebuchet MS" pitchFamily="34" charset="-120"/>
               </a:rPr>
-              <a:t>aftertaste</a:t>
+              <a:t>foretaste</a:t>
             </a:r>
             <a:endParaRPr lang="en-US" sz="1300" dirty="0"/>
           </a:p>
@@ -38941,7 +39421,7 @@
                 <a:ea typeface="Trebuchet MS" pitchFamily="34" charset="-122"/>
                 <a:cs typeface="Trebuchet MS" pitchFamily="34" charset="-120"/>
               </a:rPr>
-              <a:t>-ing</a:t>
+              <a:t>-ful-ly</a:t>
             </a:r>
             <a:endParaRPr lang="en-US" sz="1300" dirty="0"/>
           </a:p>
@@ -39005,7 +39485,7 @@
                 <a:ea typeface="Trebuchet MS" pitchFamily="34" charset="-122"/>
                 <a:cs typeface="Trebuchet MS" pitchFamily="34" charset="-120"/>
               </a:rPr>
-              <a:t>un-</a:t>
+              <a:t>re-</a:t>
             </a:r>
             <a:endParaRPr lang="en-US" sz="1300" dirty="0"/>
           </a:p>
@@ -39094,7 +39574,7 @@
                 <a:ea typeface="Trebuchet MS" pitchFamily="34" charset="-122"/>
                 <a:cs typeface="Trebuchet MS" pitchFamily="34" charset="-120"/>
               </a:rPr>
-              <a:t>-ed</a:t>
+              <a:t>-ing</a:t>
             </a:r>
             <a:endParaRPr lang="en-US" sz="1300" dirty="0"/>
           </a:p>
@@ -39158,7 +39638,7 @@
                 <a:ea typeface="Trebuchet MS" pitchFamily="34" charset="-122"/>
                 <a:cs typeface="Trebuchet MS" pitchFamily="34" charset="-120"/>
               </a:rPr>
-              <a:t>re-</a:t>
+              <a:t>un-</a:t>
             </a:r>
             <a:endParaRPr lang="en-US" sz="1300" dirty="0"/>
           </a:p>
@@ -39247,7 +39727,7 @@
                 <a:ea typeface="Trebuchet MS" pitchFamily="34" charset="-122"/>
                 <a:cs typeface="Trebuchet MS" pitchFamily="34" charset="-120"/>
               </a:rPr>
-              <a:t>-ful</a:t>
+              <a:t>-ed</a:t>
             </a:r>
             <a:endParaRPr lang="en-US" sz="1300" dirty="0"/>
           </a:p>
@@ -40158,7 +40638,7 @@
                 <a:ea typeface="Calibri" pitchFamily="34" charset="-122"/>
                 <a:cs typeface="Calibri" pitchFamily="34" charset="-120"/>
               </a:rPr>
-              <a:t>Something that looks or feels elegant and well chosen, like a tasteful decoration.</a:t>
+              <a:t>Something done in a way that shows good style or judgement, like a tasteful decoration.</a:t>
             </a:r>
             <a:endParaRPr lang="en-US" sz="1200" dirty="0"/>
           </a:p>
@@ -40297,7 +40777,7 @@
                 <a:ea typeface="Calibri" pitchFamily="34" charset="-122"/>
                 <a:cs typeface="Calibri" pitchFamily="34" charset="-120"/>
               </a:rPr>
-              <a:t>The act of trying a small amount of food or drink to find out what it is like.</a:t>
+              <a:t>A feeling of not liking something or finding it unpleasant.</a:t>
             </a:r>
             <a:endParaRPr lang="en-US" sz="1200" dirty="0"/>
           </a:p>
@@ -40370,7 +40850,7 @@
                 <a:ea typeface="Trebuchet MS" pitchFamily="34" charset="-122"/>
                 <a:cs typeface="Trebuchet MS" pitchFamily="34" charset="-120"/>
               </a:rPr>
-              <a:t>tasting</a:t>
+              <a:t>distaste</a:t>
             </a:r>
             <a:endParaRPr lang="en-US" sz="1200" dirty="0"/>
           </a:p>
@@ -40436,7 +40916,7 @@
                 <a:ea typeface="Calibri" pitchFamily="34" charset="-122"/>
                 <a:cs typeface="Calibri" pitchFamily="34" charset="-120"/>
               </a:rPr>
-              <a:t>A feeling of not liking something at all, or finding it unpleasant.</a:t>
+              <a:t>Food that has a very nice or enjoyable flavour.</a:t>
             </a:r>
             <a:endParaRPr lang="en-US" sz="1200" dirty="0"/>
           </a:p>
@@ -40509,7 +40989,7 @@
                 <a:ea typeface="Trebuchet MS" pitchFamily="34" charset="-122"/>
                 <a:cs typeface="Trebuchet MS" pitchFamily="34" charset="-120"/>
               </a:rPr>
-              <a:t>tasted</a:t>
+              <a:t>tasting</a:t>
             </a:r>
             <a:endParaRPr lang="en-US" sz="1200" dirty="0"/>
           </a:p>
@@ -40575,7 +41055,7 @@
                 <a:ea typeface="Calibri" pitchFamily="34" charset="-122"/>
                 <a:cs typeface="Calibri" pitchFamily="34" charset="-120"/>
               </a:rPr>
-              <a:t>When you already tried a food or drink to find out its flavour.</a:t>
+              <a:t>The act of trying a small amount of food or drink to find out what it is like.</a:t>
             </a:r>
             <a:endParaRPr lang="en-US" sz="1200" dirty="0"/>
           </a:p>
@@ -40648,7 +41128,7 @@
                 <a:ea typeface="Trebuchet MS" pitchFamily="34" charset="-122"/>
                 <a:cs typeface="Trebuchet MS" pitchFamily="34" charset="-120"/>
               </a:rPr>
-              <a:t>tasty</a:t>
+              <a:t>tasted</a:t>
             </a:r>
             <a:endParaRPr lang="en-US" sz="1200" dirty="0"/>
           </a:p>
@@ -40714,7 +41194,7 @@
                 <a:ea typeface="Calibri" pitchFamily="34" charset="-122"/>
                 <a:cs typeface="Calibri" pitchFamily="34" charset="-120"/>
               </a:rPr>
-              <a:t>Describes food that has a really nice, enjoyable flavour.</a:t>
+              <a:t>When you have already tried the flavour of something in the past.</a:t>
             </a:r>
             <a:endParaRPr lang="en-US" sz="1200" dirty="0"/>
           </a:p>
@@ -40787,7 +41267,7 @@
                 <a:ea typeface="Trebuchet MS" pitchFamily="34" charset="-122"/>
                 <a:cs typeface="Trebuchet MS" pitchFamily="34" charset="-120"/>
               </a:rPr>
-              <a:t>distaste</a:t>
+              <a:t>tasty</a:t>
             </a:r>
             <a:endParaRPr lang="en-US" sz="1200" dirty="0"/>
           </a:p>
@@ -40853,7 +41333,7 @@
                 <a:ea typeface="Calibri" pitchFamily="34" charset="-122"/>
                 <a:cs typeface="Calibri" pitchFamily="34" charset="-120"/>
               </a:rPr>
-              <a:t>The flavour that stays in your mouth after you have eaten or drunk something.</a:t>
+              <a:t>A small experience of something that gives you an idea of what is coming later.</a:t>
             </a:r>
             <a:endParaRPr lang="en-US" sz="1200" dirty="0"/>
           </a:p>
@@ -40926,7 +41406,7 @@
                 <a:ea typeface="Trebuchet MS" pitchFamily="34" charset="-122"/>
                 <a:cs typeface="Trebuchet MS" pitchFamily="34" charset="-120"/>
               </a:rPr>
-              <a:t>aftertaste</a:t>
+              <a:t>foretaste</a:t>
             </a:r>
             <a:endParaRPr lang="en-US" sz="1200" dirty="0"/>
           </a:p>
@@ -40992,7 +41472,7 @@
                 <a:ea typeface="Calibri" pitchFamily="34" charset="-122"/>
                 <a:cs typeface="Calibri" pitchFamily="34" charset="-120"/>
               </a:rPr>
-              <a:t>Something that has no flavour, or something rude and unpleasant.</a:t>
+              <a:t>Something that has no flavour, or that is rude and shows poor judgement.</a:t>
             </a:r>
             <a:endParaRPr lang="en-US" sz="1200" dirty="0"/>
           </a:p>
@@ -41487,7 +41967,7 @@
                 <a:ea typeface="Calibri" pitchFamily="34" charset="-122"/>
                 <a:cs typeface="Calibri" pitchFamily="34" charset="-120"/>
               </a:rPr>
-              <a:t>The chef gave everyone a tasting of the new soup before it was added to the menu.</a:t>
+              <a:t>The chef gave us a foretaste of the dessert menu before the main course arrived.</a:t>
             </a:r>
             <a:endParaRPr lang="en-US" sz="1500" dirty="0"/>
           </a:p>
@@ -41651,7 +42131,7 @@
                 <a:ea typeface="Calibri" pitchFamily="34" charset="-122"/>
                 <a:cs typeface="Calibri" pitchFamily="34" charset="-120"/>
               </a:rPr>
-              <a:t>Mia thought the bright orange curtains were tasteless and wanted something more elegant for the classroom.</a:t>
+              <a:t>She arranged the flowers in a tasteful way that made the whole room look beautiful.</a:t>
             </a:r>
             <a:endParaRPr lang="en-US" sz="1500" dirty="0"/>
           </a:p>
@@ -41815,7 +42295,7 @@
                 <a:ea typeface="Calibri" pitchFamily="34" charset="-122"/>
                 <a:cs typeface="Calibri" pitchFamily="34" charset="-120"/>
               </a:rPr>
-              <a:t>After eating the strong cheese, Jake noticed a sharp aftertaste that lasted for several minutes.</a:t>
+              <a:t>The soup was so tasteless that the students added extra herbs to improve the flavour.</a:t>
             </a:r>
             <a:endParaRPr lang="en-US" sz="1500" dirty="0"/>
           </a:p>

--- a/output/wordlabs-taste-3day.pptx
+++ b/output/wordlabs-taste-3day.pptx
@@ -10965,11 +10965,11 @@
         <p:spPr>
           <a:xfrm>
             <a:off x="1874520" y="4096512"/>
-            <a:ext cx="6903720" cy="804672"/>
+            <a:ext cx="6903720" cy="658368"/>
           </a:xfrm>
           <a:prstGeom prst="rect">
             <a:avLst>
-              <a:gd name="adj" fmla="val 6818"/>
+              <a:gd name="adj" fmla="val 8333"/>
             </a:avLst>
           </a:prstGeom>
           <a:solidFill>
@@ -10991,12 +10991,12 @@
         </p:nvSpPr>
         <p:spPr>
           <a:xfrm>
-            <a:off x="1951828" y="4169664"/>
-            <a:ext cx="603504" cy="384048"/>
+            <a:off x="1952244" y="4169664"/>
+            <a:ext cx="543652" cy="475488"/>
           </a:xfrm>
           <a:prstGeom prst="rect">
             <a:avLst>
-              <a:gd name="adj" fmla="val 9524"/>
+              <a:gd name="adj" fmla="val 7692"/>
             </a:avLst>
           </a:prstGeom>
           <a:solidFill>
@@ -11018,8 +11018,8 @@
         </p:nvSpPr>
         <p:spPr>
           <a:xfrm>
-            <a:off x="1951828" y="4169664"/>
-            <a:ext cx="603504" cy="384048"/>
+            <a:off x="1952244" y="4169664"/>
+            <a:ext cx="543652" cy="475488"/>
           </a:xfrm>
           <a:prstGeom prst="rect">
             <a:avLst/>
@@ -11057,12 +11057,12 @@
         </p:nvSpPr>
         <p:spPr>
           <a:xfrm>
-            <a:off x="2605209" y="4169664"/>
-            <a:ext cx="603504" cy="384048"/>
+            <a:off x="2546188" y="4169664"/>
+            <a:ext cx="543652" cy="475488"/>
           </a:xfrm>
           <a:prstGeom prst="rect">
             <a:avLst>
-              <a:gd name="adj" fmla="val 9524"/>
+              <a:gd name="adj" fmla="val 7692"/>
             </a:avLst>
           </a:prstGeom>
           <a:solidFill>
@@ -11084,8 +11084,8 @@
         </p:nvSpPr>
         <p:spPr>
           <a:xfrm>
-            <a:off x="2605209" y="4169664"/>
-            <a:ext cx="603504" cy="384048"/>
+            <a:off x="2546188" y="4169664"/>
+            <a:ext cx="543652" cy="475488"/>
           </a:xfrm>
           <a:prstGeom prst="rect">
             <a:avLst/>
@@ -11123,12 +11123,12 @@
         </p:nvSpPr>
         <p:spPr>
           <a:xfrm>
-            <a:off x="3258589" y="4169664"/>
-            <a:ext cx="603504" cy="384048"/>
+            <a:off x="3140133" y="4169664"/>
+            <a:ext cx="543652" cy="475488"/>
           </a:xfrm>
           <a:prstGeom prst="rect">
             <a:avLst>
-              <a:gd name="adj" fmla="val 9524"/>
+              <a:gd name="adj" fmla="val 7692"/>
             </a:avLst>
           </a:prstGeom>
           <a:solidFill>
@@ -11150,8 +11150,8 @@
         </p:nvSpPr>
         <p:spPr>
           <a:xfrm>
-            <a:off x="3258589" y="4169664"/>
-            <a:ext cx="603504" cy="384048"/>
+            <a:off x="3140133" y="4169664"/>
+            <a:ext cx="543652" cy="475488"/>
           </a:xfrm>
           <a:prstGeom prst="rect">
             <a:avLst/>
@@ -11189,12 +11189,12 @@
         </p:nvSpPr>
         <p:spPr>
           <a:xfrm>
-            <a:off x="3911969" y="4169664"/>
-            <a:ext cx="603504" cy="384048"/>
+            <a:off x="3734077" y="4169664"/>
+            <a:ext cx="543652" cy="475488"/>
           </a:xfrm>
           <a:prstGeom prst="rect">
             <a:avLst>
-              <a:gd name="adj" fmla="val 9524"/>
+              <a:gd name="adj" fmla="val 7692"/>
             </a:avLst>
           </a:prstGeom>
           <a:solidFill>
@@ -11216,8 +11216,8 @@
         </p:nvSpPr>
         <p:spPr>
           <a:xfrm>
-            <a:off x="3911969" y="4169664"/>
-            <a:ext cx="603504" cy="384048"/>
+            <a:off x="3734077" y="4169664"/>
+            <a:ext cx="543652" cy="475488"/>
           </a:xfrm>
           <a:prstGeom prst="rect">
             <a:avLst/>
@@ -11255,12 +11255,12 @@
         </p:nvSpPr>
         <p:spPr>
           <a:xfrm>
-            <a:off x="4565350" y="4169664"/>
-            <a:ext cx="603504" cy="384048"/>
+            <a:off x="4328021" y="4169664"/>
+            <a:ext cx="543652" cy="475488"/>
           </a:xfrm>
           <a:prstGeom prst="rect">
             <a:avLst>
-              <a:gd name="adj" fmla="val 9524"/>
+              <a:gd name="adj" fmla="val 7692"/>
             </a:avLst>
           </a:prstGeom>
           <a:solidFill>
@@ -11282,8 +11282,8 @@
         </p:nvSpPr>
         <p:spPr>
           <a:xfrm>
-            <a:off x="4565350" y="4169664"/>
-            <a:ext cx="603504" cy="384048"/>
+            <a:off x="4328021" y="4169664"/>
+            <a:ext cx="543652" cy="475488"/>
           </a:xfrm>
           <a:prstGeom prst="rect">
             <a:avLst/>
@@ -11307,7 +11307,7 @@
                 <a:ea typeface="Trebuchet MS" pitchFamily="34" charset="-122"/>
                 <a:cs typeface="Trebuchet MS" pitchFamily="34" charset="-120"/>
               </a:rPr>
-              <a:t>ay</a:t>
+              <a:t>a</a:t>
             </a:r>
             <a:endParaRPr lang="en-US" sz="900" dirty="0"/>
           </a:p>
@@ -11315,57 +11315,18 @@
       </p:sp>
       <p:sp>
         <p:nvSpPr>
-          <p:cNvPr id="49" name="Text 47"/>
-          <p:cNvSpPr/>
-          <p:nvPr/>
-        </p:nvSpPr>
-        <p:spPr>
-          <a:xfrm>
-            <a:off x="4565350" y="4572000"/>
-            <a:ext cx="603504" cy="219456"/>
-          </a:xfrm>
-          <a:prstGeom prst="rect">
-            <a:avLst/>
-          </a:prstGeom>
-          <a:noFill/>
-          <a:ln/>
-        </p:spPr>
-        <p:txBody>
-          <a:bodyPr wrap="square" lIns="0" tIns="0" rIns="0" bIns="0" rtlCol="0" anchor="t"/>
-          <a:lstStyle/>
-          <a:p>
-            <a:pPr algn="ctr" indent="0" marL="0">
-              <a:buNone/>
-            </a:pPr>
-            <a:r>
-              <a:rPr lang="en-US" sz="750" i="1" dirty="0">
-                <a:solidFill>
-                  <a:srgbClr val="94A3B8"/>
-                </a:solidFill>
-                <a:latin typeface="Calibri" pitchFamily="34" charset="0"/>
-                <a:ea typeface="Calibri" pitchFamily="34" charset="-122"/>
-                <a:cs typeface="Calibri" pitchFamily="34" charset="-120"/>
-              </a:rPr>
-              <a:t>/ay/</a:t>
-            </a:r>
-            <a:endParaRPr lang="en-US" sz="750" dirty="0"/>
-          </a:p>
-        </p:txBody>
-      </p:sp>
-      <p:sp>
-        <p:nvSpPr>
-          <p:cNvPr id="50" name="Shape 48"/>
-          <p:cNvSpPr/>
-          <p:nvPr/>
-        </p:nvSpPr>
-        <p:spPr>
-          <a:xfrm>
-            <a:off x="5218730" y="4169664"/>
-            <a:ext cx="603504" cy="384048"/>
+          <p:cNvPr id="49" name="Shape 47"/>
+          <p:cNvSpPr/>
+          <p:nvPr/>
+        </p:nvSpPr>
+        <p:spPr>
+          <a:xfrm>
+            <a:off x="4921966" y="4169664"/>
+            <a:ext cx="543652" cy="475488"/>
           </a:xfrm>
           <a:prstGeom prst="rect">
             <a:avLst>
-              <a:gd name="adj" fmla="val 9524"/>
+              <a:gd name="adj" fmla="val 7692"/>
             </a:avLst>
           </a:prstGeom>
           <a:solidFill>
@@ -11381,14 +11342,14 @@
       </p:sp>
       <p:sp>
         <p:nvSpPr>
-          <p:cNvPr id="51" name="Text 49"/>
-          <p:cNvSpPr/>
-          <p:nvPr/>
-        </p:nvSpPr>
-        <p:spPr>
-          <a:xfrm>
-            <a:off x="5218730" y="4169664"/>
-            <a:ext cx="603504" cy="384048"/>
+          <p:cNvPr id="50" name="Text 48"/>
+          <p:cNvSpPr/>
+          <p:nvPr/>
+        </p:nvSpPr>
+        <p:spPr>
+          <a:xfrm>
+            <a:off x="4921966" y="4169664"/>
+            <a:ext cx="543652" cy="475488"/>
           </a:xfrm>
           <a:prstGeom prst="rect">
             <a:avLst/>
@@ -11420,18 +11381,18 @@
       </p:sp>
       <p:sp>
         <p:nvSpPr>
-          <p:cNvPr id="52" name="Shape 50"/>
-          <p:cNvSpPr/>
-          <p:nvPr/>
-        </p:nvSpPr>
-        <p:spPr>
-          <a:xfrm>
-            <a:off x="5872111" y="4169664"/>
-            <a:ext cx="603504" cy="384048"/>
+          <p:cNvPr id="51" name="Shape 49"/>
+          <p:cNvSpPr/>
+          <p:nvPr/>
+        </p:nvSpPr>
+        <p:spPr>
+          <a:xfrm>
+            <a:off x="5515910" y="4169664"/>
+            <a:ext cx="543652" cy="475488"/>
           </a:xfrm>
           <a:prstGeom prst="rect">
             <a:avLst>
-              <a:gd name="adj" fmla="val 9524"/>
+              <a:gd name="adj" fmla="val 7692"/>
             </a:avLst>
           </a:prstGeom>
           <a:solidFill>
@@ -11447,14 +11408,14 @@
       </p:sp>
       <p:sp>
         <p:nvSpPr>
-          <p:cNvPr id="53" name="Text 51"/>
-          <p:cNvSpPr/>
-          <p:nvPr/>
-        </p:nvSpPr>
-        <p:spPr>
-          <a:xfrm>
-            <a:off x="5872111" y="4169664"/>
-            <a:ext cx="603504" cy="384048"/>
+          <p:cNvPr id="52" name="Text 50"/>
+          <p:cNvSpPr/>
+          <p:nvPr/>
+        </p:nvSpPr>
+        <p:spPr>
+          <a:xfrm>
+            <a:off x="5515910" y="4169664"/>
+            <a:ext cx="543652" cy="475488"/>
           </a:xfrm>
           <a:prstGeom prst="rect">
             <a:avLst/>
@@ -11486,18 +11447,18 @@
       </p:sp>
       <p:sp>
         <p:nvSpPr>
-          <p:cNvPr id="54" name="Shape 52"/>
-          <p:cNvSpPr/>
-          <p:nvPr/>
-        </p:nvSpPr>
-        <p:spPr>
-          <a:xfrm>
-            <a:off x="6525491" y="4169664"/>
-            <a:ext cx="603504" cy="384048"/>
+          <p:cNvPr id="53" name="Shape 51"/>
+          <p:cNvSpPr/>
+          <p:nvPr/>
+        </p:nvSpPr>
+        <p:spPr>
+          <a:xfrm>
+            <a:off x="6109855" y="4169664"/>
+            <a:ext cx="543652" cy="475488"/>
           </a:xfrm>
           <a:prstGeom prst="rect">
             <a:avLst>
-              <a:gd name="adj" fmla="val 9524"/>
+              <a:gd name="adj" fmla="val 7692"/>
             </a:avLst>
           </a:prstGeom>
           <a:solidFill>
@@ -11513,14 +11474,14 @@
       </p:sp>
       <p:sp>
         <p:nvSpPr>
-          <p:cNvPr id="55" name="Text 53"/>
-          <p:cNvSpPr/>
-          <p:nvPr/>
-        </p:nvSpPr>
-        <p:spPr>
-          <a:xfrm>
-            <a:off x="6525491" y="4169664"/>
-            <a:ext cx="603504" cy="384048"/>
+          <p:cNvPr id="54" name="Text 52"/>
+          <p:cNvSpPr/>
+          <p:nvPr/>
+        </p:nvSpPr>
+        <p:spPr>
+          <a:xfrm>
+            <a:off x="6109855" y="4169664"/>
+            <a:ext cx="543652" cy="475488"/>
           </a:xfrm>
           <a:prstGeom prst="rect">
             <a:avLst/>
@@ -11544,7 +11505,7 @@
                 <a:ea typeface="Trebuchet MS" pitchFamily="34" charset="-122"/>
                 <a:cs typeface="Trebuchet MS" pitchFamily="34" charset="-120"/>
               </a:rPr>
-              <a:t>f</a:t>
+              <a:t>e</a:t>
             </a:r>
             <a:endParaRPr lang="en-US" sz="900" dirty="0"/>
           </a:p>
@@ -11552,18 +11513,18 @@
       </p:sp>
       <p:sp>
         <p:nvSpPr>
-          <p:cNvPr id="56" name="Shape 54"/>
-          <p:cNvSpPr/>
-          <p:nvPr/>
-        </p:nvSpPr>
-        <p:spPr>
-          <a:xfrm>
-            <a:off x="7178871" y="4169664"/>
-            <a:ext cx="603504" cy="384048"/>
+          <p:cNvPr id="55" name="Shape 53"/>
+          <p:cNvSpPr/>
+          <p:nvPr/>
+        </p:nvSpPr>
+        <p:spPr>
+          <a:xfrm>
+            <a:off x="6703799" y="4169664"/>
+            <a:ext cx="543652" cy="475488"/>
           </a:xfrm>
           <a:prstGeom prst="rect">
             <a:avLst>
-              <a:gd name="adj" fmla="val 9524"/>
+              <a:gd name="adj" fmla="val 7692"/>
             </a:avLst>
           </a:prstGeom>
           <a:solidFill>
@@ -11579,14 +11540,14 @@
       </p:sp>
       <p:sp>
         <p:nvSpPr>
-          <p:cNvPr id="57" name="Text 55"/>
-          <p:cNvSpPr/>
-          <p:nvPr/>
-        </p:nvSpPr>
-        <p:spPr>
-          <a:xfrm>
-            <a:off x="7178871" y="4169664"/>
-            <a:ext cx="603504" cy="384048"/>
+          <p:cNvPr id="56" name="Text 54"/>
+          <p:cNvSpPr/>
+          <p:nvPr/>
+        </p:nvSpPr>
+        <p:spPr>
+          <a:xfrm>
+            <a:off x="6703799" y="4169664"/>
+            <a:ext cx="543652" cy="475488"/>
           </a:xfrm>
           <a:prstGeom prst="rect">
             <a:avLst/>
@@ -11610,6 +11571,72 @@
                 <a:ea typeface="Trebuchet MS" pitchFamily="34" charset="-122"/>
                 <a:cs typeface="Trebuchet MS" pitchFamily="34" charset="-120"/>
               </a:rPr>
+              <a:t>f</a:t>
+            </a:r>
+            <a:endParaRPr lang="en-US" sz="900" dirty="0"/>
+          </a:p>
+        </p:txBody>
+      </p:sp>
+      <p:sp>
+        <p:nvSpPr>
+          <p:cNvPr id="57" name="Shape 55"/>
+          <p:cNvSpPr/>
+          <p:nvPr/>
+        </p:nvSpPr>
+        <p:spPr>
+          <a:xfrm>
+            <a:off x="7297743" y="4169664"/>
+            <a:ext cx="543652" cy="475488"/>
+          </a:xfrm>
+          <a:prstGeom prst="rect">
+            <a:avLst>
+              <a:gd name="adj" fmla="val 7692"/>
+            </a:avLst>
+          </a:prstGeom>
+          <a:solidFill>
+            <a:srgbClr val="FFFFFF"/>
+          </a:solidFill>
+          <a:ln w="12700">
+            <a:solidFill>
+              <a:srgbClr val="DB2777"/>
+            </a:solidFill>
+            <a:prstDash val="solid"/>
+          </a:ln>
+        </p:spPr>
+      </p:sp>
+      <p:sp>
+        <p:nvSpPr>
+          <p:cNvPr id="58" name="Text 56"/>
+          <p:cNvSpPr/>
+          <p:nvPr/>
+        </p:nvSpPr>
+        <p:spPr>
+          <a:xfrm>
+            <a:off x="7297743" y="4169664"/>
+            <a:ext cx="543652" cy="475488"/>
+          </a:xfrm>
+          <a:prstGeom prst="rect">
+            <a:avLst/>
+          </a:prstGeom>
+          <a:noFill/>
+          <a:ln/>
+        </p:spPr>
+        <p:txBody>
+          <a:bodyPr wrap="square" lIns="0" tIns="0" rIns="0" bIns="0" rtlCol="0" anchor="ctr"/>
+          <a:lstStyle/>
+          <a:p>
+            <a:pPr algn="ctr" indent="0" marL="0">
+              <a:buNone/>
+            </a:pPr>
+            <a:r>
+              <a:rPr lang="en-US" sz="900" b="1" dirty="0">
+                <a:solidFill>
+                  <a:srgbClr val="9D174D"/>
+                </a:solidFill>
+                <a:latin typeface="Trebuchet MS" pitchFamily="34" charset="0"/>
+                <a:ea typeface="Trebuchet MS" pitchFamily="34" charset="-122"/>
+                <a:cs typeface="Trebuchet MS" pitchFamily="34" charset="-120"/>
+              </a:rPr>
               <a:t>u</a:t>
             </a:r>
             <a:endParaRPr lang="en-US" sz="900" dirty="0"/>
@@ -11618,18 +11645,18 @@
       </p:sp>
       <p:sp>
         <p:nvSpPr>
-          <p:cNvPr id="58" name="Shape 56"/>
-          <p:cNvSpPr/>
-          <p:nvPr/>
-        </p:nvSpPr>
-        <p:spPr>
-          <a:xfrm>
-            <a:off x="7832252" y="4169664"/>
-            <a:ext cx="603504" cy="384048"/>
+          <p:cNvPr id="59" name="Shape 57"/>
+          <p:cNvSpPr/>
+          <p:nvPr/>
+        </p:nvSpPr>
+        <p:spPr>
+          <a:xfrm>
+            <a:off x="7891688" y="4169664"/>
+            <a:ext cx="543652" cy="475488"/>
           </a:xfrm>
           <a:prstGeom prst="rect">
             <a:avLst>
-              <a:gd name="adj" fmla="val 9524"/>
+              <a:gd name="adj" fmla="val 7692"/>
             </a:avLst>
           </a:prstGeom>
           <a:solidFill>
@@ -11645,14 +11672,14 @@
       </p:sp>
       <p:sp>
         <p:nvSpPr>
-          <p:cNvPr id="59" name="Text 57"/>
-          <p:cNvSpPr/>
-          <p:nvPr/>
-        </p:nvSpPr>
-        <p:spPr>
-          <a:xfrm>
-            <a:off x="7832252" y="4169664"/>
-            <a:ext cx="603504" cy="384048"/>
+          <p:cNvPr id="60" name="Text 58"/>
+          <p:cNvSpPr/>
+          <p:nvPr/>
+        </p:nvSpPr>
+        <p:spPr>
+          <a:xfrm>
+            <a:off x="7891688" y="4169664"/>
+            <a:ext cx="543652" cy="475488"/>
           </a:xfrm>
           <a:prstGeom prst="rect">
             <a:avLst/>
@@ -15936,11 +15963,11 @@
         <p:spPr>
           <a:xfrm>
             <a:off x="1874520" y="4096512"/>
-            <a:ext cx="6903720" cy="804672"/>
+            <a:ext cx="6903720" cy="658368"/>
           </a:xfrm>
           <a:prstGeom prst="rect">
             <a:avLst>
-              <a:gd name="adj" fmla="val 6818"/>
+              <a:gd name="adj" fmla="val 8333"/>
             </a:avLst>
           </a:prstGeom>
           <a:solidFill>
@@ -15962,12 +15989,12 @@
         </p:nvSpPr>
         <p:spPr>
           <a:xfrm>
-            <a:off x="2124837" y="4169664"/>
-            <a:ext cx="685800" cy="384048"/>
+            <a:off x="2023872" y="4169664"/>
+            <a:ext cx="685800" cy="475488"/>
           </a:xfrm>
           <a:prstGeom prst="rect">
             <a:avLst>
-              <a:gd name="adj" fmla="val 9524"/>
+              <a:gd name="adj" fmla="val 7692"/>
             </a:avLst>
           </a:prstGeom>
           <a:solidFill>
@@ -15989,8 +16016,8 @@
         </p:nvSpPr>
         <p:spPr>
           <a:xfrm>
-            <a:off x="2124837" y="4169664"/>
-            <a:ext cx="685800" cy="384048"/>
+            <a:off x="2023872" y="4169664"/>
+            <a:ext cx="685800" cy="475488"/>
           </a:xfrm>
           <a:prstGeom prst="rect">
             <a:avLst/>
@@ -16028,12 +16055,12 @@
         </p:nvSpPr>
         <p:spPr>
           <a:xfrm>
-            <a:off x="3033522" y="4169664"/>
-            <a:ext cx="685800" cy="384048"/>
+            <a:off x="2831592" y="4169664"/>
+            <a:ext cx="685800" cy="475488"/>
           </a:xfrm>
           <a:prstGeom prst="rect">
             <a:avLst>
-              <a:gd name="adj" fmla="val 9524"/>
+              <a:gd name="adj" fmla="val 7692"/>
             </a:avLst>
           </a:prstGeom>
           <a:solidFill>
@@ -16055,8 +16082,8 @@
         </p:nvSpPr>
         <p:spPr>
           <a:xfrm>
-            <a:off x="3033522" y="4169664"/>
-            <a:ext cx="685800" cy="384048"/>
+            <a:off x="2831592" y="4169664"/>
+            <a:ext cx="685800" cy="475488"/>
           </a:xfrm>
           <a:prstGeom prst="rect">
             <a:avLst/>
@@ -16080,7 +16107,7 @@
                 <a:ea typeface="Trebuchet MS" pitchFamily="34" charset="-122"/>
                 <a:cs typeface="Trebuchet MS" pitchFamily="34" charset="-120"/>
               </a:rPr>
-              <a:t>ay</a:t>
+              <a:t>a</a:t>
             </a:r>
             <a:endParaRPr lang="en-US" sz="900" dirty="0"/>
           </a:p>
@@ -16088,57 +16115,18 @@
       </p:sp>
       <p:sp>
         <p:nvSpPr>
-          <p:cNvPr id="37" name="Text 35"/>
-          <p:cNvSpPr/>
-          <p:nvPr/>
-        </p:nvSpPr>
-        <p:spPr>
-          <a:xfrm>
-            <a:off x="3033522" y="4572000"/>
-            <a:ext cx="685800" cy="219456"/>
-          </a:xfrm>
-          <a:prstGeom prst="rect">
-            <a:avLst/>
-          </a:prstGeom>
-          <a:noFill/>
-          <a:ln/>
-        </p:spPr>
-        <p:txBody>
-          <a:bodyPr wrap="square" lIns="0" tIns="0" rIns="0" bIns="0" rtlCol="0" anchor="t"/>
-          <a:lstStyle/>
-          <a:p>
-            <a:pPr algn="ctr" indent="0" marL="0">
-              <a:buNone/>
-            </a:pPr>
-            <a:r>
-              <a:rPr lang="en-US" sz="750" i="1" dirty="0">
-                <a:solidFill>
-                  <a:srgbClr val="94A3B8"/>
-                </a:solidFill>
-                <a:latin typeface="Calibri" pitchFamily="34" charset="0"/>
-                <a:ea typeface="Calibri" pitchFamily="34" charset="-122"/>
-                <a:cs typeface="Calibri" pitchFamily="34" charset="-120"/>
-              </a:rPr>
-              <a:t>/ay/</a:t>
-            </a:r>
-            <a:endParaRPr lang="en-US" sz="750" dirty="0"/>
-          </a:p>
-        </p:txBody>
-      </p:sp>
-      <p:sp>
-        <p:nvSpPr>
-          <p:cNvPr id="38" name="Shape 36"/>
-          <p:cNvSpPr/>
-          <p:nvPr/>
-        </p:nvSpPr>
-        <p:spPr>
-          <a:xfrm>
-            <a:off x="3942207" y="4169664"/>
-            <a:ext cx="685800" cy="384048"/>
+          <p:cNvPr id="37" name="Shape 35"/>
+          <p:cNvSpPr/>
+          <p:nvPr/>
+        </p:nvSpPr>
+        <p:spPr>
+          <a:xfrm>
+            <a:off x="3639312" y="4169664"/>
+            <a:ext cx="685800" cy="475488"/>
           </a:xfrm>
           <a:prstGeom prst="rect">
             <a:avLst>
-              <a:gd name="adj" fmla="val 9524"/>
+              <a:gd name="adj" fmla="val 7692"/>
             </a:avLst>
           </a:prstGeom>
           <a:solidFill>
@@ -16154,14 +16142,14 @@
       </p:sp>
       <p:sp>
         <p:nvSpPr>
-          <p:cNvPr id="39" name="Text 37"/>
-          <p:cNvSpPr/>
-          <p:nvPr/>
-        </p:nvSpPr>
-        <p:spPr>
-          <a:xfrm>
-            <a:off x="3942207" y="4169664"/>
-            <a:ext cx="685800" cy="384048"/>
+          <p:cNvPr id="38" name="Text 36"/>
+          <p:cNvSpPr/>
+          <p:nvPr/>
+        </p:nvSpPr>
+        <p:spPr>
+          <a:xfrm>
+            <a:off x="3639312" y="4169664"/>
+            <a:ext cx="685800" cy="475488"/>
           </a:xfrm>
           <a:prstGeom prst="rect">
             <a:avLst/>
@@ -16193,18 +16181,18 @@
       </p:sp>
       <p:sp>
         <p:nvSpPr>
-          <p:cNvPr id="40" name="Shape 38"/>
-          <p:cNvSpPr/>
-          <p:nvPr/>
-        </p:nvSpPr>
-        <p:spPr>
-          <a:xfrm>
-            <a:off x="4850892" y="4169664"/>
-            <a:ext cx="685800" cy="384048"/>
+          <p:cNvPr id="39" name="Shape 37"/>
+          <p:cNvSpPr/>
+          <p:nvPr/>
+        </p:nvSpPr>
+        <p:spPr>
+          <a:xfrm>
+            <a:off x="4447032" y="4169664"/>
+            <a:ext cx="685800" cy="475488"/>
           </a:xfrm>
           <a:prstGeom prst="rect">
             <a:avLst>
-              <a:gd name="adj" fmla="val 9524"/>
+              <a:gd name="adj" fmla="val 7692"/>
             </a:avLst>
           </a:prstGeom>
           <a:solidFill>
@@ -16220,14 +16208,14 @@
       </p:sp>
       <p:sp>
         <p:nvSpPr>
-          <p:cNvPr id="41" name="Text 39"/>
-          <p:cNvSpPr/>
-          <p:nvPr/>
-        </p:nvSpPr>
-        <p:spPr>
-          <a:xfrm>
-            <a:off x="4850892" y="4169664"/>
-            <a:ext cx="685800" cy="384048"/>
+          <p:cNvPr id="40" name="Text 38"/>
+          <p:cNvSpPr/>
+          <p:nvPr/>
+        </p:nvSpPr>
+        <p:spPr>
+          <a:xfrm>
+            <a:off x="4447032" y="4169664"/>
+            <a:ext cx="685800" cy="475488"/>
           </a:xfrm>
           <a:prstGeom prst="rect">
             <a:avLst/>
@@ -16259,18 +16247,18 @@
       </p:sp>
       <p:sp>
         <p:nvSpPr>
-          <p:cNvPr id="42" name="Shape 40"/>
-          <p:cNvSpPr/>
-          <p:nvPr/>
-        </p:nvSpPr>
-        <p:spPr>
-          <a:xfrm>
-            <a:off x="5759577" y="4169664"/>
-            <a:ext cx="685800" cy="384048"/>
+          <p:cNvPr id="41" name="Shape 39"/>
+          <p:cNvSpPr/>
+          <p:nvPr/>
+        </p:nvSpPr>
+        <p:spPr>
+          <a:xfrm>
+            <a:off x="5254752" y="4169664"/>
+            <a:ext cx="685800" cy="475488"/>
           </a:xfrm>
           <a:prstGeom prst="rect">
             <a:avLst>
-              <a:gd name="adj" fmla="val 9524"/>
+              <a:gd name="adj" fmla="val 7692"/>
             </a:avLst>
           </a:prstGeom>
           <a:solidFill>
@@ -16286,14 +16274,14 @@
       </p:sp>
       <p:sp>
         <p:nvSpPr>
-          <p:cNvPr id="43" name="Text 41"/>
-          <p:cNvSpPr/>
-          <p:nvPr/>
-        </p:nvSpPr>
-        <p:spPr>
-          <a:xfrm>
-            <a:off x="5759577" y="4169664"/>
-            <a:ext cx="685800" cy="384048"/>
+          <p:cNvPr id="42" name="Text 40"/>
+          <p:cNvSpPr/>
+          <p:nvPr/>
+        </p:nvSpPr>
+        <p:spPr>
+          <a:xfrm>
+            <a:off x="5254752" y="4169664"/>
+            <a:ext cx="685800" cy="475488"/>
           </a:xfrm>
           <a:prstGeom prst="rect">
             <a:avLst/>
@@ -16317,7 +16305,7 @@
                 <a:ea typeface="Trebuchet MS" pitchFamily="34" charset="-122"/>
                 <a:cs typeface="Trebuchet MS" pitchFamily="34" charset="-120"/>
               </a:rPr>
-              <a:t>f</a:t>
+              <a:t>e</a:t>
             </a:r>
             <a:endParaRPr lang="en-US" sz="900" dirty="0"/>
           </a:p>
@@ -16325,18 +16313,18 @@
       </p:sp>
       <p:sp>
         <p:nvSpPr>
-          <p:cNvPr id="44" name="Shape 42"/>
-          <p:cNvSpPr/>
-          <p:nvPr/>
-        </p:nvSpPr>
-        <p:spPr>
-          <a:xfrm>
-            <a:off x="6668262" y="4169664"/>
-            <a:ext cx="685800" cy="384048"/>
+          <p:cNvPr id="43" name="Shape 41"/>
+          <p:cNvSpPr/>
+          <p:nvPr/>
+        </p:nvSpPr>
+        <p:spPr>
+          <a:xfrm>
+            <a:off x="6062472" y="4169664"/>
+            <a:ext cx="685800" cy="475488"/>
           </a:xfrm>
           <a:prstGeom prst="rect">
             <a:avLst>
-              <a:gd name="adj" fmla="val 9524"/>
+              <a:gd name="adj" fmla="val 7692"/>
             </a:avLst>
           </a:prstGeom>
           <a:solidFill>
@@ -16352,14 +16340,14 @@
       </p:sp>
       <p:sp>
         <p:nvSpPr>
-          <p:cNvPr id="45" name="Text 43"/>
-          <p:cNvSpPr/>
-          <p:nvPr/>
-        </p:nvSpPr>
-        <p:spPr>
-          <a:xfrm>
-            <a:off x="6668262" y="4169664"/>
-            <a:ext cx="685800" cy="384048"/>
+          <p:cNvPr id="44" name="Text 42"/>
+          <p:cNvSpPr/>
+          <p:nvPr/>
+        </p:nvSpPr>
+        <p:spPr>
+          <a:xfrm>
+            <a:off x="6062472" y="4169664"/>
+            <a:ext cx="685800" cy="475488"/>
           </a:xfrm>
           <a:prstGeom prst="rect">
             <a:avLst/>
@@ -16383,6 +16371,72 @@
                 <a:ea typeface="Trebuchet MS" pitchFamily="34" charset="-122"/>
                 <a:cs typeface="Trebuchet MS" pitchFamily="34" charset="-120"/>
               </a:rPr>
+              <a:t>f</a:t>
+            </a:r>
+            <a:endParaRPr lang="en-US" sz="900" dirty="0"/>
+          </a:p>
+        </p:txBody>
+      </p:sp>
+      <p:sp>
+        <p:nvSpPr>
+          <p:cNvPr id="45" name="Shape 43"/>
+          <p:cNvSpPr/>
+          <p:nvPr/>
+        </p:nvSpPr>
+        <p:spPr>
+          <a:xfrm>
+            <a:off x="6870192" y="4169664"/>
+            <a:ext cx="685800" cy="475488"/>
+          </a:xfrm>
+          <a:prstGeom prst="rect">
+            <a:avLst>
+              <a:gd name="adj" fmla="val 7692"/>
+            </a:avLst>
+          </a:prstGeom>
+          <a:solidFill>
+            <a:srgbClr val="FFFFFF"/>
+          </a:solidFill>
+          <a:ln w="12700">
+            <a:solidFill>
+              <a:srgbClr val="DB2777"/>
+            </a:solidFill>
+            <a:prstDash val="solid"/>
+          </a:ln>
+        </p:spPr>
+      </p:sp>
+      <p:sp>
+        <p:nvSpPr>
+          <p:cNvPr id="46" name="Text 44"/>
+          <p:cNvSpPr/>
+          <p:nvPr/>
+        </p:nvSpPr>
+        <p:spPr>
+          <a:xfrm>
+            <a:off x="6870192" y="4169664"/>
+            <a:ext cx="685800" cy="475488"/>
+          </a:xfrm>
+          <a:prstGeom prst="rect">
+            <a:avLst/>
+          </a:prstGeom>
+          <a:noFill/>
+          <a:ln/>
+        </p:spPr>
+        <p:txBody>
+          <a:bodyPr wrap="square" lIns="0" tIns="0" rIns="0" bIns="0" rtlCol="0" anchor="ctr"/>
+          <a:lstStyle/>
+          <a:p>
+            <a:pPr algn="ctr" indent="0" marL="0">
+              <a:buNone/>
+            </a:pPr>
+            <a:r>
+              <a:rPr lang="en-US" sz="900" b="1" dirty="0">
+                <a:solidFill>
+                  <a:srgbClr val="9D174D"/>
+                </a:solidFill>
+                <a:latin typeface="Trebuchet MS" pitchFamily="34" charset="0"/>
+                <a:ea typeface="Trebuchet MS" pitchFamily="34" charset="-122"/>
+                <a:cs typeface="Trebuchet MS" pitchFamily="34" charset="-120"/>
+              </a:rPr>
               <a:t>u</a:t>
             </a:r>
             <a:endParaRPr lang="en-US" sz="900" dirty="0"/>
@@ -16391,18 +16445,18 @@
       </p:sp>
       <p:sp>
         <p:nvSpPr>
-          <p:cNvPr id="46" name="Shape 44"/>
-          <p:cNvSpPr/>
-          <p:nvPr/>
-        </p:nvSpPr>
-        <p:spPr>
-          <a:xfrm>
-            <a:off x="7576947" y="4169664"/>
-            <a:ext cx="685800" cy="384048"/>
+          <p:cNvPr id="47" name="Shape 45"/>
+          <p:cNvSpPr/>
+          <p:nvPr/>
+        </p:nvSpPr>
+        <p:spPr>
+          <a:xfrm>
+            <a:off x="7677912" y="4169664"/>
+            <a:ext cx="685800" cy="475488"/>
           </a:xfrm>
           <a:prstGeom prst="rect">
             <a:avLst>
-              <a:gd name="adj" fmla="val 9524"/>
+              <a:gd name="adj" fmla="val 7692"/>
             </a:avLst>
           </a:prstGeom>
           <a:solidFill>
@@ -16418,14 +16472,14 @@
       </p:sp>
       <p:sp>
         <p:nvSpPr>
-          <p:cNvPr id="47" name="Text 45"/>
-          <p:cNvSpPr/>
-          <p:nvPr/>
-        </p:nvSpPr>
-        <p:spPr>
-          <a:xfrm>
-            <a:off x="7576947" y="4169664"/>
-            <a:ext cx="685800" cy="384048"/>
+          <p:cNvPr id="48" name="Text 46"/>
+          <p:cNvSpPr/>
+          <p:nvPr/>
+        </p:nvSpPr>
+        <p:spPr>
+          <a:xfrm>
+            <a:off x="7677912" y="4169664"/>
+            <a:ext cx="685800" cy="475488"/>
           </a:xfrm>
           <a:prstGeom prst="rect">
             <a:avLst/>
@@ -22313,11 +22367,11 @@
         <p:spPr>
           <a:xfrm>
             <a:off x="1874520" y="4096512"/>
-            <a:ext cx="6903720" cy="804672"/>
+            <a:ext cx="6903720" cy="658368"/>
           </a:xfrm>
           <a:prstGeom prst="rect">
             <a:avLst>
-              <a:gd name="adj" fmla="val 6818"/>
+              <a:gd name="adj" fmla="val 8333"/>
             </a:avLst>
           </a:prstGeom>
           <a:solidFill>
@@ -22339,12 +22393,12 @@
         </p:nvSpPr>
         <p:spPr>
           <a:xfrm>
-            <a:off x="2254649" y="4169664"/>
-            <a:ext cx="685800" cy="384048"/>
+            <a:off x="2023872" y="4169664"/>
+            <a:ext cx="685800" cy="475488"/>
           </a:xfrm>
           <a:prstGeom prst="rect">
             <a:avLst>
-              <a:gd name="adj" fmla="val 9524"/>
+              <a:gd name="adj" fmla="val 7692"/>
             </a:avLst>
           </a:prstGeom>
           <a:solidFill>
@@ -22366,8 +22420,8 @@
         </p:nvSpPr>
         <p:spPr>
           <a:xfrm>
-            <a:off x="2254649" y="4169664"/>
-            <a:ext cx="685800" cy="384048"/>
+            <a:off x="2023872" y="4169664"/>
+            <a:ext cx="685800" cy="475488"/>
           </a:xfrm>
           <a:prstGeom prst="rect">
             <a:avLst/>
@@ -22405,12 +22459,12 @@
         </p:nvSpPr>
         <p:spPr>
           <a:xfrm>
-            <a:off x="3293146" y="4169664"/>
-            <a:ext cx="685800" cy="384048"/>
+            <a:off x="2831592" y="4169664"/>
+            <a:ext cx="685800" cy="475488"/>
           </a:xfrm>
           <a:prstGeom prst="rect">
             <a:avLst>
-              <a:gd name="adj" fmla="val 9524"/>
+              <a:gd name="adj" fmla="val 7692"/>
             </a:avLst>
           </a:prstGeom>
           <a:solidFill>
@@ -22432,8 +22486,8 @@
         </p:nvSpPr>
         <p:spPr>
           <a:xfrm>
-            <a:off x="3293146" y="4169664"/>
-            <a:ext cx="685800" cy="384048"/>
+            <a:off x="2831592" y="4169664"/>
+            <a:ext cx="685800" cy="475488"/>
           </a:xfrm>
           <a:prstGeom prst="rect">
             <a:avLst/>
@@ -22471,12 +22525,12 @@
         </p:nvSpPr>
         <p:spPr>
           <a:xfrm>
-            <a:off x="4331643" y="4169664"/>
-            <a:ext cx="685800" cy="384048"/>
+            <a:off x="3639312" y="4169664"/>
+            <a:ext cx="685800" cy="475488"/>
           </a:xfrm>
           <a:prstGeom prst="rect">
             <a:avLst>
-              <a:gd name="adj" fmla="val 9524"/>
+              <a:gd name="adj" fmla="val 7692"/>
             </a:avLst>
           </a:prstGeom>
           <a:solidFill>
@@ -22498,8 +22552,8 @@
         </p:nvSpPr>
         <p:spPr>
           <a:xfrm>
-            <a:off x="4331643" y="4169664"/>
-            <a:ext cx="685800" cy="384048"/>
+            <a:off x="3639312" y="4169664"/>
+            <a:ext cx="685800" cy="475488"/>
           </a:xfrm>
           <a:prstGeom prst="rect">
             <a:avLst/>
@@ -22523,7 +22577,7 @@
                 <a:ea typeface="Trebuchet MS" pitchFamily="34" charset="-122"/>
                 <a:cs typeface="Trebuchet MS" pitchFamily="34" charset="-120"/>
               </a:rPr>
-              <a:t>t</a:t>
+              <a:t>e</a:t>
             </a:r>
             <a:endParaRPr lang="en-US" sz="900" dirty="0"/>
           </a:p>
@@ -22537,12 +22591,12 @@
         </p:nvSpPr>
         <p:spPr>
           <a:xfrm>
-            <a:off x="5370141" y="4169664"/>
-            <a:ext cx="685800" cy="384048"/>
+            <a:off x="4447032" y="4169664"/>
+            <a:ext cx="685800" cy="475488"/>
           </a:xfrm>
           <a:prstGeom prst="rect">
             <a:avLst>
-              <a:gd name="adj" fmla="val 9524"/>
+              <a:gd name="adj" fmla="val 7692"/>
             </a:avLst>
           </a:prstGeom>
           <a:solidFill>
@@ -22564,8 +22618,8 @@
         </p:nvSpPr>
         <p:spPr>
           <a:xfrm>
-            <a:off x="5370141" y="4169664"/>
-            <a:ext cx="685800" cy="384048"/>
+            <a:off x="4447032" y="4169664"/>
+            <a:ext cx="685800" cy="475488"/>
           </a:xfrm>
           <a:prstGeom prst="rect">
             <a:avLst/>
@@ -22589,7 +22643,7 @@
                 <a:ea typeface="Trebuchet MS" pitchFamily="34" charset="-122"/>
                 <a:cs typeface="Trebuchet MS" pitchFamily="34" charset="-120"/>
               </a:rPr>
-              <a:t>ay</a:t>
+              <a:t>t</a:t>
             </a:r>
             <a:endParaRPr lang="en-US" sz="900" dirty="0"/>
           </a:p>
@@ -22597,57 +22651,18 @@
       </p:sp>
       <p:sp>
         <p:nvSpPr>
-          <p:cNvPr id="41" name="Text 39"/>
-          <p:cNvSpPr/>
-          <p:nvPr/>
-        </p:nvSpPr>
-        <p:spPr>
-          <a:xfrm>
-            <a:off x="5370141" y="4572000"/>
-            <a:ext cx="685800" cy="219456"/>
-          </a:xfrm>
-          <a:prstGeom prst="rect">
-            <a:avLst/>
-          </a:prstGeom>
-          <a:noFill/>
-          <a:ln/>
-        </p:spPr>
-        <p:txBody>
-          <a:bodyPr wrap="square" lIns="0" tIns="0" rIns="0" bIns="0" rtlCol="0" anchor="t"/>
-          <a:lstStyle/>
-          <a:p>
-            <a:pPr algn="ctr" indent="0" marL="0">
-              <a:buNone/>
-            </a:pPr>
-            <a:r>
-              <a:rPr lang="en-US" sz="750" i="1" dirty="0">
-                <a:solidFill>
-                  <a:srgbClr val="94A3B8"/>
-                </a:solidFill>
-                <a:latin typeface="Calibri" pitchFamily="34" charset="0"/>
-                <a:ea typeface="Calibri" pitchFamily="34" charset="-122"/>
-                <a:cs typeface="Calibri" pitchFamily="34" charset="-120"/>
-              </a:rPr>
-              <a:t>/ay/</a:t>
-            </a:r>
-            <a:endParaRPr lang="en-US" sz="750" dirty="0"/>
-          </a:p>
-        </p:txBody>
-      </p:sp>
-      <p:sp>
-        <p:nvSpPr>
-          <p:cNvPr id="42" name="Shape 40"/>
-          <p:cNvSpPr/>
-          <p:nvPr/>
-        </p:nvSpPr>
-        <p:spPr>
-          <a:xfrm>
-            <a:off x="6408638" y="4169664"/>
-            <a:ext cx="685800" cy="384048"/>
+          <p:cNvPr id="41" name="Shape 39"/>
+          <p:cNvSpPr/>
+          <p:nvPr/>
+        </p:nvSpPr>
+        <p:spPr>
+          <a:xfrm>
+            <a:off x="5254752" y="4169664"/>
+            <a:ext cx="685800" cy="475488"/>
           </a:xfrm>
           <a:prstGeom prst="rect">
             <a:avLst>
-              <a:gd name="adj" fmla="val 9524"/>
+              <a:gd name="adj" fmla="val 7692"/>
             </a:avLst>
           </a:prstGeom>
           <a:solidFill>
@@ -22663,14 +22678,14 @@
       </p:sp>
       <p:sp>
         <p:nvSpPr>
-          <p:cNvPr id="43" name="Text 41"/>
-          <p:cNvSpPr/>
-          <p:nvPr/>
-        </p:nvSpPr>
-        <p:spPr>
-          <a:xfrm>
-            <a:off x="6408638" y="4169664"/>
-            <a:ext cx="685800" cy="384048"/>
+          <p:cNvPr id="42" name="Text 40"/>
+          <p:cNvSpPr/>
+          <p:nvPr/>
+        </p:nvSpPr>
+        <p:spPr>
+          <a:xfrm>
+            <a:off x="5254752" y="4169664"/>
+            <a:ext cx="685800" cy="475488"/>
           </a:xfrm>
           <a:prstGeom prst="rect">
             <a:avLst/>
@@ -22694,7 +22709,7 @@
                 <a:ea typeface="Trebuchet MS" pitchFamily="34" charset="-122"/>
                 <a:cs typeface="Trebuchet MS" pitchFamily="34" charset="-120"/>
               </a:rPr>
-              <a:t>s</a:t>
+              <a:t>a</a:t>
             </a:r>
             <a:endParaRPr lang="en-US" sz="900" dirty="0"/>
           </a:p>
@@ -22702,18 +22717,18 @@
       </p:sp>
       <p:sp>
         <p:nvSpPr>
-          <p:cNvPr id="44" name="Shape 42"/>
-          <p:cNvSpPr/>
-          <p:nvPr/>
-        </p:nvSpPr>
-        <p:spPr>
-          <a:xfrm>
-            <a:off x="7447135" y="4169664"/>
-            <a:ext cx="685800" cy="384048"/>
+          <p:cNvPr id="43" name="Shape 41"/>
+          <p:cNvSpPr/>
+          <p:nvPr/>
+        </p:nvSpPr>
+        <p:spPr>
+          <a:xfrm>
+            <a:off x="6062472" y="4169664"/>
+            <a:ext cx="685800" cy="475488"/>
           </a:xfrm>
           <a:prstGeom prst="rect">
             <a:avLst>
-              <a:gd name="adj" fmla="val 9524"/>
+              <a:gd name="adj" fmla="val 7692"/>
             </a:avLst>
           </a:prstGeom>
           <a:solidFill>
@@ -22729,14 +22744,14 @@
       </p:sp>
       <p:sp>
         <p:nvSpPr>
-          <p:cNvPr id="45" name="Text 43"/>
-          <p:cNvSpPr/>
-          <p:nvPr/>
-        </p:nvSpPr>
-        <p:spPr>
-          <a:xfrm>
-            <a:off x="7447135" y="4169664"/>
-            <a:ext cx="685800" cy="384048"/>
+          <p:cNvPr id="44" name="Text 42"/>
+          <p:cNvSpPr/>
+          <p:nvPr/>
+        </p:nvSpPr>
+        <p:spPr>
+          <a:xfrm>
+            <a:off x="6062472" y="4169664"/>
+            <a:ext cx="685800" cy="475488"/>
           </a:xfrm>
           <a:prstGeom prst="rect">
             <a:avLst/>
@@ -22760,7 +22775,139 @@
                 <a:ea typeface="Trebuchet MS" pitchFamily="34" charset="-122"/>
                 <a:cs typeface="Trebuchet MS" pitchFamily="34" charset="-120"/>
               </a:rPr>
+              <a:t>s</a:t>
+            </a:r>
+            <a:endParaRPr lang="en-US" sz="900" dirty="0"/>
+          </a:p>
+        </p:txBody>
+      </p:sp>
+      <p:sp>
+        <p:nvSpPr>
+          <p:cNvPr id="45" name="Shape 43"/>
+          <p:cNvSpPr/>
+          <p:nvPr/>
+        </p:nvSpPr>
+        <p:spPr>
+          <a:xfrm>
+            <a:off x="6870192" y="4169664"/>
+            <a:ext cx="685800" cy="475488"/>
+          </a:xfrm>
+          <a:prstGeom prst="rect">
+            <a:avLst>
+              <a:gd name="adj" fmla="val 7692"/>
+            </a:avLst>
+          </a:prstGeom>
+          <a:solidFill>
+            <a:srgbClr val="FFFFFF"/>
+          </a:solidFill>
+          <a:ln w="12700">
+            <a:solidFill>
+              <a:srgbClr val="DB2777"/>
+            </a:solidFill>
+            <a:prstDash val="solid"/>
+          </a:ln>
+        </p:spPr>
+      </p:sp>
+      <p:sp>
+        <p:nvSpPr>
+          <p:cNvPr id="46" name="Text 44"/>
+          <p:cNvSpPr/>
+          <p:nvPr/>
+        </p:nvSpPr>
+        <p:spPr>
+          <a:xfrm>
+            <a:off x="6870192" y="4169664"/>
+            <a:ext cx="685800" cy="475488"/>
+          </a:xfrm>
+          <a:prstGeom prst="rect">
+            <a:avLst/>
+          </a:prstGeom>
+          <a:noFill/>
+          <a:ln/>
+        </p:spPr>
+        <p:txBody>
+          <a:bodyPr wrap="square" lIns="0" tIns="0" rIns="0" bIns="0" rtlCol="0" anchor="ctr"/>
+          <a:lstStyle/>
+          <a:p>
+            <a:pPr algn="ctr" indent="0" marL="0">
+              <a:buNone/>
+            </a:pPr>
+            <a:r>
+              <a:rPr lang="en-US" sz="900" b="1" dirty="0">
+                <a:solidFill>
+                  <a:srgbClr val="9D174D"/>
+                </a:solidFill>
+                <a:latin typeface="Trebuchet MS" pitchFamily="34" charset="0"/>
+                <a:ea typeface="Trebuchet MS" pitchFamily="34" charset="-122"/>
+                <a:cs typeface="Trebuchet MS" pitchFamily="34" charset="-120"/>
+              </a:rPr>
               <a:t>t</a:t>
+            </a:r>
+            <a:endParaRPr lang="en-US" sz="900" dirty="0"/>
+          </a:p>
+        </p:txBody>
+      </p:sp>
+      <p:sp>
+        <p:nvSpPr>
+          <p:cNvPr id="47" name="Shape 45"/>
+          <p:cNvSpPr/>
+          <p:nvPr/>
+        </p:nvSpPr>
+        <p:spPr>
+          <a:xfrm>
+            <a:off x="7677912" y="4169664"/>
+            <a:ext cx="685800" cy="475488"/>
+          </a:xfrm>
+          <a:prstGeom prst="rect">
+            <a:avLst>
+              <a:gd name="adj" fmla="val 7692"/>
+            </a:avLst>
+          </a:prstGeom>
+          <a:solidFill>
+            <a:srgbClr val="FFFFFF"/>
+          </a:solidFill>
+          <a:ln w="12700">
+            <a:solidFill>
+              <a:srgbClr val="DB2777"/>
+            </a:solidFill>
+            <a:prstDash val="solid"/>
+          </a:ln>
+        </p:spPr>
+      </p:sp>
+      <p:sp>
+        <p:nvSpPr>
+          <p:cNvPr id="48" name="Text 46"/>
+          <p:cNvSpPr/>
+          <p:nvPr/>
+        </p:nvSpPr>
+        <p:spPr>
+          <a:xfrm>
+            <a:off x="7677912" y="4169664"/>
+            <a:ext cx="685800" cy="475488"/>
+          </a:xfrm>
+          <a:prstGeom prst="rect">
+            <a:avLst/>
+          </a:prstGeom>
+          <a:noFill/>
+          <a:ln/>
+        </p:spPr>
+        <p:txBody>
+          <a:bodyPr wrap="square" lIns="0" tIns="0" rIns="0" bIns="0" rtlCol="0" anchor="ctr"/>
+          <a:lstStyle/>
+          <a:p>
+            <a:pPr algn="ctr" indent="0" marL="0">
+              <a:buNone/>
+            </a:pPr>
+            <a:r>
+              <a:rPr lang="en-US" sz="900" b="1" dirty="0">
+                <a:solidFill>
+                  <a:srgbClr val="9D174D"/>
+                </a:solidFill>
+                <a:latin typeface="Trebuchet MS" pitchFamily="34" charset="0"/>
+                <a:ea typeface="Trebuchet MS" pitchFamily="34" charset="-122"/>
+                <a:cs typeface="Trebuchet MS" pitchFamily="34" charset="-120"/>
+              </a:rPr>
+              <a:t>e</a:t>
             </a:r>
             <a:endParaRPr lang="en-US" sz="900" dirty="0"/>
           </a:p>
@@ -27591,11 +27738,11 @@
         <p:spPr>
           <a:xfrm>
             <a:off x="1874520" y="4096512"/>
-            <a:ext cx="6903720" cy="804672"/>
+            <a:ext cx="6903720" cy="658368"/>
           </a:xfrm>
           <a:prstGeom prst="rect">
             <a:avLst>
-              <a:gd name="adj" fmla="val 6818"/>
+              <a:gd name="adj" fmla="val 8333"/>
             </a:avLst>
           </a:prstGeom>
           <a:solidFill>
@@ -27618,11 +27765,11 @@
         <p:spPr>
           <a:xfrm>
             <a:off x="2254649" y="4169664"/>
-            <a:ext cx="685800" cy="384048"/>
+            <a:ext cx="685800" cy="475488"/>
           </a:xfrm>
           <a:prstGeom prst="rect">
             <a:avLst>
-              <a:gd name="adj" fmla="val 9524"/>
+              <a:gd name="adj" fmla="val 7692"/>
             </a:avLst>
           </a:prstGeom>
           <a:solidFill>
@@ -27645,7 +27792,7 @@
         <p:spPr>
           <a:xfrm>
             <a:off x="2254649" y="4169664"/>
-            <a:ext cx="685800" cy="384048"/>
+            <a:ext cx="685800" cy="475488"/>
           </a:xfrm>
           <a:prstGeom prst="rect">
             <a:avLst/>
@@ -27684,11 +27831,11 @@
         <p:spPr>
           <a:xfrm>
             <a:off x="3293146" y="4169664"/>
-            <a:ext cx="685800" cy="384048"/>
+            <a:ext cx="685800" cy="475488"/>
           </a:xfrm>
           <a:prstGeom prst="rect">
             <a:avLst>
-              <a:gd name="adj" fmla="val 9524"/>
+              <a:gd name="adj" fmla="val 7692"/>
             </a:avLst>
           </a:prstGeom>
           <a:solidFill>
@@ -27711,7 +27858,7 @@
         <p:spPr>
           <a:xfrm>
             <a:off x="3293146" y="4169664"/>
-            <a:ext cx="685800" cy="384048"/>
+            <a:ext cx="685800" cy="475488"/>
           </a:xfrm>
           <a:prstGeom prst="rect">
             <a:avLst/>
@@ -27735,7 +27882,7 @@
                 <a:ea typeface="Trebuchet MS" pitchFamily="34" charset="-122"/>
                 <a:cs typeface="Trebuchet MS" pitchFamily="34" charset="-120"/>
               </a:rPr>
-              <a:t>ay</a:t>
+              <a:t>a</a:t>
             </a:r>
             <a:endParaRPr lang="en-US" sz="900" dirty="0"/>
           </a:p>
@@ -27743,57 +27890,18 @@
       </p:sp>
       <p:sp>
         <p:nvSpPr>
-          <p:cNvPr id="38" name="Text 36"/>
-          <p:cNvSpPr/>
-          <p:nvPr/>
-        </p:nvSpPr>
-        <p:spPr>
-          <a:xfrm>
-            <a:off x="3293146" y="4572000"/>
-            <a:ext cx="685800" cy="219456"/>
-          </a:xfrm>
-          <a:prstGeom prst="rect">
-            <a:avLst/>
-          </a:prstGeom>
-          <a:noFill/>
-          <a:ln/>
-        </p:spPr>
-        <p:txBody>
-          <a:bodyPr wrap="square" lIns="0" tIns="0" rIns="0" bIns="0" rtlCol="0" anchor="t"/>
-          <a:lstStyle/>
-          <a:p>
-            <a:pPr algn="ctr" indent="0" marL="0">
-              <a:buNone/>
-            </a:pPr>
-            <a:r>
-              <a:rPr lang="en-US" sz="750" i="1" dirty="0">
-                <a:solidFill>
-                  <a:srgbClr val="94A3B8"/>
-                </a:solidFill>
-                <a:latin typeface="Calibri" pitchFamily="34" charset="0"/>
-                <a:ea typeface="Calibri" pitchFamily="34" charset="-122"/>
-                <a:cs typeface="Calibri" pitchFamily="34" charset="-120"/>
-              </a:rPr>
-              <a:t>/ay/</a:t>
-            </a:r>
-            <a:endParaRPr lang="en-US" sz="750" dirty="0"/>
-          </a:p>
-        </p:txBody>
-      </p:sp>
-      <p:sp>
-        <p:nvSpPr>
-          <p:cNvPr id="39" name="Shape 37"/>
+          <p:cNvPr id="38" name="Shape 36"/>
           <p:cNvSpPr/>
           <p:nvPr/>
         </p:nvSpPr>
         <p:spPr>
           <a:xfrm>
             <a:off x="4331643" y="4169664"/>
-            <a:ext cx="685800" cy="384048"/>
+            <a:ext cx="685800" cy="475488"/>
           </a:xfrm>
           <a:prstGeom prst="rect">
             <a:avLst>
-              <a:gd name="adj" fmla="val 9524"/>
+              <a:gd name="adj" fmla="val 7692"/>
             </a:avLst>
           </a:prstGeom>
           <a:solidFill>
@@ -27809,14 +27917,14 @@
       </p:sp>
       <p:sp>
         <p:nvSpPr>
-          <p:cNvPr id="40" name="Text 38"/>
+          <p:cNvPr id="39" name="Text 37"/>
           <p:cNvSpPr/>
           <p:nvPr/>
         </p:nvSpPr>
         <p:spPr>
           <a:xfrm>
             <a:off x="4331643" y="4169664"/>
-            <a:ext cx="685800" cy="384048"/>
+            <a:ext cx="685800" cy="475488"/>
           </a:xfrm>
           <a:prstGeom prst="rect">
             <a:avLst/>
@@ -27848,18 +27956,18 @@
       </p:sp>
       <p:sp>
         <p:nvSpPr>
-          <p:cNvPr id="41" name="Shape 39"/>
+          <p:cNvPr id="40" name="Shape 38"/>
           <p:cNvSpPr/>
           <p:nvPr/>
         </p:nvSpPr>
         <p:spPr>
           <a:xfrm>
             <a:off x="5370141" y="4169664"/>
-            <a:ext cx="685800" cy="384048"/>
+            <a:ext cx="685800" cy="475488"/>
           </a:xfrm>
           <a:prstGeom prst="rect">
             <a:avLst>
-              <a:gd name="adj" fmla="val 9524"/>
+              <a:gd name="adj" fmla="val 7692"/>
             </a:avLst>
           </a:prstGeom>
           <a:solidFill>
@@ -27875,14 +27983,14 @@
       </p:sp>
       <p:sp>
         <p:nvSpPr>
-          <p:cNvPr id="42" name="Text 40"/>
+          <p:cNvPr id="41" name="Text 39"/>
           <p:cNvSpPr/>
           <p:nvPr/>
         </p:nvSpPr>
         <p:spPr>
           <a:xfrm>
             <a:off x="5370141" y="4169664"/>
-            <a:ext cx="685800" cy="384048"/>
+            <a:ext cx="685800" cy="475488"/>
           </a:xfrm>
           <a:prstGeom prst="rect">
             <a:avLst/>
@@ -27914,18 +28022,18 @@
       </p:sp>
       <p:sp>
         <p:nvSpPr>
-          <p:cNvPr id="43" name="Shape 41"/>
+          <p:cNvPr id="42" name="Shape 40"/>
           <p:cNvSpPr/>
           <p:nvPr/>
         </p:nvSpPr>
         <p:spPr>
           <a:xfrm>
             <a:off x="6408638" y="4169664"/>
-            <a:ext cx="685800" cy="384048"/>
+            <a:ext cx="685800" cy="475488"/>
           </a:xfrm>
           <a:prstGeom prst="rect">
             <a:avLst>
-              <a:gd name="adj" fmla="val 9524"/>
+              <a:gd name="adj" fmla="val 7692"/>
             </a:avLst>
           </a:prstGeom>
           <a:solidFill>
@@ -27941,14 +28049,14 @@
       </p:sp>
       <p:sp>
         <p:nvSpPr>
-          <p:cNvPr id="44" name="Text 42"/>
+          <p:cNvPr id="43" name="Text 41"/>
           <p:cNvSpPr/>
           <p:nvPr/>
         </p:nvSpPr>
         <p:spPr>
           <a:xfrm>
             <a:off x="6408638" y="4169664"/>
-            <a:ext cx="685800" cy="384048"/>
+            <a:ext cx="685800" cy="475488"/>
           </a:xfrm>
           <a:prstGeom prst="rect">
             <a:avLst/>
@@ -27980,18 +28088,18 @@
       </p:sp>
       <p:sp>
         <p:nvSpPr>
-          <p:cNvPr id="45" name="Shape 43"/>
+          <p:cNvPr id="44" name="Shape 42"/>
           <p:cNvSpPr/>
           <p:nvPr/>
         </p:nvSpPr>
         <p:spPr>
           <a:xfrm>
             <a:off x="7447135" y="4169664"/>
-            <a:ext cx="685800" cy="384048"/>
+            <a:ext cx="685800" cy="475488"/>
           </a:xfrm>
           <a:prstGeom prst="rect">
             <a:avLst>
-              <a:gd name="adj" fmla="val 9524"/>
+              <a:gd name="adj" fmla="val 7692"/>
             </a:avLst>
           </a:prstGeom>
           <a:solidFill>
@@ -28007,14 +28115,14 @@
       </p:sp>
       <p:sp>
         <p:nvSpPr>
-          <p:cNvPr id="46" name="Text 44"/>
+          <p:cNvPr id="45" name="Text 43"/>
           <p:cNvSpPr/>
           <p:nvPr/>
         </p:nvSpPr>
         <p:spPr>
           <a:xfrm>
             <a:off x="7447135" y="4169664"/>
-            <a:ext cx="685800" cy="384048"/>
+            <a:ext cx="685800" cy="475488"/>
           </a:xfrm>
           <a:prstGeom prst="rect">
             <a:avLst/>
@@ -32033,11 +32141,11 @@
         <p:spPr>
           <a:xfrm>
             <a:off x="1874520" y="4096512"/>
-            <a:ext cx="6903720" cy="804672"/>
+            <a:ext cx="6903720" cy="658368"/>
           </a:xfrm>
           <a:prstGeom prst="rect">
             <a:avLst>
-              <a:gd name="adj" fmla="val 6818"/>
+              <a:gd name="adj" fmla="val 8333"/>
             </a:avLst>
           </a:prstGeom>
           <a:solidFill>
@@ -32059,12 +32167,12 @@
         </p:nvSpPr>
         <p:spPr>
           <a:xfrm>
-            <a:off x="2124837" y="4169664"/>
-            <a:ext cx="685800" cy="384048"/>
+            <a:off x="2023872" y="4169664"/>
+            <a:ext cx="685800" cy="475488"/>
           </a:xfrm>
           <a:prstGeom prst="rect">
             <a:avLst>
-              <a:gd name="adj" fmla="val 9524"/>
+              <a:gd name="adj" fmla="val 7692"/>
             </a:avLst>
           </a:prstGeom>
           <a:solidFill>
@@ -32086,8 +32194,8 @@
         </p:nvSpPr>
         <p:spPr>
           <a:xfrm>
-            <a:off x="2124837" y="4169664"/>
-            <a:ext cx="685800" cy="384048"/>
+            <a:off x="2023872" y="4169664"/>
+            <a:ext cx="685800" cy="475488"/>
           </a:xfrm>
           <a:prstGeom prst="rect">
             <a:avLst/>
@@ -32125,12 +32233,12 @@
         </p:nvSpPr>
         <p:spPr>
           <a:xfrm>
-            <a:off x="3033522" y="4169664"/>
-            <a:ext cx="685800" cy="384048"/>
+            <a:off x="2831592" y="4169664"/>
+            <a:ext cx="685800" cy="475488"/>
           </a:xfrm>
           <a:prstGeom prst="rect">
             <a:avLst>
-              <a:gd name="adj" fmla="val 9524"/>
+              <a:gd name="adj" fmla="val 7692"/>
             </a:avLst>
           </a:prstGeom>
           <a:solidFill>
@@ -32152,8 +32260,8 @@
         </p:nvSpPr>
         <p:spPr>
           <a:xfrm>
-            <a:off x="3033522" y="4169664"/>
-            <a:ext cx="685800" cy="384048"/>
+            <a:off x="2831592" y="4169664"/>
+            <a:ext cx="685800" cy="475488"/>
           </a:xfrm>
           <a:prstGeom prst="rect">
             <a:avLst/>
@@ -32177,7 +32285,7 @@
                 <a:ea typeface="Trebuchet MS" pitchFamily="34" charset="-122"/>
                 <a:cs typeface="Trebuchet MS" pitchFamily="34" charset="-120"/>
               </a:rPr>
-              <a:t>ay</a:t>
+              <a:t>a</a:t>
             </a:r>
             <a:endParaRPr lang="en-US" sz="900" dirty="0"/>
           </a:p>
@@ -32185,57 +32293,18 @@
       </p:sp>
       <p:sp>
         <p:nvSpPr>
-          <p:cNvPr id="37" name="Text 35"/>
-          <p:cNvSpPr/>
-          <p:nvPr/>
-        </p:nvSpPr>
-        <p:spPr>
-          <a:xfrm>
-            <a:off x="3033522" y="4572000"/>
-            <a:ext cx="685800" cy="219456"/>
-          </a:xfrm>
-          <a:prstGeom prst="rect">
-            <a:avLst/>
-          </a:prstGeom>
-          <a:noFill/>
-          <a:ln/>
-        </p:spPr>
-        <p:txBody>
-          <a:bodyPr wrap="square" lIns="0" tIns="0" rIns="0" bIns="0" rtlCol="0" anchor="t"/>
-          <a:lstStyle/>
-          <a:p>
-            <a:pPr algn="ctr" indent="0" marL="0">
-              <a:buNone/>
-            </a:pPr>
-            <a:r>
-              <a:rPr lang="en-US" sz="750" i="1" dirty="0">
-                <a:solidFill>
-                  <a:srgbClr val="94A3B8"/>
-                </a:solidFill>
-                <a:latin typeface="Calibri" pitchFamily="34" charset="0"/>
-                <a:ea typeface="Calibri" pitchFamily="34" charset="-122"/>
-                <a:cs typeface="Calibri" pitchFamily="34" charset="-120"/>
-              </a:rPr>
-              <a:t>/ay/</a:t>
-            </a:r>
-            <a:endParaRPr lang="en-US" sz="750" dirty="0"/>
-          </a:p>
-        </p:txBody>
-      </p:sp>
-      <p:sp>
-        <p:nvSpPr>
-          <p:cNvPr id="38" name="Shape 36"/>
-          <p:cNvSpPr/>
-          <p:nvPr/>
-        </p:nvSpPr>
-        <p:spPr>
-          <a:xfrm>
-            <a:off x="3942207" y="4169664"/>
-            <a:ext cx="685800" cy="384048"/>
+          <p:cNvPr id="37" name="Shape 35"/>
+          <p:cNvSpPr/>
+          <p:nvPr/>
+        </p:nvSpPr>
+        <p:spPr>
+          <a:xfrm>
+            <a:off x="3639312" y="4169664"/>
+            <a:ext cx="685800" cy="475488"/>
           </a:xfrm>
           <a:prstGeom prst="rect">
             <a:avLst>
-              <a:gd name="adj" fmla="val 9524"/>
+              <a:gd name="adj" fmla="val 7692"/>
             </a:avLst>
           </a:prstGeom>
           <a:solidFill>
@@ -32251,14 +32320,14 @@
       </p:sp>
       <p:sp>
         <p:nvSpPr>
-          <p:cNvPr id="39" name="Text 37"/>
-          <p:cNvSpPr/>
-          <p:nvPr/>
-        </p:nvSpPr>
-        <p:spPr>
-          <a:xfrm>
-            <a:off x="3942207" y="4169664"/>
-            <a:ext cx="685800" cy="384048"/>
+          <p:cNvPr id="38" name="Text 36"/>
+          <p:cNvSpPr/>
+          <p:nvPr/>
+        </p:nvSpPr>
+        <p:spPr>
+          <a:xfrm>
+            <a:off x="3639312" y="4169664"/>
+            <a:ext cx="685800" cy="475488"/>
           </a:xfrm>
           <a:prstGeom prst="rect">
             <a:avLst/>
@@ -32290,18 +32359,18 @@
       </p:sp>
       <p:sp>
         <p:nvSpPr>
-          <p:cNvPr id="40" name="Shape 38"/>
-          <p:cNvSpPr/>
-          <p:nvPr/>
-        </p:nvSpPr>
-        <p:spPr>
-          <a:xfrm>
-            <a:off x="4850892" y="4169664"/>
-            <a:ext cx="685800" cy="384048"/>
+          <p:cNvPr id="39" name="Shape 37"/>
+          <p:cNvSpPr/>
+          <p:nvPr/>
+        </p:nvSpPr>
+        <p:spPr>
+          <a:xfrm>
+            <a:off x="4447032" y="4169664"/>
+            <a:ext cx="685800" cy="475488"/>
           </a:xfrm>
           <a:prstGeom prst="rect">
             <a:avLst>
-              <a:gd name="adj" fmla="val 9524"/>
+              <a:gd name="adj" fmla="val 7692"/>
             </a:avLst>
           </a:prstGeom>
           <a:solidFill>
@@ -32317,14 +32386,14 @@
       </p:sp>
       <p:sp>
         <p:nvSpPr>
-          <p:cNvPr id="41" name="Text 39"/>
-          <p:cNvSpPr/>
-          <p:nvPr/>
-        </p:nvSpPr>
-        <p:spPr>
-          <a:xfrm>
-            <a:off x="4850892" y="4169664"/>
-            <a:ext cx="685800" cy="384048"/>
+          <p:cNvPr id="40" name="Text 38"/>
+          <p:cNvSpPr/>
+          <p:nvPr/>
+        </p:nvSpPr>
+        <p:spPr>
+          <a:xfrm>
+            <a:off x="4447032" y="4169664"/>
+            <a:ext cx="685800" cy="475488"/>
           </a:xfrm>
           <a:prstGeom prst="rect">
             <a:avLst/>
@@ -32356,18 +32425,18 @@
       </p:sp>
       <p:sp>
         <p:nvSpPr>
-          <p:cNvPr id="42" name="Shape 40"/>
-          <p:cNvSpPr/>
-          <p:nvPr/>
-        </p:nvSpPr>
-        <p:spPr>
-          <a:xfrm>
-            <a:off x="5759577" y="4169664"/>
-            <a:ext cx="685800" cy="384048"/>
+          <p:cNvPr id="41" name="Shape 39"/>
+          <p:cNvSpPr/>
+          <p:nvPr/>
+        </p:nvSpPr>
+        <p:spPr>
+          <a:xfrm>
+            <a:off x="5254752" y="4169664"/>
+            <a:ext cx="685800" cy="475488"/>
           </a:xfrm>
           <a:prstGeom prst="rect">
             <a:avLst>
-              <a:gd name="adj" fmla="val 9524"/>
+              <a:gd name="adj" fmla="val 7692"/>
             </a:avLst>
           </a:prstGeom>
           <a:solidFill>
@@ -32383,14 +32452,14 @@
       </p:sp>
       <p:sp>
         <p:nvSpPr>
-          <p:cNvPr id="43" name="Text 41"/>
-          <p:cNvSpPr/>
-          <p:nvPr/>
-        </p:nvSpPr>
-        <p:spPr>
-          <a:xfrm>
-            <a:off x="5759577" y="4169664"/>
-            <a:ext cx="685800" cy="384048"/>
+          <p:cNvPr id="42" name="Text 40"/>
+          <p:cNvSpPr/>
+          <p:nvPr/>
+        </p:nvSpPr>
+        <p:spPr>
+          <a:xfrm>
+            <a:off x="5254752" y="4169664"/>
+            <a:ext cx="685800" cy="475488"/>
           </a:xfrm>
           <a:prstGeom prst="rect">
             <a:avLst/>
@@ -32414,7 +32483,7 @@
                 <a:ea typeface="Trebuchet MS" pitchFamily="34" charset="-122"/>
                 <a:cs typeface="Trebuchet MS" pitchFamily="34" charset="-120"/>
               </a:rPr>
-              <a:t>l</a:t>
+              <a:t>e</a:t>
             </a:r>
             <a:endParaRPr lang="en-US" sz="900" dirty="0"/>
           </a:p>
@@ -32422,18 +32491,18 @@
       </p:sp>
       <p:sp>
         <p:nvSpPr>
-          <p:cNvPr id="44" name="Shape 42"/>
-          <p:cNvSpPr/>
-          <p:nvPr/>
-        </p:nvSpPr>
-        <p:spPr>
-          <a:xfrm>
-            <a:off x="6668262" y="4169664"/>
-            <a:ext cx="685800" cy="384048"/>
+          <p:cNvPr id="43" name="Shape 41"/>
+          <p:cNvSpPr/>
+          <p:nvPr/>
+        </p:nvSpPr>
+        <p:spPr>
+          <a:xfrm>
+            <a:off x="6062472" y="4169664"/>
+            <a:ext cx="685800" cy="475488"/>
           </a:xfrm>
           <a:prstGeom prst="rect">
             <a:avLst>
-              <a:gd name="adj" fmla="val 9524"/>
+              <a:gd name="adj" fmla="val 7692"/>
             </a:avLst>
           </a:prstGeom>
           <a:solidFill>
@@ -32449,14 +32518,14 @@
       </p:sp>
       <p:sp>
         <p:nvSpPr>
-          <p:cNvPr id="45" name="Text 43"/>
-          <p:cNvSpPr/>
-          <p:nvPr/>
-        </p:nvSpPr>
-        <p:spPr>
-          <a:xfrm>
-            <a:off x="6668262" y="4169664"/>
-            <a:ext cx="685800" cy="384048"/>
+          <p:cNvPr id="44" name="Text 42"/>
+          <p:cNvSpPr/>
+          <p:nvPr/>
+        </p:nvSpPr>
+        <p:spPr>
+          <a:xfrm>
+            <a:off x="6062472" y="4169664"/>
+            <a:ext cx="685800" cy="475488"/>
           </a:xfrm>
           <a:prstGeom prst="rect">
             <a:avLst/>
@@ -32480,6 +32549,72 @@
                 <a:ea typeface="Trebuchet MS" pitchFamily="34" charset="-122"/>
                 <a:cs typeface="Trebuchet MS" pitchFamily="34" charset="-120"/>
               </a:rPr>
+              <a:t>l</a:t>
+            </a:r>
+            <a:endParaRPr lang="en-US" sz="900" dirty="0"/>
+          </a:p>
+        </p:txBody>
+      </p:sp>
+      <p:sp>
+        <p:nvSpPr>
+          <p:cNvPr id="45" name="Shape 43"/>
+          <p:cNvSpPr/>
+          <p:nvPr/>
+        </p:nvSpPr>
+        <p:spPr>
+          <a:xfrm>
+            <a:off x="6870192" y="4169664"/>
+            <a:ext cx="685800" cy="475488"/>
+          </a:xfrm>
+          <a:prstGeom prst="rect">
+            <a:avLst>
+              <a:gd name="adj" fmla="val 7692"/>
+            </a:avLst>
+          </a:prstGeom>
+          <a:solidFill>
+            <a:srgbClr val="FFFFFF"/>
+          </a:solidFill>
+          <a:ln w="12700">
+            <a:solidFill>
+              <a:srgbClr val="DB2777"/>
+            </a:solidFill>
+            <a:prstDash val="solid"/>
+          </a:ln>
+        </p:spPr>
+      </p:sp>
+      <p:sp>
+        <p:nvSpPr>
+          <p:cNvPr id="46" name="Text 44"/>
+          <p:cNvSpPr/>
+          <p:nvPr/>
+        </p:nvSpPr>
+        <p:spPr>
+          <a:xfrm>
+            <a:off x="6870192" y="4169664"/>
+            <a:ext cx="685800" cy="475488"/>
+          </a:xfrm>
+          <a:prstGeom prst="rect">
+            <a:avLst/>
+          </a:prstGeom>
+          <a:noFill/>
+          <a:ln/>
+        </p:spPr>
+        <p:txBody>
+          <a:bodyPr wrap="square" lIns="0" tIns="0" rIns="0" bIns="0" rtlCol="0" anchor="ctr"/>
+          <a:lstStyle/>
+          <a:p>
+            <a:pPr algn="ctr" indent="0" marL="0">
+              <a:buNone/>
+            </a:pPr>
+            <a:r>
+              <a:rPr lang="en-US" sz="900" b="1" dirty="0">
+                <a:solidFill>
+                  <a:srgbClr val="9D174D"/>
+                </a:solidFill>
+                <a:latin typeface="Trebuchet MS" pitchFamily="34" charset="0"/>
+                <a:ea typeface="Trebuchet MS" pitchFamily="34" charset="-122"/>
+                <a:cs typeface="Trebuchet MS" pitchFamily="34" charset="-120"/>
+              </a:rPr>
               <a:t>e</a:t>
             </a:r>
             <a:endParaRPr lang="en-US" sz="900" dirty="0"/>
@@ -32488,18 +32623,18 @@
       </p:sp>
       <p:sp>
         <p:nvSpPr>
-          <p:cNvPr id="46" name="Shape 44"/>
-          <p:cNvSpPr/>
-          <p:nvPr/>
-        </p:nvSpPr>
-        <p:spPr>
-          <a:xfrm>
-            <a:off x="7576947" y="4169664"/>
-            <a:ext cx="685800" cy="384048"/>
+          <p:cNvPr id="47" name="Shape 45"/>
+          <p:cNvSpPr/>
+          <p:nvPr/>
+        </p:nvSpPr>
+        <p:spPr>
+          <a:xfrm>
+            <a:off x="7677912" y="4169664"/>
+            <a:ext cx="685800" cy="475488"/>
           </a:xfrm>
           <a:prstGeom prst="rect">
             <a:avLst>
-              <a:gd name="adj" fmla="val 9524"/>
+              <a:gd name="adj" fmla="val 7692"/>
             </a:avLst>
           </a:prstGeom>
           <a:solidFill>
@@ -32515,14 +32650,14 @@
       </p:sp>
       <p:sp>
         <p:nvSpPr>
-          <p:cNvPr id="47" name="Text 45"/>
-          <p:cNvSpPr/>
-          <p:nvPr/>
-        </p:nvSpPr>
-        <p:spPr>
-          <a:xfrm>
-            <a:off x="7576947" y="4169664"/>
-            <a:ext cx="685800" cy="384048"/>
+          <p:cNvPr id="48" name="Text 46"/>
+          <p:cNvSpPr/>
+          <p:nvPr/>
+        </p:nvSpPr>
+        <p:spPr>
+          <a:xfrm>
+            <a:off x="7677912" y="4169664"/>
+            <a:ext cx="685800" cy="475488"/>
           </a:xfrm>
           <a:prstGeom prst="rect">
             <a:avLst/>
@@ -36803,7 +36938,7 @@
                 <a:ea typeface="Calibri" pitchFamily="34" charset="-122"/>
                 <a:cs typeface="Calibri" pitchFamily="34" charset="-120"/>
               </a:rPr>
-              <a:t>1.  The word 'tasteless' contains the root 'taste' and a suffix meaning 'without'.</a:t>
+              <a:t>1.  The word 'foretaste' means to experience something after it has already happened.</a:t>
             </a:r>
             <a:endParaRPr lang="en-US" sz="1300" dirty="0"/>
           </a:p>
@@ -36826,11 +36961,11 @@
             </a:avLst>
           </a:prstGeom>
           <a:solidFill>
-            <a:srgbClr val="DCFCE7"/>
-          </a:solidFill>
-          <a:ln w="12700">
-            <a:solidFill>
-              <a:srgbClr val="16A34A"/>
+            <a:srgbClr val="FEE2E2"/>
+          </a:solidFill>
+          <a:ln w="12700">
+            <a:solidFill>
+              <a:srgbClr val="DC2626"/>
             </a:solidFill>
             <a:prstDash val="solid"/>
           </a:ln>
@@ -36863,13 +36998,13 @@
             <a:r>
               <a:rPr lang="en-US" sz="1100" b="1" dirty="0">
                 <a:solidFill>
-                  <a:srgbClr val="16A34A"/>
+                  <a:srgbClr val="DC2626"/>
                 </a:solidFill>
                 <a:latin typeface="Trebuchet MS" pitchFamily="34" charset="0"/>
                 <a:ea typeface="Trebuchet MS" pitchFamily="34" charset="-122"/>
                 <a:cs typeface="Trebuchet MS" pitchFamily="34" charset="-120"/>
               </a:rPr>
-              <a:t>TRUE</a:t>
+              <a:t>FALSE</a:t>
             </a:r>
             <a:endParaRPr lang="en-US" sz="1100" dirty="0"/>
           </a:p>
@@ -36942,7 +37077,7 @@
                 <a:ea typeface="Calibri" pitchFamily="34" charset="-122"/>
                 <a:cs typeface="Calibri" pitchFamily="34" charset="-120"/>
               </a:rPr>
-              <a:t>2.  The word 'tasteful' uses the suffix '-ful' meaning full of or having.</a:t>
+              <a:t>2.  The word 'tasteless' contains the root 'taste' and a suffix meaning 'without'.</a:t>
             </a:r>
             <a:endParaRPr lang="en-US" sz="1300" dirty="0"/>
           </a:p>
@@ -37081,7 +37216,7 @@
                 <a:ea typeface="Calibri" pitchFamily="34" charset="-122"/>
                 <a:cs typeface="Calibri" pitchFamily="34" charset="-120"/>
               </a:rPr>
-              <a:t>3.  The root 'taste' comes from ancient Greek.</a:t>
+              <a:t>3.  Adding the prefix 'dis' to 'taste' makes a word meaning a feeling of dislike.</a:t>
             </a:r>
             <a:endParaRPr lang="en-US" sz="1300" dirty="0"/>
           </a:p>
@@ -37104,11 +37239,11 @@
             </a:avLst>
           </a:prstGeom>
           <a:solidFill>
-            <a:srgbClr val="FEE2E2"/>
-          </a:solidFill>
-          <a:ln w="12700">
-            <a:solidFill>
-              <a:srgbClr val="DC2626"/>
+            <a:srgbClr val="DCFCE7"/>
+          </a:solidFill>
+          <a:ln w="12700">
+            <a:solidFill>
+              <a:srgbClr val="16A34A"/>
             </a:solidFill>
             <a:prstDash val="solid"/>
           </a:ln>
@@ -37141,13 +37276,13 @@
             <a:r>
               <a:rPr lang="en-US" sz="1100" b="1" dirty="0">
                 <a:solidFill>
-                  <a:srgbClr val="DC2626"/>
+                  <a:srgbClr val="16A34A"/>
                 </a:solidFill>
                 <a:latin typeface="Trebuchet MS" pitchFamily="34" charset="0"/>
                 <a:ea typeface="Trebuchet MS" pitchFamily="34" charset="-122"/>
                 <a:cs typeface="Trebuchet MS" pitchFamily="34" charset="-120"/>
               </a:rPr>
-              <a:t>FALSE</a:t>
+              <a:t>TRUE</a:t>
             </a:r>
             <a:endParaRPr lang="en-US" sz="1100" dirty="0"/>
           </a:p>
@@ -37220,7 +37355,7 @@
                 <a:ea typeface="Calibri" pitchFamily="34" charset="-122"/>
                 <a:cs typeface="Calibri" pitchFamily="34" charset="-120"/>
               </a:rPr>
-              <a:t>4.  The word 'foretaste' means to experience something after it has already happened.</a:t>
+              <a:t>4.  The root 'taste' comes from ancient Greek.</a:t>
             </a:r>
             <a:endParaRPr lang="en-US" sz="1300" dirty="0"/>
           </a:p>
@@ -37359,7 +37494,7 @@
                 <a:ea typeface="Calibri" pitchFamily="34" charset="-122"/>
                 <a:cs typeface="Calibri" pitchFamily="34" charset="-120"/>
               </a:rPr>
-              <a:t>5.  Adding the prefix 'dis' to 'taste' makes a word meaning a feeling of dislike.</a:t>
+              <a:t>5.  The word 'tasteful' uses the suffix '-ful' meaning full of or having.</a:t>
             </a:r>
             <a:endParaRPr lang="en-US" sz="1300" dirty="0"/>
           </a:p>
